--- a/MindMove.pptx
+++ b/MindMove.pptx
@@ -12,22 +12,25 @@
     <p:sldId id="260" r:id="rId6"/>
     <p:sldId id="261" r:id="rId7"/>
     <p:sldId id="262" r:id="rId8"/>
-    <p:sldId id="263" r:id="rId9"/>
+    <p:sldId id="264" r:id="rId9"/>
+    <p:sldId id="265" r:id="rId10"/>
+    <p:sldId id="266" r:id="rId11"/>
+    <p:sldId id="263" r:id="rId12"/>
   </p:sldIdLst>
   <p:sldSz cx="18288000" cy="10287000"/>
   <p:notesSz cx="6858000" cy="9144000"/>
   <p:embeddedFontLst>
     <p:embeddedFont>
       <p:font typeface="Calibri (MS)" panose="020B0604020202020204" charset="0"/>
-      <p:regular r:id="rId10"/>
+      <p:regular r:id="rId13"/>
     </p:embeddedFont>
     <p:embeddedFont>
       <p:font typeface="Calibri (MS) Bold" panose="020B0604020202020204" charset="0"/>
-      <p:regular r:id="rId11"/>
+      <p:regular r:id="rId14"/>
     </p:embeddedFont>
     <p:embeddedFont>
       <p:font typeface="Stinger Fit" panose="020B0604020202020204" charset="0"/>
-      <p:regular r:id="rId12"/>
+      <p:regular r:id="rId15"/>
     </p:embeddedFont>
   </p:embeddedFontLst>
   <p:defaultTextStyle>
@@ -144,6 +147,128 @@
 </p:presentation>
 </file>
 
+<file path=ppt/revisionInfo.xml><?xml version="1.0" encoding="utf-8"?>
+<p1510:revInfo xmlns:a="http://schemas.openxmlformats.org/drawingml/2006/main" xmlns:r="http://schemas.openxmlformats.org/officeDocument/2006/relationships" xmlns:p1510="http://schemas.microsoft.com/office/powerpoint/2015/10/main">
+  <p1510:revLst>
+    <p1510:client id="{A7A73963-C97B-4C0D-B22B-7BE09293C9AC}" v="8" dt="2026-04-30T12:41:29.243"/>
+  </p1510:revLst>
+</p1510:revInfo>
+</file>
+
+<file path=ppt/changesInfos/changesInfo1.xml><?xml version="1.0" encoding="utf-8"?>
+<pc:chgInfo xmlns:a="http://schemas.openxmlformats.org/drawingml/2006/main" xmlns:r="http://schemas.openxmlformats.org/officeDocument/2006/relationships" xmlns:ac="http://schemas.microsoft.com/office/drawing/2013/main/command" xmlns:pc="http://schemas.microsoft.com/office/powerpoint/2013/main/command">
+  <pc:docChgLst>
+    <pc:chgData name="Gabriela Carneiro" userId="038eca41cd8564ab" providerId="LiveId" clId="{D03F746D-BE5D-4789-93E6-42C6E52F57A2}"/>
+    <pc:docChg chg="undo custSel addSld delSld modSld">
+      <pc:chgData name="Gabriela Carneiro" userId="038eca41cd8564ab" providerId="LiveId" clId="{D03F746D-BE5D-4789-93E6-42C6E52F57A2}" dt="2026-04-30T12:42:29.254" v="160" actId="1076"/>
+      <pc:docMkLst>
+        <pc:docMk/>
+      </pc:docMkLst>
+      <pc:sldChg chg="new del">
+        <pc:chgData name="Gabriela Carneiro" userId="038eca41cd8564ab" providerId="LiveId" clId="{D03F746D-BE5D-4789-93E6-42C6E52F57A2}" dt="2026-04-30T12:29:22.640" v="1" actId="2696"/>
+        <pc:sldMkLst>
+          <pc:docMk/>
+          <pc:sldMk cId="566240445" sldId="264"/>
+        </pc:sldMkLst>
+      </pc:sldChg>
+      <pc:sldChg chg="modSp add mod">
+        <pc:chgData name="Gabriela Carneiro" userId="038eca41cd8564ab" providerId="LiveId" clId="{D03F746D-BE5D-4789-93E6-42C6E52F57A2}" dt="2026-04-30T12:35:22.742" v="42" actId="20577"/>
+        <pc:sldMkLst>
+          <pc:docMk/>
+          <pc:sldMk cId="4017652531" sldId="264"/>
+        </pc:sldMkLst>
+        <pc:spChg chg="mod">
+          <ac:chgData name="Gabriela Carneiro" userId="038eca41cd8564ab" providerId="LiveId" clId="{D03F746D-BE5D-4789-93E6-42C6E52F57A2}" dt="2026-04-30T12:35:11.131" v="39" actId="1076"/>
+          <ac:spMkLst>
+            <pc:docMk/>
+            <pc:sldMk cId="4017652531" sldId="264"/>
+            <ac:spMk id="14" creationId="{10C22223-EA7A-3163-0E0C-91EC47938E2C}"/>
+          </ac:spMkLst>
+        </pc:spChg>
+        <pc:spChg chg="mod">
+          <ac:chgData name="Gabriela Carneiro" userId="038eca41cd8564ab" providerId="LiveId" clId="{D03F746D-BE5D-4789-93E6-42C6E52F57A2}" dt="2026-04-30T12:35:22.742" v="42" actId="20577"/>
+          <ac:spMkLst>
+            <pc:docMk/>
+            <pc:sldMk cId="4017652531" sldId="264"/>
+            <ac:spMk id="15" creationId="{3B4645BA-21B6-4F44-BBAF-6DC984CB2EE7}"/>
+          </ac:spMkLst>
+        </pc:spChg>
+        <pc:grpChg chg="mod">
+          <ac:chgData name="Gabriela Carneiro" userId="038eca41cd8564ab" providerId="LiveId" clId="{D03F746D-BE5D-4789-93E6-42C6E52F57A2}" dt="2026-04-30T12:35:06.350" v="38" actId="1076"/>
+          <ac:grpSpMkLst>
+            <pc:docMk/>
+            <pc:sldMk cId="4017652531" sldId="264"/>
+            <ac:grpSpMk id="11" creationId="{1517E098-A16C-236F-38B2-E8EDA910CFEE}"/>
+          </ac:grpSpMkLst>
+        </pc:grpChg>
+      </pc:sldChg>
+      <pc:sldChg chg="modSp add mod">
+        <pc:chgData name="Gabriela Carneiro" userId="038eca41cd8564ab" providerId="LiveId" clId="{D03F746D-BE5D-4789-93E6-42C6E52F57A2}" dt="2026-04-30T12:37:23.004" v="72" actId="20577"/>
+        <pc:sldMkLst>
+          <pc:docMk/>
+          <pc:sldMk cId="197940328" sldId="265"/>
+        </pc:sldMkLst>
+        <pc:spChg chg="mod">
+          <ac:chgData name="Gabriela Carneiro" userId="038eca41cd8564ab" providerId="LiveId" clId="{D03F746D-BE5D-4789-93E6-42C6E52F57A2}" dt="2026-04-30T12:37:23.004" v="72" actId="20577"/>
+          <ac:spMkLst>
+            <pc:docMk/>
+            <pc:sldMk cId="197940328" sldId="265"/>
+            <ac:spMk id="14" creationId="{6A4CE654-EDDB-8824-C9C5-E50047542B8F}"/>
+          </ac:spMkLst>
+        </pc:spChg>
+        <pc:grpChg chg="mod">
+          <ac:chgData name="Gabriela Carneiro" userId="038eca41cd8564ab" providerId="LiveId" clId="{D03F746D-BE5D-4789-93E6-42C6E52F57A2}" dt="2026-04-30T12:37:08.308" v="45" actId="1076"/>
+          <ac:grpSpMkLst>
+            <pc:docMk/>
+            <pc:sldMk cId="197940328" sldId="265"/>
+            <ac:grpSpMk id="11" creationId="{EFEB5578-3F3A-A610-E906-508F054604BE}"/>
+          </ac:grpSpMkLst>
+        </pc:grpChg>
+      </pc:sldChg>
+      <pc:sldChg chg="modSp add mod">
+        <pc:chgData name="Gabriela Carneiro" userId="038eca41cd8564ab" providerId="LiveId" clId="{D03F746D-BE5D-4789-93E6-42C6E52F57A2}" dt="2026-04-30T12:42:29.254" v="160" actId="1076"/>
+        <pc:sldMkLst>
+          <pc:docMk/>
+          <pc:sldMk cId="4099099592" sldId="266"/>
+        </pc:sldMkLst>
+        <pc:spChg chg="mod">
+          <ac:chgData name="Gabriela Carneiro" userId="038eca41cd8564ab" providerId="LiveId" clId="{D03F746D-BE5D-4789-93E6-42C6E52F57A2}" dt="2026-04-30T12:42:29.254" v="160" actId="1076"/>
+          <ac:spMkLst>
+            <pc:docMk/>
+            <pc:sldMk cId="4099099592" sldId="266"/>
+            <ac:spMk id="14" creationId="{E7135E30-811A-A86B-899B-705C18AD03B8}"/>
+          </ac:spMkLst>
+        </pc:spChg>
+        <pc:spChg chg="mod">
+          <ac:chgData name="Gabriela Carneiro" userId="038eca41cd8564ab" providerId="LiveId" clId="{D03F746D-BE5D-4789-93E6-42C6E52F57A2}" dt="2026-04-30T12:42:11.454" v="157" actId="1076"/>
+          <ac:spMkLst>
+            <pc:docMk/>
+            <pc:sldMk cId="4099099592" sldId="266"/>
+            <ac:spMk id="15" creationId="{B691930A-ABD0-0806-5F73-DD80B3B9A2C6}"/>
+          </ac:spMkLst>
+        </pc:spChg>
+        <pc:grpChg chg="mod">
+          <ac:chgData name="Gabriela Carneiro" userId="038eca41cd8564ab" providerId="LiveId" clId="{D03F746D-BE5D-4789-93E6-42C6E52F57A2}" dt="2026-04-30T12:42:00.377" v="154" actId="1076"/>
+          <ac:grpSpMkLst>
+            <pc:docMk/>
+            <pc:sldMk cId="4099099592" sldId="266"/>
+            <ac:grpSpMk id="8" creationId="{1CB5BD7D-AB3B-B4CD-0DDB-41B18532E234}"/>
+          </ac:grpSpMkLst>
+        </pc:grpChg>
+        <pc:grpChg chg="mod">
+          <ac:chgData name="Gabriela Carneiro" userId="038eca41cd8564ab" providerId="LiveId" clId="{D03F746D-BE5D-4789-93E6-42C6E52F57A2}" dt="2026-04-30T12:42:15.832" v="159" actId="1076"/>
+          <ac:grpSpMkLst>
+            <pc:docMk/>
+            <pc:sldMk cId="4099099592" sldId="266"/>
+            <ac:grpSpMk id="11" creationId="{F0A6F672-8711-E631-2051-BAA16BB1E997}"/>
+          </ac:grpSpMkLst>
+        </pc:grpChg>
+      </pc:sldChg>
+    </pc:docChg>
+  </pc:docChgLst>
+</pc:chgInfo>
+</file>
+
 <file path=ppt/slideLayouts/slideLayout1.xml><?xml version="1.0" encoding="utf-8"?>
 <p:sldLayout xmlns:a="http://schemas.openxmlformats.org/drawingml/2006/main" xmlns:r="http://schemas.openxmlformats.org/officeDocument/2006/relationships" xmlns:p="http://schemas.openxmlformats.org/presentationml/2006/main" type="title" preserve="1">
   <p:cSld name="Title Slide">
@@ -324,7 +449,7 @@
             <a:fld id="{1D8BD707-D9CF-40AE-B4C6-C98DA3205C09}" type="datetimeFigureOut">
               <a:rPr lang="en-US" smtClean="0"/>
               <a:pPr/>
-              <a:t>4/29/2026</a:t>
+              <a:t>4/30/2026</a:t>
             </a:fld>
             <a:endParaRPr lang="en-US"/>
           </a:p>
@@ -489,7 +614,7 @@
             <a:fld id="{1D8BD707-D9CF-40AE-B4C6-C98DA3205C09}" type="datetimeFigureOut">
               <a:rPr lang="en-US" smtClean="0"/>
               <a:pPr/>
-              <a:t>4/29/2026</a:t>
+              <a:t>4/30/2026</a:t>
             </a:fld>
             <a:endParaRPr lang="en-US"/>
           </a:p>
@@ -664,7 +789,7 @@
             <a:fld id="{1D8BD707-D9CF-40AE-B4C6-C98DA3205C09}" type="datetimeFigureOut">
               <a:rPr lang="en-US" smtClean="0"/>
               <a:pPr/>
-              <a:t>4/29/2026</a:t>
+              <a:t>4/30/2026</a:t>
             </a:fld>
             <a:endParaRPr lang="en-US"/>
           </a:p>
@@ -829,7 +954,7 @@
             <a:fld id="{1D8BD707-D9CF-40AE-B4C6-C98DA3205C09}" type="datetimeFigureOut">
               <a:rPr lang="en-US" smtClean="0"/>
               <a:pPr/>
-              <a:t>4/29/2026</a:t>
+              <a:t>4/30/2026</a:t>
             </a:fld>
             <a:endParaRPr lang="en-US"/>
           </a:p>
@@ -1071,7 +1196,7 @@
             <a:fld id="{1D8BD707-D9CF-40AE-B4C6-C98DA3205C09}" type="datetimeFigureOut">
               <a:rPr lang="en-US" smtClean="0"/>
               <a:pPr/>
-              <a:t>4/29/2026</a:t>
+              <a:t>4/30/2026</a:t>
             </a:fld>
             <a:endParaRPr lang="en-US"/>
           </a:p>
@@ -1353,7 +1478,7 @@
             <a:fld id="{1D8BD707-D9CF-40AE-B4C6-C98DA3205C09}" type="datetimeFigureOut">
               <a:rPr lang="en-US" smtClean="0"/>
               <a:pPr/>
-              <a:t>4/29/2026</a:t>
+              <a:t>4/30/2026</a:t>
             </a:fld>
             <a:endParaRPr lang="en-US"/>
           </a:p>
@@ -1769,7 +1894,7 @@
             <a:fld id="{1D8BD707-D9CF-40AE-B4C6-C98DA3205C09}" type="datetimeFigureOut">
               <a:rPr lang="en-US" smtClean="0"/>
               <a:pPr/>
-              <a:t>4/29/2026</a:t>
+              <a:t>4/30/2026</a:t>
             </a:fld>
             <a:endParaRPr lang="en-US"/>
           </a:p>
@@ -1883,7 +2008,7 @@
             <a:fld id="{1D8BD707-D9CF-40AE-B4C6-C98DA3205C09}" type="datetimeFigureOut">
               <a:rPr lang="en-US" smtClean="0"/>
               <a:pPr/>
-              <a:t>4/29/2026</a:t>
+              <a:t>4/30/2026</a:t>
             </a:fld>
             <a:endParaRPr lang="en-US"/>
           </a:p>
@@ -1975,7 +2100,7 @@
             <a:fld id="{1D8BD707-D9CF-40AE-B4C6-C98DA3205C09}" type="datetimeFigureOut">
               <a:rPr lang="en-US" smtClean="0"/>
               <a:pPr/>
-              <a:t>4/29/2026</a:t>
+              <a:t>4/30/2026</a:t>
             </a:fld>
             <a:endParaRPr lang="en-US"/>
           </a:p>
@@ -2247,7 +2372,7 @@
             <a:fld id="{1D8BD707-D9CF-40AE-B4C6-C98DA3205C09}" type="datetimeFigureOut">
               <a:rPr lang="en-US" smtClean="0"/>
               <a:pPr/>
-              <a:t>4/29/2026</a:t>
+              <a:t>4/30/2026</a:t>
             </a:fld>
             <a:endParaRPr lang="en-US"/>
           </a:p>
@@ -2496,7 +2621,7 @@
             <a:fld id="{1D8BD707-D9CF-40AE-B4C6-C98DA3205C09}" type="datetimeFigureOut">
               <a:rPr lang="en-US" smtClean="0"/>
               <a:pPr/>
-              <a:t>4/29/2026</a:t>
+              <a:t>4/30/2026</a:t>
             </a:fld>
             <a:endParaRPr lang="en-US"/>
           </a:p>
@@ -2704,7 +2829,7 @@
             <a:fld id="{1D8BD707-D9CF-40AE-B4C6-C98DA3205C09}" type="datetimeFigureOut">
               <a:rPr lang="en-US" smtClean="0"/>
               <a:pPr/>
-              <a:t>4/29/2026</a:t>
+              <a:t>4/30/2026</a:t>
             </a:fld>
             <a:endParaRPr lang="en-US"/>
           </a:p>
@@ -3134,6 +3259,13 @@
             </a:stretch>
           </a:blipFill>
         </p:spPr>
+        <p:txBody>
+          <a:bodyPr/>
+          <a:lstStyle/>
+          <a:p>
+            <a:endParaRPr lang="pt-PT"/>
+          </a:p>
+        </p:txBody>
       </p:sp>
       <p:sp>
         <p:nvSpPr>
@@ -3186,6 +3318,13 @@
             </a:stretch>
           </a:blipFill>
         </p:spPr>
+        <p:txBody>
+          <a:bodyPr/>
+          <a:lstStyle/>
+          <a:p>
+            <a:endParaRPr lang="pt-PT"/>
+          </a:p>
+        </p:txBody>
       </p:sp>
       <p:sp>
         <p:nvSpPr>
@@ -3238,6 +3377,13 @@
             </a:stretch>
           </a:blipFill>
         </p:spPr>
+        <p:txBody>
+          <a:bodyPr/>
+          <a:lstStyle/>
+          <a:p>
+            <a:endParaRPr lang="pt-PT"/>
+          </a:p>
+        </p:txBody>
       </p:sp>
       <p:sp>
         <p:nvSpPr>
@@ -3290,6 +3436,13 @@
             </a:stretch>
           </a:blipFill>
         </p:spPr>
+        <p:txBody>
+          <a:bodyPr/>
+          <a:lstStyle/>
+          <a:p>
+            <a:endParaRPr lang="pt-PT"/>
+          </a:p>
+        </p:txBody>
       </p:sp>
       <p:sp>
         <p:nvSpPr>
@@ -3342,6 +3495,13 @@
             </a:stretch>
           </a:blipFill>
         </p:spPr>
+        <p:txBody>
+          <a:bodyPr/>
+          <a:lstStyle/>
+          <a:p>
+            <a:endParaRPr lang="pt-PT"/>
+          </a:p>
+        </p:txBody>
       </p:sp>
       <p:sp>
         <p:nvSpPr>
@@ -3394,6 +3554,13 @@
             </a:stretch>
           </a:blipFill>
         </p:spPr>
+        <p:txBody>
+          <a:bodyPr/>
+          <a:lstStyle/>
+          <a:p>
+            <a:endParaRPr lang="pt-PT"/>
+          </a:p>
+        </p:txBody>
       </p:sp>
       <p:sp>
         <p:nvSpPr>
@@ -3440,6 +3607,13 @@
             </a:stretch>
           </a:blipFill>
         </p:spPr>
+        <p:txBody>
+          <a:bodyPr/>
+          <a:lstStyle/>
+          <a:p>
+            <a:endParaRPr lang="pt-PT"/>
+          </a:p>
+        </p:txBody>
       </p:sp>
       <p:sp>
         <p:nvSpPr>
@@ -3535,6 +3709,13 @@
               <a:srgbClr val="FFFFFE"/>
             </a:solidFill>
           </p:spPr>
+          <p:txBody>
+            <a:bodyPr/>
+            <a:lstStyle/>
+            <a:p>
+              <a:endParaRPr lang="pt-PT"/>
+            </a:p>
+          </p:txBody>
         </p:sp>
         <p:sp>
           <p:nvSpPr>
@@ -3741,6 +3922,13 @@
               <a:srgbClr val="FFFFFE"/>
             </a:solidFill>
           </p:spPr>
+          <p:txBody>
+            <a:bodyPr/>
+            <a:lstStyle/>
+            <a:p>
+              <a:endParaRPr lang="pt-PT"/>
+            </a:p>
+          </p:txBody>
         </p:sp>
         <p:sp>
           <p:nvSpPr>
@@ -3808,6 +3996,1329 @@
                 <a:sym typeface="Calibri (MS)"/>
               </a:rPr>
               <a:t>2 de maio de 2026</a:t>
+            </a:r>
+          </a:p>
+        </p:txBody>
+      </p:sp>
+    </p:spTree>
+  </p:cSld>
+  <p:clrMapOvr>
+    <a:masterClrMapping/>
+  </p:clrMapOvr>
+</p:sld>
+</file>
+
+<file path=ppt/slides/slide10.xml><?xml version="1.0" encoding="utf-8"?>
+<p:sld xmlns:a="http://schemas.openxmlformats.org/drawingml/2006/main" xmlns:r="http://schemas.openxmlformats.org/officeDocument/2006/relationships" xmlns:p="http://schemas.openxmlformats.org/presentationml/2006/main">
+  <p:cSld>
+    <p:bg>
+      <p:bgPr>
+        <a:solidFill>
+          <a:srgbClr val="FFFFFE"/>
+        </a:solidFill>
+        <a:effectLst/>
+      </p:bgPr>
+    </p:bg>
+    <p:spTree>
+      <p:nvGrpSpPr>
+        <p:cNvPr id="1" name="">
+          <a:extLst>
+            <a:ext uri="{FF2B5EF4-FFF2-40B4-BE49-F238E27FC236}">
+              <a16:creationId xmlns:a16="http://schemas.microsoft.com/office/drawing/2014/main" id="{AF37C8D2-28F4-FB82-8DCE-DA5C9C805993}"/>
+            </a:ext>
+          </a:extLst>
+        </p:cNvPr>
+        <p:cNvGrpSpPr/>
+        <p:nvPr/>
+      </p:nvGrpSpPr>
+      <p:grpSpPr>
+        <a:xfrm>
+          <a:off x="0" y="0"/>
+          <a:ext cx="0" cy="0"/>
+          <a:chOff x="0" y="0"/>
+          <a:chExt cx="0" cy="0"/>
+        </a:xfrm>
+      </p:grpSpPr>
+      <p:grpSp>
+        <p:nvGrpSpPr>
+          <p:cNvPr id="2" name="Group 2">
+            <a:extLst>
+              <a:ext uri="{FF2B5EF4-FFF2-40B4-BE49-F238E27FC236}">
+                <a16:creationId xmlns:a16="http://schemas.microsoft.com/office/drawing/2014/main" id="{0BA3E4B9-7221-3689-7E99-3CF5084DDF10}"/>
+              </a:ext>
+            </a:extLst>
+          </p:cNvPr>
+          <p:cNvGrpSpPr/>
+          <p:nvPr/>
+        </p:nvGrpSpPr>
+        <p:grpSpPr>
+          <a:xfrm rot="-10800000">
+            <a:off x="-1434465" y="7936076"/>
+            <a:ext cx="8279532" cy="9266871"/>
+            <a:chOff x="0" y="0"/>
+            <a:chExt cx="11039376" cy="12355828"/>
+          </a:xfrm>
+        </p:grpSpPr>
+        <p:sp>
+          <p:nvSpPr>
+            <p:cNvPr id="3" name="Freeform 3">
+              <a:extLst>
+                <a:ext uri="{FF2B5EF4-FFF2-40B4-BE49-F238E27FC236}">
+                  <a16:creationId xmlns:a16="http://schemas.microsoft.com/office/drawing/2014/main" id="{9D7D1C98-75F1-7FAA-05F2-D54A70D76455}"/>
+                </a:ext>
+              </a:extLst>
+            </p:cNvPr>
+            <p:cNvSpPr/>
+            <p:nvPr/>
+          </p:nvSpPr>
+          <p:spPr>
+            <a:xfrm flipH="1" flipV="1">
+              <a:off x="1782890" y="1336201"/>
+              <a:ext cx="9256486" cy="11019627"/>
+            </a:xfrm>
+            <a:custGeom>
+              <a:avLst/>
+              <a:gdLst/>
+              <a:ahLst/>
+              <a:cxnLst/>
+              <a:rect l="l" t="t" r="r" b="b"/>
+              <a:pathLst>
+                <a:path w="9256486" h="11019627">
+                  <a:moveTo>
+                    <a:pt x="9256486" y="11019627"/>
+                  </a:moveTo>
+                  <a:lnTo>
+                    <a:pt x="0" y="11019627"/>
+                  </a:lnTo>
+                  <a:lnTo>
+                    <a:pt x="0" y="0"/>
+                  </a:lnTo>
+                  <a:lnTo>
+                    <a:pt x="9256486" y="0"/>
+                  </a:lnTo>
+                  <a:lnTo>
+                    <a:pt x="9256486" y="11019627"/>
+                  </a:lnTo>
+                  <a:close/>
+                </a:path>
+              </a:pathLst>
+            </a:custGeom>
+            <a:blipFill>
+              <a:blip>
+                <a:extLst>
+                  <a:ext uri="{96DAC541-7B7A-43D3-8B79-37D633B846F1}">
+                    <asvg:svgBlip xmlns:asvg="http://schemas.microsoft.com/office/drawing/2016/SVG/main" r:embed="rId2"/>
+                  </a:ext>
+                </a:extLst>
+              </a:blip>
+              <a:stretch>
+                <a:fillRect/>
+              </a:stretch>
+            </a:blipFill>
+            <a:ln cap="sq">
+              <a:noFill/>
+              <a:prstDash val="solid"/>
+              <a:miter/>
+            </a:ln>
+          </p:spPr>
+          <p:txBody>
+            <a:bodyPr/>
+            <a:lstStyle/>
+            <a:p>
+              <a:endParaRPr lang="pt-PT"/>
+            </a:p>
+          </p:txBody>
+        </p:sp>
+        <p:sp>
+          <p:nvSpPr>
+            <p:cNvPr id="4" name="Freeform 4">
+              <a:extLst>
+                <a:ext uri="{FF2B5EF4-FFF2-40B4-BE49-F238E27FC236}">
+                  <a16:creationId xmlns:a16="http://schemas.microsoft.com/office/drawing/2014/main" id="{95EDB898-A782-710B-63DF-0BB33A8C5371}"/>
+                </a:ext>
+              </a:extLst>
+            </p:cNvPr>
+            <p:cNvSpPr/>
+            <p:nvPr/>
+          </p:nvSpPr>
+          <p:spPr>
+            <a:xfrm>
+              <a:off x="0" y="0"/>
+              <a:ext cx="10377694" cy="10377694"/>
+            </a:xfrm>
+            <a:custGeom>
+              <a:avLst/>
+              <a:gdLst/>
+              <a:ahLst/>
+              <a:cxnLst/>
+              <a:rect l="l" t="t" r="r" b="b"/>
+              <a:pathLst>
+                <a:path w="10377694" h="10377694">
+                  <a:moveTo>
+                    <a:pt x="0" y="0"/>
+                  </a:moveTo>
+                  <a:lnTo>
+                    <a:pt x="10377694" y="0"/>
+                  </a:lnTo>
+                  <a:lnTo>
+                    <a:pt x="10377694" y="10377694"/>
+                  </a:lnTo>
+                  <a:lnTo>
+                    <a:pt x="0" y="10377694"/>
+                  </a:lnTo>
+                  <a:lnTo>
+                    <a:pt x="0" y="0"/>
+                  </a:lnTo>
+                  <a:close/>
+                </a:path>
+              </a:pathLst>
+            </a:custGeom>
+            <a:blipFill>
+              <a:blip>
+                <a:extLst>
+                  <a:ext uri="{96DAC541-7B7A-43D3-8B79-37D633B846F1}">
+                    <asvg:svgBlip xmlns:asvg="http://schemas.microsoft.com/office/drawing/2016/SVG/main" r:embed="rId3"/>
+                  </a:ext>
+                </a:extLst>
+              </a:blip>
+              <a:stretch>
+                <a:fillRect/>
+              </a:stretch>
+            </a:blipFill>
+            <a:ln cap="sq">
+              <a:noFill/>
+              <a:prstDash val="solid"/>
+              <a:miter/>
+            </a:ln>
+          </p:spPr>
+          <p:txBody>
+            <a:bodyPr/>
+            <a:lstStyle/>
+            <a:p>
+              <a:endParaRPr lang="pt-PT"/>
+            </a:p>
+          </p:txBody>
+        </p:sp>
+      </p:grpSp>
+      <p:grpSp>
+        <p:nvGrpSpPr>
+          <p:cNvPr id="5" name="Group 5">
+            <a:extLst>
+              <a:ext uri="{FF2B5EF4-FFF2-40B4-BE49-F238E27FC236}">
+                <a16:creationId xmlns:a16="http://schemas.microsoft.com/office/drawing/2014/main" id="{965E5467-DE4F-E481-2B17-A5B532867022}"/>
+              </a:ext>
+            </a:extLst>
+          </p:cNvPr>
+          <p:cNvGrpSpPr/>
+          <p:nvPr/>
+        </p:nvGrpSpPr>
+        <p:grpSpPr>
+          <a:xfrm>
+            <a:off x="11246542" y="-6136759"/>
+            <a:ext cx="8279532" cy="9266871"/>
+            <a:chOff x="0" y="0"/>
+            <a:chExt cx="11039376" cy="12355828"/>
+          </a:xfrm>
+        </p:grpSpPr>
+        <p:sp>
+          <p:nvSpPr>
+            <p:cNvPr id="6" name="Freeform 6">
+              <a:extLst>
+                <a:ext uri="{FF2B5EF4-FFF2-40B4-BE49-F238E27FC236}">
+                  <a16:creationId xmlns:a16="http://schemas.microsoft.com/office/drawing/2014/main" id="{D333C350-7CF5-8085-6C86-A66BFD77ECA4}"/>
+                </a:ext>
+              </a:extLst>
+            </p:cNvPr>
+            <p:cNvSpPr/>
+            <p:nvPr/>
+          </p:nvSpPr>
+          <p:spPr>
+            <a:xfrm flipH="1" flipV="1">
+              <a:off x="1782890" y="1336201"/>
+              <a:ext cx="9256486" cy="11019627"/>
+            </a:xfrm>
+            <a:custGeom>
+              <a:avLst/>
+              <a:gdLst/>
+              <a:ahLst/>
+              <a:cxnLst/>
+              <a:rect l="l" t="t" r="r" b="b"/>
+              <a:pathLst>
+                <a:path w="9256486" h="11019627">
+                  <a:moveTo>
+                    <a:pt x="9256486" y="11019627"/>
+                  </a:moveTo>
+                  <a:lnTo>
+                    <a:pt x="0" y="11019627"/>
+                  </a:lnTo>
+                  <a:lnTo>
+                    <a:pt x="0" y="0"/>
+                  </a:lnTo>
+                  <a:lnTo>
+                    <a:pt x="9256486" y="0"/>
+                  </a:lnTo>
+                  <a:lnTo>
+                    <a:pt x="9256486" y="11019627"/>
+                  </a:lnTo>
+                  <a:close/>
+                </a:path>
+              </a:pathLst>
+            </a:custGeom>
+            <a:blipFill>
+              <a:blip>
+                <a:extLst>
+                  <a:ext uri="{96DAC541-7B7A-43D3-8B79-37D633B846F1}">
+                    <asvg:svgBlip xmlns:asvg="http://schemas.microsoft.com/office/drawing/2016/SVG/main" r:embed="rId2"/>
+                  </a:ext>
+                </a:extLst>
+              </a:blip>
+              <a:stretch>
+                <a:fillRect/>
+              </a:stretch>
+            </a:blipFill>
+          </p:spPr>
+          <p:txBody>
+            <a:bodyPr/>
+            <a:lstStyle/>
+            <a:p>
+              <a:endParaRPr lang="pt-PT"/>
+            </a:p>
+          </p:txBody>
+        </p:sp>
+        <p:sp>
+          <p:nvSpPr>
+            <p:cNvPr id="7" name="Freeform 7">
+              <a:extLst>
+                <a:ext uri="{FF2B5EF4-FFF2-40B4-BE49-F238E27FC236}">
+                  <a16:creationId xmlns:a16="http://schemas.microsoft.com/office/drawing/2014/main" id="{5F2E1B97-25D9-DE17-F480-F3A93157D559}"/>
+                </a:ext>
+              </a:extLst>
+            </p:cNvPr>
+            <p:cNvSpPr/>
+            <p:nvPr/>
+          </p:nvSpPr>
+          <p:spPr>
+            <a:xfrm>
+              <a:off x="0" y="0"/>
+              <a:ext cx="10377694" cy="10377694"/>
+            </a:xfrm>
+            <a:custGeom>
+              <a:avLst/>
+              <a:gdLst/>
+              <a:ahLst/>
+              <a:cxnLst/>
+              <a:rect l="l" t="t" r="r" b="b"/>
+              <a:pathLst>
+                <a:path w="10377694" h="10377694">
+                  <a:moveTo>
+                    <a:pt x="0" y="0"/>
+                  </a:moveTo>
+                  <a:lnTo>
+                    <a:pt x="10377694" y="0"/>
+                  </a:lnTo>
+                  <a:lnTo>
+                    <a:pt x="10377694" y="10377694"/>
+                  </a:lnTo>
+                  <a:lnTo>
+                    <a:pt x="0" y="10377694"/>
+                  </a:lnTo>
+                  <a:lnTo>
+                    <a:pt x="0" y="0"/>
+                  </a:lnTo>
+                  <a:close/>
+                </a:path>
+              </a:pathLst>
+            </a:custGeom>
+            <a:blipFill>
+              <a:blip>
+                <a:extLst>
+                  <a:ext uri="{96DAC541-7B7A-43D3-8B79-37D633B846F1}">
+                    <asvg:svgBlip xmlns:asvg="http://schemas.microsoft.com/office/drawing/2016/SVG/main" r:embed="rId3"/>
+                  </a:ext>
+                </a:extLst>
+              </a:blip>
+              <a:stretch>
+                <a:fillRect/>
+              </a:stretch>
+            </a:blipFill>
+            <a:ln cap="sq">
+              <a:noFill/>
+              <a:prstDash val="solid"/>
+              <a:miter/>
+            </a:ln>
+          </p:spPr>
+          <p:txBody>
+            <a:bodyPr/>
+            <a:lstStyle/>
+            <a:p>
+              <a:endParaRPr lang="pt-PT"/>
+            </a:p>
+          </p:txBody>
+        </p:sp>
+      </p:grpSp>
+      <p:grpSp>
+        <p:nvGrpSpPr>
+          <p:cNvPr id="8" name="Group 8">
+            <a:extLst>
+              <a:ext uri="{FF2B5EF4-FFF2-40B4-BE49-F238E27FC236}">
+                <a16:creationId xmlns:a16="http://schemas.microsoft.com/office/drawing/2014/main" id="{1CB5BD7D-AB3B-B4CD-0DDB-41B18532E234}"/>
+              </a:ext>
+            </a:extLst>
+          </p:cNvPr>
+          <p:cNvGrpSpPr/>
+          <p:nvPr/>
+        </p:nvGrpSpPr>
+        <p:grpSpPr>
+          <a:xfrm>
+            <a:off x="1273638" y="693030"/>
+            <a:ext cx="15740723" cy="8900940"/>
+            <a:chOff x="0" y="0"/>
+            <a:chExt cx="4145705" cy="2344280"/>
+          </a:xfrm>
+        </p:grpSpPr>
+        <p:sp>
+          <p:nvSpPr>
+            <p:cNvPr id="9" name="Freeform 9">
+              <a:extLst>
+                <a:ext uri="{FF2B5EF4-FFF2-40B4-BE49-F238E27FC236}">
+                  <a16:creationId xmlns:a16="http://schemas.microsoft.com/office/drawing/2014/main" id="{08D37F49-8117-B1A1-D3FB-88AC98D4F34D}"/>
+                </a:ext>
+              </a:extLst>
+            </p:cNvPr>
+            <p:cNvSpPr/>
+            <p:nvPr/>
+          </p:nvSpPr>
+          <p:spPr>
+            <a:xfrm>
+              <a:off x="0" y="0"/>
+              <a:ext cx="4145705" cy="2344280"/>
+            </a:xfrm>
+            <a:custGeom>
+              <a:avLst/>
+              <a:gdLst/>
+              <a:ahLst/>
+              <a:cxnLst/>
+              <a:rect l="l" t="t" r="r" b="b"/>
+              <a:pathLst>
+                <a:path w="4145705" h="2344280">
+                  <a:moveTo>
+                    <a:pt x="49184" y="0"/>
+                  </a:moveTo>
+                  <a:lnTo>
+                    <a:pt x="4096521" y="0"/>
+                  </a:lnTo>
+                  <a:cubicBezTo>
+                    <a:pt x="4109565" y="0"/>
+                    <a:pt x="4122076" y="5182"/>
+                    <a:pt x="4131299" y="14406"/>
+                  </a:cubicBezTo>
+                  <a:cubicBezTo>
+                    <a:pt x="4140523" y="23629"/>
+                    <a:pt x="4145705" y="36140"/>
+                    <a:pt x="4145705" y="49184"/>
+                  </a:cubicBezTo>
+                  <a:lnTo>
+                    <a:pt x="4145705" y="2295096"/>
+                  </a:lnTo>
+                  <a:cubicBezTo>
+                    <a:pt x="4145705" y="2308141"/>
+                    <a:pt x="4140523" y="2320651"/>
+                    <a:pt x="4131299" y="2329875"/>
+                  </a:cubicBezTo>
+                  <a:cubicBezTo>
+                    <a:pt x="4122076" y="2339099"/>
+                    <a:pt x="4109565" y="2344280"/>
+                    <a:pt x="4096521" y="2344280"/>
+                  </a:cubicBezTo>
+                  <a:lnTo>
+                    <a:pt x="49184" y="2344280"/>
+                  </a:lnTo>
+                  <a:cubicBezTo>
+                    <a:pt x="22020" y="2344280"/>
+                    <a:pt x="0" y="2322260"/>
+                    <a:pt x="0" y="2295096"/>
+                  </a:cubicBezTo>
+                  <a:lnTo>
+                    <a:pt x="0" y="49184"/>
+                  </a:lnTo>
+                  <a:cubicBezTo>
+                    <a:pt x="0" y="36140"/>
+                    <a:pt x="5182" y="23629"/>
+                    <a:pt x="14406" y="14406"/>
+                  </a:cubicBezTo>
+                  <a:cubicBezTo>
+                    <a:pt x="23629" y="5182"/>
+                    <a:pt x="36140" y="0"/>
+                    <a:pt x="49184" y="0"/>
+                  </a:cubicBezTo>
+                  <a:close/>
+                </a:path>
+              </a:pathLst>
+            </a:custGeom>
+            <a:solidFill>
+              <a:srgbClr val="BFDBFF"/>
+            </a:solidFill>
+            <a:ln cap="rnd">
+              <a:noFill/>
+              <a:prstDash val="solid"/>
+              <a:round/>
+            </a:ln>
+          </p:spPr>
+          <p:txBody>
+            <a:bodyPr/>
+            <a:lstStyle/>
+            <a:p>
+              <a:endParaRPr lang="pt-PT"/>
+            </a:p>
+          </p:txBody>
+        </p:sp>
+        <p:sp>
+          <p:nvSpPr>
+            <p:cNvPr id="10" name="TextBox 10">
+              <a:extLst>
+                <a:ext uri="{FF2B5EF4-FFF2-40B4-BE49-F238E27FC236}">
+                  <a16:creationId xmlns:a16="http://schemas.microsoft.com/office/drawing/2014/main" id="{726B78C4-78C1-69C8-0FF7-987CCA9E4800}"/>
+                </a:ext>
+              </a:extLst>
+            </p:cNvPr>
+            <p:cNvSpPr txBox="1"/>
+            <p:nvPr/>
+          </p:nvSpPr>
+          <p:spPr>
+            <a:xfrm>
+              <a:off x="0" y="-47625"/>
+              <a:ext cx="4145705" cy="2391905"/>
+            </a:xfrm>
+            <a:prstGeom prst="rect">
+              <a:avLst/>
+            </a:prstGeom>
+          </p:spPr>
+          <p:txBody>
+            <a:bodyPr lIns="50800" tIns="50800" rIns="50800" bIns="50800" rtlCol="0" anchor="ctr"/>
+            <a:lstStyle/>
+            <a:p>
+              <a:pPr marL="0" lvl="0" indent="0" algn="ctr">
+                <a:lnSpc>
+                  <a:spcPts val="2659"/>
+                </a:lnSpc>
+              </a:pPr>
+              <a:endParaRPr/>
+            </a:p>
+          </p:txBody>
+        </p:sp>
+      </p:grpSp>
+      <p:grpSp>
+        <p:nvGrpSpPr>
+          <p:cNvPr id="11" name="Group 11">
+            <a:extLst>
+              <a:ext uri="{FF2B5EF4-FFF2-40B4-BE49-F238E27FC236}">
+                <a16:creationId xmlns:a16="http://schemas.microsoft.com/office/drawing/2014/main" id="{F0A6F672-8711-E631-2051-BAA16BB1E997}"/>
+              </a:ext>
+            </a:extLst>
+          </p:cNvPr>
+          <p:cNvGrpSpPr/>
+          <p:nvPr/>
+        </p:nvGrpSpPr>
+        <p:grpSpPr>
+          <a:xfrm>
+            <a:off x="1518575" y="1099664"/>
+            <a:ext cx="15250847" cy="8229600"/>
+            <a:chOff x="0" y="0"/>
+            <a:chExt cx="4016684" cy="2167467"/>
+          </a:xfrm>
+        </p:grpSpPr>
+        <p:sp>
+          <p:nvSpPr>
+            <p:cNvPr id="12" name="Freeform 12">
+              <a:extLst>
+                <a:ext uri="{FF2B5EF4-FFF2-40B4-BE49-F238E27FC236}">
+                  <a16:creationId xmlns:a16="http://schemas.microsoft.com/office/drawing/2014/main" id="{459D72C5-6002-2349-87A7-4128AEEFAF73}"/>
+                </a:ext>
+              </a:extLst>
+            </p:cNvPr>
+            <p:cNvSpPr/>
+            <p:nvPr/>
+          </p:nvSpPr>
+          <p:spPr>
+            <a:xfrm>
+              <a:off x="0" y="0"/>
+              <a:ext cx="4016684" cy="2167467"/>
+            </a:xfrm>
+            <a:custGeom>
+              <a:avLst/>
+              <a:gdLst/>
+              <a:ahLst/>
+              <a:cxnLst/>
+              <a:rect l="l" t="t" r="r" b="b"/>
+              <a:pathLst>
+                <a:path w="4016684" h="2167467">
+                  <a:moveTo>
+                    <a:pt x="50764" y="0"/>
+                  </a:moveTo>
+                  <a:lnTo>
+                    <a:pt x="3965920" y="0"/>
+                  </a:lnTo>
+                  <a:cubicBezTo>
+                    <a:pt x="3993956" y="0"/>
+                    <a:pt x="4016684" y="22728"/>
+                    <a:pt x="4016684" y="50764"/>
+                  </a:cubicBezTo>
+                  <a:lnTo>
+                    <a:pt x="4016684" y="2116703"/>
+                  </a:lnTo>
+                  <a:cubicBezTo>
+                    <a:pt x="4016684" y="2144739"/>
+                    <a:pt x="3993956" y="2167467"/>
+                    <a:pt x="3965920" y="2167467"/>
+                  </a:cubicBezTo>
+                  <a:lnTo>
+                    <a:pt x="50764" y="2167467"/>
+                  </a:lnTo>
+                  <a:cubicBezTo>
+                    <a:pt x="37300" y="2167467"/>
+                    <a:pt x="24388" y="2162118"/>
+                    <a:pt x="14868" y="2152598"/>
+                  </a:cubicBezTo>
+                  <a:cubicBezTo>
+                    <a:pt x="5348" y="2143078"/>
+                    <a:pt x="0" y="2130166"/>
+                    <a:pt x="0" y="2116703"/>
+                  </a:cubicBezTo>
+                  <a:lnTo>
+                    <a:pt x="0" y="50764"/>
+                  </a:lnTo>
+                  <a:cubicBezTo>
+                    <a:pt x="0" y="22728"/>
+                    <a:pt x="22728" y="0"/>
+                    <a:pt x="50764" y="0"/>
+                  </a:cubicBezTo>
+                  <a:close/>
+                </a:path>
+              </a:pathLst>
+            </a:custGeom>
+            <a:solidFill>
+              <a:srgbClr val="FFFFFE"/>
+            </a:solidFill>
+            <a:ln cap="rnd">
+              <a:noFill/>
+              <a:prstDash val="solid"/>
+              <a:round/>
+            </a:ln>
+          </p:spPr>
+          <p:txBody>
+            <a:bodyPr/>
+            <a:lstStyle/>
+            <a:p>
+              <a:endParaRPr lang="pt-PT" dirty="0"/>
+            </a:p>
+          </p:txBody>
+        </p:sp>
+        <p:sp>
+          <p:nvSpPr>
+            <p:cNvPr id="13" name="TextBox 13">
+              <a:extLst>
+                <a:ext uri="{FF2B5EF4-FFF2-40B4-BE49-F238E27FC236}">
+                  <a16:creationId xmlns:a16="http://schemas.microsoft.com/office/drawing/2014/main" id="{7DA019CF-0C28-6927-D858-DB394B15D0D8}"/>
+                </a:ext>
+              </a:extLst>
+            </p:cNvPr>
+            <p:cNvSpPr txBox="1"/>
+            <p:nvPr/>
+          </p:nvSpPr>
+          <p:spPr>
+            <a:xfrm>
+              <a:off x="0" y="-47625"/>
+              <a:ext cx="4016684" cy="2215092"/>
+            </a:xfrm>
+            <a:prstGeom prst="rect">
+              <a:avLst/>
+            </a:prstGeom>
+          </p:spPr>
+          <p:txBody>
+            <a:bodyPr lIns="50800" tIns="50800" rIns="50800" bIns="50800" rtlCol="0" anchor="ctr"/>
+            <a:lstStyle/>
+            <a:p>
+              <a:pPr marL="0" lvl="0" indent="0" algn="ctr">
+                <a:lnSpc>
+                  <a:spcPts val="2659"/>
+                </a:lnSpc>
+              </a:pPr>
+              <a:endParaRPr/>
+            </a:p>
+          </p:txBody>
+        </p:sp>
+      </p:grpSp>
+      <p:sp>
+        <p:nvSpPr>
+          <p:cNvPr id="14" name="TextBox 14">
+            <a:extLst>
+              <a:ext uri="{FF2B5EF4-FFF2-40B4-BE49-F238E27FC236}">
+                <a16:creationId xmlns:a16="http://schemas.microsoft.com/office/drawing/2014/main" id="{E7135E30-811A-A86B-899B-705C18AD03B8}"/>
+              </a:ext>
+            </a:extLst>
+          </p:cNvPr>
+          <p:cNvSpPr txBox="1"/>
+          <p:nvPr/>
+        </p:nvSpPr>
+        <p:spPr>
+          <a:xfrm>
+            <a:off x="2281335" y="2789450"/>
+            <a:ext cx="13773557" cy="1132939"/>
+          </a:xfrm>
+          <a:prstGeom prst="rect">
+            <a:avLst/>
+          </a:prstGeom>
+        </p:spPr>
+        <p:txBody>
+          <a:bodyPr lIns="0" tIns="0" rIns="0" bIns="0" rtlCol="0" anchor="t">
+            <a:spAutoFit/>
+          </a:bodyPr>
+          <a:lstStyle/>
+          <a:p>
+            <a:pPr lvl="0" algn="ctr">
+              <a:lnSpc>
+                <a:spcPts val="8398"/>
+              </a:lnSpc>
+            </a:pPr>
+            <a:r>
+              <a:rPr lang="pt-PT" sz="9600" dirty="0"/>
+              <a:t>Ética e proteção de dados</a:t>
+            </a:r>
+            <a:endParaRPr lang="en-US" sz="9129" dirty="0">
+              <a:solidFill>
+                <a:srgbClr val="000000"/>
+              </a:solidFill>
+              <a:latin typeface="Calibri (MS)"/>
+              <a:ea typeface="Calibri (MS)"/>
+              <a:cs typeface="Calibri (MS)"/>
+              <a:sym typeface="Calibri (MS)"/>
+            </a:endParaRPr>
+          </a:p>
+        </p:txBody>
+      </p:sp>
+      <p:sp>
+        <p:nvSpPr>
+          <p:cNvPr id="15" name="TextBox 15">
+            <a:extLst>
+              <a:ext uri="{FF2B5EF4-FFF2-40B4-BE49-F238E27FC236}">
+                <a16:creationId xmlns:a16="http://schemas.microsoft.com/office/drawing/2014/main" id="{B691930A-ABD0-0806-5F73-DD80B3B9A2C6}"/>
+              </a:ext>
+            </a:extLst>
+          </p:cNvPr>
+          <p:cNvSpPr txBox="1"/>
+          <p:nvPr/>
+        </p:nvSpPr>
+        <p:spPr>
+          <a:xfrm>
+            <a:off x="2255741" y="4479114"/>
+            <a:ext cx="13773557" cy="3164841"/>
+          </a:xfrm>
+          <a:prstGeom prst="rect">
+            <a:avLst/>
+          </a:prstGeom>
+        </p:spPr>
+        <p:txBody>
+          <a:bodyPr lIns="0" tIns="0" rIns="0" bIns="0" rtlCol="0" anchor="t">
+            <a:spAutoFit/>
+          </a:bodyPr>
+          <a:lstStyle/>
+          <a:p>
+            <a:pPr>
+              <a:lnSpc>
+                <a:spcPct val="150000"/>
+              </a:lnSpc>
+            </a:pPr>
+            <a:r>
+              <a:rPr lang="pt-PT" sz="2800" u="sng" dirty="0"/>
+              <a:t>Garantida através de:</a:t>
+            </a:r>
+          </a:p>
+          <a:p>
+            <a:pPr marL="457200" indent="-457200">
+              <a:lnSpc>
+                <a:spcPct val="150000"/>
+              </a:lnSpc>
+              <a:buFont typeface="Arial" panose="020B0604020202020204" pitchFamily="34" charset="0"/>
+              <a:buChar char="•"/>
+            </a:pPr>
+            <a:r>
+              <a:rPr lang="pt-PT" sz="2800" dirty="0"/>
+              <a:t>Aprovação ética pela Comissão de Ética da FMUP. </a:t>
+            </a:r>
+          </a:p>
+          <a:p>
+            <a:pPr marL="457200" indent="-457200">
+              <a:lnSpc>
+                <a:spcPct val="150000"/>
+              </a:lnSpc>
+              <a:buFont typeface="Arial" panose="020B0604020202020204" pitchFamily="34" charset="0"/>
+              <a:buChar char="•"/>
+            </a:pPr>
+            <a:r>
+              <a:rPr lang="pt-PT" sz="2800" dirty="0"/>
+              <a:t>Consentimento informado digital obtido via </a:t>
+            </a:r>
+            <a:r>
+              <a:rPr lang="pt-PT" sz="2800" dirty="0" err="1"/>
+              <a:t>landing</a:t>
+            </a:r>
+            <a:r>
+              <a:rPr lang="pt-PT" sz="2800" dirty="0"/>
+              <a:t> </a:t>
+            </a:r>
+            <a:r>
+              <a:rPr lang="pt-PT" sz="2800" dirty="0" err="1"/>
+              <a:t>page</a:t>
+            </a:r>
+            <a:r>
+              <a:rPr lang="pt-PT" sz="2800" dirty="0"/>
+              <a:t> antes da participação no estudo.</a:t>
+            </a:r>
+          </a:p>
+          <a:p>
+            <a:pPr marL="457200" indent="-457200">
+              <a:lnSpc>
+                <a:spcPct val="150000"/>
+              </a:lnSpc>
+              <a:buFont typeface="Arial" panose="020B0604020202020204" pitchFamily="34" charset="0"/>
+              <a:buChar char="•"/>
+            </a:pPr>
+            <a:r>
+              <a:rPr lang="pt-PT" sz="2800" dirty="0"/>
+              <a:t>Proteção de dados em conformidade com o RGPD. </a:t>
+            </a:r>
+          </a:p>
+          <a:p>
+            <a:pPr marL="457200" indent="-457200">
+              <a:lnSpc>
+                <a:spcPct val="150000"/>
+              </a:lnSpc>
+              <a:buFont typeface="Arial" panose="020B0604020202020204" pitchFamily="34" charset="0"/>
+              <a:buChar char="•"/>
+            </a:pPr>
+            <a:r>
+              <a:rPr lang="pt-PT" sz="2800" dirty="0"/>
+              <a:t>Dados anonimizados e armazenados em servidores seguros com encriptação </a:t>
+            </a:r>
+            <a:r>
+              <a:rPr lang="pt-PT" sz="2800" dirty="0" err="1"/>
+              <a:t>end</a:t>
+            </a:r>
+            <a:r>
+              <a:rPr lang="pt-PT" sz="2800" dirty="0"/>
+              <a:t>-to-</a:t>
+            </a:r>
+            <a:r>
+              <a:rPr lang="pt-PT" sz="2800" dirty="0" err="1"/>
+              <a:t>end</a:t>
+            </a:r>
+            <a:r>
+              <a:rPr lang="pt-PT" sz="2800" dirty="0"/>
+              <a:t>.</a:t>
+            </a:r>
+          </a:p>
+        </p:txBody>
+      </p:sp>
+    </p:spTree>
+    <p:extLst>
+      <p:ext uri="{BB962C8B-B14F-4D97-AF65-F5344CB8AC3E}">
+        <p14:creationId xmlns:p14="http://schemas.microsoft.com/office/powerpoint/2010/main" val="4099099592"/>
+      </p:ext>
+    </p:extLst>
+  </p:cSld>
+  <p:clrMapOvr>
+    <a:masterClrMapping/>
+  </p:clrMapOvr>
+</p:sld>
+</file>
+
+<file path=ppt/slides/slide11.xml><?xml version="1.0" encoding="utf-8"?>
+<p:sld xmlns:a="http://schemas.openxmlformats.org/drawingml/2006/main" xmlns:r="http://schemas.openxmlformats.org/officeDocument/2006/relationships" xmlns:p="http://schemas.openxmlformats.org/presentationml/2006/main">
+  <p:cSld>
+    <p:bg>
+      <p:bgPr>
+        <a:solidFill>
+          <a:srgbClr val="FFFFFE"/>
+        </a:solidFill>
+        <a:effectLst/>
+      </p:bgPr>
+    </p:bg>
+    <p:spTree>
+      <p:nvGrpSpPr>
+        <p:cNvPr id="1" name=""/>
+        <p:cNvGrpSpPr/>
+        <p:nvPr/>
+      </p:nvGrpSpPr>
+      <p:grpSpPr>
+        <a:xfrm>
+          <a:off x="0" y="0"/>
+          <a:ext cx="0" cy="0"/>
+          <a:chOff x="0" y="0"/>
+          <a:chExt cx="0" cy="0"/>
+        </a:xfrm>
+      </p:grpSpPr>
+      <p:grpSp>
+        <p:nvGrpSpPr>
+          <p:cNvPr id="2" name="Group 2"/>
+          <p:cNvGrpSpPr/>
+          <p:nvPr/>
+        </p:nvGrpSpPr>
+        <p:grpSpPr>
+          <a:xfrm>
+            <a:off x="11114938" y="-6754570"/>
+            <a:ext cx="8279532" cy="9266871"/>
+            <a:chOff x="0" y="0"/>
+            <a:chExt cx="11039376" cy="12355828"/>
+          </a:xfrm>
+        </p:grpSpPr>
+        <p:sp>
+          <p:nvSpPr>
+            <p:cNvPr id="3" name="Freeform 3"/>
+            <p:cNvSpPr/>
+            <p:nvPr/>
+          </p:nvSpPr>
+          <p:spPr>
+            <a:xfrm flipH="1" flipV="1">
+              <a:off x="1782890" y="1336201"/>
+              <a:ext cx="9256486" cy="11019627"/>
+            </a:xfrm>
+            <a:custGeom>
+              <a:avLst/>
+              <a:gdLst/>
+              <a:ahLst/>
+              <a:cxnLst/>
+              <a:rect l="l" t="t" r="r" b="b"/>
+              <a:pathLst>
+                <a:path w="9256486" h="11019627">
+                  <a:moveTo>
+                    <a:pt x="9256486" y="11019627"/>
+                  </a:moveTo>
+                  <a:lnTo>
+                    <a:pt x="0" y="11019627"/>
+                  </a:lnTo>
+                  <a:lnTo>
+                    <a:pt x="0" y="0"/>
+                  </a:lnTo>
+                  <a:lnTo>
+                    <a:pt x="9256486" y="0"/>
+                  </a:lnTo>
+                  <a:lnTo>
+                    <a:pt x="9256486" y="11019627"/>
+                  </a:lnTo>
+                  <a:close/>
+                </a:path>
+              </a:pathLst>
+            </a:custGeom>
+            <a:blipFill>
+              <a:blip>
+                <a:extLst>
+                  <a:ext uri="{96DAC541-7B7A-43D3-8B79-37D633B846F1}">
+                    <asvg:svgBlip xmlns:asvg="http://schemas.microsoft.com/office/drawing/2016/SVG/main" r:embed="rId2"/>
+                  </a:ext>
+                </a:extLst>
+              </a:blip>
+              <a:stretch>
+                <a:fillRect/>
+              </a:stretch>
+            </a:blipFill>
+          </p:spPr>
+          <p:txBody>
+            <a:bodyPr/>
+            <a:lstStyle/>
+            <a:p>
+              <a:endParaRPr lang="pt-PT"/>
+            </a:p>
+          </p:txBody>
+        </p:sp>
+        <p:sp>
+          <p:nvSpPr>
+            <p:cNvPr id="4" name="Freeform 4"/>
+            <p:cNvSpPr/>
+            <p:nvPr/>
+          </p:nvSpPr>
+          <p:spPr>
+            <a:xfrm>
+              <a:off x="0" y="0"/>
+              <a:ext cx="10377694" cy="10377694"/>
+            </a:xfrm>
+            <a:custGeom>
+              <a:avLst/>
+              <a:gdLst/>
+              <a:ahLst/>
+              <a:cxnLst/>
+              <a:rect l="l" t="t" r="r" b="b"/>
+              <a:pathLst>
+                <a:path w="10377694" h="10377694">
+                  <a:moveTo>
+                    <a:pt x="0" y="0"/>
+                  </a:moveTo>
+                  <a:lnTo>
+                    <a:pt x="10377694" y="0"/>
+                  </a:lnTo>
+                  <a:lnTo>
+                    <a:pt x="10377694" y="10377694"/>
+                  </a:lnTo>
+                  <a:lnTo>
+                    <a:pt x="0" y="10377694"/>
+                  </a:lnTo>
+                  <a:lnTo>
+                    <a:pt x="0" y="0"/>
+                  </a:lnTo>
+                  <a:close/>
+                </a:path>
+              </a:pathLst>
+            </a:custGeom>
+            <a:blipFill>
+              <a:blip>
+                <a:extLst>
+                  <a:ext uri="{96DAC541-7B7A-43D3-8B79-37D633B846F1}">
+                    <asvg:svgBlip xmlns:asvg="http://schemas.microsoft.com/office/drawing/2016/SVG/main" r:embed="rId3"/>
+                  </a:ext>
+                </a:extLst>
+              </a:blip>
+              <a:stretch>
+                <a:fillRect/>
+              </a:stretch>
+            </a:blipFill>
+          </p:spPr>
+          <p:txBody>
+            <a:bodyPr/>
+            <a:lstStyle/>
+            <a:p>
+              <a:endParaRPr lang="pt-PT"/>
+            </a:p>
+          </p:txBody>
+        </p:sp>
+      </p:grpSp>
+      <p:grpSp>
+        <p:nvGrpSpPr>
+          <p:cNvPr id="5" name="Group 5"/>
+          <p:cNvGrpSpPr/>
+          <p:nvPr/>
+        </p:nvGrpSpPr>
+        <p:grpSpPr>
+          <a:xfrm rot="-10800000">
+            <a:off x="-1434465" y="7936076"/>
+            <a:ext cx="8279532" cy="9266871"/>
+            <a:chOff x="0" y="0"/>
+            <a:chExt cx="11039376" cy="12355828"/>
+          </a:xfrm>
+        </p:grpSpPr>
+        <p:sp>
+          <p:nvSpPr>
+            <p:cNvPr id="6" name="Freeform 6"/>
+            <p:cNvSpPr/>
+            <p:nvPr/>
+          </p:nvSpPr>
+          <p:spPr>
+            <a:xfrm flipH="1" flipV="1">
+              <a:off x="1782890" y="1336201"/>
+              <a:ext cx="9256486" cy="11019627"/>
+            </a:xfrm>
+            <a:custGeom>
+              <a:avLst/>
+              <a:gdLst/>
+              <a:ahLst/>
+              <a:cxnLst/>
+              <a:rect l="l" t="t" r="r" b="b"/>
+              <a:pathLst>
+                <a:path w="9256486" h="11019627">
+                  <a:moveTo>
+                    <a:pt x="9256486" y="11019627"/>
+                  </a:moveTo>
+                  <a:lnTo>
+                    <a:pt x="0" y="11019627"/>
+                  </a:lnTo>
+                  <a:lnTo>
+                    <a:pt x="0" y="0"/>
+                  </a:lnTo>
+                  <a:lnTo>
+                    <a:pt x="9256486" y="0"/>
+                  </a:lnTo>
+                  <a:lnTo>
+                    <a:pt x="9256486" y="11019627"/>
+                  </a:lnTo>
+                  <a:close/>
+                </a:path>
+              </a:pathLst>
+            </a:custGeom>
+            <a:blipFill>
+              <a:blip>
+                <a:extLst>
+                  <a:ext uri="{96DAC541-7B7A-43D3-8B79-37D633B846F1}">
+                    <asvg:svgBlip xmlns:asvg="http://schemas.microsoft.com/office/drawing/2016/SVG/main" r:embed="rId2"/>
+                  </a:ext>
+                </a:extLst>
+              </a:blip>
+              <a:stretch>
+                <a:fillRect/>
+              </a:stretch>
+            </a:blipFill>
+          </p:spPr>
+          <p:txBody>
+            <a:bodyPr/>
+            <a:lstStyle/>
+            <a:p>
+              <a:endParaRPr lang="pt-PT"/>
+            </a:p>
+          </p:txBody>
+        </p:sp>
+        <p:sp>
+          <p:nvSpPr>
+            <p:cNvPr id="7" name="Freeform 7"/>
+            <p:cNvSpPr/>
+            <p:nvPr/>
+          </p:nvSpPr>
+          <p:spPr>
+            <a:xfrm>
+              <a:off x="0" y="0"/>
+              <a:ext cx="10377694" cy="10377694"/>
+            </a:xfrm>
+            <a:custGeom>
+              <a:avLst/>
+              <a:gdLst/>
+              <a:ahLst/>
+              <a:cxnLst/>
+              <a:rect l="l" t="t" r="r" b="b"/>
+              <a:pathLst>
+                <a:path w="10377694" h="10377694">
+                  <a:moveTo>
+                    <a:pt x="0" y="0"/>
+                  </a:moveTo>
+                  <a:lnTo>
+                    <a:pt x="10377694" y="0"/>
+                  </a:lnTo>
+                  <a:lnTo>
+                    <a:pt x="10377694" y="10377694"/>
+                  </a:lnTo>
+                  <a:lnTo>
+                    <a:pt x="0" y="10377694"/>
+                  </a:lnTo>
+                  <a:lnTo>
+                    <a:pt x="0" y="0"/>
+                  </a:lnTo>
+                  <a:close/>
+                </a:path>
+              </a:pathLst>
+            </a:custGeom>
+            <a:blipFill>
+              <a:blip>
+                <a:extLst>
+                  <a:ext uri="{96DAC541-7B7A-43D3-8B79-37D633B846F1}">
+                    <asvg:svgBlip xmlns:asvg="http://schemas.microsoft.com/office/drawing/2016/SVG/main" r:embed="rId3"/>
+                  </a:ext>
+                </a:extLst>
+              </a:blip>
+              <a:stretch>
+                <a:fillRect/>
+              </a:stretch>
+            </a:blipFill>
+          </p:spPr>
+          <p:txBody>
+            <a:bodyPr/>
+            <a:lstStyle/>
+            <a:p>
+              <a:endParaRPr lang="pt-PT"/>
+            </a:p>
+          </p:txBody>
+        </p:sp>
+      </p:grpSp>
+      <p:sp>
+        <p:nvSpPr>
+          <p:cNvPr id="8" name="Freeform 8"/>
+          <p:cNvSpPr/>
+          <p:nvPr/>
+        </p:nvSpPr>
+        <p:spPr>
+          <a:xfrm rot="-10800000">
+            <a:off x="15965137" y="8412436"/>
+            <a:ext cx="4645726" cy="4645726"/>
+          </a:xfrm>
+          <a:custGeom>
+            <a:avLst/>
+            <a:gdLst/>
+            <a:ahLst/>
+            <a:cxnLst/>
+            <a:rect l="l" t="t" r="r" b="b"/>
+            <a:pathLst>
+              <a:path w="4645726" h="4645726">
+                <a:moveTo>
+                  <a:pt x="0" y="0"/>
+                </a:moveTo>
+                <a:lnTo>
+                  <a:pt x="4645726" y="0"/>
+                </a:lnTo>
+                <a:lnTo>
+                  <a:pt x="4645726" y="4645726"/>
+                </a:lnTo>
+                <a:lnTo>
+                  <a:pt x="0" y="4645726"/>
+                </a:lnTo>
+                <a:lnTo>
+                  <a:pt x="0" y="0"/>
+                </a:lnTo>
+                <a:close/>
+              </a:path>
+            </a:pathLst>
+          </a:custGeom>
+          <a:blipFill>
+            <a:blip>
+              <a:extLst>
+                <a:ext uri="{96DAC541-7B7A-43D3-8B79-37D633B846F1}">
+                  <asvg:svgBlip xmlns:asvg="http://schemas.microsoft.com/office/drawing/2016/SVG/main" r:embed="rId3"/>
+                </a:ext>
+              </a:extLst>
+            </a:blip>
+            <a:stretch>
+              <a:fillRect/>
+            </a:stretch>
+          </a:blipFill>
+        </p:spPr>
+        <p:txBody>
+          <a:bodyPr/>
+          <a:lstStyle/>
+          <a:p>
+            <a:endParaRPr lang="pt-PT"/>
+          </a:p>
+        </p:txBody>
+      </p:sp>
+      <p:sp>
+        <p:nvSpPr>
+          <p:cNvPr id="9" name="Freeform 9"/>
+          <p:cNvSpPr/>
+          <p:nvPr/>
+        </p:nvSpPr>
+        <p:spPr>
+          <a:xfrm rot="-10800000">
+            <a:off x="-2281014" y="-2716014"/>
+            <a:ext cx="4645726" cy="4645726"/>
+          </a:xfrm>
+          <a:custGeom>
+            <a:avLst/>
+            <a:gdLst/>
+            <a:ahLst/>
+            <a:cxnLst/>
+            <a:rect l="l" t="t" r="r" b="b"/>
+            <a:pathLst>
+              <a:path w="4645726" h="4645726">
+                <a:moveTo>
+                  <a:pt x="0" y="0"/>
+                </a:moveTo>
+                <a:lnTo>
+                  <a:pt x="4645726" y="0"/>
+                </a:lnTo>
+                <a:lnTo>
+                  <a:pt x="4645726" y="4645726"/>
+                </a:lnTo>
+                <a:lnTo>
+                  <a:pt x="0" y="4645726"/>
+                </a:lnTo>
+                <a:lnTo>
+                  <a:pt x="0" y="0"/>
+                </a:lnTo>
+                <a:close/>
+              </a:path>
+            </a:pathLst>
+          </a:custGeom>
+          <a:blipFill>
+            <a:blip>
+              <a:extLst>
+                <a:ext uri="{96DAC541-7B7A-43D3-8B79-37D633B846F1}">
+                  <asvg:svgBlip xmlns:asvg="http://schemas.microsoft.com/office/drawing/2016/SVG/main" r:embed="rId3"/>
+                </a:ext>
+              </a:extLst>
+            </a:blip>
+            <a:stretch>
+              <a:fillRect/>
+            </a:stretch>
+          </a:blipFill>
+        </p:spPr>
+        <p:txBody>
+          <a:bodyPr/>
+          <a:lstStyle/>
+          <a:p>
+            <a:endParaRPr lang="pt-PT"/>
+          </a:p>
+        </p:txBody>
+      </p:sp>
+      <p:sp>
+        <p:nvSpPr>
+          <p:cNvPr id="10" name="TextBox 10"/>
+          <p:cNvSpPr txBox="1"/>
+          <p:nvPr/>
+        </p:nvSpPr>
+        <p:spPr>
+          <a:xfrm>
+            <a:off x="4263643" y="5887740"/>
+            <a:ext cx="9760714" cy="813704"/>
+          </a:xfrm>
+          <a:prstGeom prst="rect">
+            <a:avLst/>
+          </a:prstGeom>
+        </p:spPr>
+        <p:txBody>
+          <a:bodyPr lIns="0" tIns="0" rIns="0" bIns="0" rtlCol="0" anchor="t">
+            <a:spAutoFit/>
+          </a:bodyPr>
+          <a:lstStyle/>
+          <a:p>
+            <a:pPr marL="0" lvl="0" indent="0" algn="ctr">
+              <a:lnSpc>
+                <a:spcPts val="6600"/>
+              </a:lnSpc>
+            </a:pPr>
+            <a:r>
+              <a:rPr lang="en-US" sz="4714">
+                <a:solidFill>
+                  <a:srgbClr val="1E344C"/>
+                </a:solidFill>
+                <a:latin typeface="Stinger Fit"/>
+                <a:ea typeface="Stinger Fit"/>
+                <a:cs typeface="Stinger Fit"/>
+                <a:sym typeface="Stinger Fit"/>
+              </a:rPr>
+              <a:t>Equipa de Investigação MinMove</a:t>
+            </a:r>
+          </a:p>
+        </p:txBody>
+      </p:sp>
+      <p:sp>
+        <p:nvSpPr>
+          <p:cNvPr id="11" name="TextBox 11"/>
+          <p:cNvSpPr txBox="1"/>
+          <p:nvPr/>
+        </p:nvSpPr>
+        <p:spPr>
+          <a:xfrm>
+            <a:off x="2364712" y="3223376"/>
+            <a:ext cx="13558576" cy="1440714"/>
+          </a:xfrm>
+          <a:prstGeom prst="rect">
+            <a:avLst/>
+          </a:prstGeom>
+        </p:spPr>
+        <p:txBody>
+          <a:bodyPr lIns="0" tIns="0" rIns="0" bIns="0" rtlCol="0" anchor="t">
+            <a:spAutoFit/>
+          </a:bodyPr>
+          <a:lstStyle/>
+          <a:p>
+            <a:pPr marL="0" lvl="0" indent="0" algn="ctr">
+              <a:lnSpc>
+                <a:spcPts val="10972"/>
+              </a:lnSpc>
+            </a:pPr>
+            <a:r>
+              <a:rPr lang="en-US" sz="10160">
+                <a:solidFill>
+                  <a:srgbClr val="1E344C"/>
+                </a:solidFill>
+                <a:latin typeface="Stinger Fit"/>
+                <a:ea typeface="Stinger Fit"/>
+                <a:cs typeface="Stinger Fit"/>
+                <a:sym typeface="Stinger Fit"/>
+              </a:rPr>
+              <a:t>Obrigado pela Atenção</a:t>
             </a:r>
           </a:p>
         </p:txBody>
@@ -3915,6 +5426,13 @@
               <a:miter/>
             </a:ln>
           </p:spPr>
+          <p:txBody>
+            <a:bodyPr/>
+            <a:lstStyle/>
+            <a:p>
+              <a:endParaRPr lang="pt-PT"/>
+            </a:p>
+          </p:txBody>
         </p:sp>
         <p:sp>
           <p:nvSpPr>
@@ -3972,6 +5490,13 @@
               <a:miter/>
             </a:ln>
           </p:spPr>
+          <p:txBody>
+            <a:bodyPr/>
+            <a:lstStyle/>
+            <a:p>
+              <a:endParaRPr lang="pt-PT"/>
+            </a:p>
+          </p:txBody>
         </p:sp>
       </p:grpSp>
       <p:grpSp>
@@ -4039,6 +5564,13 @@
               </a:stretch>
             </a:blipFill>
           </p:spPr>
+          <p:txBody>
+            <a:bodyPr/>
+            <a:lstStyle/>
+            <a:p>
+              <a:endParaRPr lang="pt-PT"/>
+            </a:p>
+          </p:txBody>
         </p:sp>
         <p:sp>
           <p:nvSpPr>
@@ -4096,6 +5628,13 @@
               <a:miter/>
             </a:ln>
           </p:spPr>
+          <p:txBody>
+            <a:bodyPr/>
+            <a:lstStyle/>
+            <a:p>
+              <a:endParaRPr lang="pt-PT"/>
+            </a:p>
+          </p:txBody>
         </p:sp>
       </p:grpSp>
       <p:grpSp>
@@ -4194,6 +5733,13 @@
               <a:round/>
             </a:ln>
           </p:spPr>
+          <p:txBody>
+            <a:bodyPr/>
+            <a:lstStyle/>
+            <a:p>
+              <a:endParaRPr lang="pt-PT"/>
+            </a:p>
+          </p:txBody>
         </p:sp>
         <p:sp>
           <p:nvSpPr>
@@ -4310,6 +5856,13 @@
               <a:round/>
             </a:ln>
           </p:spPr>
+          <p:txBody>
+            <a:bodyPr/>
+            <a:lstStyle/>
+            <a:p>
+              <a:endParaRPr lang="pt-PT"/>
+            </a:p>
+          </p:txBody>
         </p:sp>
         <p:sp>
           <p:nvSpPr>
@@ -4638,6 +6191,13 @@
               <a:miter/>
             </a:ln>
           </p:spPr>
+          <p:txBody>
+            <a:bodyPr/>
+            <a:lstStyle/>
+            <a:p>
+              <a:endParaRPr lang="pt-PT"/>
+            </a:p>
+          </p:txBody>
         </p:sp>
         <p:sp>
           <p:nvSpPr>
@@ -4695,6 +6255,13 @@
               <a:miter/>
             </a:ln>
           </p:spPr>
+          <p:txBody>
+            <a:bodyPr/>
+            <a:lstStyle/>
+            <a:p>
+              <a:endParaRPr lang="pt-PT"/>
+            </a:p>
+          </p:txBody>
         </p:sp>
       </p:grpSp>
       <p:grpSp>
@@ -4762,6 +6329,13 @@
               </a:stretch>
             </a:blipFill>
           </p:spPr>
+          <p:txBody>
+            <a:bodyPr/>
+            <a:lstStyle/>
+            <a:p>
+              <a:endParaRPr lang="pt-PT"/>
+            </a:p>
+          </p:txBody>
         </p:sp>
         <p:sp>
           <p:nvSpPr>
@@ -4819,6 +6393,13 @@
               <a:miter/>
             </a:ln>
           </p:spPr>
+          <p:txBody>
+            <a:bodyPr/>
+            <a:lstStyle/>
+            <a:p>
+              <a:endParaRPr lang="pt-PT"/>
+            </a:p>
+          </p:txBody>
         </p:sp>
       </p:grpSp>
       <p:grpSp>
@@ -4917,6 +6498,13 @@
               <a:round/>
             </a:ln>
           </p:spPr>
+          <p:txBody>
+            <a:bodyPr/>
+            <a:lstStyle/>
+            <a:p>
+              <a:endParaRPr lang="pt-PT"/>
+            </a:p>
+          </p:txBody>
         </p:sp>
         <p:sp>
           <p:nvSpPr>
@@ -5033,6 +6621,13 @@
               <a:round/>
             </a:ln>
           </p:spPr>
+          <p:txBody>
+            <a:bodyPr/>
+            <a:lstStyle/>
+            <a:p>
+              <a:endParaRPr lang="pt-PT"/>
+            </a:p>
+          </p:txBody>
         </p:sp>
         <p:sp>
           <p:nvSpPr>
@@ -5154,6 +6749,13 @@
               <a:srgbClr val="BFDBFF"/>
             </a:solidFill>
           </p:spPr>
+          <p:txBody>
+            <a:bodyPr/>
+            <a:lstStyle/>
+            <a:p>
+              <a:endParaRPr lang="pt-PT"/>
+            </a:p>
+          </p:txBody>
         </p:sp>
         <p:sp>
           <p:nvSpPr>
@@ -5425,6 +7027,13 @@
               <a:srgbClr val="BFDBFF"/>
             </a:solidFill>
           </p:spPr>
+          <p:txBody>
+            <a:bodyPr/>
+            <a:lstStyle/>
+            <a:p>
+              <a:endParaRPr lang="pt-PT"/>
+            </a:p>
+          </p:txBody>
         </p:sp>
         <p:sp>
           <p:nvSpPr>
@@ -5763,6 +7372,13 @@
               <a:miter/>
             </a:ln>
           </p:spPr>
+          <p:txBody>
+            <a:bodyPr/>
+            <a:lstStyle/>
+            <a:p>
+              <a:endParaRPr lang="pt-PT"/>
+            </a:p>
+          </p:txBody>
         </p:sp>
         <p:sp>
           <p:nvSpPr>
@@ -5820,6 +7436,13 @@
               <a:miter/>
             </a:ln>
           </p:spPr>
+          <p:txBody>
+            <a:bodyPr/>
+            <a:lstStyle/>
+            <a:p>
+              <a:endParaRPr lang="pt-PT"/>
+            </a:p>
+          </p:txBody>
         </p:sp>
       </p:grpSp>
       <p:grpSp>
@@ -5887,6 +7510,13 @@
               </a:stretch>
             </a:blipFill>
           </p:spPr>
+          <p:txBody>
+            <a:bodyPr/>
+            <a:lstStyle/>
+            <a:p>
+              <a:endParaRPr lang="pt-PT"/>
+            </a:p>
+          </p:txBody>
         </p:sp>
         <p:sp>
           <p:nvSpPr>
@@ -5944,6 +7574,13 @@
               <a:miter/>
             </a:ln>
           </p:spPr>
+          <p:txBody>
+            <a:bodyPr/>
+            <a:lstStyle/>
+            <a:p>
+              <a:endParaRPr lang="pt-PT"/>
+            </a:p>
+          </p:txBody>
         </p:sp>
       </p:grpSp>
       <p:grpSp>
@@ -6042,6 +7679,13 @@
               <a:round/>
             </a:ln>
           </p:spPr>
+          <p:txBody>
+            <a:bodyPr/>
+            <a:lstStyle/>
+            <a:p>
+              <a:endParaRPr lang="pt-PT"/>
+            </a:p>
+          </p:txBody>
         </p:sp>
         <p:sp>
           <p:nvSpPr>
@@ -6158,6 +7802,13 @@
               <a:round/>
             </a:ln>
           </p:spPr>
+          <p:txBody>
+            <a:bodyPr/>
+            <a:lstStyle/>
+            <a:p>
+              <a:endParaRPr lang="pt-PT"/>
+            </a:p>
+          </p:txBody>
         </p:sp>
         <p:sp>
           <p:nvSpPr>
@@ -6452,6 +8103,13 @@
               <a:miter/>
             </a:ln>
           </p:spPr>
+          <p:txBody>
+            <a:bodyPr/>
+            <a:lstStyle/>
+            <a:p>
+              <a:endParaRPr lang="pt-PT"/>
+            </a:p>
+          </p:txBody>
         </p:sp>
         <p:sp>
           <p:nvSpPr>
@@ -6509,6 +8167,13 @@
               <a:miter/>
             </a:ln>
           </p:spPr>
+          <p:txBody>
+            <a:bodyPr/>
+            <a:lstStyle/>
+            <a:p>
+              <a:endParaRPr lang="pt-PT"/>
+            </a:p>
+          </p:txBody>
         </p:sp>
       </p:grpSp>
       <p:grpSp>
@@ -6576,6 +8241,13 @@
               </a:stretch>
             </a:blipFill>
           </p:spPr>
+          <p:txBody>
+            <a:bodyPr/>
+            <a:lstStyle/>
+            <a:p>
+              <a:endParaRPr lang="pt-PT"/>
+            </a:p>
+          </p:txBody>
         </p:sp>
         <p:sp>
           <p:nvSpPr>
@@ -6633,6 +8305,13 @@
               <a:miter/>
             </a:ln>
           </p:spPr>
+          <p:txBody>
+            <a:bodyPr/>
+            <a:lstStyle/>
+            <a:p>
+              <a:endParaRPr lang="pt-PT"/>
+            </a:p>
+          </p:txBody>
         </p:sp>
       </p:grpSp>
       <p:grpSp>
@@ -6731,6 +8410,13 @@
               <a:round/>
             </a:ln>
           </p:spPr>
+          <p:txBody>
+            <a:bodyPr/>
+            <a:lstStyle/>
+            <a:p>
+              <a:endParaRPr lang="pt-PT"/>
+            </a:p>
+          </p:txBody>
         </p:sp>
         <p:sp>
           <p:nvSpPr>
@@ -6847,6 +8533,13 @@
               <a:round/>
             </a:ln>
           </p:spPr>
+          <p:txBody>
+            <a:bodyPr/>
+            <a:lstStyle/>
+            <a:p>
+              <a:endParaRPr lang="pt-PT"/>
+            </a:p>
+          </p:txBody>
         </p:sp>
         <p:sp>
           <p:nvSpPr>
@@ -6900,6 +8593,13 @@
             <a:tailEnd type="arrow" w="med" len="sm"/>
           </a:ln>
         </p:spPr>
+        <p:txBody>
+          <a:bodyPr/>
+          <a:lstStyle/>
+          <a:p>
+            <a:endParaRPr lang="pt-PT"/>
+          </a:p>
+        </p:txBody>
       </p:sp>
       <p:grpSp>
         <p:nvGrpSpPr>
@@ -6965,6 +8665,13 @@
               <a:srgbClr val="000000"/>
             </a:solidFill>
           </p:spPr>
+          <p:txBody>
+            <a:bodyPr/>
+            <a:lstStyle/>
+            <a:p>
+              <a:endParaRPr lang="pt-PT"/>
+            </a:p>
+          </p:txBody>
         </p:sp>
         <p:sp>
           <p:nvSpPr>
@@ -7100,6 +8807,13 @@
               <a:srgbClr val="000000"/>
             </a:solidFill>
           </p:spPr>
+          <p:txBody>
+            <a:bodyPr/>
+            <a:lstStyle/>
+            <a:p>
+              <a:endParaRPr lang="pt-PT"/>
+            </a:p>
+          </p:txBody>
         </p:sp>
         <p:sp>
           <p:nvSpPr>
@@ -7194,6 +8908,13 @@
               <a:srgbClr val="000000"/>
             </a:solidFill>
           </p:spPr>
+          <p:txBody>
+            <a:bodyPr/>
+            <a:lstStyle/>
+            <a:p>
+              <a:endParaRPr lang="pt-PT"/>
+            </a:p>
+          </p:txBody>
         </p:sp>
         <p:sp>
           <p:nvSpPr>
@@ -7288,6 +9009,13 @@
               <a:srgbClr val="000000"/>
             </a:solidFill>
           </p:spPr>
+          <p:txBody>
+            <a:bodyPr/>
+            <a:lstStyle/>
+            <a:p>
+              <a:endParaRPr lang="pt-PT"/>
+            </a:p>
+          </p:txBody>
         </p:sp>
         <p:sp>
           <p:nvSpPr>
@@ -7382,6 +9110,13 @@
               <a:srgbClr val="000000"/>
             </a:solidFill>
           </p:spPr>
+          <p:txBody>
+            <a:bodyPr/>
+            <a:lstStyle/>
+            <a:p>
+              <a:endParaRPr lang="pt-PT"/>
+            </a:p>
+          </p:txBody>
         </p:sp>
         <p:sp>
           <p:nvSpPr>
@@ -7476,6 +9211,13 @@
               <a:srgbClr val="000000"/>
             </a:solidFill>
           </p:spPr>
+          <p:txBody>
+            <a:bodyPr/>
+            <a:lstStyle/>
+            <a:p>
+              <a:endParaRPr lang="pt-PT"/>
+            </a:p>
+          </p:txBody>
         </p:sp>
         <p:sp>
           <p:nvSpPr>
@@ -7873,6 +9615,13 @@
               <a:miter/>
             </a:ln>
           </p:spPr>
+          <p:txBody>
+            <a:bodyPr/>
+            <a:lstStyle/>
+            <a:p>
+              <a:endParaRPr lang="pt-PT"/>
+            </a:p>
+          </p:txBody>
         </p:sp>
         <p:sp>
           <p:nvSpPr>
@@ -7930,6 +9679,13 @@
               <a:miter/>
             </a:ln>
           </p:spPr>
+          <p:txBody>
+            <a:bodyPr/>
+            <a:lstStyle/>
+            <a:p>
+              <a:endParaRPr lang="pt-PT"/>
+            </a:p>
+          </p:txBody>
         </p:sp>
       </p:grpSp>
       <p:grpSp>
@@ -7997,6 +9753,13 @@
               </a:stretch>
             </a:blipFill>
           </p:spPr>
+          <p:txBody>
+            <a:bodyPr/>
+            <a:lstStyle/>
+            <a:p>
+              <a:endParaRPr lang="pt-PT"/>
+            </a:p>
+          </p:txBody>
         </p:sp>
         <p:sp>
           <p:nvSpPr>
@@ -8054,6 +9817,13 @@
               <a:miter/>
             </a:ln>
           </p:spPr>
+          <p:txBody>
+            <a:bodyPr/>
+            <a:lstStyle/>
+            <a:p>
+              <a:endParaRPr lang="pt-PT"/>
+            </a:p>
+          </p:txBody>
         </p:sp>
       </p:grpSp>
       <p:grpSp>
@@ -8152,6 +9922,13 @@
               <a:round/>
             </a:ln>
           </p:spPr>
+          <p:txBody>
+            <a:bodyPr/>
+            <a:lstStyle/>
+            <a:p>
+              <a:endParaRPr lang="pt-PT"/>
+            </a:p>
+          </p:txBody>
         </p:sp>
         <p:sp>
           <p:nvSpPr>
@@ -8268,6 +10045,13 @@
               <a:round/>
             </a:ln>
           </p:spPr>
+          <p:txBody>
+            <a:bodyPr/>
+            <a:lstStyle/>
+            <a:p>
+              <a:endParaRPr lang="pt-PT"/>
+            </a:p>
+          </p:txBody>
         </p:sp>
         <p:sp>
           <p:nvSpPr>
@@ -8762,6 +10546,13 @@
               <a:miter/>
             </a:ln>
           </p:spPr>
+          <p:txBody>
+            <a:bodyPr/>
+            <a:lstStyle/>
+            <a:p>
+              <a:endParaRPr lang="pt-PT"/>
+            </a:p>
+          </p:txBody>
         </p:sp>
         <p:sp>
           <p:nvSpPr>
@@ -8819,6 +10610,13 @@
               <a:miter/>
             </a:ln>
           </p:spPr>
+          <p:txBody>
+            <a:bodyPr/>
+            <a:lstStyle/>
+            <a:p>
+              <a:endParaRPr lang="pt-PT"/>
+            </a:p>
+          </p:txBody>
         </p:sp>
       </p:grpSp>
       <p:grpSp>
@@ -8886,6 +10684,13 @@
               </a:stretch>
             </a:blipFill>
           </p:spPr>
+          <p:txBody>
+            <a:bodyPr/>
+            <a:lstStyle/>
+            <a:p>
+              <a:endParaRPr lang="pt-PT"/>
+            </a:p>
+          </p:txBody>
         </p:sp>
         <p:sp>
           <p:nvSpPr>
@@ -8943,6 +10748,13 @@
               <a:miter/>
             </a:ln>
           </p:spPr>
+          <p:txBody>
+            <a:bodyPr/>
+            <a:lstStyle/>
+            <a:p>
+              <a:endParaRPr lang="pt-PT"/>
+            </a:p>
+          </p:txBody>
         </p:sp>
       </p:grpSp>
       <p:grpSp>
@@ -9041,6 +10853,13 @@
               <a:round/>
             </a:ln>
           </p:spPr>
+          <p:txBody>
+            <a:bodyPr/>
+            <a:lstStyle/>
+            <a:p>
+              <a:endParaRPr lang="pt-PT"/>
+            </a:p>
+          </p:txBody>
         </p:sp>
         <p:sp>
           <p:nvSpPr>
@@ -9157,6 +10976,13 @@
               <a:round/>
             </a:ln>
           </p:spPr>
+          <p:txBody>
+            <a:bodyPr/>
+            <a:lstStyle/>
+            <a:p>
+              <a:endParaRPr lang="pt-PT"/>
+            </a:p>
+          </p:txBody>
         </p:sp>
         <p:sp>
           <p:nvSpPr>
@@ -9363,7 +11189,13 @@
     </p:bg>
     <p:spTree>
       <p:nvGrpSpPr>
-        <p:cNvPr id="1" name=""/>
+        <p:cNvPr id="1" name="">
+          <a:extLst>
+            <a:ext uri="{FF2B5EF4-FFF2-40B4-BE49-F238E27FC236}">
+              <a16:creationId xmlns:a16="http://schemas.microsoft.com/office/drawing/2014/main" id="{720E0810-9546-AA19-E9EC-477C71AA106D}"/>
+            </a:ext>
+          </a:extLst>
+        </p:cNvPr>
         <p:cNvGrpSpPr/>
         <p:nvPr/>
       </p:nvGrpSpPr>
@@ -9377,13 +11209,19 @@
       </p:grpSpPr>
       <p:grpSp>
         <p:nvGrpSpPr>
-          <p:cNvPr id="2" name="Group 2"/>
+          <p:cNvPr id="2" name="Group 2">
+            <a:extLst>
+              <a:ext uri="{FF2B5EF4-FFF2-40B4-BE49-F238E27FC236}">
+                <a16:creationId xmlns:a16="http://schemas.microsoft.com/office/drawing/2014/main" id="{D49E9DE4-30B2-6F3A-F6FE-EA05B1F9CDC4}"/>
+              </a:ext>
+            </a:extLst>
+          </p:cNvPr>
           <p:cNvGrpSpPr/>
           <p:nvPr/>
         </p:nvGrpSpPr>
         <p:grpSpPr>
-          <a:xfrm>
-            <a:off x="11114938" y="-6754570"/>
+          <a:xfrm rot="-10800000">
+            <a:off x="-1434465" y="7936076"/>
             <a:ext cx="8279532" cy="9266871"/>
             <a:chOff x="0" y="0"/>
             <a:chExt cx="11039376" cy="12355828"/>
@@ -9391,7 +11229,13 @@
         </p:grpSpPr>
         <p:sp>
           <p:nvSpPr>
-            <p:cNvPr id="3" name="Freeform 3"/>
+            <p:cNvPr id="3" name="Freeform 3">
+              <a:extLst>
+                <a:ext uri="{FF2B5EF4-FFF2-40B4-BE49-F238E27FC236}">
+                  <a16:creationId xmlns:a16="http://schemas.microsoft.com/office/drawing/2014/main" id="{94B7B50A-1C17-094C-246C-9BB19B4C0E29}"/>
+                </a:ext>
+              </a:extLst>
+            </p:cNvPr>
             <p:cNvSpPr/>
             <p:nvPr/>
           </p:nvSpPr>
@@ -9439,11 +11283,29 @@
                 <a:fillRect/>
               </a:stretch>
             </a:blipFill>
+            <a:ln cap="sq">
+              <a:noFill/>
+              <a:prstDash val="solid"/>
+              <a:miter/>
+            </a:ln>
           </p:spPr>
+          <p:txBody>
+            <a:bodyPr/>
+            <a:lstStyle/>
+            <a:p>
+              <a:endParaRPr lang="pt-PT"/>
+            </a:p>
+          </p:txBody>
         </p:sp>
         <p:sp>
           <p:nvSpPr>
-            <p:cNvPr id="4" name="Freeform 4"/>
+            <p:cNvPr id="4" name="Freeform 4">
+              <a:extLst>
+                <a:ext uri="{FF2B5EF4-FFF2-40B4-BE49-F238E27FC236}">
+                  <a16:creationId xmlns:a16="http://schemas.microsoft.com/office/drawing/2014/main" id="{4C6A1BB5-349D-A1CC-7FDA-39C38C44661F}"/>
+                </a:ext>
+              </a:extLst>
+            </p:cNvPr>
             <p:cNvSpPr/>
             <p:nvPr/>
           </p:nvSpPr>
@@ -9491,18 +11353,36 @@
                 <a:fillRect/>
               </a:stretch>
             </a:blipFill>
+            <a:ln cap="sq">
+              <a:noFill/>
+              <a:prstDash val="solid"/>
+              <a:miter/>
+            </a:ln>
           </p:spPr>
+          <p:txBody>
+            <a:bodyPr/>
+            <a:lstStyle/>
+            <a:p>
+              <a:endParaRPr lang="pt-PT"/>
+            </a:p>
+          </p:txBody>
         </p:sp>
       </p:grpSp>
       <p:grpSp>
         <p:nvGrpSpPr>
-          <p:cNvPr id="5" name="Group 5"/>
+          <p:cNvPr id="5" name="Group 5">
+            <a:extLst>
+              <a:ext uri="{FF2B5EF4-FFF2-40B4-BE49-F238E27FC236}">
+                <a16:creationId xmlns:a16="http://schemas.microsoft.com/office/drawing/2014/main" id="{2E86219B-FEEF-0AA1-F121-B2A6AC144C0A}"/>
+              </a:ext>
+            </a:extLst>
+          </p:cNvPr>
           <p:cNvGrpSpPr/>
           <p:nvPr/>
         </p:nvGrpSpPr>
         <p:grpSpPr>
-          <a:xfrm rot="-10800000">
-            <a:off x="-1434465" y="7936076"/>
+          <a:xfrm>
+            <a:off x="11246542" y="-6136759"/>
             <a:ext cx="8279532" cy="9266871"/>
             <a:chOff x="0" y="0"/>
             <a:chExt cx="11039376" cy="12355828"/>
@@ -9510,7 +11390,13 @@
         </p:grpSpPr>
         <p:sp>
           <p:nvSpPr>
-            <p:cNvPr id="6" name="Freeform 6"/>
+            <p:cNvPr id="6" name="Freeform 6">
+              <a:extLst>
+                <a:ext uri="{FF2B5EF4-FFF2-40B4-BE49-F238E27FC236}">
+                  <a16:creationId xmlns:a16="http://schemas.microsoft.com/office/drawing/2014/main" id="{F792C25A-F8D6-E17F-6CA2-D527C829D607}"/>
+                </a:ext>
+              </a:extLst>
+            </p:cNvPr>
             <p:cNvSpPr/>
             <p:nvPr/>
           </p:nvSpPr>
@@ -9559,10 +11445,23 @@
               </a:stretch>
             </a:blipFill>
           </p:spPr>
+          <p:txBody>
+            <a:bodyPr/>
+            <a:lstStyle/>
+            <a:p>
+              <a:endParaRPr lang="pt-PT"/>
+            </a:p>
+          </p:txBody>
         </p:sp>
         <p:sp>
           <p:nvSpPr>
-            <p:cNvPr id="7" name="Freeform 7"/>
+            <p:cNvPr id="7" name="Freeform 7">
+              <a:extLst>
+                <a:ext uri="{FF2B5EF4-FFF2-40B4-BE49-F238E27FC236}">
+                  <a16:creationId xmlns:a16="http://schemas.microsoft.com/office/drawing/2014/main" id="{E6A20D79-8126-7A60-806C-53FE1687B900}"/>
+                </a:ext>
+              </a:extLst>
+            </p:cNvPr>
             <p:cNvSpPr/>
             <p:nvPr/>
           </p:nvSpPr>
@@ -9610,123 +11509,329 @@
                 <a:fillRect/>
               </a:stretch>
             </a:blipFill>
+            <a:ln cap="sq">
+              <a:noFill/>
+              <a:prstDash val="solid"/>
+              <a:miter/>
+            </a:ln>
           </p:spPr>
+          <p:txBody>
+            <a:bodyPr/>
+            <a:lstStyle/>
+            <a:p>
+              <a:endParaRPr lang="pt-PT"/>
+            </a:p>
+          </p:txBody>
+        </p:sp>
+      </p:grpSp>
+      <p:grpSp>
+        <p:nvGrpSpPr>
+          <p:cNvPr id="8" name="Group 8">
+            <a:extLst>
+              <a:ext uri="{FF2B5EF4-FFF2-40B4-BE49-F238E27FC236}">
+                <a16:creationId xmlns:a16="http://schemas.microsoft.com/office/drawing/2014/main" id="{C68605E2-423F-7C95-6E97-93BA02D5E657}"/>
+              </a:ext>
+            </a:extLst>
+          </p:cNvPr>
+          <p:cNvGrpSpPr/>
+          <p:nvPr/>
+        </p:nvGrpSpPr>
+        <p:grpSpPr>
+          <a:xfrm>
+            <a:off x="1273638" y="693030"/>
+            <a:ext cx="15740723" cy="8900940"/>
+            <a:chOff x="0" y="0"/>
+            <a:chExt cx="4145705" cy="2344280"/>
+          </a:xfrm>
+        </p:grpSpPr>
+        <p:sp>
+          <p:nvSpPr>
+            <p:cNvPr id="9" name="Freeform 9">
+              <a:extLst>
+                <a:ext uri="{FF2B5EF4-FFF2-40B4-BE49-F238E27FC236}">
+                  <a16:creationId xmlns:a16="http://schemas.microsoft.com/office/drawing/2014/main" id="{171CBC28-95E3-2B2D-151B-C77C7987EA5A}"/>
+                </a:ext>
+              </a:extLst>
+            </p:cNvPr>
+            <p:cNvSpPr/>
+            <p:nvPr/>
+          </p:nvSpPr>
+          <p:spPr>
+            <a:xfrm>
+              <a:off x="0" y="0"/>
+              <a:ext cx="4145705" cy="2344280"/>
+            </a:xfrm>
+            <a:custGeom>
+              <a:avLst/>
+              <a:gdLst/>
+              <a:ahLst/>
+              <a:cxnLst/>
+              <a:rect l="l" t="t" r="r" b="b"/>
+              <a:pathLst>
+                <a:path w="4145705" h="2344280">
+                  <a:moveTo>
+                    <a:pt x="49184" y="0"/>
+                  </a:moveTo>
+                  <a:lnTo>
+                    <a:pt x="4096521" y="0"/>
+                  </a:lnTo>
+                  <a:cubicBezTo>
+                    <a:pt x="4109565" y="0"/>
+                    <a:pt x="4122076" y="5182"/>
+                    <a:pt x="4131299" y="14406"/>
+                  </a:cubicBezTo>
+                  <a:cubicBezTo>
+                    <a:pt x="4140523" y="23629"/>
+                    <a:pt x="4145705" y="36140"/>
+                    <a:pt x="4145705" y="49184"/>
+                  </a:cubicBezTo>
+                  <a:lnTo>
+                    <a:pt x="4145705" y="2295096"/>
+                  </a:lnTo>
+                  <a:cubicBezTo>
+                    <a:pt x="4145705" y="2308141"/>
+                    <a:pt x="4140523" y="2320651"/>
+                    <a:pt x="4131299" y="2329875"/>
+                  </a:cubicBezTo>
+                  <a:cubicBezTo>
+                    <a:pt x="4122076" y="2339099"/>
+                    <a:pt x="4109565" y="2344280"/>
+                    <a:pt x="4096521" y="2344280"/>
+                  </a:cubicBezTo>
+                  <a:lnTo>
+                    <a:pt x="49184" y="2344280"/>
+                  </a:lnTo>
+                  <a:cubicBezTo>
+                    <a:pt x="22020" y="2344280"/>
+                    <a:pt x="0" y="2322260"/>
+                    <a:pt x="0" y="2295096"/>
+                  </a:cubicBezTo>
+                  <a:lnTo>
+                    <a:pt x="0" y="49184"/>
+                  </a:lnTo>
+                  <a:cubicBezTo>
+                    <a:pt x="0" y="36140"/>
+                    <a:pt x="5182" y="23629"/>
+                    <a:pt x="14406" y="14406"/>
+                  </a:cubicBezTo>
+                  <a:cubicBezTo>
+                    <a:pt x="23629" y="5182"/>
+                    <a:pt x="36140" y="0"/>
+                    <a:pt x="49184" y="0"/>
+                  </a:cubicBezTo>
+                  <a:close/>
+                </a:path>
+              </a:pathLst>
+            </a:custGeom>
+            <a:solidFill>
+              <a:srgbClr val="BFDBFF"/>
+            </a:solidFill>
+            <a:ln cap="rnd">
+              <a:noFill/>
+              <a:prstDash val="solid"/>
+              <a:round/>
+            </a:ln>
+          </p:spPr>
+          <p:txBody>
+            <a:bodyPr/>
+            <a:lstStyle/>
+            <a:p>
+              <a:endParaRPr lang="pt-PT"/>
+            </a:p>
+          </p:txBody>
+        </p:sp>
+        <p:sp>
+          <p:nvSpPr>
+            <p:cNvPr id="10" name="TextBox 10">
+              <a:extLst>
+                <a:ext uri="{FF2B5EF4-FFF2-40B4-BE49-F238E27FC236}">
+                  <a16:creationId xmlns:a16="http://schemas.microsoft.com/office/drawing/2014/main" id="{AFF6BD67-2E36-F3B7-D2AD-2A869AB90E79}"/>
+                </a:ext>
+              </a:extLst>
+            </p:cNvPr>
+            <p:cNvSpPr txBox="1"/>
+            <p:nvPr/>
+          </p:nvSpPr>
+          <p:spPr>
+            <a:xfrm>
+              <a:off x="0" y="-47625"/>
+              <a:ext cx="4145705" cy="2391905"/>
+            </a:xfrm>
+            <a:prstGeom prst="rect">
+              <a:avLst/>
+            </a:prstGeom>
+          </p:spPr>
+          <p:txBody>
+            <a:bodyPr lIns="50800" tIns="50800" rIns="50800" bIns="50800" rtlCol="0" anchor="ctr"/>
+            <a:lstStyle/>
+            <a:p>
+              <a:pPr marL="0" lvl="0" indent="0" algn="ctr">
+                <a:lnSpc>
+                  <a:spcPts val="2659"/>
+                </a:lnSpc>
+              </a:pPr>
+              <a:endParaRPr/>
+            </a:p>
+          </p:txBody>
+        </p:sp>
+      </p:grpSp>
+      <p:grpSp>
+        <p:nvGrpSpPr>
+          <p:cNvPr id="11" name="Group 11">
+            <a:extLst>
+              <a:ext uri="{FF2B5EF4-FFF2-40B4-BE49-F238E27FC236}">
+                <a16:creationId xmlns:a16="http://schemas.microsoft.com/office/drawing/2014/main" id="{1517E098-A16C-236F-38B2-E8EDA910CFEE}"/>
+              </a:ext>
+            </a:extLst>
+          </p:cNvPr>
+          <p:cNvGrpSpPr/>
+          <p:nvPr/>
+        </p:nvGrpSpPr>
+        <p:grpSpPr>
+          <a:xfrm>
+            <a:off x="1518575" y="1099664"/>
+            <a:ext cx="15250847" cy="8229600"/>
+            <a:chOff x="0" y="0"/>
+            <a:chExt cx="4016684" cy="2167467"/>
+          </a:xfrm>
+        </p:grpSpPr>
+        <p:sp>
+          <p:nvSpPr>
+            <p:cNvPr id="12" name="Freeform 12">
+              <a:extLst>
+                <a:ext uri="{FF2B5EF4-FFF2-40B4-BE49-F238E27FC236}">
+                  <a16:creationId xmlns:a16="http://schemas.microsoft.com/office/drawing/2014/main" id="{316AB019-1848-08F2-7499-7AA062C308DC}"/>
+                </a:ext>
+              </a:extLst>
+            </p:cNvPr>
+            <p:cNvSpPr/>
+            <p:nvPr/>
+          </p:nvSpPr>
+          <p:spPr>
+            <a:xfrm>
+              <a:off x="0" y="0"/>
+              <a:ext cx="4016684" cy="2167467"/>
+            </a:xfrm>
+            <a:custGeom>
+              <a:avLst/>
+              <a:gdLst/>
+              <a:ahLst/>
+              <a:cxnLst/>
+              <a:rect l="l" t="t" r="r" b="b"/>
+              <a:pathLst>
+                <a:path w="4016684" h="2167467">
+                  <a:moveTo>
+                    <a:pt x="50764" y="0"/>
+                  </a:moveTo>
+                  <a:lnTo>
+                    <a:pt x="3965920" y="0"/>
+                  </a:lnTo>
+                  <a:cubicBezTo>
+                    <a:pt x="3993956" y="0"/>
+                    <a:pt x="4016684" y="22728"/>
+                    <a:pt x="4016684" y="50764"/>
+                  </a:cubicBezTo>
+                  <a:lnTo>
+                    <a:pt x="4016684" y="2116703"/>
+                  </a:lnTo>
+                  <a:cubicBezTo>
+                    <a:pt x="4016684" y="2144739"/>
+                    <a:pt x="3993956" y="2167467"/>
+                    <a:pt x="3965920" y="2167467"/>
+                  </a:cubicBezTo>
+                  <a:lnTo>
+                    <a:pt x="50764" y="2167467"/>
+                  </a:lnTo>
+                  <a:cubicBezTo>
+                    <a:pt x="37300" y="2167467"/>
+                    <a:pt x="24388" y="2162118"/>
+                    <a:pt x="14868" y="2152598"/>
+                  </a:cubicBezTo>
+                  <a:cubicBezTo>
+                    <a:pt x="5348" y="2143078"/>
+                    <a:pt x="0" y="2130166"/>
+                    <a:pt x="0" y="2116703"/>
+                  </a:cubicBezTo>
+                  <a:lnTo>
+                    <a:pt x="0" y="50764"/>
+                  </a:lnTo>
+                  <a:cubicBezTo>
+                    <a:pt x="0" y="22728"/>
+                    <a:pt x="22728" y="0"/>
+                    <a:pt x="50764" y="0"/>
+                  </a:cubicBezTo>
+                  <a:close/>
+                </a:path>
+              </a:pathLst>
+            </a:custGeom>
+            <a:solidFill>
+              <a:srgbClr val="FFFFFE"/>
+            </a:solidFill>
+            <a:ln cap="rnd">
+              <a:noFill/>
+              <a:prstDash val="solid"/>
+              <a:round/>
+            </a:ln>
+          </p:spPr>
+          <p:txBody>
+            <a:bodyPr/>
+            <a:lstStyle/>
+            <a:p>
+              <a:endParaRPr lang="pt-PT"/>
+            </a:p>
+          </p:txBody>
+        </p:sp>
+        <p:sp>
+          <p:nvSpPr>
+            <p:cNvPr id="13" name="TextBox 13">
+              <a:extLst>
+                <a:ext uri="{FF2B5EF4-FFF2-40B4-BE49-F238E27FC236}">
+                  <a16:creationId xmlns:a16="http://schemas.microsoft.com/office/drawing/2014/main" id="{E8CA8FAF-F3D3-EF92-49B4-713FB2C0CE6E}"/>
+                </a:ext>
+              </a:extLst>
+            </p:cNvPr>
+            <p:cNvSpPr txBox="1"/>
+            <p:nvPr/>
+          </p:nvSpPr>
+          <p:spPr>
+            <a:xfrm>
+              <a:off x="0" y="-47625"/>
+              <a:ext cx="4016684" cy="2215092"/>
+            </a:xfrm>
+            <a:prstGeom prst="rect">
+              <a:avLst/>
+            </a:prstGeom>
+          </p:spPr>
+          <p:txBody>
+            <a:bodyPr lIns="50800" tIns="50800" rIns="50800" bIns="50800" rtlCol="0" anchor="ctr"/>
+            <a:lstStyle/>
+            <a:p>
+              <a:pPr marL="0" lvl="0" indent="0" algn="ctr">
+                <a:lnSpc>
+                  <a:spcPts val="2659"/>
+                </a:lnSpc>
+              </a:pPr>
+              <a:endParaRPr/>
+            </a:p>
+          </p:txBody>
         </p:sp>
       </p:grpSp>
       <p:sp>
         <p:nvSpPr>
-          <p:cNvPr id="8" name="Freeform 8"/>
-          <p:cNvSpPr/>
-          <p:nvPr/>
-        </p:nvSpPr>
-        <p:spPr>
-          <a:xfrm rot="-10800000">
-            <a:off x="15965137" y="8412436"/>
-            <a:ext cx="4645726" cy="4645726"/>
-          </a:xfrm>
-          <a:custGeom>
-            <a:avLst/>
-            <a:gdLst/>
-            <a:ahLst/>
-            <a:cxnLst/>
-            <a:rect l="l" t="t" r="r" b="b"/>
-            <a:pathLst>
-              <a:path w="4645726" h="4645726">
-                <a:moveTo>
-                  <a:pt x="0" y="0"/>
-                </a:moveTo>
-                <a:lnTo>
-                  <a:pt x="4645726" y="0"/>
-                </a:lnTo>
-                <a:lnTo>
-                  <a:pt x="4645726" y="4645726"/>
-                </a:lnTo>
-                <a:lnTo>
-                  <a:pt x="0" y="4645726"/>
-                </a:lnTo>
-                <a:lnTo>
-                  <a:pt x="0" y="0"/>
-                </a:lnTo>
-                <a:close/>
-              </a:path>
-            </a:pathLst>
-          </a:custGeom>
-          <a:blipFill>
-            <a:blip>
-              <a:extLst>
-                <a:ext uri="{96DAC541-7B7A-43D3-8B79-37D633B846F1}">
-                  <asvg:svgBlip xmlns:asvg="http://schemas.microsoft.com/office/drawing/2016/SVG/main" r:embed="rId3"/>
-                </a:ext>
-              </a:extLst>
-            </a:blip>
-            <a:stretch>
-              <a:fillRect/>
-            </a:stretch>
-          </a:blipFill>
-        </p:spPr>
-      </p:sp>
-      <p:sp>
-        <p:nvSpPr>
-          <p:cNvPr id="9" name="Freeform 9"/>
-          <p:cNvSpPr/>
-          <p:nvPr/>
-        </p:nvSpPr>
-        <p:spPr>
-          <a:xfrm rot="-10800000">
-            <a:off x="-2281014" y="-2716014"/>
-            <a:ext cx="4645726" cy="4645726"/>
-          </a:xfrm>
-          <a:custGeom>
-            <a:avLst/>
-            <a:gdLst/>
-            <a:ahLst/>
-            <a:cxnLst/>
-            <a:rect l="l" t="t" r="r" b="b"/>
-            <a:pathLst>
-              <a:path w="4645726" h="4645726">
-                <a:moveTo>
-                  <a:pt x="0" y="0"/>
-                </a:moveTo>
-                <a:lnTo>
-                  <a:pt x="4645726" y="0"/>
-                </a:lnTo>
-                <a:lnTo>
-                  <a:pt x="4645726" y="4645726"/>
-                </a:lnTo>
-                <a:lnTo>
-                  <a:pt x="0" y="4645726"/>
-                </a:lnTo>
-                <a:lnTo>
-                  <a:pt x="0" y="0"/>
-                </a:lnTo>
-                <a:close/>
-              </a:path>
-            </a:pathLst>
-          </a:custGeom>
-          <a:blipFill>
-            <a:blip>
-              <a:extLst>
-                <a:ext uri="{96DAC541-7B7A-43D3-8B79-37D633B846F1}">
-                  <asvg:svgBlip xmlns:asvg="http://schemas.microsoft.com/office/drawing/2016/SVG/main" r:embed="rId3"/>
-                </a:ext>
-              </a:extLst>
-            </a:blip>
-            <a:stretch>
-              <a:fillRect/>
-            </a:stretch>
-          </a:blipFill>
-        </p:spPr>
-      </p:sp>
-      <p:sp>
-        <p:nvSpPr>
-          <p:cNvPr id="10" name="TextBox 10"/>
+          <p:cNvPr id="14" name="TextBox 14">
+            <a:extLst>
+              <a:ext uri="{FF2B5EF4-FFF2-40B4-BE49-F238E27FC236}">
+                <a16:creationId xmlns:a16="http://schemas.microsoft.com/office/drawing/2014/main" id="{10C22223-EA7A-3163-0E0C-91EC47938E2C}"/>
+              </a:ext>
+            </a:extLst>
+          </p:cNvPr>
           <p:cNvSpPr txBox="1"/>
           <p:nvPr/>
         </p:nvSpPr>
         <p:spPr>
           <a:xfrm>
-            <a:off x="4263643" y="5887740"/>
-            <a:ext cx="9760714" cy="813704"/>
+            <a:off x="2257221" y="1792197"/>
+            <a:ext cx="13773557" cy="1116972"/>
           </a:xfrm>
           <a:prstGeom prst="rect">
             <a:avLst/>
@@ -9740,34 +11845,40 @@
           <a:p>
             <a:pPr marL="0" lvl="0" indent="0" algn="ctr">
               <a:lnSpc>
-                <a:spcPts val="6600"/>
+                <a:spcPts val="8398"/>
               </a:lnSpc>
             </a:pPr>
             <a:r>
-              <a:rPr lang="en-US" sz="4714">
+              <a:rPr lang="en-US" sz="9129" dirty="0">
                 <a:solidFill>
-                  <a:srgbClr val="1E344C"/>
+                  <a:srgbClr val="000000"/>
                 </a:solidFill>
-                <a:latin typeface="Stinger Fit"/>
-                <a:ea typeface="Stinger Fit"/>
-                <a:cs typeface="Stinger Fit"/>
-                <a:sym typeface="Stinger Fit"/>
+                <a:latin typeface="Calibri (MS)"/>
+                <a:ea typeface="Calibri (MS)"/>
+                <a:cs typeface="Calibri (MS)"/>
+                <a:sym typeface="Calibri (MS)"/>
               </a:rPr>
-              <a:t>Equipa de Investigação MinMove</a:t>
+              <a:t>Outcomes</a:t>
             </a:r>
           </a:p>
         </p:txBody>
       </p:sp>
       <p:sp>
         <p:nvSpPr>
-          <p:cNvPr id="11" name="TextBox 11"/>
+          <p:cNvPr id="15" name="TextBox 15">
+            <a:extLst>
+              <a:ext uri="{FF2B5EF4-FFF2-40B4-BE49-F238E27FC236}">
+                <a16:creationId xmlns:a16="http://schemas.microsoft.com/office/drawing/2014/main" id="{3B4645BA-21B6-4F44-BBAF-6DC984CB2EE7}"/>
+              </a:ext>
+            </a:extLst>
+          </p:cNvPr>
           <p:cNvSpPr txBox="1"/>
           <p:nvPr/>
         </p:nvSpPr>
         <p:spPr>
           <a:xfrm>
-            <a:off x="2364712" y="3223376"/>
-            <a:ext cx="13558576" cy="1440714"/>
+            <a:off x="2242425" y="3198422"/>
+            <a:ext cx="13773557" cy="6334235"/>
           </a:xfrm>
           <a:prstGeom prst="rect">
             <a:avLst/>
@@ -9779,27 +11890,1092 @@
           </a:bodyPr>
           <a:lstStyle/>
           <a:p>
-            <a:pPr marL="0" lvl="0" indent="0" algn="ctr">
+            <a:pPr>
               <a:lnSpc>
-                <a:spcPts val="10972"/>
+                <a:spcPct val="150000"/>
               </a:lnSpc>
             </a:pPr>
             <a:r>
-              <a:rPr lang="en-US" sz="10160">
-                <a:solidFill>
-                  <a:srgbClr val="1E344C"/>
-                </a:solidFill>
-                <a:latin typeface="Stinger Fit"/>
-                <a:ea typeface="Stinger Fit"/>
-                <a:cs typeface="Stinger Fit"/>
-                <a:sym typeface="Stinger Fit"/>
-              </a:rPr>
-              <a:t>Obrigado pela Atenção</a:t>
-            </a:r>
+              <a:rPr lang="pt-PT" sz="2800" b="1" dirty="0" err="1"/>
+              <a:t>Outcome</a:t>
+            </a:r>
+            <a:r>
+              <a:rPr lang="pt-PT" sz="2800" b="1" dirty="0"/>
+              <a:t> Primário: </a:t>
+            </a:r>
+            <a:r>
+              <a:rPr lang="pt-PT" sz="2800" dirty="0"/>
+              <a:t>Variação no score PHQ-9 (</a:t>
+            </a:r>
+            <a:r>
+              <a:rPr lang="pt-PT" sz="2800" dirty="0" err="1"/>
+              <a:t>Patient</a:t>
+            </a:r>
+            <a:r>
+              <a:rPr lang="pt-PT" sz="2800" dirty="0"/>
+              <a:t> </a:t>
+            </a:r>
+            <a:r>
+              <a:rPr lang="pt-PT" sz="2800" dirty="0" err="1"/>
+              <a:t>Health</a:t>
+            </a:r>
+            <a:r>
+              <a:rPr lang="pt-PT" sz="2800" dirty="0"/>
+              <a:t> Questionnaire-9) para avaliação da redução de sintomas depressivos.</a:t>
+            </a:r>
+          </a:p>
+          <a:p>
+            <a:pPr>
+              <a:lnSpc>
+                <a:spcPct val="150000"/>
+              </a:lnSpc>
+            </a:pPr>
+            <a:endParaRPr lang="pt-PT" sz="2800" dirty="0"/>
+          </a:p>
+          <a:p>
+            <a:pPr>
+              <a:lnSpc>
+                <a:spcPct val="150000"/>
+              </a:lnSpc>
+            </a:pPr>
+            <a:r>
+              <a:rPr lang="pt-PT" sz="2800" b="1" dirty="0" err="1"/>
+              <a:t>Outcomes</a:t>
+            </a:r>
+            <a:r>
+              <a:rPr lang="pt-PT" sz="2800" b="1" dirty="0"/>
+              <a:t> Secundários: </a:t>
+            </a:r>
+            <a:r>
+              <a:rPr lang="pt-PT" sz="2800" dirty="0"/>
+              <a:t>Adesão à intervenção digital e bem-estar geral medido pelo WHO-5 (</a:t>
+            </a:r>
+            <a:r>
+              <a:rPr lang="pt-PT" sz="2800" dirty="0" err="1"/>
+              <a:t>World</a:t>
+            </a:r>
+            <a:r>
+              <a:rPr lang="pt-PT" sz="2800" dirty="0"/>
+              <a:t> </a:t>
+            </a:r>
+            <a:r>
+              <a:rPr lang="pt-PT" sz="2800" dirty="0" err="1"/>
+              <a:t>Health</a:t>
+            </a:r>
+            <a:r>
+              <a:rPr lang="pt-PT" sz="2800" dirty="0"/>
+              <a:t> </a:t>
+            </a:r>
+            <a:r>
+              <a:rPr lang="pt-PT" sz="2800" dirty="0" err="1"/>
+              <a:t>Organization</a:t>
+            </a:r>
+            <a:r>
+              <a:rPr lang="pt-PT" sz="2800" dirty="0"/>
+              <a:t> </a:t>
+            </a:r>
+            <a:r>
+              <a:rPr lang="pt-PT" sz="2800" dirty="0" err="1"/>
+              <a:t>Well-Being</a:t>
+            </a:r>
+            <a:r>
+              <a:rPr lang="pt-PT" sz="2800" dirty="0"/>
+              <a:t> Index).</a:t>
+            </a:r>
+          </a:p>
+          <a:p>
+            <a:pPr>
+              <a:lnSpc>
+                <a:spcPct val="150000"/>
+              </a:lnSpc>
+            </a:pPr>
+            <a:br>
+              <a:rPr lang="pt-PT" sz="2800" dirty="0"/>
+            </a:br>
+            <a:r>
+              <a:rPr lang="pt-PT" sz="2800" b="1" dirty="0"/>
+              <a:t>Usabilidade: </a:t>
+            </a:r>
+            <a:r>
+              <a:rPr lang="pt-PT" sz="2800" dirty="0"/>
+              <a:t>Avaliação através do </a:t>
+            </a:r>
+            <a:r>
+              <a:rPr lang="pt-PT" sz="2800" dirty="0" err="1"/>
+              <a:t>System</a:t>
+            </a:r>
+            <a:r>
+              <a:rPr lang="pt-PT" sz="2800" dirty="0"/>
+              <a:t> </a:t>
+            </a:r>
+            <a:r>
+              <a:rPr lang="pt-PT" sz="2800" dirty="0" err="1"/>
+              <a:t>Usability</a:t>
+            </a:r>
+            <a:r>
+              <a:rPr lang="pt-PT" sz="2800" dirty="0"/>
+              <a:t> </a:t>
+            </a:r>
+            <a:r>
+              <a:rPr lang="pt-PT" sz="2800" dirty="0" err="1"/>
+              <a:t>Scale</a:t>
+            </a:r>
+            <a:r>
+              <a:rPr lang="pt-PT" sz="2800" dirty="0"/>
+              <a:t> (SUS) para medir a experiência do utilizador com a aplicação </a:t>
+            </a:r>
+            <a:r>
+              <a:rPr lang="pt-PT" sz="2800" dirty="0" err="1"/>
+              <a:t>MindMove</a:t>
+            </a:r>
+            <a:r>
+              <a:rPr lang="pt-PT" sz="2800" dirty="0"/>
+              <a:t>.</a:t>
+            </a:r>
+            <a:br>
+              <a:rPr lang="pt-PT" sz="2800" dirty="0"/>
+            </a:br>
+            <a:br>
+              <a:rPr lang="pt-PT" sz="2800" dirty="0"/>
+            </a:br>
+            <a:endParaRPr lang="en-US" sz="2499" dirty="0">
+              <a:solidFill>
+                <a:srgbClr val="000000"/>
+              </a:solidFill>
+              <a:latin typeface="Calibri (MS)"/>
+              <a:ea typeface="Calibri (MS)"/>
+              <a:cs typeface="Calibri (MS)"/>
+              <a:sym typeface="Calibri (MS)"/>
+            </a:endParaRPr>
           </a:p>
         </p:txBody>
       </p:sp>
     </p:spTree>
+    <p:extLst>
+      <p:ext uri="{BB962C8B-B14F-4D97-AF65-F5344CB8AC3E}">
+        <p14:creationId xmlns:p14="http://schemas.microsoft.com/office/powerpoint/2010/main" val="4017652531"/>
+      </p:ext>
+    </p:extLst>
+  </p:cSld>
+  <p:clrMapOvr>
+    <a:masterClrMapping/>
+  </p:clrMapOvr>
+</p:sld>
+</file>
+
+<file path=ppt/slides/slide9.xml><?xml version="1.0" encoding="utf-8"?>
+<p:sld xmlns:a="http://schemas.openxmlformats.org/drawingml/2006/main" xmlns:r="http://schemas.openxmlformats.org/officeDocument/2006/relationships" xmlns:p="http://schemas.openxmlformats.org/presentationml/2006/main">
+  <p:cSld>
+    <p:bg>
+      <p:bgPr>
+        <a:solidFill>
+          <a:srgbClr val="FFFFFE"/>
+        </a:solidFill>
+        <a:effectLst/>
+      </p:bgPr>
+    </p:bg>
+    <p:spTree>
+      <p:nvGrpSpPr>
+        <p:cNvPr id="1" name="">
+          <a:extLst>
+            <a:ext uri="{FF2B5EF4-FFF2-40B4-BE49-F238E27FC236}">
+              <a16:creationId xmlns:a16="http://schemas.microsoft.com/office/drawing/2014/main" id="{429901AF-3FD5-AE99-C56A-3618B3E51B06}"/>
+            </a:ext>
+          </a:extLst>
+        </p:cNvPr>
+        <p:cNvGrpSpPr/>
+        <p:nvPr/>
+      </p:nvGrpSpPr>
+      <p:grpSpPr>
+        <a:xfrm>
+          <a:off x="0" y="0"/>
+          <a:ext cx="0" cy="0"/>
+          <a:chOff x="0" y="0"/>
+          <a:chExt cx="0" cy="0"/>
+        </a:xfrm>
+      </p:grpSpPr>
+      <p:grpSp>
+        <p:nvGrpSpPr>
+          <p:cNvPr id="2" name="Group 2">
+            <a:extLst>
+              <a:ext uri="{FF2B5EF4-FFF2-40B4-BE49-F238E27FC236}">
+                <a16:creationId xmlns:a16="http://schemas.microsoft.com/office/drawing/2014/main" id="{98FA112E-8C0B-A4CC-EDAC-06EE502937EC}"/>
+              </a:ext>
+            </a:extLst>
+          </p:cNvPr>
+          <p:cNvGrpSpPr/>
+          <p:nvPr/>
+        </p:nvGrpSpPr>
+        <p:grpSpPr>
+          <a:xfrm rot="-10800000">
+            <a:off x="-1434465" y="7936076"/>
+            <a:ext cx="8279532" cy="9266871"/>
+            <a:chOff x="0" y="0"/>
+            <a:chExt cx="11039376" cy="12355828"/>
+          </a:xfrm>
+        </p:grpSpPr>
+        <p:sp>
+          <p:nvSpPr>
+            <p:cNvPr id="3" name="Freeform 3">
+              <a:extLst>
+                <a:ext uri="{FF2B5EF4-FFF2-40B4-BE49-F238E27FC236}">
+                  <a16:creationId xmlns:a16="http://schemas.microsoft.com/office/drawing/2014/main" id="{95A093CA-F276-3A1A-34FE-3668F3A6F530}"/>
+                </a:ext>
+              </a:extLst>
+            </p:cNvPr>
+            <p:cNvSpPr/>
+            <p:nvPr/>
+          </p:nvSpPr>
+          <p:spPr>
+            <a:xfrm flipH="1" flipV="1">
+              <a:off x="1782890" y="1336201"/>
+              <a:ext cx="9256486" cy="11019627"/>
+            </a:xfrm>
+            <a:custGeom>
+              <a:avLst/>
+              <a:gdLst/>
+              <a:ahLst/>
+              <a:cxnLst/>
+              <a:rect l="l" t="t" r="r" b="b"/>
+              <a:pathLst>
+                <a:path w="9256486" h="11019627">
+                  <a:moveTo>
+                    <a:pt x="9256486" y="11019627"/>
+                  </a:moveTo>
+                  <a:lnTo>
+                    <a:pt x="0" y="11019627"/>
+                  </a:lnTo>
+                  <a:lnTo>
+                    <a:pt x="0" y="0"/>
+                  </a:lnTo>
+                  <a:lnTo>
+                    <a:pt x="9256486" y="0"/>
+                  </a:lnTo>
+                  <a:lnTo>
+                    <a:pt x="9256486" y="11019627"/>
+                  </a:lnTo>
+                  <a:close/>
+                </a:path>
+              </a:pathLst>
+            </a:custGeom>
+            <a:blipFill>
+              <a:blip>
+                <a:extLst>
+                  <a:ext uri="{96DAC541-7B7A-43D3-8B79-37D633B846F1}">
+                    <asvg:svgBlip xmlns:asvg="http://schemas.microsoft.com/office/drawing/2016/SVG/main" r:embed="rId2"/>
+                  </a:ext>
+                </a:extLst>
+              </a:blip>
+              <a:stretch>
+                <a:fillRect/>
+              </a:stretch>
+            </a:blipFill>
+            <a:ln cap="sq">
+              <a:noFill/>
+              <a:prstDash val="solid"/>
+              <a:miter/>
+            </a:ln>
+          </p:spPr>
+          <p:txBody>
+            <a:bodyPr/>
+            <a:lstStyle/>
+            <a:p>
+              <a:endParaRPr lang="pt-PT"/>
+            </a:p>
+          </p:txBody>
+        </p:sp>
+        <p:sp>
+          <p:nvSpPr>
+            <p:cNvPr id="4" name="Freeform 4">
+              <a:extLst>
+                <a:ext uri="{FF2B5EF4-FFF2-40B4-BE49-F238E27FC236}">
+                  <a16:creationId xmlns:a16="http://schemas.microsoft.com/office/drawing/2014/main" id="{2F9CCB97-9BC3-3AA5-3D5D-430577518E74}"/>
+                </a:ext>
+              </a:extLst>
+            </p:cNvPr>
+            <p:cNvSpPr/>
+            <p:nvPr/>
+          </p:nvSpPr>
+          <p:spPr>
+            <a:xfrm>
+              <a:off x="0" y="0"/>
+              <a:ext cx="10377694" cy="10377694"/>
+            </a:xfrm>
+            <a:custGeom>
+              <a:avLst/>
+              <a:gdLst/>
+              <a:ahLst/>
+              <a:cxnLst/>
+              <a:rect l="l" t="t" r="r" b="b"/>
+              <a:pathLst>
+                <a:path w="10377694" h="10377694">
+                  <a:moveTo>
+                    <a:pt x="0" y="0"/>
+                  </a:moveTo>
+                  <a:lnTo>
+                    <a:pt x="10377694" y="0"/>
+                  </a:lnTo>
+                  <a:lnTo>
+                    <a:pt x="10377694" y="10377694"/>
+                  </a:lnTo>
+                  <a:lnTo>
+                    <a:pt x="0" y="10377694"/>
+                  </a:lnTo>
+                  <a:lnTo>
+                    <a:pt x="0" y="0"/>
+                  </a:lnTo>
+                  <a:close/>
+                </a:path>
+              </a:pathLst>
+            </a:custGeom>
+            <a:blipFill>
+              <a:blip>
+                <a:extLst>
+                  <a:ext uri="{96DAC541-7B7A-43D3-8B79-37D633B846F1}">
+                    <asvg:svgBlip xmlns:asvg="http://schemas.microsoft.com/office/drawing/2016/SVG/main" r:embed="rId3"/>
+                  </a:ext>
+                </a:extLst>
+              </a:blip>
+              <a:stretch>
+                <a:fillRect/>
+              </a:stretch>
+            </a:blipFill>
+            <a:ln cap="sq">
+              <a:noFill/>
+              <a:prstDash val="solid"/>
+              <a:miter/>
+            </a:ln>
+          </p:spPr>
+          <p:txBody>
+            <a:bodyPr/>
+            <a:lstStyle/>
+            <a:p>
+              <a:endParaRPr lang="pt-PT"/>
+            </a:p>
+          </p:txBody>
+        </p:sp>
+      </p:grpSp>
+      <p:grpSp>
+        <p:nvGrpSpPr>
+          <p:cNvPr id="5" name="Group 5">
+            <a:extLst>
+              <a:ext uri="{FF2B5EF4-FFF2-40B4-BE49-F238E27FC236}">
+                <a16:creationId xmlns:a16="http://schemas.microsoft.com/office/drawing/2014/main" id="{9D8A01B2-A3FE-FA78-D2B7-272DDA9070E7}"/>
+              </a:ext>
+            </a:extLst>
+          </p:cNvPr>
+          <p:cNvGrpSpPr/>
+          <p:nvPr/>
+        </p:nvGrpSpPr>
+        <p:grpSpPr>
+          <a:xfrm>
+            <a:off x="11246542" y="-6136759"/>
+            <a:ext cx="8279532" cy="9266871"/>
+            <a:chOff x="0" y="0"/>
+            <a:chExt cx="11039376" cy="12355828"/>
+          </a:xfrm>
+        </p:grpSpPr>
+        <p:sp>
+          <p:nvSpPr>
+            <p:cNvPr id="6" name="Freeform 6">
+              <a:extLst>
+                <a:ext uri="{FF2B5EF4-FFF2-40B4-BE49-F238E27FC236}">
+                  <a16:creationId xmlns:a16="http://schemas.microsoft.com/office/drawing/2014/main" id="{E0D94FBF-90C8-2D64-1AFF-0A275AF3FF68}"/>
+                </a:ext>
+              </a:extLst>
+            </p:cNvPr>
+            <p:cNvSpPr/>
+            <p:nvPr/>
+          </p:nvSpPr>
+          <p:spPr>
+            <a:xfrm flipH="1" flipV="1">
+              <a:off x="1782890" y="1336201"/>
+              <a:ext cx="9256486" cy="11019627"/>
+            </a:xfrm>
+            <a:custGeom>
+              <a:avLst/>
+              <a:gdLst/>
+              <a:ahLst/>
+              <a:cxnLst/>
+              <a:rect l="l" t="t" r="r" b="b"/>
+              <a:pathLst>
+                <a:path w="9256486" h="11019627">
+                  <a:moveTo>
+                    <a:pt x="9256486" y="11019627"/>
+                  </a:moveTo>
+                  <a:lnTo>
+                    <a:pt x="0" y="11019627"/>
+                  </a:lnTo>
+                  <a:lnTo>
+                    <a:pt x="0" y="0"/>
+                  </a:lnTo>
+                  <a:lnTo>
+                    <a:pt x="9256486" y="0"/>
+                  </a:lnTo>
+                  <a:lnTo>
+                    <a:pt x="9256486" y="11019627"/>
+                  </a:lnTo>
+                  <a:close/>
+                </a:path>
+              </a:pathLst>
+            </a:custGeom>
+            <a:blipFill>
+              <a:blip>
+                <a:extLst>
+                  <a:ext uri="{96DAC541-7B7A-43D3-8B79-37D633B846F1}">
+                    <asvg:svgBlip xmlns:asvg="http://schemas.microsoft.com/office/drawing/2016/SVG/main" r:embed="rId2"/>
+                  </a:ext>
+                </a:extLst>
+              </a:blip>
+              <a:stretch>
+                <a:fillRect/>
+              </a:stretch>
+            </a:blipFill>
+          </p:spPr>
+          <p:txBody>
+            <a:bodyPr/>
+            <a:lstStyle/>
+            <a:p>
+              <a:endParaRPr lang="pt-PT"/>
+            </a:p>
+          </p:txBody>
+        </p:sp>
+        <p:sp>
+          <p:nvSpPr>
+            <p:cNvPr id="7" name="Freeform 7">
+              <a:extLst>
+                <a:ext uri="{FF2B5EF4-FFF2-40B4-BE49-F238E27FC236}">
+                  <a16:creationId xmlns:a16="http://schemas.microsoft.com/office/drawing/2014/main" id="{F8EEA087-482E-8C25-BD97-FB241B338C6C}"/>
+                </a:ext>
+              </a:extLst>
+            </p:cNvPr>
+            <p:cNvSpPr/>
+            <p:nvPr/>
+          </p:nvSpPr>
+          <p:spPr>
+            <a:xfrm>
+              <a:off x="0" y="0"/>
+              <a:ext cx="10377694" cy="10377694"/>
+            </a:xfrm>
+            <a:custGeom>
+              <a:avLst/>
+              <a:gdLst/>
+              <a:ahLst/>
+              <a:cxnLst/>
+              <a:rect l="l" t="t" r="r" b="b"/>
+              <a:pathLst>
+                <a:path w="10377694" h="10377694">
+                  <a:moveTo>
+                    <a:pt x="0" y="0"/>
+                  </a:moveTo>
+                  <a:lnTo>
+                    <a:pt x="10377694" y="0"/>
+                  </a:lnTo>
+                  <a:lnTo>
+                    <a:pt x="10377694" y="10377694"/>
+                  </a:lnTo>
+                  <a:lnTo>
+                    <a:pt x="0" y="10377694"/>
+                  </a:lnTo>
+                  <a:lnTo>
+                    <a:pt x="0" y="0"/>
+                  </a:lnTo>
+                  <a:close/>
+                </a:path>
+              </a:pathLst>
+            </a:custGeom>
+            <a:blipFill>
+              <a:blip>
+                <a:extLst>
+                  <a:ext uri="{96DAC541-7B7A-43D3-8B79-37D633B846F1}">
+                    <asvg:svgBlip xmlns:asvg="http://schemas.microsoft.com/office/drawing/2016/SVG/main" r:embed="rId3"/>
+                  </a:ext>
+                </a:extLst>
+              </a:blip>
+              <a:stretch>
+                <a:fillRect/>
+              </a:stretch>
+            </a:blipFill>
+            <a:ln cap="sq">
+              <a:noFill/>
+              <a:prstDash val="solid"/>
+              <a:miter/>
+            </a:ln>
+          </p:spPr>
+          <p:txBody>
+            <a:bodyPr/>
+            <a:lstStyle/>
+            <a:p>
+              <a:endParaRPr lang="pt-PT"/>
+            </a:p>
+          </p:txBody>
+        </p:sp>
+      </p:grpSp>
+      <p:grpSp>
+        <p:nvGrpSpPr>
+          <p:cNvPr id="8" name="Group 8">
+            <a:extLst>
+              <a:ext uri="{FF2B5EF4-FFF2-40B4-BE49-F238E27FC236}">
+                <a16:creationId xmlns:a16="http://schemas.microsoft.com/office/drawing/2014/main" id="{6996D2BC-4A66-257D-C12B-959ADFFD9103}"/>
+              </a:ext>
+            </a:extLst>
+          </p:cNvPr>
+          <p:cNvGrpSpPr/>
+          <p:nvPr/>
+        </p:nvGrpSpPr>
+        <p:grpSpPr>
+          <a:xfrm>
+            <a:off x="1273638" y="693030"/>
+            <a:ext cx="15740723" cy="8900940"/>
+            <a:chOff x="0" y="0"/>
+            <a:chExt cx="4145705" cy="2344280"/>
+          </a:xfrm>
+        </p:grpSpPr>
+        <p:sp>
+          <p:nvSpPr>
+            <p:cNvPr id="9" name="Freeform 9">
+              <a:extLst>
+                <a:ext uri="{FF2B5EF4-FFF2-40B4-BE49-F238E27FC236}">
+                  <a16:creationId xmlns:a16="http://schemas.microsoft.com/office/drawing/2014/main" id="{CB55B418-D88E-F181-4639-3E67A937AACB}"/>
+                </a:ext>
+              </a:extLst>
+            </p:cNvPr>
+            <p:cNvSpPr/>
+            <p:nvPr/>
+          </p:nvSpPr>
+          <p:spPr>
+            <a:xfrm>
+              <a:off x="0" y="0"/>
+              <a:ext cx="4145705" cy="2344280"/>
+            </a:xfrm>
+            <a:custGeom>
+              <a:avLst/>
+              <a:gdLst/>
+              <a:ahLst/>
+              <a:cxnLst/>
+              <a:rect l="l" t="t" r="r" b="b"/>
+              <a:pathLst>
+                <a:path w="4145705" h="2344280">
+                  <a:moveTo>
+                    <a:pt x="49184" y="0"/>
+                  </a:moveTo>
+                  <a:lnTo>
+                    <a:pt x="4096521" y="0"/>
+                  </a:lnTo>
+                  <a:cubicBezTo>
+                    <a:pt x="4109565" y="0"/>
+                    <a:pt x="4122076" y="5182"/>
+                    <a:pt x="4131299" y="14406"/>
+                  </a:cubicBezTo>
+                  <a:cubicBezTo>
+                    <a:pt x="4140523" y="23629"/>
+                    <a:pt x="4145705" y="36140"/>
+                    <a:pt x="4145705" y="49184"/>
+                  </a:cubicBezTo>
+                  <a:lnTo>
+                    <a:pt x="4145705" y="2295096"/>
+                  </a:lnTo>
+                  <a:cubicBezTo>
+                    <a:pt x="4145705" y="2308141"/>
+                    <a:pt x="4140523" y="2320651"/>
+                    <a:pt x="4131299" y="2329875"/>
+                  </a:cubicBezTo>
+                  <a:cubicBezTo>
+                    <a:pt x="4122076" y="2339099"/>
+                    <a:pt x="4109565" y="2344280"/>
+                    <a:pt x="4096521" y="2344280"/>
+                  </a:cubicBezTo>
+                  <a:lnTo>
+                    <a:pt x="49184" y="2344280"/>
+                  </a:lnTo>
+                  <a:cubicBezTo>
+                    <a:pt x="22020" y="2344280"/>
+                    <a:pt x="0" y="2322260"/>
+                    <a:pt x="0" y="2295096"/>
+                  </a:cubicBezTo>
+                  <a:lnTo>
+                    <a:pt x="0" y="49184"/>
+                  </a:lnTo>
+                  <a:cubicBezTo>
+                    <a:pt x="0" y="36140"/>
+                    <a:pt x="5182" y="23629"/>
+                    <a:pt x="14406" y="14406"/>
+                  </a:cubicBezTo>
+                  <a:cubicBezTo>
+                    <a:pt x="23629" y="5182"/>
+                    <a:pt x="36140" y="0"/>
+                    <a:pt x="49184" y="0"/>
+                  </a:cubicBezTo>
+                  <a:close/>
+                </a:path>
+              </a:pathLst>
+            </a:custGeom>
+            <a:solidFill>
+              <a:srgbClr val="BFDBFF"/>
+            </a:solidFill>
+            <a:ln cap="rnd">
+              <a:noFill/>
+              <a:prstDash val="solid"/>
+              <a:round/>
+            </a:ln>
+          </p:spPr>
+          <p:txBody>
+            <a:bodyPr/>
+            <a:lstStyle/>
+            <a:p>
+              <a:endParaRPr lang="pt-PT"/>
+            </a:p>
+          </p:txBody>
+        </p:sp>
+        <p:sp>
+          <p:nvSpPr>
+            <p:cNvPr id="10" name="TextBox 10">
+              <a:extLst>
+                <a:ext uri="{FF2B5EF4-FFF2-40B4-BE49-F238E27FC236}">
+                  <a16:creationId xmlns:a16="http://schemas.microsoft.com/office/drawing/2014/main" id="{FD7729C4-9DA5-382F-0D1D-CB9F3FF9B86D}"/>
+                </a:ext>
+              </a:extLst>
+            </p:cNvPr>
+            <p:cNvSpPr txBox="1"/>
+            <p:nvPr/>
+          </p:nvSpPr>
+          <p:spPr>
+            <a:xfrm>
+              <a:off x="0" y="-47625"/>
+              <a:ext cx="4145705" cy="2391905"/>
+            </a:xfrm>
+            <a:prstGeom prst="rect">
+              <a:avLst/>
+            </a:prstGeom>
+          </p:spPr>
+          <p:txBody>
+            <a:bodyPr lIns="50800" tIns="50800" rIns="50800" bIns="50800" rtlCol="0" anchor="ctr"/>
+            <a:lstStyle/>
+            <a:p>
+              <a:pPr marL="0" lvl="0" indent="0" algn="ctr">
+                <a:lnSpc>
+                  <a:spcPts val="2659"/>
+                </a:lnSpc>
+              </a:pPr>
+              <a:endParaRPr/>
+            </a:p>
+          </p:txBody>
+        </p:sp>
+      </p:grpSp>
+      <p:grpSp>
+        <p:nvGrpSpPr>
+          <p:cNvPr id="11" name="Group 11">
+            <a:extLst>
+              <a:ext uri="{FF2B5EF4-FFF2-40B4-BE49-F238E27FC236}">
+                <a16:creationId xmlns:a16="http://schemas.microsoft.com/office/drawing/2014/main" id="{EFEB5578-3F3A-A610-E906-508F054604BE}"/>
+              </a:ext>
+            </a:extLst>
+          </p:cNvPr>
+          <p:cNvGrpSpPr/>
+          <p:nvPr/>
+        </p:nvGrpSpPr>
+        <p:grpSpPr>
+          <a:xfrm>
+            <a:off x="1518575" y="1099664"/>
+            <a:ext cx="15250847" cy="8229600"/>
+            <a:chOff x="0" y="0"/>
+            <a:chExt cx="4016684" cy="2167467"/>
+          </a:xfrm>
+        </p:grpSpPr>
+        <p:sp>
+          <p:nvSpPr>
+            <p:cNvPr id="12" name="Freeform 12">
+              <a:extLst>
+                <a:ext uri="{FF2B5EF4-FFF2-40B4-BE49-F238E27FC236}">
+                  <a16:creationId xmlns:a16="http://schemas.microsoft.com/office/drawing/2014/main" id="{E39867AD-2BBC-C027-57A5-14CD66662134}"/>
+                </a:ext>
+              </a:extLst>
+            </p:cNvPr>
+            <p:cNvSpPr/>
+            <p:nvPr/>
+          </p:nvSpPr>
+          <p:spPr>
+            <a:xfrm>
+              <a:off x="0" y="0"/>
+              <a:ext cx="4016684" cy="2167467"/>
+            </a:xfrm>
+            <a:custGeom>
+              <a:avLst/>
+              <a:gdLst/>
+              <a:ahLst/>
+              <a:cxnLst/>
+              <a:rect l="l" t="t" r="r" b="b"/>
+              <a:pathLst>
+                <a:path w="4016684" h="2167467">
+                  <a:moveTo>
+                    <a:pt x="50764" y="0"/>
+                  </a:moveTo>
+                  <a:lnTo>
+                    <a:pt x="3965920" y="0"/>
+                  </a:lnTo>
+                  <a:cubicBezTo>
+                    <a:pt x="3993956" y="0"/>
+                    <a:pt x="4016684" y="22728"/>
+                    <a:pt x="4016684" y="50764"/>
+                  </a:cubicBezTo>
+                  <a:lnTo>
+                    <a:pt x="4016684" y="2116703"/>
+                  </a:lnTo>
+                  <a:cubicBezTo>
+                    <a:pt x="4016684" y="2144739"/>
+                    <a:pt x="3993956" y="2167467"/>
+                    <a:pt x="3965920" y="2167467"/>
+                  </a:cubicBezTo>
+                  <a:lnTo>
+                    <a:pt x="50764" y="2167467"/>
+                  </a:lnTo>
+                  <a:cubicBezTo>
+                    <a:pt x="37300" y="2167467"/>
+                    <a:pt x="24388" y="2162118"/>
+                    <a:pt x="14868" y="2152598"/>
+                  </a:cubicBezTo>
+                  <a:cubicBezTo>
+                    <a:pt x="5348" y="2143078"/>
+                    <a:pt x="0" y="2130166"/>
+                    <a:pt x="0" y="2116703"/>
+                  </a:cubicBezTo>
+                  <a:lnTo>
+                    <a:pt x="0" y="50764"/>
+                  </a:lnTo>
+                  <a:cubicBezTo>
+                    <a:pt x="0" y="22728"/>
+                    <a:pt x="22728" y="0"/>
+                    <a:pt x="50764" y="0"/>
+                  </a:cubicBezTo>
+                  <a:close/>
+                </a:path>
+              </a:pathLst>
+            </a:custGeom>
+            <a:solidFill>
+              <a:srgbClr val="FFFFFE"/>
+            </a:solidFill>
+            <a:ln cap="rnd">
+              <a:noFill/>
+              <a:prstDash val="solid"/>
+              <a:round/>
+            </a:ln>
+          </p:spPr>
+          <p:txBody>
+            <a:bodyPr/>
+            <a:lstStyle/>
+            <a:p>
+              <a:endParaRPr lang="pt-PT"/>
+            </a:p>
+          </p:txBody>
+        </p:sp>
+        <p:sp>
+          <p:nvSpPr>
+            <p:cNvPr id="13" name="TextBox 13">
+              <a:extLst>
+                <a:ext uri="{FF2B5EF4-FFF2-40B4-BE49-F238E27FC236}">
+                  <a16:creationId xmlns:a16="http://schemas.microsoft.com/office/drawing/2014/main" id="{3AB4E9FB-D086-81BD-ACD3-F6437FCA9053}"/>
+                </a:ext>
+              </a:extLst>
+            </p:cNvPr>
+            <p:cNvSpPr txBox="1"/>
+            <p:nvPr/>
+          </p:nvSpPr>
+          <p:spPr>
+            <a:xfrm>
+              <a:off x="0" y="-47625"/>
+              <a:ext cx="4016684" cy="2215092"/>
+            </a:xfrm>
+            <a:prstGeom prst="rect">
+              <a:avLst/>
+            </a:prstGeom>
+          </p:spPr>
+          <p:txBody>
+            <a:bodyPr lIns="50800" tIns="50800" rIns="50800" bIns="50800" rtlCol="0" anchor="ctr"/>
+            <a:lstStyle/>
+            <a:p>
+              <a:pPr marL="0" lvl="0" indent="0" algn="ctr">
+                <a:lnSpc>
+                  <a:spcPts val="2659"/>
+                </a:lnSpc>
+              </a:pPr>
+              <a:endParaRPr/>
+            </a:p>
+          </p:txBody>
+        </p:sp>
+      </p:grpSp>
+      <p:sp>
+        <p:nvSpPr>
+          <p:cNvPr id="14" name="TextBox 14">
+            <a:extLst>
+              <a:ext uri="{FF2B5EF4-FFF2-40B4-BE49-F238E27FC236}">
+                <a16:creationId xmlns:a16="http://schemas.microsoft.com/office/drawing/2014/main" id="{6A4CE654-EDDB-8824-C9C5-E50047542B8F}"/>
+              </a:ext>
+            </a:extLst>
+          </p:cNvPr>
+          <p:cNvSpPr txBox="1"/>
+          <p:nvPr/>
+        </p:nvSpPr>
+        <p:spPr>
+          <a:xfrm>
+            <a:off x="2257221" y="1792197"/>
+            <a:ext cx="13773557" cy="1116972"/>
+          </a:xfrm>
+          <a:prstGeom prst="rect">
+            <a:avLst/>
+          </a:prstGeom>
+        </p:spPr>
+        <p:txBody>
+          <a:bodyPr lIns="0" tIns="0" rIns="0" bIns="0" rtlCol="0" anchor="t">
+            <a:spAutoFit/>
+          </a:bodyPr>
+          <a:lstStyle/>
+          <a:p>
+            <a:pPr marL="0" lvl="0" indent="0" algn="ctr">
+              <a:lnSpc>
+                <a:spcPts val="8398"/>
+              </a:lnSpc>
+            </a:pPr>
+            <a:r>
+              <a:rPr lang="en-US" sz="9129" dirty="0" err="1">
+                <a:solidFill>
+                  <a:srgbClr val="000000"/>
+                </a:solidFill>
+                <a:latin typeface="Calibri (MS)"/>
+                <a:ea typeface="Calibri (MS)"/>
+                <a:cs typeface="Calibri (MS)"/>
+                <a:sym typeface="Calibri (MS)"/>
+              </a:rPr>
+              <a:t>Análise</a:t>
+            </a:r>
+            <a:r>
+              <a:rPr lang="en-US" sz="9129" dirty="0">
+                <a:solidFill>
+                  <a:srgbClr val="000000"/>
+                </a:solidFill>
+                <a:latin typeface="Calibri (MS)"/>
+                <a:ea typeface="Calibri (MS)"/>
+                <a:cs typeface="Calibri (MS)"/>
+                <a:sym typeface="Calibri (MS)"/>
+              </a:rPr>
+              <a:t> </a:t>
+            </a:r>
+            <a:r>
+              <a:rPr lang="en-US" sz="9129" dirty="0" err="1">
+                <a:solidFill>
+                  <a:srgbClr val="000000"/>
+                </a:solidFill>
+                <a:latin typeface="Calibri (MS)"/>
+                <a:ea typeface="Calibri (MS)"/>
+                <a:cs typeface="Calibri (MS)"/>
+                <a:sym typeface="Calibri (MS)"/>
+              </a:rPr>
+              <a:t>Estatística</a:t>
+            </a:r>
+            <a:endParaRPr lang="en-US" sz="9129" dirty="0">
+              <a:solidFill>
+                <a:srgbClr val="000000"/>
+              </a:solidFill>
+              <a:latin typeface="Calibri (MS)"/>
+              <a:ea typeface="Calibri (MS)"/>
+              <a:cs typeface="Calibri (MS)"/>
+              <a:sym typeface="Calibri (MS)"/>
+            </a:endParaRPr>
+          </a:p>
+        </p:txBody>
+      </p:sp>
+      <p:sp>
+        <p:nvSpPr>
+          <p:cNvPr id="15" name="TextBox 15">
+            <a:extLst>
+              <a:ext uri="{FF2B5EF4-FFF2-40B4-BE49-F238E27FC236}">
+                <a16:creationId xmlns:a16="http://schemas.microsoft.com/office/drawing/2014/main" id="{051B9642-EF55-6345-FE28-44B5ABBE63D8}"/>
+              </a:ext>
+            </a:extLst>
+          </p:cNvPr>
+          <p:cNvSpPr txBox="1"/>
+          <p:nvPr/>
+        </p:nvSpPr>
+        <p:spPr>
+          <a:xfrm>
+            <a:off x="2242425" y="3198422"/>
+            <a:ext cx="13773557" cy="6334235"/>
+          </a:xfrm>
+          <a:prstGeom prst="rect">
+            <a:avLst/>
+          </a:prstGeom>
+        </p:spPr>
+        <p:txBody>
+          <a:bodyPr lIns="0" tIns="0" rIns="0" bIns="0" rtlCol="0" anchor="t">
+            <a:spAutoFit/>
+          </a:bodyPr>
+          <a:lstStyle/>
+          <a:p>
+            <a:pPr>
+              <a:lnSpc>
+                <a:spcPct val="150000"/>
+              </a:lnSpc>
+            </a:pPr>
+            <a:r>
+              <a:rPr lang="pt-PT" sz="2800" b="1" dirty="0" err="1"/>
+              <a:t>Outcome</a:t>
+            </a:r>
+            <a:r>
+              <a:rPr lang="pt-PT" sz="2800" b="1" dirty="0"/>
+              <a:t> Primário: </a:t>
+            </a:r>
+            <a:r>
+              <a:rPr lang="pt-PT" sz="2800" dirty="0"/>
+              <a:t>Variação no score PHQ-9 (</a:t>
+            </a:r>
+            <a:r>
+              <a:rPr lang="pt-PT" sz="2800" dirty="0" err="1"/>
+              <a:t>Patient</a:t>
+            </a:r>
+            <a:r>
+              <a:rPr lang="pt-PT" sz="2800" dirty="0"/>
+              <a:t> </a:t>
+            </a:r>
+            <a:r>
+              <a:rPr lang="pt-PT" sz="2800" dirty="0" err="1"/>
+              <a:t>Health</a:t>
+            </a:r>
+            <a:r>
+              <a:rPr lang="pt-PT" sz="2800" dirty="0"/>
+              <a:t> Questionnaire-9) para avaliação da redução de sintomas depressivos.</a:t>
+            </a:r>
+          </a:p>
+          <a:p>
+            <a:pPr>
+              <a:lnSpc>
+                <a:spcPct val="150000"/>
+              </a:lnSpc>
+            </a:pPr>
+            <a:endParaRPr lang="pt-PT" sz="2800" dirty="0"/>
+          </a:p>
+          <a:p>
+            <a:pPr>
+              <a:lnSpc>
+                <a:spcPct val="150000"/>
+              </a:lnSpc>
+            </a:pPr>
+            <a:r>
+              <a:rPr lang="pt-PT" sz="2800" b="1" dirty="0" err="1"/>
+              <a:t>Outcomes</a:t>
+            </a:r>
+            <a:r>
+              <a:rPr lang="pt-PT" sz="2800" b="1" dirty="0"/>
+              <a:t> Secundários: </a:t>
+            </a:r>
+            <a:r>
+              <a:rPr lang="pt-PT" sz="2800" dirty="0"/>
+              <a:t>Adesão à intervenção digital e bem-estar geral medido pelo WHO-5 (</a:t>
+            </a:r>
+            <a:r>
+              <a:rPr lang="pt-PT" sz="2800" dirty="0" err="1"/>
+              <a:t>World</a:t>
+            </a:r>
+            <a:r>
+              <a:rPr lang="pt-PT" sz="2800" dirty="0"/>
+              <a:t> </a:t>
+            </a:r>
+            <a:r>
+              <a:rPr lang="pt-PT" sz="2800" dirty="0" err="1"/>
+              <a:t>Health</a:t>
+            </a:r>
+            <a:r>
+              <a:rPr lang="pt-PT" sz="2800" dirty="0"/>
+              <a:t> </a:t>
+            </a:r>
+            <a:r>
+              <a:rPr lang="pt-PT" sz="2800" dirty="0" err="1"/>
+              <a:t>Organization</a:t>
+            </a:r>
+            <a:r>
+              <a:rPr lang="pt-PT" sz="2800" dirty="0"/>
+              <a:t> </a:t>
+            </a:r>
+            <a:r>
+              <a:rPr lang="pt-PT" sz="2800" dirty="0" err="1"/>
+              <a:t>Well-Being</a:t>
+            </a:r>
+            <a:r>
+              <a:rPr lang="pt-PT" sz="2800" dirty="0"/>
+              <a:t> Index).</a:t>
+            </a:r>
+          </a:p>
+          <a:p>
+            <a:pPr>
+              <a:lnSpc>
+                <a:spcPct val="150000"/>
+              </a:lnSpc>
+            </a:pPr>
+            <a:br>
+              <a:rPr lang="pt-PT" sz="2800" dirty="0"/>
+            </a:br>
+            <a:r>
+              <a:rPr lang="pt-PT" sz="2800" b="1" dirty="0"/>
+              <a:t>Usabilidade: </a:t>
+            </a:r>
+            <a:r>
+              <a:rPr lang="pt-PT" sz="2800" dirty="0"/>
+              <a:t>Avaliação através do </a:t>
+            </a:r>
+            <a:r>
+              <a:rPr lang="pt-PT" sz="2800" dirty="0" err="1"/>
+              <a:t>System</a:t>
+            </a:r>
+            <a:r>
+              <a:rPr lang="pt-PT" sz="2800" dirty="0"/>
+              <a:t> </a:t>
+            </a:r>
+            <a:r>
+              <a:rPr lang="pt-PT" sz="2800" dirty="0" err="1"/>
+              <a:t>Usability</a:t>
+            </a:r>
+            <a:r>
+              <a:rPr lang="pt-PT" sz="2800" dirty="0"/>
+              <a:t> </a:t>
+            </a:r>
+            <a:r>
+              <a:rPr lang="pt-PT" sz="2800" dirty="0" err="1"/>
+              <a:t>Scale</a:t>
+            </a:r>
+            <a:r>
+              <a:rPr lang="pt-PT" sz="2800" dirty="0"/>
+              <a:t> (SUS) para medir a experiência do utilizador com a aplicação </a:t>
+            </a:r>
+            <a:r>
+              <a:rPr lang="pt-PT" sz="2800" dirty="0" err="1"/>
+              <a:t>MindMove</a:t>
+            </a:r>
+            <a:r>
+              <a:rPr lang="pt-PT" sz="2800" dirty="0"/>
+              <a:t>.</a:t>
+            </a:r>
+            <a:br>
+              <a:rPr lang="pt-PT" sz="2800" dirty="0"/>
+            </a:br>
+            <a:br>
+              <a:rPr lang="pt-PT" sz="2800" dirty="0"/>
+            </a:br>
+            <a:endParaRPr lang="en-US" sz="2499" dirty="0">
+              <a:solidFill>
+                <a:srgbClr val="000000"/>
+              </a:solidFill>
+              <a:latin typeface="Calibri (MS)"/>
+              <a:ea typeface="Calibri (MS)"/>
+              <a:cs typeface="Calibri (MS)"/>
+              <a:sym typeface="Calibri (MS)"/>
+            </a:endParaRPr>
+          </a:p>
+        </p:txBody>
+      </p:sp>
+    </p:spTree>
+    <p:extLst>
+      <p:ext uri="{BB962C8B-B14F-4D97-AF65-F5344CB8AC3E}">
+        <p14:creationId xmlns:p14="http://schemas.microsoft.com/office/powerpoint/2010/main" val="197940328"/>
+      </p:ext>
+    </p:extLst>
   </p:cSld>
   <p:clrMapOvr>
     <a:masterClrMapping/>

--- a/MindMove.pptx
+++ b/MindMove.pptx
@@ -150,7 +150,7 @@
 <file path=ppt/revisionInfo.xml><?xml version="1.0" encoding="utf-8"?>
 <p1510:revInfo xmlns:a="http://schemas.openxmlformats.org/drawingml/2006/main" xmlns:r="http://schemas.openxmlformats.org/officeDocument/2006/relationships" xmlns:p1510="http://schemas.microsoft.com/office/powerpoint/2015/10/main">
   <p1510:revLst>
-    <p1510:client id="{A7A73963-C97B-4C0D-B22B-7BE09293C9AC}" v="8" dt="2026-04-30T12:41:29.243"/>
+    <p1510:client id="{A7A73963-C97B-4C0D-B22B-7BE09293C9AC}" v="28" dt="2026-04-30T13:07:36.090"/>
   </p1510:revLst>
 </p1510:revInfo>
 </file>
@@ -160,10 +160,244 @@
   <pc:docChgLst>
     <pc:chgData name="Gabriela Carneiro" userId="038eca41cd8564ab" providerId="LiveId" clId="{D03F746D-BE5D-4789-93E6-42C6E52F57A2}"/>
     <pc:docChg chg="undo custSel addSld delSld modSld">
-      <pc:chgData name="Gabriela Carneiro" userId="038eca41cd8564ab" providerId="LiveId" clId="{D03F746D-BE5D-4789-93E6-42C6E52F57A2}" dt="2026-04-30T12:42:29.254" v="160" actId="1076"/>
+      <pc:chgData name="Gabriela Carneiro" userId="038eca41cd8564ab" providerId="LiveId" clId="{D03F746D-BE5D-4789-93E6-42C6E52F57A2}" dt="2026-04-30T13:11:08.630" v="545" actId="20577"/>
       <pc:docMkLst>
         <pc:docMk/>
       </pc:docMkLst>
+      <pc:sldChg chg="modSp mod">
+        <pc:chgData name="Gabriela Carneiro" userId="038eca41cd8564ab" providerId="LiveId" clId="{D03F746D-BE5D-4789-93E6-42C6E52F57A2}" dt="2026-04-30T13:11:08.630" v="545" actId="20577"/>
+        <pc:sldMkLst>
+          <pc:docMk/>
+          <pc:sldMk cId="0" sldId="257"/>
+        </pc:sldMkLst>
+        <pc:spChg chg="mod">
+          <ac:chgData name="Gabriela Carneiro" userId="038eca41cd8564ab" providerId="LiveId" clId="{D03F746D-BE5D-4789-93E6-42C6E52F57A2}" dt="2026-04-30T13:11:08.630" v="545" actId="20577"/>
+          <ac:spMkLst>
+            <pc:docMk/>
+            <pc:sldMk cId="0" sldId="257"/>
+            <ac:spMk id="14" creationId="{00000000-0000-0000-0000-000000000000}"/>
+          </ac:spMkLst>
+        </pc:spChg>
+        <pc:grpChg chg="mod">
+          <ac:chgData name="Gabriela Carneiro" userId="038eca41cd8564ab" providerId="LiveId" clId="{D03F746D-BE5D-4789-93E6-42C6E52F57A2}" dt="2026-04-30T13:10:29.717" v="542" actId="1076"/>
+          <ac:grpSpMkLst>
+            <pc:docMk/>
+            <pc:sldMk cId="0" sldId="257"/>
+            <ac:grpSpMk id="11" creationId="{00000000-0000-0000-0000-000000000000}"/>
+          </ac:grpSpMkLst>
+        </pc:grpChg>
+      </pc:sldChg>
+      <pc:sldChg chg="modSp mod">
+        <pc:chgData name="Gabriela Carneiro" userId="038eca41cd8564ab" providerId="LiveId" clId="{D03F746D-BE5D-4789-93E6-42C6E52F57A2}" dt="2026-04-30T13:09:56.808" v="536" actId="2710"/>
+        <pc:sldMkLst>
+          <pc:docMk/>
+          <pc:sldMk cId="0" sldId="258"/>
+        </pc:sldMkLst>
+        <pc:spChg chg="mod">
+          <ac:chgData name="Gabriela Carneiro" userId="038eca41cd8564ab" providerId="LiveId" clId="{D03F746D-BE5D-4789-93E6-42C6E52F57A2}" dt="2026-04-30T13:09:51.337" v="535" actId="2710"/>
+          <ac:spMkLst>
+            <pc:docMk/>
+            <pc:sldMk cId="0" sldId="258"/>
+            <ac:spMk id="17" creationId="{00000000-0000-0000-0000-000000000000}"/>
+          </ac:spMkLst>
+        </pc:spChg>
+        <pc:spChg chg="mod">
+          <ac:chgData name="Gabriela Carneiro" userId="038eca41cd8564ab" providerId="LiveId" clId="{D03F746D-BE5D-4789-93E6-42C6E52F57A2}" dt="2026-04-30T13:09:56.808" v="536" actId="2710"/>
+          <ac:spMkLst>
+            <pc:docMk/>
+            <pc:sldMk cId="0" sldId="258"/>
+            <ac:spMk id="24" creationId="{00000000-0000-0000-0000-000000000000}"/>
+          </ac:spMkLst>
+        </pc:spChg>
+      </pc:sldChg>
+      <pc:sldChg chg="modSp mod">
+        <pc:chgData name="Gabriela Carneiro" userId="038eca41cd8564ab" providerId="LiveId" clId="{D03F746D-BE5D-4789-93E6-42C6E52F57A2}" dt="2026-04-30T13:09:44.947" v="534" actId="2710"/>
+        <pc:sldMkLst>
+          <pc:docMk/>
+          <pc:sldMk cId="0" sldId="259"/>
+        </pc:sldMkLst>
+        <pc:spChg chg="mod">
+          <ac:chgData name="Gabriela Carneiro" userId="038eca41cd8564ab" providerId="LiveId" clId="{D03F746D-BE5D-4789-93E6-42C6E52F57A2}" dt="2026-04-30T13:09:44.947" v="534" actId="2710"/>
+          <ac:spMkLst>
+            <pc:docMk/>
+            <pc:sldMk cId="0" sldId="259"/>
+            <ac:spMk id="14" creationId="{00000000-0000-0000-0000-000000000000}"/>
+          </ac:spMkLst>
+        </pc:spChg>
+      </pc:sldChg>
+      <pc:sldChg chg="addSp delSp modSp mod">
+        <pc:chgData name="Gabriela Carneiro" userId="038eca41cd8564ab" providerId="LiveId" clId="{D03F746D-BE5D-4789-93E6-42C6E52F57A2}" dt="2026-04-30T13:04:58.690" v="504" actId="2711"/>
+        <pc:sldMkLst>
+          <pc:docMk/>
+          <pc:sldMk cId="0" sldId="260"/>
+        </pc:sldMkLst>
+        <pc:spChg chg="mod">
+          <ac:chgData name="Gabriela Carneiro" userId="038eca41cd8564ab" providerId="LiveId" clId="{D03F746D-BE5D-4789-93E6-42C6E52F57A2}" dt="2026-04-30T13:03:43.862" v="493" actId="2711"/>
+          <ac:spMkLst>
+            <pc:docMk/>
+            <pc:sldMk cId="0" sldId="260"/>
+            <ac:spMk id="34" creationId="{00000000-0000-0000-0000-000000000000}"/>
+          </ac:spMkLst>
+        </pc:spChg>
+        <pc:spChg chg="mod">
+          <ac:chgData name="Gabriela Carneiro" userId="038eca41cd8564ab" providerId="LiveId" clId="{D03F746D-BE5D-4789-93E6-42C6E52F57A2}" dt="2026-04-30T13:03:49.277" v="494" actId="2711"/>
+          <ac:spMkLst>
+            <pc:docMk/>
+            <pc:sldMk cId="0" sldId="260"/>
+            <ac:spMk id="35" creationId="{00000000-0000-0000-0000-000000000000}"/>
+          </ac:spMkLst>
+        </pc:spChg>
+        <pc:spChg chg="mod">
+          <ac:chgData name="Gabriela Carneiro" userId="038eca41cd8564ab" providerId="LiveId" clId="{D03F746D-BE5D-4789-93E6-42C6E52F57A2}" dt="2026-04-30T13:03:54.036" v="495" actId="2711"/>
+          <ac:spMkLst>
+            <pc:docMk/>
+            <pc:sldMk cId="0" sldId="260"/>
+            <ac:spMk id="36" creationId="{00000000-0000-0000-0000-000000000000}"/>
+          </ac:spMkLst>
+        </pc:spChg>
+        <pc:spChg chg="del mod">
+          <ac:chgData name="Gabriela Carneiro" userId="038eca41cd8564ab" providerId="LiveId" clId="{D03F746D-BE5D-4789-93E6-42C6E52F57A2}" dt="2026-04-30T12:51:40.125" v="245" actId="478"/>
+          <ac:spMkLst>
+            <pc:docMk/>
+            <pc:sldMk cId="0" sldId="260"/>
+            <ac:spMk id="37" creationId="{00000000-0000-0000-0000-000000000000}"/>
+          </ac:spMkLst>
+        </pc:spChg>
+        <pc:spChg chg="del mod">
+          <ac:chgData name="Gabriela Carneiro" userId="038eca41cd8564ab" providerId="LiveId" clId="{D03F746D-BE5D-4789-93E6-42C6E52F57A2}" dt="2026-04-30T12:51:44.360" v="247" actId="478"/>
+          <ac:spMkLst>
+            <pc:docMk/>
+            <pc:sldMk cId="0" sldId="260"/>
+            <ac:spMk id="38" creationId="{00000000-0000-0000-0000-000000000000}"/>
+          </ac:spMkLst>
+        </pc:spChg>
+        <pc:spChg chg="del mod">
+          <ac:chgData name="Gabriela Carneiro" userId="038eca41cd8564ab" providerId="LiveId" clId="{D03F746D-BE5D-4789-93E6-42C6E52F57A2}" dt="2026-04-30T12:51:46.779" v="249" actId="478"/>
+          <ac:spMkLst>
+            <pc:docMk/>
+            <pc:sldMk cId="0" sldId="260"/>
+            <ac:spMk id="39" creationId="{00000000-0000-0000-0000-000000000000}"/>
+          </ac:spMkLst>
+        </pc:spChg>
+        <pc:spChg chg="add mod">
+          <ac:chgData name="Gabriela Carneiro" userId="038eca41cd8564ab" providerId="LiveId" clId="{D03F746D-BE5D-4789-93E6-42C6E52F57A2}" dt="2026-04-30T13:04:11.036" v="498" actId="2711"/>
+          <ac:spMkLst>
+            <pc:docMk/>
+            <pc:sldMk cId="0" sldId="260"/>
+            <ac:spMk id="41" creationId="{5A448EE5-1115-BAFA-55D9-05FF2B60D281}"/>
+          </ac:spMkLst>
+        </pc:spChg>
+        <pc:spChg chg="add mod">
+          <ac:chgData name="Gabriela Carneiro" userId="038eca41cd8564ab" providerId="LiveId" clId="{D03F746D-BE5D-4789-93E6-42C6E52F57A2}" dt="2026-04-30T13:04:04.046" v="497" actId="2711"/>
+          <ac:spMkLst>
+            <pc:docMk/>
+            <pc:sldMk cId="0" sldId="260"/>
+            <ac:spMk id="42" creationId="{C75C0113-4FE2-B7A2-65DA-5CE5513D10EC}"/>
+          </ac:spMkLst>
+        </pc:spChg>
+        <pc:spChg chg="add mod">
+          <ac:chgData name="Gabriela Carneiro" userId="038eca41cd8564ab" providerId="LiveId" clId="{D03F746D-BE5D-4789-93E6-42C6E52F57A2}" dt="2026-04-30T13:03:59.280" v="496" actId="2711"/>
+          <ac:spMkLst>
+            <pc:docMk/>
+            <pc:sldMk cId="0" sldId="260"/>
+            <ac:spMk id="43" creationId="{DD7B652D-E054-35DE-4076-53C8FE097115}"/>
+          </ac:spMkLst>
+        </pc:spChg>
+        <pc:spChg chg="add mod">
+          <ac:chgData name="Gabriela Carneiro" userId="038eca41cd8564ab" providerId="LiveId" clId="{D03F746D-BE5D-4789-93E6-42C6E52F57A2}" dt="2026-04-30T13:04:33.604" v="500" actId="2711"/>
+          <ac:spMkLst>
+            <pc:docMk/>
+            <pc:sldMk cId="0" sldId="260"/>
+            <ac:spMk id="45" creationId="{B021C95D-9FEF-129B-6BFE-7DEE5A03AFA9}"/>
+          </ac:spMkLst>
+        </pc:spChg>
+        <pc:spChg chg="add mod">
+          <ac:chgData name="Gabriela Carneiro" userId="038eca41cd8564ab" providerId="LiveId" clId="{D03F746D-BE5D-4789-93E6-42C6E52F57A2}" dt="2026-04-30T13:04:28.042" v="499" actId="2711"/>
+          <ac:spMkLst>
+            <pc:docMk/>
+            <pc:sldMk cId="0" sldId="260"/>
+            <ac:spMk id="46" creationId="{B012E857-08EE-77AF-9525-05B6E3D2E920}"/>
+          </ac:spMkLst>
+        </pc:spChg>
+        <pc:spChg chg="add mod">
+          <ac:chgData name="Gabriela Carneiro" userId="038eca41cd8564ab" providerId="LiveId" clId="{D03F746D-BE5D-4789-93E6-42C6E52F57A2}" dt="2026-04-30T13:04:39.366" v="501" actId="2711"/>
+          <ac:spMkLst>
+            <pc:docMk/>
+            <pc:sldMk cId="0" sldId="260"/>
+            <ac:spMk id="47" creationId="{F1E2E988-4F79-4F99-CFB6-CF951B5D559B}"/>
+          </ac:spMkLst>
+        </pc:spChg>
+        <pc:spChg chg="add mod">
+          <ac:chgData name="Gabriela Carneiro" userId="038eca41cd8564ab" providerId="LiveId" clId="{D03F746D-BE5D-4789-93E6-42C6E52F57A2}" dt="2026-04-30T13:04:46.791" v="502" actId="2711"/>
+          <ac:spMkLst>
+            <pc:docMk/>
+            <pc:sldMk cId="0" sldId="260"/>
+            <ac:spMk id="48" creationId="{67EFB66F-12CB-213E-0E9A-27E9F17DC130}"/>
+          </ac:spMkLst>
+        </pc:spChg>
+        <pc:spChg chg="add mod">
+          <ac:chgData name="Gabriela Carneiro" userId="038eca41cd8564ab" providerId="LiveId" clId="{D03F746D-BE5D-4789-93E6-42C6E52F57A2}" dt="2026-04-30T13:04:52.469" v="503" actId="2711"/>
+          <ac:spMkLst>
+            <pc:docMk/>
+            <pc:sldMk cId="0" sldId="260"/>
+            <ac:spMk id="49" creationId="{B72C2D19-59F3-56EB-2797-2A6D2BDB7C7F}"/>
+          </ac:spMkLst>
+        </pc:spChg>
+        <pc:spChg chg="add mod">
+          <ac:chgData name="Gabriela Carneiro" userId="038eca41cd8564ab" providerId="LiveId" clId="{D03F746D-BE5D-4789-93E6-42C6E52F57A2}" dt="2026-04-30T13:04:58.690" v="504" actId="2711"/>
+          <ac:spMkLst>
+            <pc:docMk/>
+            <pc:sldMk cId="0" sldId="260"/>
+            <ac:spMk id="50" creationId="{82244D29-6D4C-C88A-6C0F-BCE9730474E5}"/>
+          </ac:spMkLst>
+        </pc:spChg>
+        <pc:grpChg chg="mod">
+          <ac:chgData name="Gabriela Carneiro" userId="038eca41cd8564ab" providerId="LiveId" clId="{D03F746D-BE5D-4789-93E6-42C6E52F57A2}" dt="2026-04-30T12:59:36.398" v="479" actId="1037"/>
+          <ac:grpSpMkLst>
+            <pc:docMk/>
+            <pc:sldMk cId="0" sldId="260"/>
+            <ac:grpSpMk id="11" creationId="{00000000-0000-0000-0000-000000000000}"/>
+          </ac:grpSpMkLst>
+        </pc:grpChg>
+      </pc:sldChg>
+      <pc:sldChg chg="modSp mod">
+        <pc:chgData name="Gabriela Carneiro" userId="038eca41cd8564ab" providerId="LiveId" clId="{D03F746D-BE5D-4789-93E6-42C6E52F57A2}" dt="2026-04-30T13:09:35.374" v="533" actId="1076"/>
+        <pc:sldMkLst>
+          <pc:docMk/>
+          <pc:sldMk cId="0" sldId="261"/>
+        </pc:sldMkLst>
+        <pc:spChg chg="mod">
+          <ac:chgData name="Gabriela Carneiro" userId="038eca41cd8564ab" providerId="LiveId" clId="{D03F746D-BE5D-4789-93E6-42C6E52F57A2}" dt="2026-04-30T13:09:24.069" v="531" actId="1076"/>
+          <ac:spMkLst>
+            <pc:docMk/>
+            <pc:sldMk cId="0" sldId="261"/>
+            <ac:spMk id="15" creationId="{00000000-0000-0000-0000-000000000000}"/>
+          </ac:spMkLst>
+        </pc:spChg>
+        <pc:spChg chg="mod">
+          <ac:chgData name="Gabriela Carneiro" userId="038eca41cd8564ab" providerId="LiveId" clId="{D03F746D-BE5D-4789-93E6-42C6E52F57A2}" dt="2026-04-30T13:09:35.374" v="533" actId="1076"/>
+          <ac:spMkLst>
+            <pc:docMk/>
+            <pc:sldMk cId="0" sldId="261"/>
+            <ac:spMk id="16" creationId="{00000000-0000-0000-0000-000000000000}"/>
+          </ac:spMkLst>
+        </pc:spChg>
+      </pc:sldChg>
+      <pc:sldChg chg="modSp mod">
+        <pc:chgData name="Gabriela Carneiro" userId="038eca41cd8564ab" providerId="LiveId" clId="{D03F746D-BE5D-4789-93E6-42C6E52F57A2}" dt="2026-04-30T13:09:03.746" v="528" actId="2710"/>
+        <pc:sldMkLst>
+          <pc:docMk/>
+          <pc:sldMk cId="0" sldId="262"/>
+        </pc:sldMkLst>
+        <pc:spChg chg="mod">
+          <ac:chgData name="Gabriela Carneiro" userId="038eca41cd8564ab" providerId="LiveId" clId="{D03F746D-BE5D-4789-93E6-42C6E52F57A2}" dt="2026-04-30T13:09:03.746" v="528" actId="2710"/>
+          <ac:spMkLst>
+            <pc:docMk/>
+            <pc:sldMk cId="0" sldId="262"/>
+            <ac:spMk id="15" creationId="{00000000-0000-0000-0000-000000000000}"/>
+          </ac:spMkLst>
+        </pc:spChg>
+      </pc:sldChg>
       <pc:sldChg chg="new del">
         <pc:chgData name="Gabriela Carneiro" userId="038eca41cd8564ab" providerId="LiveId" clId="{D03F746D-BE5D-4789-93E6-42C6E52F57A2}" dt="2026-04-30T12:29:22.640" v="1" actId="2696"/>
         <pc:sldMkLst>
@@ -172,7 +406,7 @@
         </pc:sldMkLst>
       </pc:sldChg>
       <pc:sldChg chg="modSp add mod">
-        <pc:chgData name="Gabriela Carneiro" userId="038eca41cd8564ab" providerId="LiveId" clId="{D03F746D-BE5D-4789-93E6-42C6E52F57A2}" dt="2026-04-30T12:35:22.742" v="42" actId="20577"/>
+        <pc:chgData name="Gabriela Carneiro" userId="038eca41cd8564ab" providerId="LiveId" clId="{D03F746D-BE5D-4789-93E6-42C6E52F57A2}" dt="2026-04-30T13:08:55.817" v="527" actId="255"/>
         <pc:sldMkLst>
           <pc:docMk/>
           <pc:sldMk cId="4017652531" sldId="264"/>
@@ -186,7 +420,7 @@
           </ac:spMkLst>
         </pc:spChg>
         <pc:spChg chg="mod">
-          <ac:chgData name="Gabriela Carneiro" userId="038eca41cd8564ab" providerId="LiveId" clId="{D03F746D-BE5D-4789-93E6-42C6E52F57A2}" dt="2026-04-30T12:35:22.742" v="42" actId="20577"/>
+          <ac:chgData name="Gabriela Carneiro" userId="038eca41cd8564ab" providerId="LiveId" clId="{D03F746D-BE5D-4789-93E6-42C6E52F57A2}" dt="2026-04-30T13:08:55.817" v="527" actId="255"/>
           <ac:spMkLst>
             <pc:docMk/>
             <pc:sldMk cId="4017652531" sldId="264"/>
@@ -203,7 +437,7 @@
         </pc:grpChg>
       </pc:sldChg>
       <pc:sldChg chg="modSp add mod">
-        <pc:chgData name="Gabriela Carneiro" userId="038eca41cd8564ab" providerId="LiveId" clId="{D03F746D-BE5D-4789-93E6-42C6E52F57A2}" dt="2026-04-30T12:37:23.004" v="72" actId="20577"/>
+        <pc:chgData name="Gabriela Carneiro" userId="038eca41cd8564ab" providerId="LiveId" clId="{D03F746D-BE5D-4789-93E6-42C6E52F57A2}" dt="2026-04-30T13:08:48.487" v="526" actId="2710"/>
         <pc:sldMkLst>
           <pc:docMk/>
           <pc:sldMk cId="197940328" sldId="265"/>
@@ -216,6 +450,14 @@
             <ac:spMk id="14" creationId="{6A4CE654-EDDB-8824-C9C5-E50047542B8F}"/>
           </ac:spMkLst>
         </pc:spChg>
+        <pc:spChg chg="mod">
+          <ac:chgData name="Gabriela Carneiro" userId="038eca41cd8564ab" providerId="LiveId" clId="{D03F746D-BE5D-4789-93E6-42C6E52F57A2}" dt="2026-04-30T13:08:48.487" v="526" actId="2710"/>
+          <ac:spMkLst>
+            <pc:docMk/>
+            <pc:sldMk cId="197940328" sldId="265"/>
+            <ac:spMk id="15" creationId="{051B9642-EF55-6345-FE28-44B5ABBE63D8}"/>
+          </ac:spMkLst>
+        </pc:spChg>
         <pc:grpChg chg="mod">
           <ac:chgData name="Gabriela Carneiro" userId="038eca41cd8564ab" providerId="LiveId" clId="{D03F746D-BE5D-4789-93E6-42C6E52F57A2}" dt="2026-04-30T12:37:08.308" v="45" actId="1076"/>
           <ac:grpSpMkLst>
@@ -226,7 +468,7 @@
         </pc:grpChg>
       </pc:sldChg>
       <pc:sldChg chg="modSp add mod">
-        <pc:chgData name="Gabriela Carneiro" userId="038eca41cd8564ab" providerId="LiveId" clId="{D03F746D-BE5D-4789-93E6-42C6E52F57A2}" dt="2026-04-30T12:42:29.254" v="160" actId="1076"/>
+        <pc:chgData name="Gabriela Carneiro" userId="038eca41cd8564ab" providerId="LiveId" clId="{D03F746D-BE5D-4789-93E6-42C6E52F57A2}" dt="2026-04-30T13:08:36.645" v="525" actId="255"/>
         <pc:sldMkLst>
           <pc:docMk/>
           <pc:sldMk cId="4099099592" sldId="266"/>
@@ -240,7 +482,7 @@
           </ac:spMkLst>
         </pc:spChg>
         <pc:spChg chg="mod">
-          <ac:chgData name="Gabriela Carneiro" userId="038eca41cd8564ab" providerId="LiveId" clId="{D03F746D-BE5D-4789-93E6-42C6E52F57A2}" dt="2026-04-30T12:42:11.454" v="157" actId="1076"/>
+          <ac:chgData name="Gabriela Carneiro" userId="038eca41cd8564ab" providerId="LiveId" clId="{D03F746D-BE5D-4789-93E6-42C6E52F57A2}" dt="2026-04-30T13:08:36.645" v="525" actId="255"/>
           <ac:spMkLst>
             <pc:docMk/>
             <pc:sldMk cId="4099099592" sldId="266"/>
@@ -4711,7 +4953,7 @@
         <p:spPr>
           <a:xfrm>
             <a:off x="2255741" y="4479114"/>
-            <a:ext cx="13773557" cy="3164841"/>
+            <a:ext cx="13773557" cy="2825774"/>
           </a:xfrm>
           <a:prstGeom prst="rect">
             <a:avLst/>
@@ -4729,7 +4971,10 @@
               </a:lnSpc>
             </a:pPr>
             <a:r>
-              <a:rPr lang="pt-PT" sz="2800" u="sng" dirty="0"/>
+              <a:rPr lang="pt-PT" sz="2500" u="sng" dirty="0">
+                <a:latin typeface="Calibri (MS)" panose="020B0604020202020204" charset="0"/>
+                <a:cs typeface="Calibri (MS)" panose="020B0604020202020204" charset="0"/>
+              </a:rPr>
               <a:t>Garantida através de:</a:t>
             </a:r>
           </a:p>
@@ -4742,7 +4987,10 @@
               <a:buChar char="•"/>
             </a:pPr>
             <a:r>
-              <a:rPr lang="pt-PT" sz="2800" dirty="0"/>
+              <a:rPr lang="pt-PT" sz="2500" dirty="0">
+                <a:latin typeface="Calibri (MS)" panose="020B0604020202020204" charset="0"/>
+                <a:cs typeface="Calibri (MS)" panose="020B0604020202020204" charset="0"/>
+              </a:rPr>
               <a:t>Aprovação ética pela Comissão de Ética da FMUP. </a:t>
             </a:r>
           </a:p>
@@ -4755,23 +5003,38 @@
               <a:buChar char="•"/>
             </a:pPr>
             <a:r>
-              <a:rPr lang="pt-PT" sz="2800" dirty="0"/>
+              <a:rPr lang="pt-PT" sz="2500" dirty="0">
+                <a:latin typeface="Calibri (MS)" panose="020B0604020202020204" charset="0"/>
+                <a:cs typeface="Calibri (MS)" panose="020B0604020202020204" charset="0"/>
+              </a:rPr>
               <a:t>Consentimento informado digital obtido via </a:t>
             </a:r>
             <a:r>
-              <a:rPr lang="pt-PT" sz="2800" dirty="0" err="1"/>
+              <a:rPr lang="pt-PT" sz="2500" dirty="0" err="1">
+                <a:latin typeface="Calibri (MS)" panose="020B0604020202020204" charset="0"/>
+                <a:cs typeface="Calibri (MS)" panose="020B0604020202020204" charset="0"/>
+              </a:rPr>
               <a:t>landing</a:t>
             </a:r>
             <a:r>
-              <a:rPr lang="pt-PT" sz="2800" dirty="0"/>
+              <a:rPr lang="pt-PT" sz="2500" dirty="0">
+                <a:latin typeface="Calibri (MS)" panose="020B0604020202020204" charset="0"/>
+                <a:cs typeface="Calibri (MS)" panose="020B0604020202020204" charset="0"/>
+              </a:rPr>
               <a:t> </a:t>
             </a:r>
             <a:r>
-              <a:rPr lang="pt-PT" sz="2800" dirty="0" err="1"/>
+              <a:rPr lang="pt-PT" sz="2500" dirty="0" err="1">
+                <a:latin typeface="Calibri (MS)" panose="020B0604020202020204" charset="0"/>
+                <a:cs typeface="Calibri (MS)" panose="020B0604020202020204" charset="0"/>
+              </a:rPr>
               <a:t>page</a:t>
             </a:r>
             <a:r>
-              <a:rPr lang="pt-PT" sz="2800" dirty="0"/>
+              <a:rPr lang="pt-PT" sz="2500" dirty="0">
+                <a:latin typeface="Calibri (MS)" panose="020B0604020202020204" charset="0"/>
+                <a:cs typeface="Calibri (MS)" panose="020B0604020202020204" charset="0"/>
+              </a:rPr>
               <a:t> antes da participação no estudo.</a:t>
             </a:r>
           </a:p>
@@ -4784,7 +5047,10 @@
               <a:buChar char="•"/>
             </a:pPr>
             <a:r>
-              <a:rPr lang="pt-PT" sz="2800" dirty="0"/>
+              <a:rPr lang="pt-PT" sz="2500" dirty="0">
+                <a:latin typeface="Calibri (MS)" panose="020B0604020202020204" charset="0"/>
+                <a:cs typeface="Calibri (MS)" panose="020B0604020202020204" charset="0"/>
+              </a:rPr>
               <a:t>Proteção de dados em conformidade com o RGPD. </a:t>
             </a:r>
           </a:p>
@@ -4797,23 +5063,38 @@
               <a:buChar char="•"/>
             </a:pPr>
             <a:r>
-              <a:rPr lang="pt-PT" sz="2800" dirty="0"/>
+              <a:rPr lang="pt-PT" sz="2500" dirty="0">
+                <a:latin typeface="Calibri (MS)" panose="020B0604020202020204" charset="0"/>
+                <a:cs typeface="Calibri (MS)" panose="020B0604020202020204" charset="0"/>
+              </a:rPr>
               <a:t>Dados anonimizados e armazenados em servidores seguros com encriptação </a:t>
             </a:r>
             <a:r>
-              <a:rPr lang="pt-PT" sz="2800" dirty="0" err="1"/>
+              <a:rPr lang="pt-PT" sz="2500" dirty="0" err="1">
+                <a:latin typeface="Calibri (MS)" panose="020B0604020202020204" charset="0"/>
+                <a:cs typeface="Calibri (MS)" panose="020B0604020202020204" charset="0"/>
+              </a:rPr>
               <a:t>end</a:t>
             </a:r>
             <a:r>
-              <a:rPr lang="pt-PT" sz="2800" dirty="0"/>
+              <a:rPr lang="pt-PT" sz="2500" dirty="0">
+                <a:latin typeface="Calibri (MS)" panose="020B0604020202020204" charset="0"/>
+                <a:cs typeface="Calibri (MS)" panose="020B0604020202020204" charset="0"/>
+              </a:rPr>
               <a:t>-to-</a:t>
             </a:r>
             <a:r>
-              <a:rPr lang="pt-PT" sz="2800" dirty="0" err="1"/>
+              <a:rPr lang="pt-PT" sz="2500" dirty="0" err="1">
+                <a:latin typeface="Calibri (MS)" panose="020B0604020202020204" charset="0"/>
+                <a:cs typeface="Calibri (MS)" panose="020B0604020202020204" charset="0"/>
+              </a:rPr>
               <a:t>end</a:t>
             </a:r>
             <a:r>
-              <a:rPr lang="pt-PT" sz="2800" dirty="0"/>
+              <a:rPr lang="pt-PT" sz="2500" dirty="0">
+                <a:latin typeface="Calibri (MS)" panose="020B0604020202020204" charset="0"/>
+                <a:cs typeface="Calibri (MS)" panose="020B0604020202020204" charset="0"/>
+              </a:rPr>
               <a:t>.</a:t>
             </a:r>
           </a:p>
@@ -5901,8 +6182,8 @@
         </p:nvSpPr>
         <p:spPr>
           <a:xfrm>
-            <a:off x="2163650" y="3175476"/>
-            <a:ext cx="13960701" cy="6242669"/>
+            <a:off x="2163648" y="2994984"/>
+            <a:ext cx="13960701" cy="5942011"/>
           </a:xfrm>
           <a:prstGeom prst="rect">
             <a:avLst/>
@@ -5916,113 +6197,920 @@
           <a:p>
             <a:pPr marL="0" lvl="0" indent="0" algn="just">
               <a:lnSpc>
-                <a:spcPts val="3499"/>
+                <a:spcPct val="150000"/>
               </a:lnSpc>
             </a:pPr>
             <a:r>
-              <a:rPr lang="en-US" sz="2499">
-                <a:solidFill>
-                  <a:srgbClr val="000000"/>
-                </a:solidFill>
-                <a:latin typeface="Calibri (MS)"/>
-                <a:ea typeface="Calibri (MS)"/>
-                <a:cs typeface="Calibri (MS)"/>
-                <a:sym typeface="Calibri (MS)"/>
-              </a:rPr>
-              <a:t>A transição para o ensino superior é um período de elevada vulnerabilidade, estimando-se que </a:t>
-            </a:r>
-            <a:r>
-              <a:rPr lang="en-US" sz="2499" b="1">
-                <a:solidFill>
-                  <a:srgbClr val="000000"/>
-                </a:solidFill>
-                <a:latin typeface="Calibri (MS) Bold"/>
+              <a:rPr lang="en-US" sz="2500" dirty="0">
+                <a:solidFill>
+                  <a:srgbClr val="000000"/>
+                </a:solidFill>
+                <a:latin typeface="Calibri (MS)" panose="020B0604020202020204" charset="0"/>
+                <a:ea typeface="Calibri (MS)"/>
+                <a:cs typeface="Calibri (MS)" panose="020B0604020202020204" charset="0"/>
+                <a:sym typeface="Calibri (MS)"/>
+              </a:rPr>
+              <a:t>A </a:t>
+            </a:r>
+            <a:r>
+              <a:rPr lang="en-US" sz="2500" dirty="0" err="1">
+                <a:solidFill>
+                  <a:srgbClr val="000000"/>
+                </a:solidFill>
+                <a:latin typeface="Calibri (MS)" panose="020B0604020202020204" charset="0"/>
+                <a:ea typeface="Calibri (MS)"/>
+                <a:cs typeface="Calibri (MS)" panose="020B0604020202020204" charset="0"/>
+                <a:sym typeface="Calibri (MS)"/>
+              </a:rPr>
+              <a:t>transição</a:t>
+            </a:r>
+            <a:r>
+              <a:rPr lang="en-US" sz="2500" dirty="0">
+                <a:solidFill>
+                  <a:srgbClr val="000000"/>
+                </a:solidFill>
+                <a:latin typeface="Calibri (MS)" panose="020B0604020202020204" charset="0"/>
+                <a:ea typeface="Calibri (MS)"/>
+                <a:cs typeface="Calibri (MS)" panose="020B0604020202020204" charset="0"/>
+                <a:sym typeface="Calibri (MS)"/>
+              </a:rPr>
+              <a:t> para o </a:t>
+            </a:r>
+            <a:r>
+              <a:rPr lang="en-US" sz="2500" dirty="0" err="1">
+                <a:solidFill>
+                  <a:srgbClr val="000000"/>
+                </a:solidFill>
+                <a:latin typeface="Calibri (MS)" panose="020B0604020202020204" charset="0"/>
+                <a:ea typeface="Calibri (MS)"/>
+                <a:cs typeface="Calibri (MS)" panose="020B0604020202020204" charset="0"/>
+                <a:sym typeface="Calibri (MS)"/>
+              </a:rPr>
+              <a:t>ensino</a:t>
+            </a:r>
+            <a:r>
+              <a:rPr lang="en-US" sz="2500" dirty="0">
+                <a:solidFill>
+                  <a:srgbClr val="000000"/>
+                </a:solidFill>
+                <a:latin typeface="Calibri (MS)" panose="020B0604020202020204" charset="0"/>
+                <a:ea typeface="Calibri (MS)"/>
+                <a:cs typeface="Calibri (MS)" panose="020B0604020202020204" charset="0"/>
+                <a:sym typeface="Calibri (MS)"/>
+              </a:rPr>
+              <a:t> superior é um </a:t>
+            </a:r>
+            <a:r>
+              <a:rPr lang="en-US" sz="2500" dirty="0" err="1">
+                <a:solidFill>
+                  <a:srgbClr val="000000"/>
+                </a:solidFill>
+                <a:latin typeface="Calibri (MS)" panose="020B0604020202020204" charset="0"/>
+                <a:ea typeface="Calibri (MS)"/>
+                <a:cs typeface="Calibri (MS)" panose="020B0604020202020204" charset="0"/>
+                <a:sym typeface="Calibri (MS)"/>
+              </a:rPr>
+              <a:t>período</a:t>
+            </a:r>
+            <a:r>
+              <a:rPr lang="en-US" sz="2500" dirty="0">
+                <a:solidFill>
+                  <a:srgbClr val="000000"/>
+                </a:solidFill>
+                <a:latin typeface="Calibri (MS)" panose="020B0604020202020204" charset="0"/>
+                <a:ea typeface="Calibri (MS)"/>
+                <a:cs typeface="Calibri (MS)" panose="020B0604020202020204" charset="0"/>
+                <a:sym typeface="Calibri (MS)"/>
+              </a:rPr>
+              <a:t> de </a:t>
+            </a:r>
+            <a:r>
+              <a:rPr lang="en-US" sz="2500" dirty="0" err="1">
+                <a:solidFill>
+                  <a:srgbClr val="000000"/>
+                </a:solidFill>
+                <a:latin typeface="Calibri (MS)" panose="020B0604020202020204" charset="0"/>
+                <a:ea typeface="Calibri (MS)"/>
+                <a:cs typeface="Calibri (MS)" panose="020B0604020202020204" charset="0"/>
+                <a:sym typeface="Calibri (MS)"/>
+              </a:rPr>
+              <a:t>elevada</a:t>
+            </a:r>
+            <a:r>
+              <a:rPr lang="en-US" sz="2500" dirty="0">
+                <a:solidFill>
+                  <a:srgbClr val="000000"/>
+                </a:solidFill>
+                <a:latin typeface="Calibri (MS)" panose="020B0604020202020204" charset="0"/>
+                <a:ea typeface="Calibri (MS)"/>
+                <a:cs typeface="Calibri (MS)" panose="020B0604020202020204" charset="0"/>
+                <a:sym typeface="Calibri (MS)"/>
+              </a:rPr>
+              <a:t> </a:t>
+            </a:r>
+            <a:r>
+              <a:rPr lang="en-US" sz="2500" dirty="0" err="1">
+                <a:solidFill>
+                  <a:srgbClr val="000000"/>
+                </a:solidFill>
+                <a:latin typeface="Calibri (MS)" panose="020B0604020202020204" charset="0"/>
+                <a:ea typeface="Calibri (MS)"/>
+                <a:cs typeface="Calibri (MS)" panose="020B0604020202020204" charset="0"/>
+                <a:sym typeface="Calibri (MS)"/>
+              </a:rPr>
+              <a:t>vulnerabilidade</a:t>
+            </a:r>
+            <a:r>
+              <a:rPr lang="en-US" sz="2500" dirty="0">
+                <a:solidFill>
+                  <a:srgbClr val="000000"/>
+                </a:solidFill>
+                <a:latin typeface="Calibri (MS)" panose="020B0604020202020204" charset="0"/>
+                <a:ea typeface="Calibri (MS)"/>
+                <a:cs typeface="Calibri (MS)" panose="020B0604020202020204" charset="0"/>
+                <a:sym typeface="Calibri (MS)"/>
+              </a:rPr>
+              <a:t>, </a:t>
+            </a:r>
+            <a:r>
+              <a:rPr lang="en-US" sz="2500" dirty="0" err="1">
+                <a:solidFill>
+                  <a:srgbClr val="000000"/>
+                </a:solidFill>
+                <a:latin typeface="Calibri (MS)" panose="020B0604020202020204" charset="0"/>
+                <a:ea typeface="Calibri (MS)"/>
+                <a:cs typeface="Calibri (MS)" panose="020B0604020202020204" charset="0"/>
+                <a:sym typeface="Calibri (MS)"/>
+              </a:rPr>
+              <a:t>estimando</a:t>
+            </a:r>
+            <a:r>
+              <a:rPr lang="en-US" sz="2500" dirty="0">
+                <a:solidFill>
+                  <a:srgbClr val="000000"/>
+                </a:solidFill>
+                <a:latin typeface="Calibri (MS)" panose="020B0604020202020204" charset="0"/>
+                <a:ea typeface="Calibri (MS)"/>
+                <a:cs typeface="Calibri (MS)" panose="020B0604020202020204" charset="0"/>
+                <a:sym typeface="Calibri (MS)"/>
+              </a:rPr>
+              <a:t>-se </a:t>
+            </a:r>
+            <a:r>
+              <a:rPr lang="en-US" sz="2500" dirty="0" err="1">
+                <a:solidFill>
+                  <a:srgbClr val="000000"/>
+                </a:solidFill>
+                <a:latin typeface="Calibri (MS)" panose="020B0604020202020204" charset="0"/>
+                <a:ea typeface="Calibri (MS)"/>
+                <a:cs typeface="Calibri (MS)" panose="020B0604020202020204" charset="0"/>
+                <a:sym typeface="Calibri (MS)"/>
+              </a:rPr>
+              <a:t>que</a:t>
+            </a:r>
+            <a:r>
+              <a:rPr lang="en-US" sz="2500" dirty="0">
+                <a:solidFill>
+                  <a:srgbClr val="000000"/>
+                </a:solidFill>
+                <a:latin typeface="Calibri (MS)" panose="020B0604020202020204" charset="0"/>
+                <a:ea typeface="Calibri (MS)"/>
+                <a:cs typeface="Calibri (MS)" panose="020B0604020202020204" charset="0"/>
+                <a:sym typeface="Calibri (MS)"/>
+              </a:rPr>
+              <a:t> </a:t>
+            </a:r>
+            <a:r>
+              <a:rPr lang="en-US" sz="2500" b="1" dirty="0">
+                <a:solidFill>
+                  <a:srgbClr val="000000"/>
+                </a:solidFill>
+                <a:latin typeface="Calibri (MS)" panose="020B0604020202020204" charset="0"/>
                 <a:ea typeface="Calibri (MS) Bold"/>
-                <a:cs typeface="Calibri (MS) Bold"/>
+                <a:cs typeface="Calibri (MS)" panose="020B0604020202020204" charset="0"/>
                 <a:sym typeface="Calibri (MS) Bold"/>
               </a:rPr>
-              <a:t>um terço dos estudantes</a:t>
-            </a:r>
-            <a:r>
-              <a:rPr lang="en-US" sz="2499">
-                <a:solidFill>
-                  <a:srgbClr val="000000"/>
-                </a:solidFill>
-                <a:latin typeface="Calibri (MS)"/>
-                <a:ea typeface="Calibri (MS)"/>
-                <a:cs typeface="Calibri (MS)"/>
-                <a:sym typeface="Calibri (MS)"/>
-              </a:rPr>
-              <a:t> sofra de mal-estar psicológico. Barreiras como o estigma, custos elevados e longas listas de espera dificultam o acesso ao apoio tradicional, que é muitas vezes escasso ou passivo.</a:t>
+              <a:t>um </a:t>
+            </a:r>
+            <a:r>
+              <a:rPr lang="en-US" sz="2500" b="1" dirty="0" err="1">
+                <a:solidFill>
+                  <a:srgbClr val="000000"/>
+                </a:solidFill>
+                <a:latin typeface="Calibri (MS)" panose="020B0604020202020204" charset="0"/>
+                <a:ea typeface="Calibri (MS) Bold"/>
+                <a:cs typeface="Calibri (MS)" panose="020B0604020202020204" charset="0"/>
+                <a:sym typeface="Calibri (MS) Bold"/>
+              </a:rPr>
+              <a:t>terço</a:t>
+            </a:r>
+            <a:r>
+              <a:rPr lang="en-US" sz="2500" b="1" dirty="0">
+                <a:solidFill>
+                  <a:srgbClr val="000000"/>
+                </a:solidFill>
+                <a:latin typeface="Calibri (MS)" panose="020B0604020202020204" charset="0"/>
+                <a:ea typeface="Calibri (MS) Bold"/>
+                <a:cs typeface="Calibri (MS)" panose="020B0604020202020204" charset="0"/>
+                <a:sym typeface="Calibri (MS) Bold"/>
+              </a:rPr>
+              <a:t> dos </a:t>
+            </a:r>
+            <a:r>
+              <a:rPr lang="en-US" sz="2500" b="1" dirty="0" err="1">
+                <a:solidFill>
+                  <a:srgbClr val="000000"/>
+                </a:solidFill>
+                <a:latin typeface="Calibri (MS)" panose="020B0604020202020204" charset="0"/>
+                <a:ea typeface="Calibri (MS) Bold"/>
+                <a:cs typeface="Calibri (MS)" panose="020B0604020202020204" charset="0"/>
+                <a:sym typeface="Calibri (MS) Bold"/>
+              </a:rPr>
+              <a:t>estudantes</a:t>
+            </a:r>
+            <a:r>
+              <a:rPr lang="en-US" sz="2500" dirty="0">
+                <a:solidFill>
+                  <a:srgbClr val="000000"/>
+                </a:solidFill>
+                <a:latin typeface="Calibri (MS)" panose="020B0604020202020204" charset="0"/>
+                <a:ea typeface="Calibri (MS)"/>
+                <a:cs typeface="Calibri (MS)" panose="020B0604020202020204" charset="0"/>
+                <a:sym typeface="Calibri (MS)"/>
+              </a:rPr>
+              <a:t> </a:t>
+            </a:r>
+            <a:r>
+              <a:rPr lang="en-US" sz="2500" dirty="0" err="1">
+                <a:solidFill>
+                  <a:srgbClr val="000000"/>
+                </a:solidFill>
+                <a:latin typeface="Calibri (MS)" panose="020B0604020202020204" charset="0"/>
+                <a:ea typeface="Calibri (MS)"/>
+                <a:cs typeface="Calibri (MS)" panose="020B0604020202020204" charset="0"/>
+                <a:sym typeface="Calibri (MS)"/>
+              </a:rPr>
+              <a:t>sofra</a:t>
+            </a:r>
+            <a:r>
+              <a:rPr lang="en-US" sz="2500" dirty="0">
+                <a:solidFill>
+                  <a:srgbClr val="000000"/>
+                </a:solidFill>
+                <a:latin typeface="Calibri (MS)" panose="020B0604020202020204" charset="0"/>
+                <a:ea typeface="Calibri (MS)"/>
+                <a:cs typeface="Calibri (MS)" panose="020B0604020202020204" charset="0"/>
+                <a:sym typeface="Calibri (MS)"/>
+              </a:rPr>
+              <a:t> de mal-</a:t>
+            </a:r>
+            <a:r>
+              <a:rPr lang="en-US" sz="2500" dirty="0" err="1">
+                <a:solidFill>
+                  <a:srgbClr val="000000"/>
+                </a:solidFill>
+                <a:latin typeface="Calibri (MS)" panose="020B0604020202020204" charset="0"/>
+                <a:ea typeface="Calibri (MS)"/>
+                <a:cs typeface="Calibri (MS)" panose="020B0604020202020204" charset="0"/>
+                <a:sym typeface="Calibri (MS)"/>
+              </a:rPr>
+              <a:t>estar</a:t>
+            </a:r>
+            <a:r>
+              <a:rPr lang="en-US" sz="2500" dirty="0">
+                <a:solidFill>
+                  <a:srgbClr val="000000"/>
+                </a:solidFill>
+                <a:latin typeface="Calibri (MS)" panose="020B0604020202020204" charset="0"/>
+                <a:ea typeface="Calibri (MS)"/>
+                <a:cs typeface="Calibri (MS)" panose="020B0604020202020204" charset="0"/>
+                <a:sym typeface="Calibri (MS)"/>
+              </a:rPr>
+              <a:t> </a:t>
+            </a:r>
+            <a:r>
+              <a:rPr lang="en-US" sz="2500" dirty="0" err="1">
+                <a:solidFill>
+                  <a:srgbClr val="000000"/>
+                </a:solidFill>
+                <a:latin typeface="Calibri (MS)" panose="020B0604020202020204" charset="0"/>
+                <a:ea typeface="Calibri (MS)"/>
+                <a:cs typeface="Calibri (MS)" panose="020B0604020202020204" charset="0"/>
+                <a:sym typeface="Calibri (MS)"/>
+              </a:rPr>
+              <a:t>psicológico</a:t>
+            </a:r>
+            <a:r>
+              <a:rPr lang="en-US" sz="2500" dirty="0">
+                <a:solidFill>
+                  <a:srgbClr val="000000"/>
+                </a:solidFill>
+                <a:latin typeface="Calibri (MS)" panose="020B0604020202020204" charset="0"/>
+                <a:ea typeface="Calibri (MS)"/>
+                <a:cs typeface="Calibri (MS)" panose="020B0604020202020204" charset="0"/>
+                <a:sym typeface="Calibri (MS)"/>
+              </a:rPr>
+              <a:t>. </a:t>
+            </a:r>
+            <a:r>
+              <a:rPr lang="en-US" sz="2500" dirty="0" err="1">
+                <a:solidFill>
+                  <a:srgbClr val="000000"/>
+                </a:solidFill>
+                <a:latin typeface="Calibri (MS)" panose="020B0604020202020204" charset="0"/>
+                <a:ea typeface="Calibri (MS)"/>
+                <a:cs typeface="Calibri (MS)" panose="020B0604020202020204" charset="0"/>
+                <a:sym typeface="Calibri (MS)"/>
+              </a:rPr>
+              <a:t>Barreiras</a:t>
+            </a:r>
+            <a:r>
+              <a:rPr lang="en-US" sz="2500" dirty="0">
+                <a:solidFill>
+                  <a:srgbClr val="000000"/>
+                </a:solidFill>
+                <a:latin typeface="Calibri (MS)" panose="020B0604020202020204" charset="0"/>
+                <a:ea typeface="Calibri (MS)"/>
+                <a:cs typeface="Calibri (MS)" panose="020B0604020202020204" charset="0"/>
+                <a:sym typeface="Calibri (MS)"/>
+              </a:rPr>
+              <a:t> </a:t>
+            </a:r>
+            <a:r>
+              <a:rPr lang="en-US" sz="2500" dirty="0" err="1">
+                <a:solidFill>
+                  <a:srgbClr val="000000"/>
+                </a:solidFill>
+                <a:latin typeface="Calibri (MS)" panose="020B0604020202020204" charset="0"/>
+                <a:ea typeface="Calibri (MS)"/>
+                <a:cs typeface="Calibri (MS)" panose="020B0604020202020204" charset="0"/>
+                <a:sym typeface="Calibri (MS)"/>
+              </a:rPr>
+              <a:t>como</a:t>
+            </a:r>
+            <a:r>
+              <a:rPr lang="en-US" sz="2500" dirty="0">
+                <a:solidFill>
+                  <a:srgbClr val="000000"/>
+                </a:solidFill>
+                <a:latin typeface="Calibri (MS)" panose="020B0604020202020204" charset="0"/>
+                <a:ea typeface="Calibri (MS)"/>
+                <a:cs typeface="Calibri (MS)" panose="020B0604020202020204" charset="0"/>
+                <a:sym typeface="Calibri (MS)"/>
+              </a:rPr>
+              <a:t> o </a:t>
+            </a:r>
+            <a:r>
+              <a:rPr lang="en-US" sz="2500" dirty="0" err="1">
+                <a:solidFill>
+                  <a:srgbClr val="000000"/>
+                </a:solidFill>
+                <a:latin typeface="Calibri (MS)" panose="020B0604020202020204" charset="0"/>
+                <a:ea typeface="Calibri (MS)"/>
+                <a:cs typeface="Calibri (MS)" panose="020B0604020202020204" charset="0"/>
+                <a:sym typeface="Calibri (MS)"/>
+              </a:rPr>
+              <a:t>estigma</a:t>
+            </a:r>
+            <a:r>
+              <a:rPr lang="en-US" sz="2500" dirty="0">
+                <a:solidFill>
+                  <a:srgbClr val="000000"/>
+                </a:solidFill>
+                <a:latin typeface="Calibri (MS)" panose="020B0604020202020204" charset="0"/>
+                <a:ea typeface="Calibri (MS)"/>
+                <a:cs typeface="Calibri (MS)" panose="020B0604020202020204" charset="0"/>
+                <a:sym typeface="Calibri (MS)"/>
+              </a:rPr>
+              <a:t>, custos </a:t>
+            </a:r>
+            <a:r>
+              <a:rPr lang="en-US" sz="2500" dirty="0" err="1">
+                <a:solidFill>
+                  <a:srgbClr val="000000"/>
+                </a:solidFill>
+                <a:latin typeface="Calibri (MS)" panose="020B0604020202020204" charset="0"/>
+                <a:ea typeface="Calibri (MS)"/>
+                <a:cs typeface="Calibri (MS)" panose="020B0604020202020204" charset="0"/>
+                <a:sym typeface="Calibri (MS)"/>
+              </a:rPr>
+              <a:t>elevados</a:t>
+            </a:r>
+            <a:r>
+              <a:rPr lang="en-US" sz="2500" dirty="0">
+                <a:solidFill>
+                  <a:srgbClr val="000000"/>
+                </a:solidFill>
+                <a:latin typeface="Calibri (MS)" panose="020B0604020202020204" charset="0"/>
+                <a:ea typeface="Calibri (MS)"/>
+                <a:cs typeface="Calibri (MS)" panose="020B0604020202020204" charset="0"/>
+                <a:sym typeface="Calibri (MS)"/>
+              </a:rPr>
+              <a:t> e longas </a:t>
+            </a:r>
+            <a:r>
+              <a:rPr lang="en-US" sz="2500" dirty="0" err="1">
+                <a:solidFill>
+                  <a:srgbClr val="000000"/>
+                </a:solidFill>
+                <a:latin typeface="Calibri (MS)" panose="020B0604020202020204" charset="0"/>
+                <a:ea typeface="Calibri (MS)"/>
+                <a:cs typeface="Calibri (MS)" panose="020B0604020202020204" charset="0"/>
+                <a:sym typeface="Calibri (MS)"/>
+              </a:rPr>
+              <a:t>listas</a:t>
+            </a:r>
+            <a:r>
+              <a:rPr lang="en-US" sz="2500" dirty="0">
+                <a:solidFill>
+                  <a:srgbClr val="000000"/>
+                </a:solidFill>
+                <a:latin typeface="Calibri (MS)" panose="020B0604020202020204" charset="0"/>
+                <a:ea typeface="Calibri (MS)"/>
+                <a:cs typeface="Calibri (MS)" panose="020B0604020202020204" charset="0"/>
+                <a:sym typeface="Calibri (MS)"/>
+              </a:rPr>
+              <a:t> de </a:t>
+            </a:r>
+            <a:r>
+              <a:rPr lang="en-US" sz="2500" dirty="0" err="1">
+                <a:solidFill>
+                  <a:srgbClr val="000000"/>
+                </a:solidFill>
+                <a:latin typeface="Calibri (MS)" panose="020B0604020202020204" charset="0"/>
+                <a:ea typeface="Calibri (MS)"/>
+                <a:cs typeface="Calibri (MS)" panose="020B0604020202020204" charset="0"/>
+                <a:sym typeface="Calibri (MS)"/>
+              </a:rPr>
+              <a:t>espera</a:t>
+            </a:r>
+            <a:r>
+              <a:rPr lang="en-US" sz="2500" dirty="0">
+                <a:solidFill>
+                  <a:srgbClr val="000000"/>
+                </a:solidFill>
+                <a:latin typeface="Calibri (MS)" panose="020B0604020202020204" charset="0"/>
+                <a:ea typeface="Calibri (MS)"/>
+                <a:cs typeface="Calibri (MS)" panose="020B0604020202020204" charset="0"/>
+                <a:sym typeface="Calibri (MS)"/>
+              </a:rPr>
+              <a:t> </a:t>
+            </a:r>
+            <a:r>
+              <a:rPr lang="en-US" sz="2500" dirty="0" err="1">
+                <a:solidFill>
+                  <a:srgbClr val="000000"/>
+                </a:solidFill>
+                <a:latin typeface="Calibri (MS)" panose="020B0604020202020204" charset="0"/>
+                <a:ea typeface="Calibri (MS)"/>
+                <a:cs typeface="Calibri (MS)" panose="020B0604020202020204" charset="0"/>
+                <a:sym typeface="Calibri (MS)"/>
+              </a:rPr>
+              <a:t>dificultam</a:t>
+            </a:r>
+            <a:r>
+              <a:rPr lang="en-US" sz="2500" dirty="0">
+                <a:solidFill>
+                  <a:srgbClr val="000000"/>
+                </a:solidFill>
+                <a:latin typeface="Calibri (MS)" panose="020B0604020202020204" charset="0"/>
+                <a:ea typeface="Calibri (MS)"/>
+                <a:cs typeface="Calibri (MS)" panose="020B0604020202020204" charset="0"/>
+                <a:sym typeface="Calibri (MS)"/>
+              </a:rPr>
+              <a:t> o </a:t>
+            </a:r>
+            <a:r>
+              <a:rPr lang="en-US" sz="2500" dirty="0" err="1">
+                <a:solidFill>
+                  <a:srgbClr val="000000"/>
+                </a:solidFill>
+                <a:latin typeface="Calibri (MS)" panose="020B0604020202020204" charset="0"/>
+                <a:ea typeface="Calibri (MS)"/>
+                <a:cs typeface="Calibri (MS)" panose="020B0604020202020204" charset="0"/>
+                <a:sym typeface="Calibri (MS)"/>
+              </a:rPr>
+              <a:t>acesso</a:t>
+            </a:r>
+            <a:r>
+              <a:rPr lang="en-US" sz="2500" dirty="0">
+                <a:solidFill>
+                  <a:srgbClr val="000000"/>
+                </a:solidFill>
+                <a:latin typeface="Calibri (MS)" panose="020B0604020202020204" charset="0"/>
+                <a:ea typeface="Calibri (MS)"/>
+                <a:cs typeface="Calibri (MS)" panose="020B0604020202020204" charset="0"/>
+                <a:sym typeface="Calibri (MS)"/>
+              </a:rPr>
+              <a:t> </a:t>
+            </a:r>
+            <a:r>
+              <a:rPr lang="en-US" sz="2500" dirty="0" err="1">
+                <a:solidFill>
+                  <a:srgbClr val="000000"/>
+                </a:solidFill>
+                <a:latin typeface="Calibri (MS)" panose="020B0604020202020204" charset="0"/>
+                <a:ea typeface="Calibri (MS)"/>
+                <a:cs typeface="Calibri (MS)" panose="020B0604020202020204" charset="0"/>
+                <a:sym typeface="Calibri (MS)"/>
+              </a:rPr>
+              <a:t>ao</a:t>
+            </a:r>
+            <a:r>
+              <a:rPr lang="en-US" sz="2500" dirty="0">
+                <a:solidFill>
+                  <a:srgbClr val="000000"/>
+                </a:solidFill>
+                <a:latin typeface="Calibri (MS)" panose="020B0604020202020204" charset="0"/>
+                <a:ea typeface="Calibri (MS)"/>
+                <a:cs typeface="Calibri (MS)" panose="020B0604020202020204" charset="0"/>
+                <a:sym typeface="Calibri (MS)"/>
+              </a:rPr>
+              <a:t> </a:t>
+            </a:r>
+            <a:r>
+              <a:rPr lang="en-US" sz="2500" dirty="0" err="1">
+                <a:solidFill>
+                  <a:srgbClr val="000000"/>
+                </a:solidFill>
+                <a:latin typeface="Calibri (MS)" panose="020B0604020202020204" charset="0"/>
+                <a:ea typeface="Calibri (MS)"/>
+                <a:cs typeface="Calibri (MS)" panose="020B0604020202020204" charset="0"/>
+                <a:sym typeface="Calibri (MS)"/>
+              </a:rPr>
+              <a:t>apoio</a:t>
+            </a:r>
+            <a:r>
+              <a:rPr lang="en-US" sz="2500" dirty="0">
+                <a:solidFill>
+                  <a:srgbClr val="000000"/>
+                </a:solidFill>
+                <a:latin typeface="Calibri (MS)" panose="020B0604020202020204" charset="0"/>
+                <a:ea typeface="Calibri (MS)"/>
+                <a:cs typeface="Calibri (MS)" panose="020B0604020202020204" charset="0"/>
+                <a:sym typeface="Calibri (MS)"/>
+              </a:rPr>
+              <a:t> </a:t>
+            </a:r>
+            <a:r>
+              <a:rPr lang="en-US" sz="2500" dirty="0" err="1">
+                <a:solidFill>
+                  <a:srgbClr val="000000"/>
+                </a:solidFill>
+                <a:latin typeface="Calibri (MS)" panose="020B0604020202020204" charset="0"/>
+                <a:ea typeface="Calibri (MS)"/>
+                <a:cs typeface="Calibri (MS)" panose="020B0604020202020204" charset="0"/>
+                <a:sym typeface="Calibri (MS)"/>
+              </a:rPr>
+              <a:t>tradicional</a:t>
+            </a:r>
+            <a:r>
+              <a:rPr lang="en-US" sz="2500" dirty="0">
+                <a:solidFill>
+                  <a:srgbClr val="000000"/>
+                </a:solidFill>
+                <a:latin typeface="Calibri (MS)" panose="020B0604020202020204" charset="0"/>
+                <a:ea typeface="Calibri (MS)"/>
+                <a:cs typeface="Calibri (MS)" panose="020B0604020202020204" charset="0"/>
+                <a:sym typeface="Calibri (MS)"/>
+              </a:rPr>
+              <a:t>, </a:t>
+            </a:r>
+            <a:r>
+              <a:rPr lang="en-US" sz="2500" dirty="0" err="1">
+                <a:solidFill>
+                  <a:srgbClr val="000000"/>
+                </a:solidFill>
+                <a:latin typeface="Calibri (MS)" panose="020B0604020202020204" charset="0"/>
+                <a:ea typeface="Calibri (MS)"/>
+                <a:cs typeface="Calibri (MS)" panose="020B0604020202020204" charset="0"/>
+                <a:sym typeface="Calibri (MS)"/>
+              </a:rPr>
+              <a:t>que</a:t>
+            </a:r>
+            <a:r>
+              <a:rPr lang="en-US" sz="2500" dirty="0">
+                <a:solidFill>
+                  <a:srgbClr val="000000"/>
+                </a:solidFill>
+                <a:latin typeface="Calibri (MS)" panose="020B0604020202020204" charset="0"/>
+                <a:ea typeface="Calibri (MS)"/>
+                <a:cs typeface="Calibri (MS)" panose="020B0604020202020204" charset="0"/>
+                <a:sym typeface="Calibri (MS)"/>
+              </a:rPr>
+              <a:t> é </a:t>
+            </a:r>
+            <a:r>
+              <a:rPr lang="en-US" sz="2500" dirty="0" err="1">
+                <a:solidFill>
+                  <a:srgbClr val="000000"/>
+                </a:solidFill>
+                <a:latin typeface="Calibri (MS)" panose="020B0604020202020204" charset="0"/>
+                <a:ea typeface="Calibri (MS)"/>
+                <a:cs typeface="Calibri (MS)" panose="020B0604020202020204" charset="0"/>
+                <a:sym typeface="Calibri (MS)"/>
+              </a:rPr>
+              <a:t>muitas</a:t>
+            </a:r>
+            <a:r>
+              <a:rPr lang="en-US" sz="2500" dirty="0">
+                <a:solidFill>
+                  <a:srgbClr val="000000"/>
+                </a:solidFill>
+                <a:latin typeface="Calibri (MS)" panose="020B0604020202020204" charset="0"/>
+                <a:ea typeface="Calibri (MS)"/>
+                <a:cs typeface="Calibri (MS)" panose="020B0604020202020204" charset="0"/>
+                <a:sym typeface="Calibri (MS)"/>
+              </a:rPr>
+              <a:t> </a:t>
+            </a:r>
+            <a:r>
+              <a:rPr lang="en-US" sz="2500" dirty="0" err="1">
+                <a:solidFill>
+                  <a:srgbClr val="000000"/>
+                </a:solidFill>
+                <a:latin typeface="Calibri (MS)" panose="020B0604020202020204" charset="0"/>
+                <a:ea typeface="Calibri (MS)"/>
+                <a:cs typeface="Calibri (MS)" panose="020B0604020202020204" charset="0"/>
+                <a:sym typeface="Calibri (MS)"/>
+              </a:rPr>
+              <a:t>vezes</a:t>
+            </a:r>
+            <a:r>
+              <a:rPr lang="en-US" sz="2500" dirty="0">
+                <a:solidFill>
+                  <a:srgbClr val="000000"/>
+                </a:solidFill>
+                <a:latin typeface="Calibri (MS)" panose="020B0604020202020204" charset="0"/>
+                <a:ea typeface="Calibri (MS)"/>
+                <a:cs typeface="Calibri (MS)" panose="020B0604020202020204" charset="0"/>
+                <a:sym typeface="Calibri (MS)"/>
+              </a:rPr>
+              <a:t> </a:t>
+            </a:r>
+            <a:r>
+              <a:rPr lang="en-US" sz="2500" dirty="0" err="1">
+                <a:solidFill>
+                  <a:srgbClr val="000000"/>
+                </a:solidFill>
+                <a:latin typeface="Calibri (MS)" panose="020B0604020202020204" charset="0"/>
+                <a:ea typeface="Calibri (MS)"/>
+                <a:cs typeface="Calibri (MS)" panose="020B0604020202020204" charset="0"/>
+                <a:sym typeface="Calibri (MS)"/>
+              </a:rPr>
+              <a:t>escasso</a:t>
+            </a:r>
+            <a:r>
+              <a:rPr lang="en-US" sz="2500" dirty="0">
+                <a:solidFill>
+                  <a:srgbClr val="000000"/>
+                </a:solidFill>
+                <a:latin typeface="Calibri (MS)" panose="020B0604020202020204" charset="0"/>
+                <a:ea typeface="Calibri (MS)"/>
+                <a:cs typeface="Calibri (MS)" panose="020B0604020202020204" charset="0"/>
+                <a:sym typeface="Calibri (MS)"/>
+              </a:rPr>
+              <a:t> </a:t>
+            </a:r>
+            <a:r>
+              <a:rPr lang="en-US" sz="2500" dirty="0" err="1">
+                <a:solidFill>
+                  <a:srgbClr val="000000"/>
+                </a:solidFill>
+                <a:latin typeface="Calibri (MS)" panose="020B0604020202020204" charset="0"/>
+                <a:ea typeface="Calibri (MS)"/>
+                <a:cs typeface="Calibri (MS)" panose="020B0604020202020204" charset="0"/>
+                <a:sym typeface="Calibri (MS)"/>
+              </a:rPr>
+              <a:t>ou</a:t>
+            </a:r>
+            <a:r>
+              <a:rPr lang="en-US" sz="2500" dirty="0">
+                <a:solidFill>
+                  <a:srgbClr val="000000"/>
+                </a:solidFill>
+                <a:latin typeface="Calibri (MS)" panose="020B0604020202020204" charset="0"/>
+                <a:ea typeface="Calibri (MS)"/>
+                <a:cs typeface="Calibri (MS)" panose="020B0604020202020204" charset="0"/>
+                <a:sym typeface="Calibri (MS)"/>
+              </a:rPr>
+              <a:t> </a:t>
+            </a:r>
+            <a:r>
+              <a:rPr lang="en-US" sz="2500" dirty="0" err="1">
+                <a:solidFill>
+                  <a:srgbClr val="000000"/>
+                </a:solidFill>
+                <a:latin typeface="Calibri (MS)" panose="020B0604020202020204" charset="0"/>
+                <a:ea typeface="Calibri (MS)"/>
+                <a:cs typeface="Calibri (MS)" panose="020B0604020202020204" charset="0"/>
+                <a:sym typeface="Calibri (MS)"/>
+              </a:rPr>
+              <a:t>passivo</a:t>
+            </a:r>
+            <a:r>
+              <a:rPr lang="en-US" sz="2500" dirty="0">
+                <a:solidFill>
+                  <a:srgbClr val="000000"/>
+                </a:solidFill>
+                <a:latin typeface="Calibri (MS)" panose="020B0604020202020204" charset="0"/>
+                <a:ea typeface="Calibri (MS)"/>
+                <a:cs typeface="Calibri (MS)" panose="020B0604020202020204" charset="0"/>
+                <a:sym typeface="Calibri (MS)"/>
+              </a:rPr>
+              <a:t>.</a:t>
             </a:r>
           </a:p>
           <a:p>
             <a:pPr marL="0" lvl="0" indent="0" algn="just">
               <a:lnSpc>
-                <a:spcPts val="3499"/>
+                <a:spcPct val="150000"/>
               </a:lnSpc>
             </a:pPr>
-            <a:endParaRPr lang="en-US" sz="2499">
+            <a:endParaRPr lang="en-US" sz="2500" dirty="0">
               <a:solidFill>
                 <a:srgbClr val="000000"/>
               </a:solidFill>
-              <a:latin typeface="Calibri (MS)"/>
+              <a:latin typeface="Calibri (MS)" panose="020B0604020202020204" charset="0"/>
               <a:ea typeface="Calibri (MS)"/>
-              <a:cs typeface="Calibri (MS)"/>
+              <a:cs typeface="Calibri (MS)" panose="020B0604020202020204" charset="0"/>
               <a:sym typeface="Calibri (MS)"/>
             </a:endParaRPr>
           </a:p>
           <a:p>
             <a:pPr marL="0" lvl="0" indent="0" algn="just">
               <a:lnSpc>
-                <a:spcPts val="4199"/>
+                <a:spcPct val="150000"/>
               </a:lnSpc>
             </a:pPr>
             <a:r>
-              <a:rPr lang="en-US" sz="2999" b="1">
-                <a:solidFill>
-                  <a:srgbClr val="000000"/>
-                </a:solidFill>
-                <a:latin typeface="Calibri (MS) Bold"/>
+              <a:rPr lang="en-US" sz="3500" b="1" dirty="0" err="1">
+                <a:solidFill>
+                  <a:srgbClr val="000000"/>
+                </a:solidFill>
+                <a:latin typeface="Calibri (MS)" panose="020B0604020202020204" charset="0"/>
                 <a:ea typeface="Calibri (MS) Bold"/>
-                <a:cs typeface="Calibri (MS) Bold"/>
+                <a:cs typeface="Calibri (MS)" panose="020B0604020202020204" charset="0"/>
                 <a:sym typeface="Calibri (MS) Bold"/>
               </a:rPr>
               <a:t>MoveMind</a:t>
             </a:r>
-          </a:p>
-          <a:p>
-            <a:pPr marL="0" lvl="0" indent="0" algn="just">
-              <a:lnSpc>
-                <a:spcPts val="3499"/>
-              </a:lnSpc>
-            </a:pPr>
-            <a:r>
-              <a:rPr lang="en-US" sz="2499">
-                <a:solidFill>
-                  <a:srgbClr val="000000"/>
-                </a:solidFill>
-                <a:latin typeface="Calibri (MS)"/>
-                <a:ea typeface="Calibri (MS)"/>
-                <a:cs typeface="Calibri (MS)"/>
-                <a:sym typeface="Calibri (MS)"/>
-              </a:rPr>
-              <a:t>O projeto MindMove propõe uma intervenção digital multimodal que combina a Terapia Cognitivo-Comportamental digital (dCBT) com a monitorização ativa do sono e da atividade física. Direcionada para estudantes com sintomas depressivos ligeiros a moderados (PHQ-9 entre 5 e 14), a aplicação funciona como uma ferramenta preventiva que visa evitar o agravamento do quadro clínico através de um suporte contínuo e personalizado. Ao comparar esta solução tecnológica com o suporte informativo estático, o estudo procura demonstrar a eficácia de uma abordagem escalável e superior ao padrão de cuidado atual nas universidades portuguesas, oferecendo uma resposta moderna e eficiente aos desafios da saúde mental no contexto académico.</a:t>
-            </a:r>
-          </a:p>
-          <a:p>
-            <a:pPr marL="0" lvl="0" indent="0" algn="ctr">
-              <a:lnSpc>
-                <a:spcPts val="3431"/>
-              </a:lnSpc>
-            </a:pPr>
-            <a:endParaRPr lang="en-US" sz="2499">
+            <a:endParaRPr lang="en-US" sz="3500" b="1" dirty="0">
               <a:solidFill>
                 <a:srgbClr val="000000"/>
               </a:solidFill>
-              <a:latin typeface="Calibri (MS)"/>
+              <a:latin typeface="Calibri (MS)" panose="020B0604020202020204" charset="0"/>
+              <a:ea typeface="Calibri (MS) Bold"/>
+              <a:cs typeface="Calibri (MS)" panose="020B0604020202020204" charset="0"/>
+              <a:sym typeface="Calibri (MS) Bold"/>
+            </a:endParaRPr>
+          </a:p>
+          <a:p>
+            <a:pPr lvl="0" algn="just">
+              <a:lnSpc>
+                <a:spcPct val="150000"/>
+              </a:lnSpc>
+            </a:pPr>
+            <a:r>
+              <a:rPr lang="pt-PT" sz="2500" dirty="0">
+                <a:latin typeface="Calibri (MS)" panose="020B0604020202020204" charset="0"/>
+                <a:cs typeface="Calibri (MS)" panose="020B0604020202020204" charset="0"/>
+              </a:rPr>
+              <a:t>O projeto </a:t>
+            </a:r>
+            <a:r>
+              <a:rPr lang="pt-PT" sz="2500" b="1" dirty="0" err="1">
+                <a:latin typeface="Calibri (MS)" panose="020B0604020202020204" charset="0"/>
+                <a:cs typeface="Calibri (MS)" panose="020B0604020202020204" charset="0"/>
+              </a:rPr>
+              <a:t>MindMove</a:t>
+            </a:r>
+            <a:r>
+              <a:rPr lang="pt-PT" sz="2500" dirty="0">
+                <a:latin typeface="Calibri (MS)" panose="020B0604020202020204" charset="0"/>
+                <a:cs typeface="Calibri (MS)" panose="020B0604020202020204" charset="0"/>
+              </a:rPr>
+              <a:t> colmata esta lacuna através de uma </a:t>
+            </a:r>
+            <a:r>
+              <a:rPr lang="pt-PT" sz="2500" b="1" dirty="0">
+                <a:latin typeface="Calibri (MS)" panose="020B0604020202020204" charset="0"/>
+                <a:cs typeface="Calibri (MS)" panose="020B0604020202020204" charset="0"/>
+              </a:rPr>
+              <a:t>intervenção digital multimodal</a:t>
+            </a:r>
+            <a:r>
+              <a:rPr lang="pt-PT" sz="2500" dirty="0">
+                <a:latin typeface="Calibri (MS)" panose="020B0604020202020204" charset="0"/>
+                <a:cs typeface="Calibri (MS)" panose="020B0604020202020204" charset="0"/>
+              </a:rPr>
+              <a:t> que</a:t>
+            </a:r>
+          </a:p>
+          <a:p>
+            <a:pPr lvl="0" algn="just">
+              <a:lnSpc>
+                <a:spcPct val="150000"/>
+              </a:lnSpc>
+            </a:pPr>
+            <a:r>
+              <a:rPr lang="pt-PT" sz="2500" dirty="0">
+                <a:latin typeface="Calibri (MS)" panose="020B0604020202020204" charset="0"/>
+                <a:cs typeface="Calibri (MS)" panose="020B0604020202020204" charset="0"/>
+              </a:rPr>
+              <a:t>integra </a:t>
+            </a:r>
+            <a:r>
+              <a:rPr lang="pt-PT" sz="2500" b="1" dirty="0" err="1">
+                <a:latin typeface="Calibri (MS)" panose="020B0604020202020204" charset="0"/>
+                <a:cs typeface="Calibri (MS)" panose="020B0604020202020204" charset="0"/>
+              </a:rPr>
+              <a:t>dCBT</a:t>
+            </a:r>
+            <a:r>
+              <a:rPr lang="pt-PT" sz="2500" dirty="0">
+                <a:latin typeface="Calibri (MS)" panose="020B0604020202020204" charset="0"/>
+                <a:cs typeface="Calibri (MS)" panose="020B0604020202020204" charset="0"/>
+              </a:rPr>
+              <a:t> com a monitorização ativa do </a:t>
+            </a:r>
+            <a:r>
+              <a:rPr lang="pt-PT" sz="2500" b="1" dirty="0">
+                <a:latin typeface="Calibri (MS)" panose="020B0604020202020204" charset="0"/>
+                <a:cs typeface="Calibri (MS)" panose="020B0604020202020204" charset="0"/>
+              </a:rPr>
+              <a:t>sono e exercício</a:t>
+            </a:r>
+            <a:r>
+              <a:rPr lang="pt-PT" sz="2500" dirty="0">
+                <a:latin typeface="Calibri (MS)" panose="020B0604020202020204" charset="0"/>
+                <a:cs typeface="Calibri (MS)" panose="020B0604020202020204" charset="0"/>
+              </a:rPr>
+              <a:t>. Focada em sintomas </a:t>
+            </a:r>
+            <a:r>
+              <a:rPr lang="pt-PT" sz="2500" b="1" dirty="0">
+                <a:latin typeface="Calibri (MS)" panose="020B0604020202020204" charset="0"/>
+                <a:cs typeface="Calibri (MS)" panose="020B0604020202020204" charset="0"/>
+              </a:rPr>
+              <a:t>ligeiros a moderados (PHQ-9: 5–14)</a:t>
+            </a:r>
+            <a:r>
+              <a:rPr lang="pt-PT" sz="2500" dirty="0">
+                <a:latin typeface="Calibri (MS)" panose="020B0604020202020204" charset="0"/>
+                <a:cs typeface="Calibri (MS)" panose="020B0604020202020204" charset="0"/>
+              </a:rPr>
+              <a:t>, a aplicação atua de forma preventiva para evitar o agravamento clínico. Ao comparar esta solução com o suporte informativo estático (</a:t>
+            </a:r>
+            <a:r>
+              <a:rPr lang="pt-PT" sz="2500" b="1" dirty="0">
+                <a:latin typeface="Calibri (MS)" panose="020B0604020202020204" charset="0"/>
+                <a:cs typeface="Calibri (MS)" panose="020B0604020202020204" charset="0"/>
+              </a:rPr>
+              <a:t>brochuras</a:t>
+            </a:r>
+            <a:r>
+              <a:rPr lang="pt-PT" sz="2500" dirty="0">
+                <a:latin typeface="Calibri (MS)" panose="020B0604020202020204" charset="0"/>
+                <a:cs typeface="Calibri (MS)" panose="020B0604020202020204" charset="0"/>
+              </a:rPr>
+              <a:t>), o estudo procura demonstrar a eficácia de uma abordagem </a:t>
+            </a:r>
+            <a:r>
+              <a:rPr lang="pt-PT" sz="2500" b="1" dirty="0">
+                <a:latin typeface="Calibri (MS)" panose="020B0604020202020204" charset="0"/>
+                <a:cs typeface="Calibri (MS)" panose="020B0604020202020204" charset="0"/>
+              </a:rPr>
+              <a:t>escalável e superior</a:t>
+            </a:r>
+            <a:r>
+              <a:rPr lang="pt-PT" sz="2500" dirty="0">
+                <a:latin typeface="Calibri (MS)" panose="020B0604020202020204" charset="0"/>
+                <a:cs typeface="Calibri (MS)" panose="020B0604020202020204" charset="0"/>
+              </a:rPr>
+              <a:t> ao padrão de cuidado atual no </a:t>
+            </a:r>
+            <a:r>
+              <a:rPr lang="pt-PT" sz="2500">
+                <a:latin typeface="Calibri (MS)" panose="020B0604020202020204" charset="0"/>
+                <a:cs typeface="Calibri (MS)" panose="020B0604020202020204" charset="0"/>
+              </a:rPr>
+              <a:t>contexto acadêmico </a:t>
+            </a:r>
+            <a:r>
+              <a:rPr lang="pt-PT" sz="2500" dirty="0">
+                <a:latin typeface="Calibri (MS)" panose="020B0604020202020204" charset="0"/>
+                <a:cs typeface="Calibri (MS)" panose="020B0604020202020204" charset="0"/>
+              </a:rPr>
+              <a:t>português.</a:t>
+            </a:r>
+            <a:endParaRPr lang="en-US" sz="2500" dirty="0">
+              <a:solidFill>
+                <a:srgbClr val="000000"/>
+              </a:solidFill>
+              <a:latin typeface="Calibri (MS)" panose="020B0604020202020204" charset="0"/>
               <a:ea typeface="Calibri (MS)"/>
-              <a:cs typeface="Calibri (MS)"/>
+              <a:cs typeface="Calibri (MS)" panose="020B0604020202020204" charset="0"/>
               <a:sym typeface="Calibri (MS)"/>
             </a:endParaRPr>
           </a:p>
@@ -6795,7 +7883,7 @@
         <p:spPr>
           <a:xfrm>
             <a:off x="2310905" y="5713576"/>
-            <a:ext cx="5862565" cy="2222500"/>
+            <a:ext cx="5862565" cy="2824812"/>
           </a:xfrm>
           <a:prstGeom prst="rect">
             <a:avLst/>
@@ -6809,23 +7897,131 @@
           <a:p>
             <a:pPr marL="0" lvl="0" indent="0" algn="just">
               <a:lnSpc>
-                <a:spcPts val="3499"/>
+                <a:spcPct val="150000"/>
               </a:lnSpc>
             </a:pPr>
             <a:r>
-              <a:rPr lang="en-US" sz="2499">
-                <a:solidFill>
-                  <a:srgbClr val="000000"/>
-                </a:solidFill>
-                <a:latin typeface="Calibri (MS)"/>
-                <a:ea typeface="Calibri (MS)"/>
-                <a:cs typeface="Calibri (MS)"/>
-                <a:sym typeface="Calibri (MS)"/>
-              </a:rPr>
-              <a:t>Avaliar a eficácia da intervenção digital MindMove na </a:t>
-            </a:r>
-            <a:r>
-              <a:rPr lang="en-US" sz="2499" b="1">
+              <a:rPr lang="en-US" sz="2499" dirty="0" err="1">
+                <a:solidFill>
+                  <a:srgbClr val="000000"/>
+                </a:solidFill>
+                <a:latin typeface="Calibri (MS)"/>
+                <a:ea typeface="Calibri (MS)"/>
+                <a:cs typeface="Calibri (MS)"/>
+                <a:sym typeface="Calibri (MS)"/>
+              </a:rPr>
+              <a:t>Avaliar</a:t>
+            </a:r>
+            <a:r>
+              <a:rPr lang="en-US" sz="2499" dirty="0">
+                <a:solidFill>
+                  <a:srgbClr val="000000"/>
+                </a:solidFill>
+                <a:latin typeface="Calibri (MS)"/>
+                <a:ea typeface="Calibri (MS)"/>
+                <a:cs typeface="Calibri (MS)"/>
+                <a:sym typeface="Calibri (MS)"/>
+              </a:rPr>
+              <a:t> a </a:t>
+            </a:r>
+            <a:r>
+              <a:rPr lang="en-US" sz="2499" dirty="0" err="1">
+                <a:solidFill>
+                  <a:srgbClr val="000000"/>
+                </a:solidFill>
+                <a:latin typeface="Calibri (MS)"/>
+                <a:ea typeface="Calibri (MS)"/>
+                <a:cs typeface="Calibri (MS)"/>
+                <a:sym typeface="Calibri (MS)"/>
+              </a:rPr>
+              <a:t>eficácia</a:t>
+            </a:r>
+            <a:r>
+              <a:rPr lang="en-US" sz="2499" dirty="0">
+                <a:solidFill>
+                  <a:srgbClr val="000000"/>
+                </a:solidFill>
+                <a:latin typeface="Calibri (MS)"/>
+                <a:ea typeface="Calibri (MS)"/>
+                <a:cs typeface="Calibri (MS)"/>
+                <a:sym typeface="Calibri (MS)"/>
+              </a:rPr>
+              <a:t> da </a:t>
+            </a:r>
+            <a:r>
+              <a:rPr lang="en-US" sz="2499" dirty="0" err="1">
+                <a:solidFill>
+                  <a:srgbClr val="000000"/>
+                </a:solidFill>
+                <a:latin typeface="Calibri (MS)"/>
+                <a:ea typeface="Calibri (MS)"/>
+                <a:cs typeface="Calibri (MS)"/>
+                <a:sym typeface="Calibri (MS)"/>
+              </a:rPr>
+              <a:t>intervenção</a:t>
+            </a:r>
+            <a:r>
+              <a:rPr lang="en-US" sz="2499" dirty="0">
+                <a:solidFill>
+                  <a:srgbClr val="000000"/>
+                </a:solidFill>
+                <a:latin typeface="Calibri (MS)"/>
+                <a:ea typeface="Calibri (MS)"/>
+                <a:cs typeface="Calibri (MS)"/>
+                <a:sym typeface="Calibri (MS)"/>
+              </a:rPr>
+              <a:t> digital </a:t>
+            </a:r>
+            <a:r>
+              <a:rPr lang="en-US" sz="2499" dirty="0" err="1">
+                <a:solidFill>
+                  <a:srgbClr val="000000"/>
+                </a:solidFill>
+                <a:latin typeface="Calibri (MS)"/>
+                <a:ea typeface="Calibri (MS)"/>
+                <a:cs typeface="Calibri (MS)"/>
+                <a:sym typeface="Calibri (MS)"/>
+              </a:rPr>
+              <a:t>MindMove</a:t>
+            </a:r>
+            <a:r>
+              <a:rPr lang="en-US" sz="2499" dirty="0">
+                <a:solidFill>
+                  <a:srgbClr val="000000"/>
+                </a:solidFill>
+                <a:latin typeface="Calibri (MS)"/>
+                <a:ea typeface="Calibri (MS)"/>
+                <a:cs typeface="Calibri (MS)"/>
+                <a:sym typeface="Calibri (MS)"/>
+              </a:rPr>
+              <a:t> </a:t>
+            </a:r>
+            <a:r>
+              <a:rPr lang="en-US" sz="2499" dirty="0" err="1">
+                <a:solidFill>
+                  <a:srgbClr val="000000"/>
+                </a:solidFill>
+                <a:latin typeface="Calibri (MS)"/>
+                <a:ea typeface="Calibri (MS)"/>
+                <a:cs typeface="Calibri (MS)"/>
+                <a:sym typeface="Calibri (MS)"/>
+              </a:rPr>
+              <a:t>na</a:t>
+            </a:r>
+            <a:r>
+              <a:rPr lang="en-US" sz="2499" dirty="0">
+                <a:solidFill>
+                  <a:srgbClr val="000000"/>
+                </a:solidFill>
+                <a:latin typeface="Calibri (MS)"/>
+                <a:ea typeface="Calibri (MS)"/>
+                <a:cs typeface="Calibri (MS)"/>
+                <a:sym typeface="Calibri (MS)"/>
+              </a:rPr>
+              <a:t> </a:t>
+            </a:r>
+            <a:r>
+              <a:rPr lang="en-US" sz="2499" b="1" dirty="0" err="1">
                 <a:solidFill>
                   <a:srgbClr val="000000"/>
                 </a:solidFill>
@@ -6834,19 +8030,211 @@
                 <a:cs typeface="Calibri (MS) Bold"/>
                 <a:sym typeface="Calibri (MS) Bold"/>
               </a:rPr>
-              <a:t>redução dos sintomas depressivos</a:t>
-            </a:r>
-            <a:r>
-              <a:rPr lang="en-US" sz="2499">
-                <a:solidFill>
-                  <a:srgbClr val="000000"/>
-                </a:solidFill>
-                <a:latin typeface="Calibri (MS)"/>
-                <a:ea typeface="Calibri (MS)"/>
-                <a:cs typeface="Calibri (MS)"/>
-                <a:sym typeface="Calibri (MS)"/>
-              </a:rPr>
-              <a:t>, medidos através do questionário PHQ-9, em estudantes universitários.</a:t>
+              <a:t>redução</a:t>
+            </a:r>
+            <a:r>
+              <a:rPr lang="en-US" sz="2499" b="1" dirty="0">
+                <a:solidFill>
+                  <a:srgbClr val="000000"/>
+                </a:solidFill>
+                <a:latin typeface="Calibri (MS) Bold"/>
+                <a:ea typeface="Calibri (MS) Bold"/>
+                <a:cs typeface="Calibri (MS) Bold"/>
+                <a:sym typeface="Calibri (MS) Bold"/>
+              </a:rPr>
+              <a:t> dos </a:t>
+            </a:r>
+            <a:r>
+              <a:rPr lang="en-US" sz="2499" b="1" dirty="0" err="1">
+                <a:solidFill>
+                  <a:srgbClr val="000000"/>
+                </a:solidFill>
+                <a:latin typeface="Calibri (MS) Bold"/>
+                <a:ea typeface="Calibri (MS) Bold"/>
+                <a:cs typeface="Calibri (MS) Bold"/>
+                <a:sym typeface="Calibri (MS) Bold"/>
+              </a:rPr>
+              <a:t>sintomas</a:t>
+            </a:r>
+            <a:r>
+              <a:rPr lang="en-US" sz="2499" b="1" dirty="0">
+                <a:solidFill>
+                  <a:srgbClr val="000000"/>
+                </a:solidFill>
+                <a:latin typeface="Calibri (MS) Bold"/>
+                <a:ea typeface="Calibri (MS) Bold"/>
+                <a:cs typeface="Calibri (MS) Bold"/>
+                <a:sym typeface="Calibri (MS) Bold"/>
+              </a:rPr>
+              <a:t> </a:t>
+            </a:r>
+            <a:r>
+              <a:rPr lang="en-US" sz="2499" b="1" dirty="0" err="1">
+                <a:solidFill>
+                  <a:srgbClr val="000000"/>
+                </a:solidFill>
+                <a:latin typeface="Calibri (MS) Bold"/>
+                <a:ea typeface="Calibri (MS) Bold"/>
+                <a:cs typeface="Calibri (MS) Bold"/>
+                <a:sym typeface="Calibri (MS) Bold"/>
+              </a:rPr>
+              <a:t>depressivos</a:t>
+            </a:r>
+            <a:r>
+              <a:rPr lang="en-US" sz="2499" dirty="0">
+                <a:solidFill>
+                  <a:srgbClr val="000000"/>
+                </a:solidFill>
+                <a:latin typeface="Calibri (MS)"/>
+                <a:ea typeface="Calibri (MS)"/>
+                <a:cs typeface="Calibri (MS)"/>
+                <a:sym typeface="Calibri (MS)"/>
+              </a:rPr>
+              <a:t>, </a:t>
+            </a:r>
+            <a:r>
+              <a:rPr lang="en-US" sz="2499" dirty="0" err="1">
+                <a:solidFill>
+                  <a:srgbClr val="000000"/>
+                </a:solidFill>
+                <a:latin typeface="Calibri (MS)"/>
+                <a:ea typeface="Calibri (MS)"/>
+                <a:cs typeface="Calibri (MS)"/>
+                <a:sym typeface="Calibri (MS)"/>
+              </a:rPr>
+              <a:t>medidos</a:t>
+            </a:r>
+            <a:r>
+              <a:rPr lang="en-US" sz="2499" dirty="0">
+                <a:solidFill>
+                  <a:srgbClr val="000000"/>
+                </a:solidFill>
+                <a:latin typeface="Calibri (MS)"/>
+                <a:ea typeface="Calibri (MS)"/>
+                <a:cs typeface="Calibri (MS)"/>
+                <a:sym typeface="Calibri (MS)"/>
+              </a:rPr>
+              <a:t> </a:t>
+            </a:r>
+            <a:r>
+              <a:rPr lang="en-US" sz="2499" dirty="0" err="1">
+                <a:solidFill>
+                  <a:srgbClr val="000000"/>
+                </a:solidFill>
+                <a:latin typeface="Calibri (MS)"/>
+                <a:ea typeface="Calibri (MS)"/>
+                <a:cs typeface="Calibri (MS)"/>
+                <a:sym typeface="Calibri (MS)"/>
+              </a:rPr>
+              <a:t>através</a:t>
+            </a:r>
+            <a:r>
+              <a:rPr lang="en-US" sz="2499" dirty="0">
+                <a:solidFill>
+                  <a:srgbClr val="000000"/>
+                </a:solidFill>
+                <a:latin typeface="Calibri (MS)"/>
+                <a:ea typeface="Calibri (MS)"/>
+                <a:cs typeface="Calibri (MS)"/>
+                <a:sym typeface="Calibri (MS)"/>
+              </a:rPr>
+              <a:t> do </a:t>
+            </a:r>
+            <a:r>
+              <a:rPr lang="en-US" sz="2499" dirty="0" err="1">
+                <a:solidFill>
+                  <a:srgbClr val="000000"/>
+                </a:solidFill>
+                <a:latin typeface="Calibri (MS)"/>
+                <a:ea typeface="Calibri (MS)"/>
+                <a:cs typeface="Calibri (MS)"/>
+                <a:sym typeface="Calibri (MS)"/>
+              </a:rPr>
+              <a:t>questionário</a:t>
+            </a:r>
+            <a:r>
+              <a:rPr lang="en-US" sz="2499" dirty="0">
+                <a:solidFill>
+                  <a:srgbClr val="000000"/>
+                </a:solidFill>
+                <a:latin typeface="Calibri (MS)"/>
+                <a:ea typeface="Calibri (MS)"/>
+                <a:cs typeface="Calibri (MS)"/>
+                <a:sym typeface="Calibri (MS)"/>
+              </a:rPr>
+              <a:t> PHQ-9, </a:t>
+            </a:r>
+            <a:r>
+              <a:rPr lang="en-US" sz="2499" dirty="0" err="1">
+                <a:solidFill>
+                  <a:srgbClr val="000000"/>
+                </a:solidFill>
+                <a:latin typeface="Calibri (MS)"/>
+                <a:ea typeface="Calibri (MS)"/>
+                <a:cs typeface="Calibri (MS)"/>
+                <a:sym typeface="Calibri (MS)"/>
+              </a:rPr>
+              <a:t>em</a:t>
+            </a:r>
+            <a:r>
+              <a:rPr lang="en-US" sz="2499" dirty="0">
+                <a:solidFill>
+                  <a:srgbClr val="000000"/>
+                </a:solidFill>
+                <a:latin typeface="Calibri (MS)"/>
+                <a:ea typeface="Calibri (MS)"/>
+                <a:cs typeface="Calibri (MS)"/>
+                <a:sym typeface="Calibri (MS)"/>
+              </a:rPr>
+              <a:t> </a:t>
+            </a:r>
+            <a:r>
+              <a:rPr lang="en-US" sz="2499" dirty="0" err="1">
+                <a:solidFill>
+                  <a:srgbClr val="000000"/>
+                </a:solidFill>
+                <a:latin typeface="Calibri (MS)"/>
+                <a:ea typeface="Calibri (MS)"/>
+                <a:cs typeface="Calibri (MS)"/>
+                <a:sym typeface="Calibri (MS)"/>
+              </a:rPr>
+              <a:t>estudantes</a:t>
+            </a:r>
+            <a:r>
+              <a:rPr lang="en-US" sz="2499" dirty="0">
+                <a:solidFill>
+                  <a:srgbClr val="000000"/>
+                </a:solidFill>
+                <a:latin typeface="Calibri (MS)"/>
+                <a:ea typeface="Calibri (MS)"/>
+                <a:cs typeface="Calibri (MS)"/>
+                <a:sym typeface="Calibri (MS)"/>
+              </a:rPr>
+              <a:t> </a:t>
+            </a:r>
+            <a:r>
+              <a:rPr lang="en-US" sz="2499" dirty="0" err="1">
+                <a:solidFill>
+                  <a:srgbClr val="000000"/>
+                </a:solidFill>
+                <a:latin typeface="Calibri (MS)"/>
+                <a:ea typeface="Calibri (MS)"/>
+                <a:cs typeface="Calibri (MS)"/>
+                <a:sym typeface="Calibri (MS)"/>
+              </a:rPr>
+              <a:t>universitários</a:t>
+            </a:r>
+            <a:r>
+              <a:rPr lang="en-US" sz="2499" dirty="0">
+                <a:solidFill>
+                  <a:srgbClr val="000000"/>
+                </a:solidFill>
+                <a:latin typeface="Calibri (MS)"/>
+                <a:ea typeface="Calibri (MS)"/>
+                <a:cs typeface="Calibri (MS)"/>
+                <a:sym typeface="Calibri (MS)"/>
+              </a:rPr>
+              <a:t>.</a:t>
             </a:r>
           </a:p>
         </p:txBody>
@@ -7117,7 +8505,7 @@
         <p:spPr>
           <a:xfrm>
             <a:off x="10140211" y="5713576"/>
-            <a:ext cx="5862565" cy="1784350"/>
+            <a:ext cx="5862565" cy="2247923"/>
           </a:xfrm>
           <a:prstGeom prst="rect">
             <a:avLst/>
@@ -7131,23 +8519,35 @@
           <a:p>
             <a:pPr marL="0" lvl="0" indent="0" algn="just">
               <a:lnSpc>
-                <a:spcPts val="3499"/>
+                <a:spcPct val="150000"/>
               </a:lnSpc>
             </a:pPr>
             <a:r>
-              <a:rPr lang="en-US" sz="2499">
-                <a:solidFill>
-                  <a:srgbClr val="000000"/>
-                </a:solidFill>
-                <a:latin typeface="Calibri (MS)"/>
-                <a:ea typeface="Calibri (MS)"/>
-                <a:cs typeface="Calibri (MS)"/>
-                <a:sym typeface="Calibri (MS)"/>
-              </a:rPr>
-              <a:t>Avaliar o </a:t>
-            </a:r>
-            <a:r>
-              <a:rPr lang="en-US" sz="2499" b="1">
+              <a:rPr lang="en-US" sz="2499" dirty="0" err="1">
+                <a:solidFill>
+                  <a:srgbClr val="000000"/>
+                </a:solidFill>
+                <a:latin typeface="Calibri (MS)"/>
+                <a:ea typeface="Calibri (MS)"/>
+                <a:cs typeface="Calibri (MS)"/>
+                <a:sym typeface="Calibri (MS)"/>
+              </a:rPr>
+              <a:t>Avaliar</a:t>
+            </a:r>
+            <a:r>
+              <a:rPr lang="en-US" sz="2499" dirty="0">
+                <a:solidFill>
+                  <a:srgbClr val="000000"/>
+                </a:solidFill>
+                <a:latin typeface="Calibri (MS)"/>
+                <a:ea typeface="Calibri (MS)"/>
+                <a:cs typeface="Calibri (MS)"/>
+                <a:sym typeface="Calibri (MS)"/>
+              </a:rPr>
+              <a:t> o </a:t>
+            </a:r>
+            <a:r>
+              <a:rPr lang="en-US" sz="2499" b="1" dirty="0" err="1">
                 <a:solidFill>
                   <a:srgbClr val="000000"/>
                 </a:solidFill>
@@ -7156,22 +8556,10 @@
                 <a:cs typeface="Calibri (MS) Bold"/>
                 <a:sym typeface="Calibri (MS) Bold"/>
               </a:rPr>
-              <a:t>impacto na ansiedade </a:t>
-            </a:r>
-            <a:r>
-              <a:rPr lang="en-US" sz="2499">
-                <a:solidFill>
-                  <a:srgbClr val="000000"/>
-                </a:solidFill>
-                <a:latin typeface="Calibri (MS)"/>
-                <a:ea typeface="Calibri (MS)"/>
-                <a:cs typeface="Calibri (MS)"/>
-                <a:sym typeface="Calibri (MS)"/>
-              </a:rPr>
-              <a:t>(GAD-7), </a:t>
-            </a:r>
-            <a:r>
-              <a:rPr lang="en-US" sz="2499" b="1">
+              <a:t>impacto</a:t>
+            </a:r>
+            <a:r>
+              <a:rPr lang="en-US" sz="2499" b="1" dirty="0">
                 <a:solidFill>
                   <a:srgbClr val="000000"/>
                 </a:solidFill>
@@ -7180,22 +8568,10 @@
                 <a:cs typeface="Calibri (MS) Bold"/>
                 <a:sym typeface="Calibri (MS) Bold"/>
               </a:rPr>
-              <a:t>qualidade do sono</a:t>
-            </a:r>
-            <a:r>
-              <a:rPr lang="en-US" sz="2499">
-                <a:solidFill>
-                  <a:srgbClr val="000000"/>
-                </a:solidFill>
-                <a:latin typeface="Calibri (MS)"/>
-                <a:ea typeface="Calibri (MS)"/>
-                <a:cs typeface="Calibri (MS)"/>
-                <a:sym typeface="Calibri (MS)"/>
-              </a:rPr>
-              <a:t> (PSQI), </a:t>
-            </a:r>
-            <a:r>
-              <a:rPr lang="en-US" sz="2499" b="1">
+              <a:t> </a:t>
+            </a:r>
+            <a:r>
+              <a:rPr lang="en-US" sz="2499" b="1" dirty="0" err="1">
                 <a:solidFill>
                   <a:srgbClr val="000000"/>
                 </a:solidFill>
@@ -7204,22 +8580,10 @@
                 <a:cs typeface="Calibri (MS) Bold"/>
                 <a:sym typeface="Calibri (MS) Bold"/>
               </a:rPr>
-              <a:t>níveis de atividade física</a:t>
-            </a:r>
-            <a:r>
-              <a:rPr lang="en-US" sz="2499">
-                <a:solidFill>
-                  <a:srgbClr val="000000"/>
-                </a:solidFill>
-                <a:latin typeface="Calibri (MS)"/>
-                <a:ea typeface="Calibri (MS)"/>
-                <a:cs typeface="Calibri (MS)"/>
-                <a:sym typeface="Calibri (MS)"/>
-              </a:rPr>
-              <a:t>, </a:t>
-            </a:r>
-            <a:r>
-              <a:rPr lang="en-US" sz="2499" b="1">
+              <a:t>na</a:t>
+            </a:r>
+            <a:r>
+              <a:rPr lang="en-US" sz="2499" b="1" dirty="0">
                 <a:solidFill>
                   <a:srgbClr val="000000"/>
                 </a:solidFill>
@@ -7228,22 +8592,10 @@
                 <a:cs typeface="Calibri (MS) Bold"/>
                 <a:sym typeface="Calibri (MS) Bold"/>
               </a:rPr>
-              <a:t>adesão à intervenção</a:t>
-            </a:r>
-            <a:r>
-              <a:rPr lang="en-US" sz="2499">
-                <a:solidFill>
-                  <a:srgbClr val="000000"/>
-                </a:solidFill>
-                <a:latin typeface="Calibri (MS)"/>
-                <a:ea typeface="Calibri (MS)"/>
-                <a:cs typeface="Calibri (MS)"/>
-                <a:sym typeface="Calibri (MS)"/>
-              </a:rPr>
-              <a:t> e </a:t>
-            </a:r>
-            <a:r>
-              <a:rPr lang="en-US" sz="2499" b="1">
+              <a:t> </a:t>
+            </a:r>
+            <a:r>
+              <a:rPr lang="en-US" sz="2499" b="1" dirty="0" err="1">
                 <a:solidFill>
                   <a:srgbClr val="000000"/>
                 </a:solidFill>
@@ -7252,10 +8604,250 @@
                 <a:cs typeface="Calibri (MS) Bold"/>
                 <a:sym typeface="Calibri (MS) Bold"/>
               </a:rPr>
-              <a:t>usabilidade da aplicação </a:t>
-            </a:r>
-            <a:r>
-              <a:rPr lang="en-US" sz="2499">
+              <a:t>ansiedade</a:t>
+            </a:r>
+            <a:r>
+              <a:rPr lang="en-US" sz="2499" b="1" dirty="0">
+                <a:solidFill>
+                  <a:srgbClr val="000000"/>
+                </a:solidFill>
+                <a:latin typeface="Calibri (MS) Bold"/>
+                <a:ea typeface="Calibri (MS) Bold"/>
+                <a:cs typeface="Calibri (MS) Bold"/>
+                <a:sym typeface="Calibri (MS) Bold"/>
+              </a:rPr>
+              <a:t> </a:t>
+            </a:r>
+            <a:r>
+              <a:rPr lang="en-US" sz="2499" dirty="0">
+                <a:solidFill>
+                  <a:srgbClr val="000000"/>
+                </a:solidFill>
+                <a:latin typeface="Calibri (MS)"/>
+                <a:ea typeface="Calibri (MS)"/>
+                <a:cs typeface="Calibri (MS)"/>
+                <a:sym typeface="Calibri (MS)"/>
+              </a:rPr>
+              <a:t>(GAD-7), </a:t>
+            </a:r>
+            <a:r>
+              <a:rPr lang="en-US" sz="2499" b="1" dirty="0" err="1">
+                <a:solidFill>
+                  <a:srgbClr val="000000"/>
+                </a:solidFill>
+                <a:latin typeface="Calibri (MS) Bold"/>
+                <a:ea typeface="Calibri (MS) Bold"/>
+                <a:cs typeface="Calibri (MS) Bold"/>
+                <a:sym typeface="Calibri (MS) Bold"/>
+              </a:rPr>
+              <a:t>qualidade</a:t>
+            </a:r>
+            <a:r>
+              <a:rPr lang="en-US" sz="2499" b="1" dirty="0">
+                <a:solidFill>
+                  <a:srgbClr val="000000"/>
+                </a:solidFill>
+                <a:latin typeface="Calibri (MS) Bold"/>
+                <a:ea typeface="Calibri (MS) Bold"/>
+                <a:cs typeface="Calibri (MS) Bold"/>
+                <a:sym typeface="Calibri (MS) Bold"/>
+              </a:rPr>
+              <a:t> do </a:t>
+            </a:r>
+            <a:r>
+              <a:rPr lang="en-US" sz="2499" b="1" dirty="0" err="1">
+                <a:solidFill>
+                  <a:srgbClr val="000000"/>
+                </a:solidFill>
+                <a:latin typeface="Calibri (MS) Bold"/>
+                <a:ea typeface="Calibri (MS) Bold"/>
+                <a:cs typeface="Calibri (MS) Bold"/>
+                <a:sym typeface="Calibri (MS) Bold"/>
+              </a:rPr>
+              <a:t>sono</a:t>
+            </a:r>
+            <a:r>
+              <a:rPr lang="en-US" sz="2499" dirty="0">
+                <a:solidFill>
+                  <a:srgbClr val="000000"/>
+                </a:solidFill>
+                <a:latin typeface="Calibri (MS)"/>
+                <a:ea typeface="Calibri (MS)"/>
+                <a:cs typeface="Calibri (MS)"/>
+                <a:sym typeface="Calibri (MS)"/>
+              </a:rPr>
+              <a:t> (PSQI), </a:t>
+            </a:r>
+            <a:r>
+              <a:rPr lang="en-US" sz="2499" b="1" dirty="0" err="1">
+                <a:solidFill>
+                  <a:srgbClr val="000000"/>
+                </a:solidFill>
+                <a:latin typeface="Calibri (MS) Bold"/>
+                <a:ea typeface="Calibri (MS) Bold"/>
+                <a:cs typeface="Calibri (MS) Bold"/>
+                <a:sym typeface="Calibri (MS) Bold"/>
+              </a:rPr>
+              <a:t>níveis</a:t>
+            </a:r>
+            <a:r>
+              <a:rPr lang="en-US" sz="2499" b="1" dirty="0">
+                <a:solidFill>
+                  <a:srgbClr val="000000"/>
+                </a:solidFill>
+                <a:latin typeface="Calibri (MS) Bold"/>
+                <a:ea typeface="Calibri (MS) Bold"/>
+                <a:cs typeface="Calibri (MS) Bold"/>
+                <a:sym typeface="Calibri (MS) Bold"/>
+              </a:rPr>
+              <a:t> de </a:t>
+            </a:r>
+            <a:r>
+              <a:rPr lang="en-US" sz="2499" b="1" dirty="0" err="1">
+                <a:solidFill>
+                  <a:srgbClr val="000000"/>
+                </a:solidFill>
+                <a:latin typeface="Calibri (MS) Bold"/>
+                <a:ea typeface="Calibri (MS) Bold"/>
+                <a:cs typeface="Calibri (MS) Bold"/>
+                <a:sym typeface="Calibri (MS) Bold"/>
+              </a:rPr>
+              <a:t>atividade</a:t>
+            </a:r>
+            <a:r>
+              <a:rPr lang="en-US" sz="2499" b="1" dirty="0">
+                <a:solidFill>
+                  <a:srgbClr val="000000"/>
+                </a:solidFill>
+                <a:latin typeface="Calibri (MS) Bold"/>
+                <a:ea typeface="Calibri (MS) Bold"/>
+                <a:cs typeface="Calibri (MS) Bold"/>
+                <a:sym typeface="Calibri (MS) Bold"/>
+              </a:rPr>
+              <a:t> </a:t>
+            </a:r>
+            <a:r>
+              <a:rPr lang="en-US" sz="2499" b="1" dirty="0" err="1">
+                <a:solidFill>
+                  <a:srgbClr val="000000"/>
+                </a:solidFill>
+                <a:latin typeface="Calibri (MS) Bold"/>
+                <a:ea typeface="Calibri (MS) Bold"/>
+                <a:cs typeface="Calibri (MS) Bold"/>
+                <a:sym typeface="Calibri (MS) Bold"/>
+              </a:rPr>
+              <a:t>física</a:t>
+            </a:r>
+            <a:r>
+              <a:rPr lang="en-US" sz="2499" dirty="0">
+                <a:solidFill>
+                  <a:srgbClr val="000000"/>
+                </a:solidFill>
+                <a:latin typeface="Calibri (MS)"/>
+                <a:ea typeface="Calibri (MS)"/>
+                <a:cs typeface="Calibri (MS)"/>
+                <a:sym typeface="Calibri (MS)"/>
+              </a:rPr>
+              <a:t>, </a:t>
+            </a:r>
+            <a:r>
+              <a:rPr lang="en-US" sz="2499" b="1" dirty="0" err="1">
+                <a:solidFill>
+                  <a:srgbClr val="000000"/>
+                </a:solidFill>
+                <a:latin typeface="Calibri (MS) Bold"/>
+                <a:ea typeface="Calibri (MS) Bold"/>
+                <a:cs typeface="Calibri (MS) Bold"/>
+                <a:sym typeface="Calibri (MS) Bold"/>
+              </a:rPr>
+              <a:t>adesão</a:t>
+            </a:r>
+            <a:r>
+              <a:rPr lang="en-US" sz="2499" b="1" dirty="0">
+                <a:solidFill>
+                  <a:srgbClr val="000000"/>
+                </a:solidFill>
+                <a:latin typeface="Calibri (MS) Bold"/>
+                <a:ea typeface="Calibri (MS) Bold"/>
+                <a:cs typeface="Calibri (MS) Bold"/>
+                <a:sym typeface="Calibri (MS) Bold"/>
+              </a:rPr>
+              <a:t> à </a:t>
+            </a:r>
+            <a:r>
+              <a:rPr lang="en-US" sz="2499" b="1" dirty="0" err="1">
+                <a:solidFill>
+                  <a:srgbClr val="000000"/>
+                </a:solidFill>
+                <a:latin typeface="Calibri (MS) Bold"/>
+                <a:ea typeface="Calibri (MS) Bold"/>
+                <a:cs typeface="Calibri (MS) Bold"/>
+                <a:sym typeface="Calibri (MS) Bold"/>
+              </a:rPr>
+              <a:t>intervenção</a:t>
+            </a:r>
+            <a:r>
+              <a:rPr lang="en-US" sz="2499" dirty="0">
+                <a:solidFill>
+                  <a:srgbClr val="000000"/>
+                </a:solidFill>
+                <a:latin typeface="Calibri (MS)"/>
+                <a:ea typeface="Calibri (MS)"/>
+                <a:cs typeface="Calibri (MS)"/>
+                <a:sym typeface="Calibri (MS)"/>
+              </a:rPr>
+              <a:t> e </a:t>
+            </a:r>
+            <a:r>
+              <a:rPr lang="en-US" sz="2499" b="1" dirty="0" err="1">
+                <a:solidFill>
+                  <a:srgbClr val="000000"/>
+                </a:solidFill>
+                <a:latin typeface="Calibri (MS) Bold"/>
+                <a:ea typeface="Calibri (MS) Bold"/>
+                <a:cs typeface="Calibri (MS) Bold"/>
+                <a:sym typeface="Calibri (MS) Bold"/>
+              </a:rPr>
+              <a:t>usabilidade</a:t>
+            </a:r>
+            <a:r>
+              <a:rPr lang="en-US" sz="2499" b="1" dirty="0">
+                <a:solidFill>
+                  <a:srgbClr val="000000"/>
+                </a:solidFill>
+                <a:latin typeface="Calibri (MS) Bold"/>
+                <a:ea typeface="Calibri (MS) Bold"/>
+                <a:cs typeface="Calibri (MS) Bold"/>
+                <a:sym typeface="Calibri (MS) Bold"/>
+              </a:rPr>
+              <a:t> da </a:t>
+            </a:r>
+            <a:r>
+              <a:rPr lang="en-US" sz="2499" b="1" dirty="0" err="1">
+                <a:solidFill>
+                  <a:srgbClr val="000000"/>
+                </a:solidFill>
+                <a:latin typeface="Calibri (MS) Bold"/>
+                <a:ea typeface="Calibri (MS) Bold"/>
+                <a:cs typeface="Calibri (MS) Bold"/>
+                <a:sym typeface="Calibri (MS) Bold"/>
+              </a:rPr>
+              <a:t>aplicação</a:t>
+            </a:r>
+            <a:r>
+              <a:rPr lang="en-US" sz="2499" b="1" dirty="0">
+                <a:solidFill>
+                  <a:srgbClr val="000000"/>
+                </a:solidFill>
+                <a:latin typeface="Calibri (MS) Bold"/>
+                <a:ea typeface="Calibri (MS) Bold"/>
+                <a:cs typeface="Calibri (MS) Bold"/>
+                <a:sym typeface="Calibri (MS) Bold"/>
+              </a:rPr>
+              <a:t> </a:t>
+            </a:r>
+            <a:r>
+              <a:rPr lang="en-US" sz="2499" dirty="0">
                 <a:solidFill>
                   <a:srgbClr val="000000"/>
                 </a:solidFill>
@@ -7848,7 +9440,7 @@
         <p:spPr>
           <a:xfrm>
             <a:off x="2163650" y="4401136"/>
-            <a:ext cx="13960701" cy="3089894"/>
+            <a:ext cx="13960701" cy="3744871"/>
           </a:xfrm>
           <a:prstGeom prst="rect">
             <a:avLst/>
@@ -7862,11 +9454,11 @@
           <a:p>
             <a:pPr algn="just">
               <a:lnSpc>
-                <a:spcPts val="3499"/>
+                <a:spcPct val="150000"/>
               </a:lnSpc>
             </a:pPr>
             <a:r>
-              <a:rPr lang="en-US" sz="2499" b="1">
+              <a:rPr lang="en-US" sz="2499" b="1" dirty="0" err="1">
                 <a:solidFill>
                   <a:srgbClr val="000000"/>
                 </a:solidFill>
@@ -7875,28 +9467,364 @@
                 <a:cs typeface="Calibri (MS) Bold"/>
                 <a:sym typeface="Calibri (MS) Bold"/>
               </a:rPr>
-              <a:t>Ensaio clínico randomizado (RCT) paralelo</a:t>
-            </a:r>
-            <a:r>
-              <a:rPr lang="en-US" sz="2499">
-                <a:solidFill>
-                  <a:srgbClr val="000000"/>
-                </a:solidFill>
-                <a:latin typeface="Calibri (MS)"/>
-                <a:ea typeface="Calibri (MS)"/>
-                <a:cs typeface="Calibri (MS)"/>
-                <a:sym typeface="Calibri (MS)"/>
-              </a:rPr>
-              <a:t> com 30 participantes e alocação 1:1. O grupo intervenção utiliza a aplicação MindMove com monitorização, alertas e conteúdo educativo.</a:t>
+              <a:t>Ensaio</a:t>
+            </a:r>
+            <a:r>
+              <a:rPr lang="en-US" sz="2499" b="1" dirty="0">
+                <a:solidFill>
+                  <a:srgbClr val="000000"/>
+                </a:solidFill>
+                <a:latin typeface="Calibri (MS) Bold"/>
+                <a:ea typeface="Calibri (MS) Bold"/>
+                <a:cs typeface="Calibri (MS) Bold"/>
+                <a:sym typeface="Calibri (MS) Bold"/>
+              </a:rPr>
+              <a:t> </a:t>
+            </a:r>
+            <a:r>
+              <a:rPr lang="en-US" sz="2499" b="1" dirty="0" err="1">
+                <a:solidFill>
+                  <a:srgbClr val="000000"/>
+                </a:solidFill>
+                <a:latin typeface="Calibri (MS) Bold"/>
+                <a:ea typeface="Calibri (MS) Bold"/>
+                <a:cs typeface="Calibri (MS) Bold"/>
+                <a:sym typeface="Calibri (MS) Bold"/>
+              </a:rPr>
+              <a:t>clínico</a:t>
+            </a:r>
+            <a:r>
+              <a:rPr lang="en-US" sz="2499" b="1" dirty="0">
+                <a:solidFill>
+                  <a:srgbClr val="000000"/>
+                </a:solidFill>
+                <a:latin typeface="Calibri (MS) Bold"/>
+                <a:ea typeface="Calibri (MS) Bold"/>
+                <a:cs typeface="Calibri (MS) Bold"/>
+                <a:sym typeface="Calibri (MS) Bold"/>
+              </a:rPr>
+              <a:t> </a:t>
+            </a:r>
+            <a:r>
+              <a:rPr lang="en-US" sz="2499" b="1" dirty="0" err="1">
+                <a:solidFill>
+                  <a:srgbClr val="000000"/>
+                </a:solidFill>
+                <a:latin typeface="Calibri (MS) Bold"/>
+                <a:ea typeface="Calibri (MS) Bold"/>
+                <a:cs typeface="Calibri (MS) Bold"/>
+                <a:sym typeface="Calibri (MS) Bold"/>
+              </a:rPr>
+              <a:t>randomizado</a:t>
+            </a:r>
+            <a:r>
+              <a:rPr lang="en-US" sz="2499" b="1" dirty="0">
+                <a:solidFill>
+                  <a:srgbClr val="000000"/>
+                </a:solidFill>
+                <a:latin typeface="Calibri (MS) Bold"/>
+                <a:ea typeface="Calibri (MS) Bold"/>
+                <a:cs typeface="Calibri (MS) Bold"/>
+                <a:sym typeface="Calibri (MS) Bold"/>
+              </a:rPr>
+              <a:t> (RCT) </a:t>
+            </a:r>
+            <a:r>
+              <a:rPr lang="en-US" sz="2499" b="1" dirty="0" err="1">
+                <a:solidFill>
+                  <a:srgbClr val="000000"/>
+                </a:solidFill>
+                <a:latin typeface="Calibri (MS) Bold"/>
+                <a:ea typeface="Calibri (MS) Bold"/>
+                <a:cs typeface="Calibri (MS) Bold"/>
+                <a:sym typeface="Calibri (MS) Bold"/>
+              </a:rPr>
+              <a:t>paralelo</a:t>
+            </a:r>
+            <a:r>
+              <a:rPr lang="en-US" sz="2499" dirty="0">
+                <a:solidFill>
+                  <a:srgbClr val="000000"/>
+                </a:solidFill>
+                <a:latin typeface="Calibri (MS)"/>
+                <a:ea typeface="Calibri (MS)"/>
+                <a:cs typeface="Calibri (MS)"/>
+                <a:sym typeface="Calibri (MS)"/>
+              </a:rPr>
+              <a:t> com 30 </a:t>
+            </a:r>
+            <a:r>
+              <a:rPr lang="en-US" sz="2499" dirty="0" err="1">
+                <a:solidFill>
+                  <a:srgbClr val="000000"/>
+                </a:solidFill>
+                <a:latin typeface="Calibri (MS)"/>
+                <a:ea typeface="Calibri (MS)"/>
+                <a:cs typeface="Calibri (MS)"/>
+                <a:sym typeface="Calibri (MS)"/>
+              </a:rPr>
+              <a:t>participantes</a:t>
+            </a:r>
+            <a:r>
+              <a:rPr lang="en-US" sz="2499" dirty="0">
+                <a:solidFill>
+                  <a:srgbClr val="000000"/>
+                </a:solidFill>
+                <a:latin typeface="Calibri (MS)"/>
+                <a:ea typeface="Calibri (MS)"/>
+                <a:cs typeface="Calibri (MS)"/>
+                <a:sym typeface="Calibri (MS)"/>
+              </a:rPr>
+              <a:t> e </a:t>
+            </a:r>
+            <a:r>
+              <a:rPr lang="en-US" sz="2499" dirty="0" err="1">
+                <a:solidFill>
+                  <a:srgbClr val="000000"/>
+                </a:solidFill>
+                <a:latin typeface="Calibri (MS)"/>
+                <a:ea typeface="Calibri (MS)"/>
+                <a:cs typeface="Calibri (MS)"/>
+                <a:sym typeface="Calibri (MS)"/>
+              </a:rPr>
+              <a:t>alocação</a:t>
+            </a:r>
+            <a:r>
+              <a:rPr lang="en-US" sz="2499" dirty="0">
+                <a:solidFill>
+                  <a:srgbClr val="000000"/>
+                </a:solidFill>
+                <a:latin typeface="Calibri (MS)"/>
+                <a:ea typeface="Calibri (MS)"/>
+                <a:cs typeface="Calibri (MS)"/>
+                <a:sym typeface="Calibri (MS)"/>
+              </a:rPr>
+              <a:t> 1:1. O </a:t>
+            </a:r>
+            <a:r>
+              <a:rPr lang="en-US" sz="2499" dirty="0" err="1">
+                <a:solidFill>
+                  <a:srgbClr val="000000"/>
+                </a:solidFill>
+                <a:latin typeface="Calibri (MS)"/>
+                <a:ea typeface="Calibri (MS)"/>
+                <a:cs typeface="Calibri (MS)"/>
+                <a:sym typeface="Calibri (MS)"/>
+              </a:rPr>
+              <a:t>grupo</a:t>
+            </a:r>
+            <a:r>
+              <a:rPr lang="en-US" sz="2499" dirty="0">
+                <a:solidFill>
+                  <a:srgbClr val="000000"/>
+                </a:solidFill>
+                <a:latin typeface="Calibri (MS)"/>
+                <a:ea typeface="Calibri (MS)"/>
+                <a:cs typeface="Calibri (MS)"/>
+                <a:sym typeface="Calibri (MS)"/>
+              </a:rPr>
+              <a:t> </a:t>
+            </a:r>
+            <a:r>
+              <a:rPr lang="en-US" sz="2499" dirty="0" err="1">
+                <a:solidFill>
+                  <a:srgbClr val="000000"/>
+                </a:solidFill>
+                <a:latin typeface="Calibri (MS)"/>
+                <a:ea typeface="Calibri (MS)"/>
+                <a:cs typeface="Calibri (MS)"/>
+                <a:sym typeface="Calibri (MS)"/>
+              </a:rPr>
+              <a:t>intervenção</a:t>
+            </a:r>
+            <a:r>
+              <a:rPr lang="en-US" sz="2499" dirty="0">
+                <a:solidFill>
+                  <a:srgbClr val="000000"/>
+                </a:solidFill>
+                <a:latin typeface="Calibri (MS)"/>
+                <a:ea typeface="Calibri (MS)"/>
+                <a:cs typeface="Calibri (MS)"/>
+                <a:sym typeface="Calibri (MS)"/>
+              </a:rPr>
+              <a:t> </a:t>
+            </a:r>
+            <a:r>
+              <a:rPr lang="en-US" sz="2499" dirty="0" err="1">
+                <a:solidFill>
+                  <a:srgbClr val="000000"/>
+                </a:solidFill>
+                <a:latin typeface="Calibri (MS)"/>
+                <a:ea typeface="Calibri (MS)"/>
+                <a:cs typeface="Calibri (MS)"/>
+                <a:sym typeface="Calibri (MS)"/>
+              </a:rPr>
+              <a:t>utiliza</a:t>
+            </a:r>
+            <a:r>
+              <a:rPr lang="en-US" sz="2499" dirty="0">
+                <a:solidFill>
+                  <a:srgbClr val="000000"/>
+                </a:solidFill>
+                <a:latin typeface="Calibri (MS)"/>
+                <a:ea typeface="Calibri (MS)"/>
+                <a:cs typeface="Calibri (MS)"/>
+                <a:sym typeface="Calibri (MS)"/>
+              </a:rPr>
+              <a:t> a </a:t>
+            </a:r>
+            <a:r>
+              <a:rPr lang="en-US" sz="2499" dirty="0" err="1">
+                <a:solidFill>
+                  <a:srgbClr val="000000"/>
+                </a:solidFill>
+                <a:latin typeface="Calibri (MS)"/>
+                <a:ea typeface="Calibri (MS)"/>
+                <a:cs typeface="Calibri (MS)"/>
+                <a:sym typeface="Calibri (MS)"/>
+              </a:rPr>
+              <a:t>aplicação</a:t>
+            </a:r>
+            <a:r>
+              <a:rPr lang="en-US" sz="2499" dirty="0">
+                <a:solidFill>
+                  <a:srgbClr val="000000"/>
+                </a:solidFill>
+                <a:latin typeface="Calibri (MS)"/>
+                <a:ea typeface="Calibri (MS)"/>
+                <a:cs typeface="Calibri (MS)"/>
+                <a:sym typeface="Calibri (MS)"/>
+              </a:rPr>
+              <a:t> </a:t>
+            </a:r>
+            <a:r>
+              <a:rPr lang="en-US" sz="2499" dirty="0" err="1">
+                <a:solidFill>
+                  <a:srgbClr val="000000"/>
+                </a:solidFill>
+                <a:latin typeface="Calibri (MS)"/>
+                <a:ea typeface="Calibri (MS)"/>
+                <a:cs typeface="Calibri (MS)"/>
+                <a:sym typeface="Calibri (MS)"/>
+              </a:rPr>
+              <a:t>MindMove</a:t>
+            </a:r>
+            <a:r>
+              <a:rPr lang="en-US" sz="2499" dirty="0">
+                <a:solidFill>
+                  <a:srgbClr val="000000"/>
+                </a:solidFill>
+                <a:latin typeface="Calibri (MS)"/>
+                <a:ea typeface="Calibri (MS)"/>
+                <a:cs typeface="Calibri (MS)"/>
+                <a:sym typeface="Calibri (MS)"/>
+              </a:rPr>
+              <a:t> com </a:t>
+            </a:r>
+            <a:r>
+              <a:rPr lang="en-US" sz="2499" dirty="0" err="1">
+                <a:solidFill>
+                  <a:srgbClr val="000000"/>
+                </a:solidFill>
+                <a:latin typeface="Calibri (MS)"/>
+                <a:ea typeface="Calibri (MS)"/>
+                <a:cs typeface="Calibri (MS)"/>
+                <a:sym typeface="Calibri (MS)"/>
+              </a:rPr>
+              <a:t>monitorização</a:t>
+            </a:r>
+            <a:r>
+              <a:rPr lang="en-US" sz="2499" dirty="0">
+                <a:solidFill>
+                  <a:srgbClr val="000000"/>
+                </a:solidFill>
+                <a:latin typeface="Calibri (MS)"/>
+                <a:ea typeface="Calibri (MS)"/>
+                <a:cs typeface="Calibri (MS)"/>
+                <a:sym typeface="Calibri (MS)"/>
+              </a:rPr>
+              <a:t>, </a:t>
+            </a:r>
+            <a:r>
+              <a:rPr lang="en-US" sz="2499" dirty="0" err="1">
+                <a:solidFill>
+                  <a:srgbClr val="000000"/>
+                </a:solidFill>
+                <a:latin typeface="Calibri (MS)"/>
+                <a:ea typeface="Calibri (MS)"/>
+                <a:cs typeface="Calibri (MS)"/>
+                <a:sym typeface="Calibri (MS)"/>
+              </a:rPr>
+              <a:t>alertas</a:t>
+            </a:r>
+            <a:r>
+              <a:rPr lang="en-US" sz="2499" dirty="0">
+                <a:solidFill>
+                  <a:srgbClr val="000000"/>
+                </a:solidFill>
+                <a:latin typeface="Calibri (MS)"/>
+                <a:ea typeface="Calibri (MS)"/>
+                <a:cs typeface="Calibri (MS)"/>
+                <a:sym typeface="Calibri (MS)"/>
+              </a:rPr>
+              <a:t> e </a:t>
+            </a:r>
+            <a:r>
+              <a:rPr lang="en-US" sz="2499" dirty="0" err="1">
+                <a:solidFill>
+                  <a:srgbClr val="000000"/>
+                </a:solidFill>
+                <a:latin typeface="Calibri (MS)"/>
+                <a:ea typeface="Calibri (MS)"/>
+                <a:cs typeface="Calibri (MS)"/>
+                <a:sym typeface="Calibri (MS)"/>
+              </a:rPr>
+              <a:t>conteúdo</a:t>
+            </a:r>
+            <a:r>
+              <a:rPr lang="en-US" sz="2499" dirty="0">
+                <a:solidFill>
+                  <a:srgbClr val="000000"/>
+                </a:solidFill>
+                <a:latin typeface="Calibri (MS)"/>
+                <a:ea typeface="Calibri (MS)"/>
+                <a:cs typeface="Calibri (MS)"/>
+                <a:sym typeface="Calibri (MS)"/>
+              </a:rPr>
+              <a:t> </a:t>
+            </a:r>
+            <a:r>
+              <a:rPr lang="en-US" sz="2499" dirty="0" err="1">
+                <a:solidFill>
+                  <a:srgbClr val="000000"/>
+                </a:solidFill>
+                <a:latin typeface="Calibri (MS)"/>
+                <a:ea typeface="Calibri (MS)"/>
+                <a:cs typeface="Calibri (MS)"/>
+                <a:sym typeface="Calibri (MS)"/>
+              </a:rPr>
+              <a:t>educativo</a:t>
+            </a:r>
+            <a:r>
+              <a:rPr lang="en-US" sz="2499" dirty="0">
+                <a:solidFill>
+                  <a:srgbClr val="000000"/>
+                </a:solidFill>
+                <a:latin typeface="Calibri (MS)"/>
+                <a:ea typeface="Calibri (MS)"/>
+                <a:cs typeface="Calibri (MS)"/>
+                <a:sym typeface="Calibri (MS)"/>
+              </a:rPr>
+              <a:t>.</a:t>
             </a:r>
           </a:p>
           <a:p>
             <a:pPr algn="just">
               <a:lnSpc>
-                <a:spcPts val="3499"/>
+                <a:spcPct val="150000"/>
               </a:lnSpc>
             </a:pPr>
-            <a:endParaRPr lang="en-US" sz="2499">
+            <a:endParaRPr lang="en-US" sz="2499" dirty="0">
               <a:solidFill>
                 <a:srgbClr val="000000"/>
               </a:solidFill>
@@ -7909,20 +9837,356 @@
           <a:p>
             <a:pPr algn="just">
               <a:lnSpc>
-                <a:spcPts val="3499"/>
+                <a:spcPct val="150000"/>
               </a:lnSpc>
             </a:pPr>
             <a:r>
-              <a:rPr lang="en-US" sz="2499">
-                <a:solidFill>
-                  <a:srgbClr val="000000"/>
-                </a:solidFill>
-                <a:latin typeface="Calibri (MS)"/>
-                <a:ea typeface="Calibri (MS)"/>
-                <a:cs typeface="Calibri (MS)"/>
-                <a:sym typeface="Calibri (MS)"/>
-              </a:rPr>
-              <a:t>O grupo controlo em lista de espera recebe brochuras informativas (standard ofcare). Período do estudo: 21 a 27 de março de 2026 (fase piloto).</a:t>
+              <a:rPr lang="en-US" sz="2499" dirty="0">
+                <a:solidFill>
+                  <a:srgbClr val="000000"/>
+                </a:solidFill>
+                <a:latin typeface="Calibri (MS)"/>
+                <a:ea typeface="Calibri (MS)"/>
+                <a:cs typeface="Calibri (MS)"/>
+                <a:sym typeface="Calibri (MS)"/>
+              </a:rPr>
+              <a:t>O </a:t>
+            </a:r>
+            <a:r>
+              <a:rPr lang="en-US" sz="2499" dirty="0" err="1">
+                <a:solidFill>
+                  <a:srgbClr val="000000"/>
+                </a:solidFill>
+                <a:latin typeface="Calibri (MS)"/>
+                <a:ea typeface="Calibri (MS)"/>
+                <a:cs typeface="Calibri (MS)"/>
+                <a:sym typeface="Calibri (MS)"/>
+              </a:rPr>
+              <a:t>grupo</a:t>
+            </a:r>
+            <a:r>
+              <a:rPr lang="en-US" sz="2499" dirty="0">
+                <a:solidFill>
+                  <a:srgbClr val="000000"/>
+                </a:solidFill>
+                <a:latin typeface="Calibri (MS)"/>
+                <a:ea typeface="Calibri (MS)"/>
+                <a:cs typeface="Calibri (MS)"/>
+                <a:sym typeface="Calibri (MS)"/>
+              </a:rPr>
+              <a:t> </a:t>
+            </a:r>
+            <a:r>
+              <a:rPr lang="en-US" sz="2499" dirty="0" err="1">
+                <a:solidFill>
+                  <a:srgbClr val="000000"/>
+                </a:solidFill>
+                <a:latin typeface="Calibri (MS)"/>
+                <a:ea typeface="Calibri (MS)"/>
+                <a:cs typeface="Calibri (MS)"/>
+                <a:sym typeface="Calibri (MS)"/>
+              </a:rPr>
+              <a:t>controlo</a:t>
+            </a:r>
+            <a:r>
+              <a:rPr lang="en-US" sz="2499" dirty="0">
+                <a:solidFill>
+                  <a:srgbClr val="000000"/>
+                </a:solidFill>
+                <a:latin typeface="Calibri (MS)"/>
+                <a:ea typeface="Calibri (MS)"/>
+                <a:cs typeface="Calibri (MS)"/>
+                <a:sym typeface="Calibri (MS)"/>
+              </a:rPr>
+              <a:t> </a:t>
+            </a:r>
+            <a:r>
+              <a:rPr lang="en-US" sz="2499" dirty="0" err="1">
+                <a:solidFill>
+                  <a:srgbClr val="000000"/>
+                </a:solidFill>
+                <a:latin typeface="Calibri (MS)"/>
+                <a:ea typeface="Calibri (MS)"/>
+                <a:cs typeface="Calibri (MS)"/>
+                <a:sym typeface="Calibri (MS)"/>
+              </a:rPr>
+              <a:t>em</a:t>
+            </a:r>
+            <a:r>
+              <a:rPr lang="en-US" sz="2499" dirty="0">
+                <a:solidFill>
+                  <a:srgbClr val="000000"/>
+                </a:solidFill>
+                <a:latin typeface="Calibri (MS)"/>
+                <a:ea typeface="Calibri (MS)"/>
+                <a:cs typeface="Calibri (MS)"/>
+                <a:sym typeface="Calibri (MS)"/>
+              </a:rPr>
+              <a:t> </a:t>
+            </a:r>
+            <a:r>
+              <a:rPr lang="en-US" sz="2499" dirty="0" err="1">
+                <a:solidFill>
+                  <a:srgbClr val="000000"/>
+                </a:solidFill>
+                <a:latin typeface="Calibri (MS)"/>
+                <a:ea typeface="Calibri (MS)"/>
+                <a:cs typeface="Calibri (MS)"/>
+                <a:sym typeface="Calibri (MS)"/>
+              </a:rPr>
+              <a:t>lista</a:t>
+            </a:r>
+            <a:r>
+              <a:rPr lang="en-US" sz="2499" dirty="0">
+                <a:solidFill>
+                  <a:srgbClr val="000000"/>
+                </a:solidFill>
+                <a:latin typeface="Calibri (MS)"/>
+                <a:ea typeface="Calibri (MS)"/>
+                <a:cs typeface="Calibri (MS)"/>
+                <a:sym typeface="Calibri (MS)"/>
+              </a:rPr>
+              <a:t> de </a:t>
+            </a:r>
+            <a:r>
+              <a:rPr lang="en-US" sz="2499" dirty="0" err="1">
+                <a:solidFill>
+                  <a:srgbClr val="000000"/>
+                </a:solidFill>
+                <a:latin typeface="Calibri (MS)"/>
+                <a:ea typeface="Calibri (MS)"/>
+                <a:cs typeface="Calibri (MS)"/>
+                <a:sym typeface="Calibri (MS)"/>
+              </a:rPr>
+              <a:t>espera</a:t>
+            </a:r>
+            <a:r>
+              <a:rPr lang="en-US" sz="2499" dirty="0">
+                <a:solidFill>
+                  <a:srgbClr val="000000"/>
+                </a:solidFill>
+                <a:latin typeface="Calibri (MS)"/>
+                <a:ea typeface="Calibri (MS)"/>
+                <a:cs typeface="Calibri (MS)"/>
+                <a:sym typeface="Calibri (MS)"/>
+              </a:rPr>
+              <a:t> </a:t>
+            </a:r>
+            <a:r>
+              <a:rPr lang="en-US" sz="2499" dirty="0" err="1">
+                <a:solidFill>
+                  <a:srgbClr val="000000"/>
+                </a:solidFill>
+                <a:latin typeface="Calibri (MS)"/>
+                <a:ea typeface="Calibri (MS)"/>
+                <a:cs typeface="Calibri (MS)"/>
+                <a:sym typeface="Calibri (MS)"/>
+              </a:rPr>
+              <a:t>recebe</a:t>
+            </a:r>
+            <a:r>
+              <a:rPr lang="en-US" sz="2499" dirty="0">
+                <a:solidFill>
+                  <a:srgbClr val="000000"/>
+                </a:solidFill>
+                <a:latin typeface="Calibri (MS)"/>
+                <a:ea typeface="Calibri (MS)"/>
+                <a:cs typeface="Calibri (MS)"/>
+                <a:sym typeface="Calibri (MS)"/>
+              </a:rPr>
+              <a:t> </a:t>
+            </a:r>
+            <a:r>
+              <a:rPr lang="en-US" sz="2499" dirty="0" err="1">
+                <a:solidFill>
+                  <a:srgbClr val="000000"/>
+                </a:solidFill>
+                <a:latin typeface="Calibri (MS)"/>
+                <a:ea typeface="Calibri (MS)"/>
+                <a:cs typeface="Calibri (MS)"/>
+                <a:sym typeface="Calibri (MS)"/>
+              </a:rPr>
+              <a:t>brochuras</a:t>
+            </a:r>
+            <a:r>
+              <a:rPr lang="en-US" sz="2499" dirty="0">
+                <a:solidFill>
+                  <a:srgbClr val="000000"/>
+                </a:solidFill>
+                <a:latin typeface="Calibri (MS)"/>
+                <a:ea typeface="Calibri (MS)"/>
+                <a:cs typeface="Calibri (MS)"/>
+                <a:sym typeface="Calibri (MS)"/>
+              </a:rPr>
+              <a:t> </a:t>
+            </a:r>
+            <a:r>
+              <a:rPr lang="en-US" sz="2499" dirty="0" err="1">
+                <a:solidFill>
+                  <a:srgbClr val="000000"/>
+                </a:solidFill>
+                <a:latin typeface="Calibri (MS)"/>
+                <a:ea typeface="Calibri (MS)"/>
+                <a:cs typeface="Calibri (MS)"/>
+                <a:sym typeface="Calibri (MS)"/>
+              </a:rPr>
+              <a:t>informativas</a:t>
+            </a:r>
+            <a:r>
+              <a:rPr lang="en-US" sz="2499" dirty="0">
+                <a:solidFill>
+                  <a:srgbClr val="000000"/>
+                </a:solidFill>
+                <a:latin typeface="Calibri (MS)"/>
+                <a:ea typeface="Calibri (MS)"/>
+                <a:cs typeface="Calibri (MS)"/>
+                <a:sym typeface="Calibri (MS)"/>
+              </a:rPr>
+              <a:t> (standard </a:t>
+            </a:r>
+            <a:r>
+              <a:rPr lang="en-US" sz="2499" dirty="0" err="1">
+                <a:solidFill>
+                  <a:srgbClr val="000000"/>
+                </a:solidFill>
+                <a:latin typeface="Calibri (MS)"/>
+                <a:ea typeface="Calibri (MS)"/>
+                <a:cs typeface="Calibri (MS)"/>
+                <a:sym typeface="Calibri (MS)"/>
+              </a:rPr>
+              <a:t>ofcare</a:t>
+            </a:r>
+            <a:r>
+              <a:rPr lang="en-US" sz="2499" dirty="0">
+                <a:solidFill>
+                  <a:srgbClr val="000000"/>
+                </a:solidFill>
+                <a:latin typeface="Calibri (MS)"/>
+                <a:ea typeface="Calibri (MS)"/>
+                <a:cs typeface="Calibri (MS)"/>
+                <a:sym typeface="Calibri (MS)"/>
+              </a:rPr>
+              <a:t>). </a:t>
+            </a:r>
+            <a:r>
+              <a:rPr lang="en-US" sz="2499" dirty="0" err="1">
+                <a:solidFill>
+                  <a:srgbClr val="000000"/>
+                </a:solidFill>
+                <a:latin typeface="Calibri (MS)"/>
+                <a:ea typeface="Calibri (MS)"/>
+                <a:cs typeface="Calibri (MS)"/>
+                <a:sym typeface="Calibri (MS)"/>
+              </a:rPr>
+              <a:t>Período</a:t>
+            </a:r>
+            <a:r>
+              <a:rPr lang="en-US" sz="2499" dirty="0">
+                <a:solidFill>
+                  <a:srgbClr val="000000"/>
+                </a:solidFill>
+                <a:latin typeface="Calibri (MS)"/>
+                <a:ea typeface="Calibri (MS)"/>
+                <a:cs typeface="Calibri (MS)"/>
+                <a:sym typeface="Calibri (MS)"/>
+              </a:rPr>
+              <a:t> do </a:t>
+            </a:r>
+            <a:r>
+              <a:rPr lang="en-US" sz="2499" dirty="0" err="1">
+                <a:solidFill>
+                  <a:srgbClr val="000000"/>
+                </a:solidFill>
+                <a:latin typeface="Calibri (MS)"/>
+                <a:ea typeface="Calibri (MS)"/>
+                <a:cs typeface="Calibri (MS)"/>
+                <a:sym typeface="Calibri (MS)"/>
+              </a:rPr>
+              <a:t>estudo</a:t>
+            </a:r>
+            <a:r>
+              <a:rPr lang="en-US" sz="2499" dirty="0">
+                <a:solidFill>
+                  <a:srgbClr val="000000"/>
+                </a:solidFill>
+                <a:latin typeface="Calibri (MS)"/>
+                <a:ea typeface="Calibri (MS)"/>
+                <a:cs typeface="Calibri (MS)"/>
+                <a:sym typeface="Calibri (MS)"/>
+              </a:rPr>
+              <a:t>: 21 a 27 de </a:t>
+            </a:r>
+            <a:r>
+              <a:rPr lang="en-US" sz="2499" dirty="0" err="1">
+                <a:solidFill>
+                  <a:srgbClr val="000000"/>
+                </a:solidFill>
+                <a:latin typeface="Calibri (MS)"/>
+                <a:ea typeface="Calibri (MS)"/>
+                <a:cs typeface="Calibri (MS)"/>
+                <a:sym typeface="Calibri (MS)"/>
+              </a:rPr>
+              <a:t>março</a:t>
+            </a:r>
+            <a:r>
+              <a:rPr lang="en-US" sz="2499" dirty="0">
+                <a:solidFill>
+                  <a:srgbClr val="000000"/>
+                </a:solidFill>
+                <a:latin typeface="Calibri (MS)"/>
+                <a:ea typeface="Calibri (MS)"/>
+                <a:cs typeface="Calibri (MS)"/>
+                <a:sym typeface="Calibri (MS)"/>
+              </a:rPr>
+              <a:t> de 2026 (</a:t>
+            </a:r>
+            <a:r>
+              <a:rPr lang="en-US" sz="2499" dirty="0" err="1">
+                <a:solidFill>
+                  <a:srgbClr val="000000"/>
+                </a:solidFill>
+                <a:latin typeface="Calibri (MS)"/>
+                <a:ea typeface="Calibri (MS)"/>
+                <a:cs typeface="Calibri (MS)"/>
+                <a:sym typeface="Calibri (MS)"/>
+              </a:rPr>
+              <a:t>fase</a:t>
+            </a:r>
+            <a:r>
+              <a:rPr lang="en-US" sz="2499" dirty="0">
+                <a:solidFill>
+                  <a:srgbClr val="000000"/>
+                </a:solidFill>
+                <a:latin typeface="Calibri (MS)"/>
+                <a:ea typeface="Calibri (MS)"/>
+                <a:cs typeface="Calibri (MS)"/>
+                <a:sym typeface="Calibri (MS)"/>
+              </a:rPr>
+              <a:t> </a:t>
+            </a:r>
+            <a:r>
+              <a:rPr lang="en-US" sz="2499" dirty="0" err="1">
+                <a:solidFill>
+                  <a:srgbClr val="000000"/>
+                </a:solidFill>
+                <a:latin typeface="Calibri (MS)"/>
+                <a:ea typeface="Calibri (MS)"/>
+                <a:cs typeface="Calibri (MS)"/>
+                <a:sym typeface="Calibri (MS)"/>
+              </a:rPr>
+              <a:t>piloto</a:t>
+            </a:r>
+            <a:r>
+              <a:rPr lang="en-US" sz="2499" dirty="0">
+                <a:solidFill>
+                  <a:srgbClr val="000000"/>
+                </a:solidFill>
+                <a:latin typeface="Calibri (MS)"/>
+                <a:ea typeface="Calibri (MS)"/>
+                <a:cs typeface="Calibri (MS)"/>
+                <a:sym typeface="Calibri (MS)"/>
+              </a:rPr>
+              <a:t>).</a:t>
             </a:r>
           </a:p>
           <a:p>
@@ -7931,7 +10195,7 @@
                 <a:spcPts val="3499"/>
               </a:lnSpc>
             </a:pPr>
-            <a:endParaRPr lang="en-US" sz="2499">
+            <a:endParaRPr lang="en-US" sz="2499" dirty="0">
               <a:solidFill>
                 <a:srgbClr val="000000"/>
               </a:solidFill>
@@ -7947,7 +10211,7 @@
                 <a:spcPts val="3431"/>
               </a:lnSpc>
             </a:pPr>
-            <a:endParaRPr lang="en-US" sz="2499">
+            <a:endParaRPr lang="en-US" sz="2499" dirty="0">
               <a:solidFill>
                 <a:srgbClr val="000000"/>
               </a:solidFill>
@@ -8455,7 +10719,7 @@
         </p:nvGrpSpPr>
         <p:grpSpPr>
           <a:xfrm>
-            <a:off x="1518577" y="1028700"/>
+            <a:off x="1447800" y="1028700"/>
             <a:ext cx="15250847" cy="8229600"/>
             <a:chOff x="0" y="0"/>
             <a:chExt cx="4016684" cy="2167467"/>
@@ -9256,8 +11520,8 @@
         </p:nvSpPr>
         <p:spPr>
           <a:xfrm>
-            <a:off x="1518577" y="6521586"/>
-            <a:ext cx="2141633" cy="666115"/>
+            <a:off x="1540770" y="5218783"/>
+            <a:ext cx="2141633" cy="680443"/>
           </a:xfrm>
           <a:prstGeom prst="rect">
             <a:avLst/>
@@ -9278,17 +11542,50 @@
               </a:spcBef>
             </a:pPr>
             <a:r>
-              <a:rPr lang="en-US" sz="1899">
-                <a:solidFill>
-                  <a:srgbClr val="000000"/>
-                </a:solidFill>
-                <a:latin typeface="Stinger Fit"/>
+              <a:rPr lang="en-US" sz="2200" b="1" dirty="0" err="1">
+                <a:solidFill>
+                  <a:srgbClr val="000000"/>
+                </a:solidFill>
+                <a:latin typeface="Calibri (MS)" panose="020B0604020202020204" charset="0"/>
                 <a:ea typeface="Stinger Fit"/>
-                <a:cs typeface="Stinger Fit"/>
+                <a:cs typeface="Calibri (MS)" panose="020B0604020202020204" charset="0"/>
                 <a:sym typeface="Stinger Fit"/>
               </a:rPr>
-              <a:t>Seleção de participantes</a:t>
-            </a:r>
+              <a:t>Recrutamento</a:t>
+            </a:r>
+            <a:r>
+              <a:rPr lang="en-US" sz="2200" b="1" dirty="0">
+                <a:solidFill>
+                  <a:srgbClr val="000000"/>
+                </a:solidFill>
+                <a:latin typeface="Calibri (MS)" panose="020B0604020202020204" charset="0"/>
+                <a:ea typeface="Stinger Fit"/>
+                <a:cs typeface="Calibri (MS)" panose="020B0604020202020204" charset="0"/>
+                <a:sym typeface="Stinger Fit"/>
+              </a:rPr>
+              <a:t> e </a:t>
+            </a:r>
+            <a:r>
+              <a:rPr lang="en-US" sz="2200" b="1" dirty="0" err="1">
+                <a:solidFill>
+                  <a:srgbClr val="000000"/>
+                </a:solidFill>
+                <a:latin typeface="Calibri (MS)" panose="020B0604020202020204" charset="0"/>
+                <a:ea typeface="Stinger Fit"/>
+                <a:cs typeface="Calibri (MS)" panose="020B0604020202020204" charset="0"/>
+                <a:sym typeface="Stinger Fit"/>
+              </a:rPr>
+              <a:t>Triagem</a:t>
+            </a:r>
+            <a:endParaRPr lang="en-US" sz="2200" b="1" dirty="0">
+              <a:solidFill>
+                <a:srgbClr val="000000"/>
+              </a:solidFill>
+              <a:latin typeface="Calibri (MS)" panose="020B0604020202020204" charset="0"/>
+              <a:ea typeface="Stinger Fit"/>
+              <a:cs typeface="Calibri (MS)" panose="020B0604020202020204" charset="0"/>
+              <a:sym typeface="Stinger Fit"/>
+            </a:endParaRPr>
           </a:p>
         </p:txBody>
       </p:sp>
@@ -9300,8 +11597,8 @@
         </p:nvSpPr>
         <p:spPr>
           <a:xfrm>
-            <a:off x="3660210" y="6521586"/>
-            <a:ext cx="2463316" cy="666115"/>
+            <a:off x="3628469" y="5256091"/>
+            <a:ext cx="2463316" cy="680443"/>
           </a:xfrm>
           <a:prstGeom prst="rect">
             <a:avLst/>
@@ -9322,16 +11619,40 @@
               </a:spcBef>
             </a:pPr>
             <a:r>
-              <a:rPr lang="en-US" sz="1899">
-                <a:solidFill>
-                  <a:srgbClr val="000000"/>
-                </a:solidFill>
-                <a:latin typeface="Stinger Fit"/>
+              <a:rPr lang="en-US" sz="2200" b="1" dirty="0">
+                <a:solidFill>
+                  <a:srgbClr val="000000"/>
+                </a:solidFill>
+                <a:latin typeface="Calibri (MS)" panose="020B0604020202020204" charset="0"/>
                 <a:ea typeface="Stinger Fit"/>
-                <a:cs typeface="Stinger Fit"/>
+                <a:cs typeface="Calibri (MS)" panose="020B0604020202020204" charset="0"/>
                 <a:sym typeface="Stinger Fit"/>
               </a:rPr>
-              <a:t>Avaliação inicial (PHQ-9, GAD-7)</a:t>
+              <a:t>Baseline e </a:t>
+            </a:r>
+            <a:r>
+              <a:rPr lang="en-US" sz="2200" b="1" dirty="0" err="1">
+                <a:solidFill>
+                  <a:srgbClr val="000000"/>
+                </a:solidFill>
+                <a:latin typeface="Calibri (MS)" panose="020B0604020202020204" charset="0"/>
+                <a:ea typeface="Stinger Fit"/>
+                <a:cs typeface="Calibri (MS)" panose="020B0604020202020204" charset="0"/>
+                <a:sym typeface="Stinger Fit"/>
+              </a:rPr>
+              <a:t>Randomização</a:t>
+            </a:r>
+            <a:r>
+              <a:rPr lang="en-US" sz="2200" b="1" dirty="0">
+                <a:solidFill>
+                  <a:srgbClr val="000000"/>
+                </a:solidFill>
+                <a:latin typeface="Calibri (MS)" panose="020B0604020202020204" charset="0"/>
+                <a:ea typeface="Stinger Fit"/>
+                <a:cs typeface="Calibri (MS)" panose="020B0604020202020204" charset="0"/>
+                <a:sym typeface="Stinger Fit"/>
+              </a:rPr>
+              <a:t> </a:t>
             </a:r>
           </a:p>
         </p:txBody>
@@ -9344,8 +11665,8 @@
         </p:nvSpPr>
         <p:spPr>
           <a:xfrm>
-            <a:off x="6451752" y="6521586"/>
-            <a:ext cx="1642291" cy="999490"/>
+            <a:off x="6451751" y="5198770"/>
+            <a:ext cx="1642291" cy="676660"/>
           </a:xfrm>
           <a:prstGeom prst="rect">
             <a:avLst/>
@@ -9366,37 +11687,48 @@
               </a:spcBef>
             </a:pPr>
             <a:r>
-              <a:rPr lang="en-US" sz="1899">
-                <a:solidFill>
-                  <a:srgbClr val="000000"/>
-                </a:solidFill>
-                <a:latin typeface="Stinger Fit"/>
-                <a:ea typeface="Stinger Fit"/>
-                <a:cs typeface="Stinger Fit"/>
-                <a:sym typeface="Stinger Fit"/>
-              </a:rPr>
-              <a:t>Data definida pelos investigadores </a:t>
-            </a:r>
+              <a:rPr lang="pt-PT" sz="2200" b="1" dirty="0">
+                <a:latin typeface="Calibri (MS)" panose="020B0604020202020204" charset="0"/>
+                <a:cs typeface="Calibri (MS)" panose="020B0604020202020204" charset="0"/>
+              </a:rPr>
+              <a:t>Início da Intervenção</a:t>
+            </a:r>
+            <a:endParaRPr lang="en-US" sz="2200" b="1" dirty="0">
+              <a:solidFill>
+                <a:srgbClr val="000000"/>
+              </a:solidFill>
+              <a:latin typeface="Calibri (MS)" panose="020B0604020202020204" charset="0"/>
+              <a:ea typeface="Stinger Fit"/>
+              <a:cs typeface="Calibri (MS)" panose="020B0604020202020204" charset="0"/>
+              <a:sym typeface="Stinger Fit"/>
+            </a:endParaRPr>
           </a:p>
         </p:txBody>
       </p:sp>
       <p:sp>
         <p:nvSpPr>
-          <p:cNvPr id="37" name="TextBox 37"/>
+          <p:cNvPr id="41" name="CaixaDeTexto 40">
+            <a:extLst>
+              <a:ext uri="{FF2B5EF4-FFF2-40B4-BE49-F238E27FC236}">
+                <a16:creationId xmlns:a16="http://schemas.microsoft.com/office/drawing/2014/main" id="{5A448EE5-1115-BAFA-55D9-05FF2B60D281}"/>
+              </a:ext>
+            </a:extLst>
+          </p:cNvPr>
           <p:cNvSpPr txBox="1"/>
           <p:nvPr/>
         </p:nvSpPr>
         <p:spPr>
           <a:xfrm>
-            <a:off x="8701425" y="6521586"/>
-            <a:ext cx="2094238" cy="666115"/>
+            <a:off x="13916894" y="5462729"/>
+            <a:ext cx="1565884" cy="426527"/>
           </a:xfrm>
           <a:prstGeom prst="rect">
             <a:avLst/>
           </a:prstGeom>
+          <a:noFill/>
         </p:spPr>
         <p:txBody>
-          <a:bodyPr lIns="0" tIns="0" rIns="0" bIns="0" rtlCol="0" anchor="t">
+          <a:bodyPr wrap="square">
             <a:spAutoFit/>
           </a:bodyPr>
           <a:lstStyle/>
@@ -9410,37 +11742,53 @@
               </a:spcBef>
             </a:pPr>
             <a:r>
-              <a:rPr lang="en-US" sz="1899">
-                <a:solidFill>
-                  <a:srgbClr val="000000"/>
-                </a:solidFill>
-                <a:latin typeface="Stinger Fit"/>
+              <a:rPr lang="pt-PT" sz="2200" b="1" dirty="0">
+                <a:solidFill>
+                  <a:srgbClr val="000000"/>
+                </a:solidFill>
+                <a:latin typeface="Calibri (MS)" panose="020B0604020202020204" charset="0"/>
                 <a:ea typeface="Stinger Fit"/>
-                <a:cs typeface="Stinger Fit"/>
+                <a:cs typeface="Calibri (MS)" panose="020B0604020202020204" charset="0"/>
                 <a:sym typeface="Stinger Fit"/>
               </a:rPr>
-              <a:t>Avaliação intermédia</a:t>
-            </a:r>
+              <a:t>Follow-up</a:t>
+            </a:r>
+            <a:endParaRPr lang="en-US" sz="2200" b="1" dirty="0">
+              <a:solidFill>
+                <a:srgbClr val="000000"/>
+              </a:solidFill>
+              <a:latin typeface="Calibri (MS)" panose="020B0604020202020204" charset="0"/>
+              <a:ea typeface="Stinger Fit"/>
+              <a:cs typeface="Calibri (MS)" panose="020B0604020202020204" charset="0"/>
+              <a:sym typeface="Stinger Fit"/>
+            </a:endParaRPr>
           </a:p>
         </p:txBody>
       </p:sp>
       <p:sp>
         <p:nvSpPr>
-          <p:cNvPr id="38" name="TextBox 38"/>
+          <p:cNvPr id="42" name="CaixaDeTexto 41">
+            <a:extLst>
+              <a:ext uri="{FF2B5EF4-FFF2-40B4-BE49-F238E27FC236}">
+                <a16:creationId xmlns:a16="http://schemas.microsoft.com/office/drawing/2014/main" id="{C75C0113-4FE2-B7A2-65DA-5CE5513D10EC}"/>
+              </a:ext>
+            </a:extLst>
+          </p:cNvPr>
           <p:cNvSpPr txBox="1"/>
           <p:nvPr/>
         </p:nvSpPr>
         <p:spPr>
           <a:xfrm>
-            <a:off x="11177071" y="6521586"/>
-            <a:ext cx="2094238" cy="332740"/>
+            <a:off x="11256899" y="5150257"/>
+            <a:ext cx="1931799" cy="772776"/>
           </a:xfrm>
           <a:prstGeom prst="rect">
             <a:avLst/>
           </a:prstGeom>
+          <a:noFill/>
         </p:spPr>
         <p:txBody>
-          <a:bodyPr lIns="0" tIns="0" rIns="0" bIns="0" rtlCol="0" anchor="t">
+          <a:bodyPr wrap="square">
             <a:spAutoFit/>
           </a:bodyPr>
           <a:lstStyle/>
@@ -9454,37 +11802,65 @@
               </a:spcBef>
             </a:pPr>
             <a:r>
-              <a:rPr lang="en-US" sz="1899">
-                <a:solidFill>
-                  <a:srgbClr val="000000"/>
-                </a:solidFill>
-                <a:latin typeface="Stinger Fit"/>
+              <a:rPr lang="pt-PT" sz="2200" b="1" dirty="0">
+                <a:solidFill>
+                  <a:srgbClr val="000000"/>
+                </a:solidFill>
+                <a:latin typeface="Calibri (MS)" panose="020B0604020202020204" charset="0"/>
                 <a:ea typeface="Stinger Fit"/>
-                <a:cs typeface="Stinger Fit"/>
+                <a:cs typeface="Calibri (MS)" panose="020B0604020202020204" charset="0"/>
                 <a:sym typeface="Stinger Fit"/>
               </a:rPr>
-              <a:t>Avaliação final</a:t>
-            </a:r>
+              <a:t>Avaliação final/ </a:t>
+            </a:r>
+            <a:r>
+              <a:rPr lang="pt-PT" sz="2200" b="1" dirty="0" err="1">
+                <a:solidFill>
+                  <a:srgbClr val="000000"/>
+                </a:solidFill>
+                <a:latin typeface="Calibri (MS)" panose="020B0604020202020204" charset="0"/>
+                <a:ea typeface="Stinger Fit"/>
+                <a:cs typeface="Calibri (MS)" panose="020B0604020202020204" charset="0"/>
+                <a:sym typeface="Stinger Fit"/>
+              </a:rPr>
+              <a:t>post-test</a:t>
+            </a:r>
+            <a:endParaRPr lang="en-US" sz="2200" b="1" dirty="0">
+              <a:solidFill>
+                <a:srgbClr val="000000"/>
+              </a:solidFill>
+              <a:latin typeface="Calibri (MS)" panose="020B0604020202020204" charset="0"/>
+              <a:ea typeface="Stinger Fit"/>
+              <a:cs typeface="Calibri (MS)" panose="020B0604020202020204" charset="0"/>
+              <a:sym typeface="Stinger Fit"/>
+            </a:endParaRPr>
           </a:p>
         </p:txBody>
       </p:sp>
       <p:sp>
         <p:nvSpPr>
-          <p:cNvPr id="39" name="TextBox 39"/>
+          <p:cNvPr id="43" name="CaixaDeTexto 42">
+            <a:extLst>
+              <a:ext uri="{FF2B5EF4-FFF2-40B4-BE49-F238E27FC236}">
+                <a16:creationId xmlns:a16="http://schemas.microsoft.com/office/drawing/2014/main" id="{DD7B652D-E054-35DE-4076-53C8FE097115}"/>
+              </a:ext>
+            </a:extLst>
+          </p:cNvPr>
           <p:cNvSpPr txBox="1"/>
           <p:nvPr/>
         </p:nvSpPr>
         <p:spPr>
           <a:xfrm>
-            <a:off x="13523013" y="6521586"/>
-            <a:ext cx="2353645" cy="332740"/>
+            <a:off x="8979801" y="5160729"/>
+            <a:ext cx="1537486" cy="772776"/>
           </a:xfrm>
           <a:prstGeom prst="rect">
             <a:avLst/>
           </a:prstGeom>
+          <a:noFill/>
         </p:spPr>
         <p:txBody>
-          <a:bodyPr lIns="0" tIns="0" rIns="0" bIns="0" rtlCol="0" anchor="t">
+          <a:bodyPr wrap="square">
             <a:spAutoFit/>
           </a:bodyPr>
           <a:lstStyle/>
@@ -9498,16 +11874,375 @@
               </a:spcBef>
             </a:pPr>
             <a:r>
-              <a:rPr lang="en-US" sz="1899">
-                <a:solidFill>
-                  <a:srgbClr val="000000"/>
-                </a:solidFill>
-                <a:latin typeface="Stinger Fit"/>
+              <a:rPr lang="pt-PT" sz="2200" b="1" dirty="0">
+                <a:solidFill>
+                  <a:srgbClr val="000000"/>
+                </a:solidFill>
+                <a:latin typeface="Calibri (MS)" panose="020B0604020202020204" charset="0"/>
                 <a:ea typeface="Stinger Fit"/>
-                <a:cs typeface="Stinger Fit"/>
+                <a:cs typeface="Calibri (MS)" panose="020B0604020202020204" charset="0"/>
                 <a:sym typeface="Stinger Fit"/>
               </a:rPr>
-              <a:t>Acompanhamento</a:t>
+              <a:t>Avaliação Intermédia</a:t>
+            </a:r>
+            <a:endParaRPr lang="en-US" sz="2200" b="1" dirty="0">
+              <a:solidFill>
+                <a:srgbClr val="000000"/>
+              </a:solidFill>
+              <a:latin typeface="Calibri (MS)" panose="020B0604020202020204" charset="0"/>
+              <a:ea typeface="Stinger Fit"/>
+              <a:cs typeface="Calibri (MS)" panose="020B0604020202020204" charset="0"/>
+              <a:sym typeface="Stinger Fit"/>
+            </a:endParaRPr>
+          </a:p>
+        </p:txBody>
+      </p:sp>
+      <p:sp>
+        <p:nvSpPr>
+          <p:cNvPr id="45" name="CaixaDeTexto 44">
+            <a:extLst>
+              <a:ext uri="{FF2B5EF4-FFF2-40B4-BE49-F238E27FC236}">
+                <a16:creationId xmlns:a16="http://schemas.microsoft.com/office/drawing/2014/main" id="{B021C95D-9FEF-129B-6BFE-7DEE5A03AFA9}"/>
+              </a:ext>
+            </a:extLst>
+          </p:cNvPr>
+          <p:cNvSpPr txBox="1"/>
+          <p:nvPr/>
+        </p:nvSpPr>
+        <p:spPr>
+          <a:xfrm>
+            <a:off x="4069673" y="6545773"/>
+            <a:ext cx="1405211" cy="426527"/>
+          </a:xfrm>
+          <a:prstGeom prst="rect">
+            <a:avLst/>
+          </a:prstGeom>
+          <a:noFill/>
+        </p:spPr>
+        <p:txBody>
+          <a:bodyPr wrap="square">
+            <a:spAutoFit/>
+          </a:bodyPr>
+          <a:lstStyle/>
+          <a:p>
+            <a:pPr algn="ctr">
+              <a:lnSpc>
+                <a:spcPts val="2659"/>
+              </a:lnSpc>
+              <a:spcBef>
+                <a:spcPct val="0"/>
+              </a:spcBef>
+            </a:pPr>
+            <a:r>
+              <a:rPr lang="en-US" sz="2200" dirty="0">
+                <a:solidFill>
+                  <a:srgbClr val="000000"/>
+                </a:solidFill>
+                <a:latin typeface="Calibri (MS)" panose="020B0604020202020204" charset="0"/>
+                <a:ea typeface="Stinger Fit"/>
+                <a:cs typeface="Calibri (MS)" panose="020B0604020202020204" charset="0"/>
+                <a:sym typeface="Stinger Fit"/>
+              </a:rPr>
+              <a:t>Dia 0</a:t>
+            </a:r>
+          </a:p>
+        </p:txBody>
+      </p:sp>
+      <p:sp>
+        <p:nvSpPr>
+          <p:cNvPr id="46" name="CaixaDeTexto 45">
+            <a:extLst>
+              <a:ext uri="{FF2B5EF4-FFF2-40B4-BE49-F238E27FC236}">
+                <a16:creationId xmlns:a16="http://schemas.microsoft.com/office/drawing/2014/main" id="{B012E857-08EE-77AF-9525-05B6E3D2E920}"/>
+              </a:ext>
+            </a:extLst>
+          </p:cNvPr>
+          <p:cNvSpPr txBox="1"/>
+          <p:nvPr/>
+        </p:nvSpPr>
+        <p:spPr>
+          <a:xfrm>
+            <a:off x="1800587" y="6542904"/>
+            <a:ext cx="1405211" cy="772776"/>
+          </a:xfrm>
+          <a:prstGeom prst="rect">
+            <a:avLst/>
+          </a:prstGeom>
+          <a:noFill/>
+        </p:spPr>
+        <p:txBody>
+          <a:bodyPr wrap="square">
+            <a:spAutoFit/>
+          </a:bodyPr>
+          <a:lstStyle/>
+          <a:p>
+            <a:pPr algn="ctr">
+              <a:lnSpc>
+                <a:spcPts val="2659"/>
+              </a:lnSpc>
+              <a:spcBef>
+                <a:spcPct val="0"/>
+              </a:spcBef>
+            </a:pPr>
+            <a:r>
+              <a:rPr lang="en-US" sz="2200" dirty="0">
+                <a:solidFill>
+                  <a:srgbClr val="000000"/>
+                </a:solidFill>
+                <a:latin typeface="Calibri (MS)" panose="020B0604020202020204" charset="0"/>
+                <a:ea typeface="Stinger Fit"/>
+                <a:cs typeface="Calibri (MS)" panose="020B0604020202020204" charset="0"/>
+                <a:sym typeface="Stinger Fit"/>
+              </a:rPr>
+              <a:t>Semanas </a:t>
+            </a:r>
+          </a:p>
+          <a:p>
+            <a:pPr algn="ctr">
+              <a:lnSpc>
+                <a:spcPts val="2659"/>
+              </a:lnSpc>
+              <a:spcBef>
+                <a:spcPct val="0"/>
+              </a:spcBef>
+            </a:pPr>
+            <a:r>
+              <a:rPr lang="en-US" sz="2200" dirty="0">
+                <a:solidFill>
+                  <a:srgbClr val="000000"/>
+                </a:solidFill>
+                <a:latin typeface="Calibri (MS)" panose="020B0604020202020204" charset="0"/>
+                <a:ea typeface="Stinger Fit"/>
+                <a:cs typeface="Calibri (MS)" panose="020B0604020202020204" charset="0"/>
+                <a:sym typeface="Stinger Fit"/>
+              </a:rPr>
+              <a:t>-2 a 0</a:t>
+            </a:r>
+          </a:p>
+        </p:txBody>
+      </p:sp>
+      <p:sp>
+        <p:nvSpPr>
+          <p:cNvPr id="47" name="CaixaDeTexto 46">
+            <a:extLst>
+              <a:ext uri="{FF2B5EF4-FFF2-40B4-BE49-F238E27FC236}">
+                <a16:creationId xmlns:a16="http://schemas.microsoft.com/office/drawing/2014/main" id="{F1E2E988-4F79-4F99-CFB6-CF951B5D559B}"/>
+              </a:ext>
+            </a:extLst>
+          </p:cNvPr>
+          <p:cNvSpPr txBox="1"/>
+          <p:nvPr/>
+        </p:nvSpPr>
+        <p:spPr>
+          <a:xfrm>
+            <a:off x="6570290" y="6548245"/>
+            <a:ext cx="1405211" cy="772776"/>
+          </a:xfrm>
+          <a:prstGeom prst="rect">
+            <a:avLst/>
+          </a:prstGeom>
+          <a:noFill/>
+        </p:spPr>
+        <p:txBody>
+          <a:bodyPr wrap="square">
+            <a:spAutoFit/>
+          </a:bodyPr>
+          <a:lstStyle/>
+          <a:p>
+            <a:pPr algn="ctr">
+              <a:lnSpc>
+                <a:spcPts val="2659"/>
+              </a:lnSpc>
+              <a:spcBef>
+                <a:spcPct val="0"/>
+              </a:spcBef>
+            </a:pPr>
+            <a:r>
+              <a:rPr lang="en-US" sz="2200" dirty="0">
+                <a:solidFill>
+                  <a:srgbClr val="000000"/>
+                </a:solidFill>
+                <a:latin typeface="Calibri (MS)" panose="020B0604020202020204" charset="0"/>
+                <a:ea typeface="Stinger Fit"/>
+                <a:cs typeface="Calibri (MS)" panose="020B0604020202020204" charset="0"/>
+                <a:sym typeface="Stinger Fit"/>
+              </a:rPr>
+              <a:t>Semanas </a:t>
+            </a:r>
+          </a:p>
+          <a:p>
+            <a:pPr algn="ctr">
+              <a:lnSpc>
+                <a:spcPts val="2659"/>
+              </a:lnSpc>
+              <a:spcBef>
+                <a:spcPct val="0"/>
+              </a:spcBef>
+            </a:pPr>
+            <a:r>
+              <a:rPr lang="en-US" sz="2200" dirty="0">
+                <a:solidFill>
+                  <a:srgbClr val="000000"/>
+                </a:solidFill>
+                <a:latin typeface="Calibri (MS)" panose="020B0604020202020204" charset="0"/>
+                <a:ea typeface="Stinger Fit"/>
+                <a:cs typeface="Calibri (MS)" panose="020B0604020202020204" charset="0"/>
+                <a:sym typeface="Stinger Fit"/>
+              </a:rPr>
+              <a:t>1 a 8</a:t>
+            </a:r>
+          </a:p>
+        </p:txBody>
+      </p:sp>
+      <p:sp>
+        <p:nvSpPr>
+          <p:cNvPr id="48" name="CaixaDeTexto 47">
+            <a:extLst>
+              <a:ext uri="{FF2B5EF4-FFF2-40B4-BE49-F238E27FC236}">
+                <a16:creationId xmlns:a16="http://schemas.microsoft.com/office/drawing/2014/main" id="{67EFB66F-12CB-213E-0E9A-27E9F17DC130}"/>
+              </a:ext>
+            </a:extLst>
+          </p:cNvPr>
+          <p:cNvSpPr txBox="1"/>
+          <p:nvPr/>
+        </p:nvSpPr>
+        <p:spPr>
+          <a:xfrm>
+            <a:off x="9045938" y="6541184"/>
+            <a:ext cx="1405211" cy="426527"/>
+          </a:xfrm>
+          <a:prstGeom prst="rect">
+            <a:avLst/>
+          </a:prstGeom>
+          <a:noFill/>
+        </p:spPr>
+        <p:txBody>
+          <a:bodyPr wrap="square">
+            <a:spAutoFit/>
+          </a:bodyPr>
+          <a:lstStyle/>
+          <a:p>
+            <a:pPr algn="ctr">
+              <a:lnSpc>
+                <a:spcPts val="2659"/>
+              </a:lnSpc>
+              <a:spcBef>
+                <a:spcPct val="0"/>
+              </a:spcBef>
+            </a:pPr>
+            <a:r>
+              <a:rPr lang="en-US" sz="2200" dirty="0">
+                <a:solidFill>
+                  <a:srgbClr val="000000"/>
+                </a:solidFill>
+                <a:latin typeface="Calibri (MS)" panose="020B0604020202020204" charset="0"/>
+                <a:ea typeface="Stinger Fit"/>
+                <a:cs typeface="Calibri (MS)" panose="020B0604020202020204" charset="0"/>
+                <a:sym typeface="Stinger Fit"/>
+              </a:rPr>
+              <a:t>Semana 4</a:t>
+            </a:r>
+          </a:p>
+        </p:txBody>
+      </p:sp>
+      <p:sp>
+        <p:nvSpPr>
+          <p:cNvPr id="49" name="CaixaDeTexto 48">
+            <a:extLst>
+              <a:ext uri="{FF2B5EF4-FFF2-40B4-BE49-F238E27FC236}">
+                <a16:creationId xmlns:a16="http://schemas.microsoft.com/office/drawing/2014/main" id="{B72C2D19-59F3-56EB-2797-2A6D2BDB7C7F}"/>
+              </a:ext>
+            </a:extLst>
+          </p:cNvPr>
+          <p:cNvSpPr txBox="1"/>
+          <p:nvPr/>
+        </p:nvSpPr>
+        <p:spPr>
+          <a:xfrm>
+            <a:off x="11546555" y="6541184"/>
+            <a:ext cx="1405211" cy="426527"/>
+          </a:xfrm>
+          <a:prstGeom prst="rect">
+            <a:avLst/>
+          </a:prstGeom>
+          <a:noFill/>
+        </p:spPr>
+        <p:txBody>
+          <a:bodyPr wrap="square">
+            <a:spAutoFit/>
+          </a:bodyPr>
+          <a:lstStyle/>
+          <a:p>
+            <a:pPr algn="ctr">
+              <a:lnSpc>
+                <a:spcPts val="2659"/>
+              </a:lnSpc>
+              <a:spcBef>
+                <a:spcPct val="0"/>
+              </a:spcBef>
+            </a:pPr>
+            <a:r>
+              <a:rPr lang="en-US" sz="2200" dirty="0">
+                <a:solidFill>
+                  <a:srgbClr val="000000"/>
+                </a:solidFill>
+                <a:latin typeface="Calibri (MS)" panose="020B0604020202020204" charset="0"/>
+                <a:ea typeface="Stinger Fit"/>
+                <a:cs typeface="Calibri (MS)" panose="020B0604020202020204" charset="0"/>
+                <a:sym typeface="Stinger Fit"/>
+              </a:rPr>
+              <a:t>Semana 8</a:t>
+            </a:r>
+          </a:p>
+        </p:txBody>
+      </p:sp>
+      <p:sp>
+        <p:nvSpPr>
+          <p:cNvPr id="50" name="CaixaDeTexto 49">
+            <a:extLst>
+              <a:ext uri="{FF2B5EF4-FFF2-40B4-BE49-F238E27FC236}">
+                <a16:creationId xmlns:a16="http://schemas.microsoft.com/office/drawing/2014/main" id="{82244D29-6D4C-C88A-6C0F-BCE9730474E5}"/>
+              </a:ext>
+            </a:extLst>
+          </p:cNvPr>
+          <p:cNvSpPr txBox="1"/>
+          <p:nvPr/>
+        </p:nvSpPr>
+        <p:spPr>
+          <a:xfrm>
+            <a:off x="13868516" y="6548403"/>
+            <a:ext cx="1662640" cy="426527"/>
+          </a:xfrm>
+          <a:prstGeom prst="rect">
+            <a:avLst/>
+          </a:prstGeom>
+          <a:noFill/>
+        </p:spPr>
+        <p:txBody>
+          <a:bodyPr wrap="square">
+            <a:spAutoFit/>
+          </a:bodyPr>
+          <a:lstStyle/>
+          <a:p>
+            <a:pPr algn="ctr">
+              <a:lnSpc>
+                <a:spcPts val="2659"/>
+              </a:lnSpc>
+              <a:spcBef>
+                <a:spcPct val="0"/>
+              </a:spcBef>
+            </a:pPr>
+            <a:r>
+              <a:rPr lang="en-US" sz="2200" dirty="0">
+                <a:solidFill>
+                  <a:srgbClr val="000000"/>
+                </a:solidFill>
+                <a:latin typeface="Calibri (MS)" panose="020B0604020202020204" charset="0"/>
+                <a:ea typeface="Stinger Fit"/>
+                <a:cs typeface="Calibri (MS)" panose="020B0604020202020204" charset="0"/>
+                <a:sym typeface="Stinger Fit"/>
+              </a:rPr>
+              <a:t>Semana 12</a:t>
             </a:r>
           </a:p>
         </p:txBody>
@@ -10131,8 +12866,8 @@
         </p:nvSpPr>
         <p:spPr>
           <a:xfrm>
-            <a:off x="2257221" y="3735005"/>
-            <a:ext cx="6200371" cy="5391150"/>
+            <a:off x="2257221" y="3492945"/>
+            <a:ext cx="6200371" cy="6337953"/>
           </a:xfrm>
           <a:prstGeom prst="rect">
             <a:avLst/>
@@ -10146,11 +12881,11 @@
           <a:p>
             <a:pPr algn="just">
               <a:lnSpc>
-                <a:spcPts val="5250"/>
+                <a:spcPct val="150000"/>
               </a:lnSpc>
             </a:pPr>
             <a:r>
-              <a:rPr lang="en-US" sz="3500" b="1">
+              <a:rPr lang="en-US" sz="3500" b="1" dirty="0" err="1">
                 <a:solidFill>
                   <a:srgbClr val="000000"/>
                 </a:solidFill>
@@ -10159,7 +12894,522 @@
                 <a:cs typeface="Calibri (MS) Bold"/>
                 <a:sym typeface="Calibri (MS) Bold"/>
               </a:rPr>
-              <a:t>Critérios de Inclusão:</a:t>
+              <a:t>Critérios</a:t>
+            </a:r>
+            <a:r>
+              <a:rPr lang="en-US" sz="3500" b="1" dirty="0">
+                <a:solidFill>
+                  <a:srgbClr val="000000"/>
+                </a:solidFill>
+                <a:latin typeface="Calibri (MS) Bold"/>
+                <a:ea typeface="Calibri (MS) Bold"/>
+                <a:cs typeface="Calibri (MS) Bold"/>
+                <a:sym typeface="Calibri (MS) Bold"/>
+              </a:rPr>
+              <a:t> de </a:t>
+            </a:r>
+            <a:r>
+              <a:rPr lang="en-US" sz="3500" b="1" dirty="0" err="1">
+                <a:solidFill>
+                  <a:srgbClr val="000000"/>
+                </a:solidFill>
+                <a:latin typeface="Calibri (MS) Bold"/>
+                <a:ea typeface="Calibri (MS) Bold"/>
+                <a:cs typeface="Calibri (MS) Bold"/>
+                <a:sym typeface="Calibri (MS) Bold"/>
+              </a:rPr>
+              <a:t>Inclusão</a:t>
+            </a:r>
+            <a:r>
+              <a:rPr lang="en-US" sz="3500" b="1" dirty="0">
+                <a:solidFill>
+                  <a:srgbClr val="000000"/>
+                </a:solidFill>
+                <a:latin typeface="Calibri (MS) Bold"/>
+                <a:ea typeface="Calibri (MS) Bold"/>
+                <a:cs typeface="Calibri (MS) Bold"/>
+                <a:sym typeface="Calibri (MS) Bold"/>
+              </a:rPr>
+              <a:t>:</a:t>
+            </a:r>
+          </a:p>
+          <a:p>
+            <a:pPr algn="just">
+              <a:lnSpc>
+                <a:spcPct val="150000"/>
+              </a:lnSpc>
+            </a:pPr>
+            <a:r>
+              <a:rPr lang="en-US" sz="2499" dirty="0">
+                <a:solidFill>
+                  <a:srgbClr val="000000"/>
+                </a:solidFill>
+                <a:latin typeface="Calibri (MS)"/>
+                <a:ea typeface="Calibri (MS)"/>
+                <a:cs typeface="Calibri (MS)"/>
+                <a:sym typeface="Calibri (MS)"/>
+              </a:rPr>
+              <a:t>•Estudantes </a:t>
+            </a:r>
+            <a:r>
+              <a:rPr lang="en-US" sz="2499" dirty="0" err="1">
+                <a:solidFill>
+                  <a:srgbClr val="000000"/>
+                </a:solidFill>
+                <a:latin typeface="Calibri (MS)"/>
+                <a:ea typeface="Calibri (MS)"/>
+                <a:cs typeface="Calibri (MS)"/>
+                <a:sym typeface="Calibri (MS)"/>
+              </a:rPr>
+              <a:t>universitários</a:t>
+            </a:r>
+            <a:r>
+              <a:rPr lang="en-US" sz="2499" dirty="0">
+                <a:solidFill>
+                  <a:srgbClr val="000000"/>
+                </a:solidFill>
+                <a:latin typeface="Calibri (MS)"/>
+                <a:ea typeface="Calibri (MS)"/>
+                <a:cs typeface="Calibri (MS)"/>
+                <a:sym typeface="Calibri (MS)"/>
+              </a:rPr>
+              <a:t> </a:t>
+            </a:r>
+            <a:r>
+              <a:rPr lang="en-US" sz="2499" dirty="0" err="1">
+                <a:solidFill>
+                  <a:srgbClr val="000000"/>
+                </a:solidFill>
+                <a:latin typeface="Calibri (MS)"/>
+                <a:ea typeface="Calibri (MS)"/>
+                <a:cs typeface="Calibri (MS)"/>
+                <a:sym typeface="Calibri (MS)"/>
+              </a:rPr>
+              <a:t>matriculados</a:t>
+            </a:r>
+            <a:r>
+              <a:rPr lang="en-US" sz="2499" dirty="0">
+                <a:solidFill>
+                  <a:srgbClr val="000000"/>
+                </a:solidFill>
+                <a:latin typeface="Calibri (MS)"/>
+                <a:ea typeface="Calibri (MS)"/>
+                <a:cs typeface="Calibri (MS)"/>
+                <a:sym typeface="Calibri (MS)"/>
+              </a:rPr>
+              <a:t>;</a:t>
+            </a:r>
+          </a:p>
+          <a:p>
+            <a:pPr algn="just">
+              <a:lnSpc>
+                <a:spcPct val="150000"/>
+              </a:lnSpc>
+            </a:pPr>
+            <a:r>
+              <a:rPr lang="en-US" sz="2499" dirty="0">
+                <a:solidFill>
+                  <a:srgbClr val="000000"/>
+                </a:solidFill>
+                <a:latin typeface="Calibri (MS)"/>
+                <a:ea typeface="Calibri (MS)"/>
+                <a:cs typeface="Calibri (MS)"/>
+                <a:sym typeface="Calibri (MS)"/>
+              </a:rPr>
+              <a:t>•</a:t>
+            </a:r>
+            <a:r>
+              <a:rPr lang="en-US" sz="2499" dirty="0" err="1">
+                <a:solidFill>
+                  <a:srgbClr val="000000"/>
+                </a:solidFill>
+                <a:latin typeface="Calibri (MS)"/>
+                <a:ea typeface="Calibri (MS)"/>
+                <a:cs typeface="Calibri (MS)"/>
+                <a:sym typeface="Calibri (MS)"/>
+              </a:rPr>
+              <a:t>Idade</a:t>
+            </a:r>
+            <a:r>
+              <a:rPr lang="en-US" sz="2499" dirty="0">
+                <a:solidFill>
+                  <a:srgbClr val="000000"/>
+                </a:solidFill>
+                <a:latin typeface="Calibri (MS)"/>
+                <a:ea typeface="Calibri (MS)"/>
+                <a:cs typeface="Calibri (MS)"/>
+                <a:sym typeface="Calibri (MS)"/>
+              </a:rPr>
+              <a:t> entre 18 e 30 </a:t>
+            </a:r>
+            <a:r>
+              <a:rPr lang="en-US" sz="2499" dirty="0" err="1">
+                <a:solidFill>
+                  <a:srgbClr val="000000"/>
+                </a:solidFill>
+                <a:latin typeface="Calibri (MS)"/>
+                <a:ea typeface="Calibri (MS)"/>
+                <a:cs typeface="Calibri (MS)"/>
+                <a:sym typeface="Calibri (MS)"/>
+              </a:rPr>
+              <a:t>anos</a:t>
+            </a:r>
+            <a:r>
+              <a:rPr lang="en-US" sz="2499" dirty="0">
+                <a:solidFill>
+                  <a:srgbClr val="000000"/>
+                </a:solidFill>
+                <a:latin typeface="Calibri (MS)"/>
+                <a:ea typeface="Calibri (MS)"/>
+                <a:cs typeface="Calibri (MS)"/>
+                <a:sym typeface="Calibri (MS)"/>
+              </a:rPr>
+              <a:t>;</a:t>
+            </a:r>
+          </a:p>
+          <a:p>
+            <a:pPr algn="just">
+              <a:lnSpc>
+                <a:spcPct val="150000"/>
+              </a:lnSpc>
+            </a:pPr>
+            <a:r>
+              <a:rPr lang="en-US" sz="2499" dirty="0">
+                <a:solidFill>
+                  <a:srgbClr val="000000"/>
+                </a:solidFill>
+                <a:latin typeface="Calibri (MS)"/>
+                <a:ea typeface="Calibri (MS)"/>
+                <a:cs typeface="Calibri (MS)"/>
+                <a:sym typeface="Calibri (MS)"/>
+              </a:rPr>
+              <a:t>•</a:t>
+            </a:r>
+            <a:r>
+              <a:rPr lang="en-US" sz="2499" dirty="0" err="1">
+                <a:solidFill>
+                  <a:srgbClr val="000000"/>
+                </a:solidFill>
+                <a:latin typeface="Calibri (MS)"/>
+                <a:ea typeface="Calibri (MS)"/>
+                <a:cs typeface="Calibri (MS)"/>
+                <a:sym typeface="Calibri (MS)"/>
+              </a:rPr>
+              <a:t>Pontuação</a:t>
+            </a:r>
+            <a:r>
+              <a:rPr lang="en-US" sz="2499" dirty="0">
+                <a:solidFill>
+                  <a:srgbClr val="000000"/>
+                </a:solidFill>
+                <a:latin typeface="Calibri (MS)"/>
+                <a:ea typeface="Calibri (MS)"/>
+                <a:cs typeface="Calibri (MS)"/>
+                <a:sym typeface="Calibri (MS)"/>
+              </a:rPr>
+              <a:t> PHQ-9 ≥ 5 (</a:t>
+            </a:r>
+            <a:r>
+              <a:rPr lang="en-US" sz="2499" dirty="0" err="1">
+                <a:solidFill>
+                  <a:srgbClr val="000000"/>
+                </a:solidFill>
+                <a:latin typeface="Calibri (MS)"/>
+                <a:ea typeface="Calibri (MS)"/>
+                <a:cs typeface="Calibri (MS)"/>
+                <a:sym typeface="Calibri (MS)"/>
+              </a:rPr>
+              <a:t>sintomas</a:t>
+            </a:r>
+            <a:r>
+              <a:rPr lang="en-US" sz="2499" dirty="0">
+                <a:solidFill>
+                  <a:srgbClr val="000000"/>
+                </a:solidFill>
+                <a:latin typeface="Calibri (MS)"/>
+                <a:ea typeface="Calibri (MS)"/>
+                <a:cs typeface="Calibri (MS)"/>
+                <a:sym typeface="Calibri (MS)"/>
+              </a:rPr>
+              <a:t> </a:t>
+            </a:r>
+            <a:r>
+              <a:rPr lang="en-US" sz="2499" dirty="0" err="1">
+                <a:solidFill>
+                  <a:srgbClr val="000000"/>
+                </a:solidFill>
+                <a:latin typeface="Calibri (MS)"/>
+                <a:ea typeface="Calibri (MS)"/>
+                <a:cs typeface="Calibri (MS)"/>
+                <a:sym typeface="Calibri (MS)"/>
+              </a:rPr>
+              <a:t>depressivos</a:t>
+            </a:r>
+            <a:r>
+              <a:rPr lang="en-US" sz="2499" dirty="0">
+                <a:solidFill>
+                  <a:srgbClr val="000000"/>
+                </a:solidFill>
+                <a:latin typeface="Calibri (MS)"/>
+                <a:ea typeface="Calibri (MS)"/>
+                <a:cs typeface="Calibri (MS)"/>
+                <a:sym typeface="Calibri (MS)"/>
+              </a:rPr>
+              <a:t> </a:t>
+            </a:r>
+            <a:r>
+              <a:rPr lang="en-US" sz="2499" dirty="0" err="1">
+                <a:solidFill>
+                  <a:srgbClr val="000000"/>
+                </a:solidFill>
+                <a:latin typeface="Calibri (MS)"/>
+                <a:ea typeface="Calibri (MS)"/>
+                <a:cs typeface="Calibri (MS)"/>
+                <a:sym typeface="Calibri (MS)"/>
+              </a:rPr>
+              <a:t>leves</a:t>
+            </a:r>
+            <a:r>
+              <a:rPr lang="en-US" sz="2499" dirty="0">
+                <a:solidFill>
+                  <a:srgbClr val="000000"/>
+                </a:solidFill>
+                <a:latin typeface="Calibri (MS)"/>
+                <a:ea typeface="Calibri (MS)"/>
+                <a:cs typeface="Calibri (MS)"/>
+                <a:sym typeface="Calibri (MS)"/>
+              </a:rPr>
+              <a:t> a </a:t>
+            </a:r>
+            <a:r>
+              <a:rPr lang="en-US" sz="2499" dirty="0" err="1">
+                <a:solidFill>
+                  <a:srgbClr val="000000"/>
+                </a:solidFill>
+                <a:latin typeface="Calibri (MS)"/>
+                <a:ea typeface="Calibri (MS)"/>
+                <a:cs typeface="Calibri (MS)"/>
+                <a:sym typeface="Calibri (MS)"/>
+              </a:rPr>
+              <a:t>moderados</a:t>
+            </a:r>
+            <a:r>
+              <a:rPr lang="en-US" sz="2499" dirty="0">
+                <a:solidFill>
+                  <a:srgbClr val="000000"/>
+                </a:solidFill>
+                <a:latin typeface="Calibri (MS)"/>
+                <a:ea typeface="Calibri (MS)"/>
+                <a:cs typeface="Calibri (MS)"/>
+                <a:sym typeface="Calibri (MS)"/>
+              </a:rPr>
+              <a:t>);</a:t>
+            </a:r>
+          </a:p>
+          <a:p>
+            <a:pPr algn="just">
+              <a:lnSpc>
+                <a:spcPct val="150000"/>
+              </a:lnSpc>
+            </a:pPr>
+            <a:r>
+              <a:rPr lang="en-US" sz="2499" dirty="0">
+                <a:solidFill>
+                  <a:srgbClr val="000000"/>
+                </a:solidFill>
+                <a:latin typeface="Calibri (MS)"/>
+                <a:ea typeface="Calibri (MS)"/>
+                <a:cs typeface="Calibri (MS)"/>
+                <a:sym typeface="Calibri (MS)"/>
+              </a:rPr>
+              <a:t>•</a:t>
+            </a:r>
+            <a:r>
+              <a:rPr lang="en-US" sz="2499" dirty="0" err="1">
+                <a:solidFill>
+                  <a:srgbClr val="000000"/>
+                </a:solidFill>
+                <a:latin typeface="Calibri (MS)"/>
+                <a:ea typeface="Calibri (MS)"/>
+                <a:cs typeface="Calibri (MS)"/>
+                <a:sym typeface="Calibri (MS)"/>
+              </a:rPr>
+              <a:t>Acesso</a:t>
+            </a:r>
+            <a:r>
+              <a:rPr lang="en-US" sz="2499" dirty="0">
+                <a:solidFill>
+                  <a:srgbClr val="000000"/>
+                </a:solidFill>
+                <a:latin typeface="Calibri (MS)"/>
+                <a:ea typeface="Calibri (MS)"/>
+                <a:cs typeface="Calibri (MS)"/>
+                <a:sym typeface="Calibri (MS)"/>
+              </a:rPr>
+              <a:t> a smartphone com </a:t>
+            </a:r>
+            <a:r>
+              <a:rPr lang="en-US" sz="2499" dirty="0" err="1">
+                <a:solidFill>
+                  <a:srgbClr val="000000"/>
+                </a:solidFill>
+                <a:latin typeface="Calibri (MS)"/>
+                <a:ea typeface="Calibri (MS)"/>
+                <a:cs typeface="Calibri (MS)"/>
+                <a:sym typeface="Calibri (MS)"/>
+              </a:rPr>
+              <a:t>sistema</a:t>
+            </a:r>
+            <a:r>
+              <a:rPr lang="en-US" sz="2499" dirty="0">
+                <a:solidFill>
+                  <a:srgbClr val="000000"/>
+                </a:solidFill>
+                <a:latin typeface="Calibri (MS)"/>
+                <a:ea typeface="Calibri (MS)"/>
+                <a:cs typeface="Calibri (MS)"/>
+                <a:sym typeface="Calibri (MS)"/>
+              </a:rPr>
+              <a:t> iOS </a:t>
+            </a:r>
+            <a:r>
+              <a:rPr lang="en-US" sz="2499" dirty="0" err="1">
+                <a:solidFill>
+                  <a:srgbClr val="000000"/>
+                </a:solidFill>
+                <a:latin typeface="Calibri (MS)"/>
+                <a:ea typeface="Calibri (MS)"/>
+                <a:cs typeface="Calibri (MS)"/>
+                <a:sym typeface="Calibri (MS)"/>
+              </a:rPr>
+              <a:t>ou</a:t>
+            </a:r>
+            <a:r>
+              <a:rPr lang="en-US" sz="2499" dirty="0">
+                <a:solidFill>
+                  <a:srgbClr val="000000"/>
+                </a:solidFill>
+                <a:latin typeface="Calibri (MS)"/>
+                <a:ea typeface="Calibri (MS)"/>
+                <a:cs typeface="Calibri (MS)"/>
+                <a:sym typeface="Calibri (MS)"/>
+              </a:rPr>
+              <a:t> Android;</a:t>
+            </a:r>
+          </a:p>
+          <a:p>
+            <a:pPr algn="just">
+              <a:lnSpc>
+                <a:spcPct val="150000"/>
+              </a:lnSpc>
+            </a:pPr>
+            <a:r>
+              <a:rPr lang="en-US" sz="2499" dirty="0">
+                <a:solidFill>
+                  <a:srgbClr val="000000"/>
+                </a:solidFill>
+                <a:latin typeface="Calibri (MS)"/>
+                <a:ea typeface="Calibri (MS)"/>
+                <a:cs typeface="Calibri (MS)"/>
+                <a:sym typeface="Calibri (MS)"/>
+              </a:rPr>
+              <a:t>•</a:t>
+            </a:r>
+            <a:r>
+              <a:rPr lang="en-US" sz="2499" dirty="0" err="1">
+                <a:solidFill>
+                  <a:srgbClr val="000000"/>
+                </a:solidFill>
+                <a:latin typeface="Calibri (MS)"/>
+                <a:ea typeface="Calibri (MS)"/>
+                <a:cs typeface="Calibri (MS)"/>
+                <a:sym typeface="Calibri (MS)"/>
+              </a:rPr>
+              <a:t>Capacidade</a:t>
+            </a:r>
+            <a:r>
+              <a:rPr lang="en-US" sz="2499" dirty="0">
+                <a:solidFill>
+                  <a:srgbClr val="000000"/>
+                </a:solidFill>
+                <a:latin typeface="Calibri (MS)"/>
+                <a:ea typeface="Calibri (MS)"/>
+                <a:cs typeface="Calibri (MS)"/>
+                <a:sym typeface="Calibri (MS)"/>
+              </a:rPr>
+              <a:t> de </a:t>
+            </a:r>
+            <a:r>
+              <a:rPr lang="en-US" sz="2499" dirty="0" err="1">
+                <a:solidFill>
+                  <a:srgbClr val="000000"/>
+                </a:solidFill>
+                <a:latin typeface="Calibri (MS)"/>
+                <a:ea typeface="Calibri (MS)"/>
+                <a:cs typeface="Calibri (MS)"/>
+                <a:sym typeface="Calibri (MS)"/>
+              </a:rPr>
+              <a:t>fornecer</a:t>
+            </a:r>
+            <a:r>
+              <a:rPr lang="en-US" sz="2499" dirty="0">
+                <a:solidFill>
+                  <a:srgbClr val="000000"/>
+                </a:solidFill>
+                <a:latin typeface="Calibri (MS)"/>
+                <a:ea typeface="Calibri (MS)"/>
+                <a:cs typeface="Calibri (MS)"/>
+                <a:sym typeface="Calibri (MS)"/>
+              </a:rPr>
+              <a:t> </a:t>
+            </a:r>
+            <a:r>
+              <a:rPr lang="en-US" sz="2499" dirty="0" err="1">
+                <a:solidFill>
+                  <a:srgbClr val="000000"/>
+                </a:solidFill>
+                <a:latin typeface="Calibri (MS)"/>
+                <a:ea typeface="Calibri (MS)"/>
+                <a:cs typeface="Calibri (MS)"/>
+                <a:sym typeface="Calibri (MS)"/>
+              </a:rPr>
+              <a:t>consentimento</a:t>
+            </a:r>
+            <a:r>
+              <a:rPr lang="en-US" sz="2499" dirty="0">
+                <a:solidFill>
+                  <a:srgbClr val="000000"/>
+                </a:solidFill>
+                <a:latin typeface="Calibri (MS)"/>
+                <a:ea typeface="Calibri (MS)"/>
+                <a:cs typeface="Calibri (MS)"/>
+                <a:sym typeface="Calibri (MS)"/>
+              </a:rPr>
+              <a:t> </a:t>
+            </a:r>
+            <a:r>
+              <a:rPr lang="en-US" sz="2499" dirty="0" err="1">
+                <a:solidFill>
+                  <a:srgbClr val="000000"/>
+                </a:solidFill>
+                <a:latin typeface="Calibri (MS)"/>
+                <a:ea typeface="Calibri (MS)"/>
+                <a:cs typeface="Calibri (MS)"/>
+                <a:sym typeface="Calibri (MS)"/>
+              </a:rPr>
+              <a:t>informado</a:t>
+            </a:r>
+            <a:r>
+              <a:rPr lang="en-US" sz="2499" dirty="0">
+                <a:solidFill>
+                  <a:srgbClr val="000000"/>
+                </a:solidFill>
+                <a:latin typeface="Calibri (MS)"/>
+                <a:ea typeface="Calibri (MS)"/>
+                <a:cs typeface="Calibri (MS)"/>
+                <a:sym typeface="Calibri (MS)"/>
+              </a:rPr>
+              <a:t>.</a:t>
             </a:r>
           </a:p>
           <a:p>
@@ -10168,102 +13418,7 @@
                 <a:spcPts val="3749"/>
               </a:lnSpc>
             </a:pPr>
-            <a:r>
-              <a:rPr lang="en-US" sz="2499">
-                <a:solidFill>
-                  <a:srgbClr val="000000"/>
-                </a:solidFill>
-                <a:latin typeface="Calibri (MS)"/>
-                <a:ea typeface="Calibri (MS)"/>
-                <a:cs typeface="Calibri (MS)"/>
-                <a:sym typeface="Calibri (MS)"/>
-              </a:rPr>
-              <a:t>•Estudantes universitários matriculados;</a:t>
-            </a:r>
-          </a:p>
-          <a:p>
-            <a:pPr algn="just">
-              <a:lnSpc>
-                <a:spcPts val="3749"/>
-              </a:lnSpc>
-            </a:pPr>
-            <a:r>
-              <a:rPr lang="en-US" sz="2499">
-                <a:solidFill>
-                  <a:srgbClr val="000000"/>
-                </a:solidFill>
-                <a:latin typeface="Calibri (MS)"/>
-                <a:ea typeface="Calibri (MS)"/>
-                <a:cs typeface="Calibri (MS)"/>
-                <a:sym typeface="Calibri (MS)"/>
-              </a:rPr>
-              <a:t>•Idade entre 18 e 30 anos;</a:t>
-            </a:r>
-          </a:p>
-          <a:p>
-            <a:pPr algn="just">
-              <a:lnSpc>
-                <a:spcPts val="3749"/>
-              </a:lnSpc>
-            </a:pPr>
-            <a:r>
-              <a:rPr lang="en-US" sz="2499">
-                <a:solidFill>
-                  <a:srgbClr val="000000"/>
-                </a:solidFill>
-                <a:latin typeface="Calibri (MS)"/>
-                <a:ea typeface="Calibri (MS)"/>
-                <a:cs typeface="Calibri (MS)"/>
-                <a:sym typeface="Calibri (MS)"/>
-              </a:rPr>
-              <a:t>•Pontuação PHQ-9 ≥ 5 (sintomas depressivos leves a moderados);</a:t>
-            </a:r>
-          </a:p>
-          <a:p>
-            <a:pPr algn="just">
-              <a:lnSpc>
-                <a:spcPts val="3749"/>
-              </a:lnSpc>
-            </a:pPr>
-            <a:r>
-              <a:rPr lang="en-US" sz="2499">
-                <a:solidFill>
-                  <a:srgbClr val="000000"/>
-                </a:solidFill>
-                <a:latin typeface="Calibri (MS)"/>
-                <a:ea typeface="Calibri (MS)"/>
-                <a:cs typeface="Calibri (MS)"/>
-                <a:sym typeface="Calibri (MS)"/>
-              </a:rPr>
-              <a:t>•Acesso a smartphone com sistema iOS ou Android;</a:t>
-            </a:r>
-          </a:p>
-          <a:p>
-            <a:pPr algn="just">
-              <a:lnSpc>
-                <a:spcPts val="3749"/>
-              </a:lnSpc>
-            </a:pPr>
-            <a:r>
-              <a:rPr lang="en-US" sz="2499">
-                <a:solidFill>
-                  <a:srgbClr val="000000"/>
-                </a:solidFill>
-                <a:latin typeface="Calibri (MS)"/>
-                <a:ea typeface="Calibri (MS)"/>
-                <a:cs typeface="Calibri (MS)"/>
-                <a:sym typeface="Calibri (MS)"/>
-              </a:rPr>
-              <a:t>•Capacidade de fornecer consentimento informado.</a:t>
-            </a:r>
-          </a:p>
-          <a:p>
-            <a:pPr algn="just">
-              <a:lnSpc>
-                <a:spcPts val="3749"/>
-              </a:lnSpc>
-            </a:pPr>
-            <a:endParaRPr lang="en-US" sz="2499">
+            <a:endParaRPr lang="en-US" sz="2499" dirty="0">
               <a:solidFill>
                 <a:srgbClr val="000000"/>
               </a:solidFill>
@@ -10279,7 +13434,7 @@
                 <a:spcPts val="3749"/>
               </a:lnSpc>
             </a:pPr>
-            <a:endParaRPr lang="en-US" sz="2499">
+            <a:endParaRPr lang="en-US" sz="2499" dirty="0">
               <a:solidFill>
                 <a:srgbClr val="000000"/>
               </a:solidFill>
@@ -10299,8 +13454,8 @@
         </p:nvSpPr>
         <p:spPr>
           <a:xfrm>
-            <a:off x="9144000" y="3735005"/>
-            <a:ext cx="6886779" cy="3524250"/>
+            <a:off x="9170118" y="3451051"/>
+            <a:ext cx="6886779" cy="4132798"/>
           </a:xfrm>
           <a:prstGeom prst="rect">
             <a:avLst/>
@@ -10314,11 +13469,11 @@
           <a:p>
             <a:pPr algn="just">
               <a:lnSpc>
-                <a:spcPts val="5250"/>
+                <a:spcPct val="150000"/>
               </a:lnSpc>
             </a:pPr>
             <a:r>
-              <a:rPr lang="en-US" sz="3500" b="1">
+              <a:rPr lang="en-US" sz="3500" b="1" dirty="0" err="1">
                 <a:solidFill>
                   <a:srgbClr val="000000"/>
                 </a:solidFill>
@@ -10327,102 +13482,642 @@
                 <a:cs typeface="Calibri (MS) Bold"/>
                 <a:sym typeface="Calibri (MS) Bold"/>
               </a:rPr>
-              <a:t>Critérios de Exclusão:</a:t>
+              <a:t>Critérios</a:t>
+            </a:r>
+            <a:r>
+              <a:rPr lang="en-US" sz="3500" b="1" dirty="0">
+                <a:solidFill>
+                  <a:srgbClr val="000000"/>
+                </a:solidFill>
+                <a:latin typeface="Calibri (MS) Bold"/>
+                <a:ea typeface="Calibri (MS) Bold"/>
+                <a:cs typeface="Calibri (MS) Bold"/>
+                <a:sym typeface="Calibri (MS) Bold"/>
+              </a:rPr>
+              <a:t> de </a:t>
+            </a:r>
+            <a:r>
+              <a:rPr lang="en-US" sz="3500" b="1" dirty="0" err="1">
+                <a:solidFill>
+                  <a:srgbClr val="000000"/>
+                </a:solidFill>
+                <a:latin typeface="Calibri (MS) Bold"/>
+                <a:ea typeface="Calibri (MS) Bold"/>
+                <a:cs typeface="Calibri (MS) Bold"/>
+                <a:sym typeface="Calibri (MS) Bold"/>
+              </a:rPr>
+              <a:t>Exclusão</a:t>
+            </a:r>
+            <a:r>
+              <a:rPr lang="en-US" sz="3500" b="1" dirty="0">
+                <a:solidFill>
+                  <a:srgbClr val="000000"/>
+                </a:solidFill>
+                <a:latin typeface="Calibri (MS) Bold"/>
+                <a:ea typeface="Calibri (MS) Bold"/>
+                <a:cs typeface="Calibri (MS) Bold"/>
+                <a:sym typeface="Calibri (MS) Bold"/>
+              </a:rPr>
+              <a:t>:</a:t>
             </a:r>
           </a:p>
           <a:p>
             <a:pPr algn="just">
               <a:lnSpc>
-                <a:spcPts val="3749"/>
+                <a:spcPct val="150000"/>
               </a:lnSpc>
             </a:pPr>
             <a:r>
-              <a:rPr lang="en-US" sz="2499">
-                <a:solidFill>
-                  <a:srgbClr val="000000"/>
-                </a:solidFill>
-                <a:latin typeface="Calibri (MS)"/>
-                <a:ea typeface="Calibri (MS)"/>
-                <a:cs typeface="Calibri (MS)"/>
-                <a:sym typeface="Calibri (MS)"/>
-              </a:rPr>
-              <a:t>•Tratamento psiquiátrico ativo em curso;</a:t>
+              <a:rPr lang="en-US" sz="2499" dirty="0">
+                <a:solidFill>
+                  <a:srgbClr val="000000"/>
+                </a:solidFill>
+                <a:latin typeface="Calibri (MS)"/>
+                <a:ea typeface="Calibri (MS)"/>
+                <a:cs typeface="Calibri (MS)"/>
+                <a:sym typeface="Calibri (MS)"/>
+              </a:rPr>
+              <a:t>•</a:t>
+            </a:r>
+            <a:r>
+              <a:rPr lang="en-US" sz="2499" dirty="0" err="1">
+                <a:solidFill>
+                  <a:srgbClr val="000000"/>
+                </a:solidFill>
+                <a:latin typeface="Calibri (MS)"/>
+                <a:ea typeface="Calibri (MS)"/>
+                <a:cs typeface="Calibri (MS)"/>
+                <a:sym typeface="Calibri (MS)"/>
+              </a:rPr>
+              <a:t>Tratamento</a:t>
+            </a:r>
+            <a:r>
+              <a:rPr lang="en-US" sz="2499" dirty="0">
+                <a:solidFill>
+                  <a:srgbClr val="000000"/>
+                </a:solidFill>
+                <a:latin typeface="Calibri (MS)"/>
+                <a:ea typeface="Calibri (MS)"/>
+                <a:cs typeface="Calibri (MS)"/>
+                <a:sym typeface="Calibri (MS)"/>
+              </a:rPr>
+              <a:t> </a:t>
+            </a:r>
+            <a:r>
+              <a:rPr lang="en-US" sz="2499" dirty="0" err="1">
+                <a:solidFill>
+                  <a:srgbClr val="000000"/>
+                </a:solidFill>
+                <a:latin typeface="Calibri (MS)"/>
+                <a:ea typeface="Calibri (MS)"/>
+                <a:cs typeface="Calibri (MS)"/>
+                <a:sym typeface="Calibri (MS)"/>
+              </a:rPr>
+              <a:t>psiquiátrico</a:t>
+            </a:r>
+            <a:r>
+              <a:rPr lang="en-US" sz="2499" dirty="0">
+                <a:solidFill>
+                  <a:srgbClr val="000000"/>
+                </a:solidFill>
+                <a:latin typeface="Calibri (MS)"/>
+                <a:ea typeface="Calibri (MS)"/>
+                <a:cs typeface="Calibri (MS)"/>
+                <a:sym typeface="Calibri (MS)"/>
+              </a:rPr>
+              <a:t> </a:t>
+            </a:r>
+            <a:r>
+              <a:rPr lang="en-US" sz="2499" dirty="0" err="1">
+                <a:solidFill>
+                  <a:srgbClr val="000000"/>
+                </a:solidFill>
+                <a:latin typeface="Calibri (MS)"/>
+                <a:ea typeface="Calibri (MS)"/>
+                <a:cs typeface="Calibri (MS)"/>
+                <a:sym typeface="Calibri (MS)"/>
+              </a:rPr>
+              <a:t>ativo</a:t>
+            </a:r>
+            <a:r>
+              <a:rPr lang="en-US" sz="2499" dirty="0">
+                <a:solidFill>
+                  <a:srgbClr val="000000"/>
+                </a:solidFill>
+                <a:latin typeface="Calibri (MS)"/>
+                <a:ea typeface="Calibri (MS)"/>
+                <a:cs typeface="Calibri (MS)"/>
+                <a:sym typeface="Calibri (MS)"/>
+              </a:rPr>
+              <a:t> </a:t>
+            </a:r>
+            <a:r>
+              <a:rPr lang="en-US" sz="2499" dirty="0" err="1">
+                <a:solidFill>
+                  <a:srgbClr val="000000"/>
+                </a:solidFill>
+                <a:latin typeface="Calibri (MS)"/>
+                <a:ea typeface="Calibri (MS)"/>
+                <a:cs typeface="Calibri (MS)"/>
+                <a:sym typeface="Calibri (MS)"/>
+              </a:rPr>
+              <a:t>em</a:t>
+            </a:r>
+            <a:r>
+              <a:rPr lang="en-US" sz="2499" dirty="0">
+                <a:solidFill>
+                  <a:srgbClr val="000000"/>
+                </a:solidFill>
+                <a:latin typeface="Calibri (MS)"/>
+                <a:ea typeface="Calibri (MS)"/>
+                <a:cs typeface="Calibri (MS)"/>
+                <a:sym typeface="Calibri (MS)"/>
+              </a:rPr>
+              <a:t> </a:t>
+            </a:r>
+            <a:r>
+              <a:rPr lang="en-US" sz="2499" dirty="0" err="1">
+                <a:solidFill>
+                  <a:srgbClr val="000000"/>
+                </a:solidFill>
+                <a:latin typeface="Calibri (MS)"/>
+                <a:ea typeface="Calibri (MS)"/>
+                <a:cs typeface="Calibri (MS)"/>
+                <a:sym typeface="Calibri (MS)"/>
+              </a:rPr>
+              <a:t>curso</a:t>
+            </a:r>
+            <a:r>
+              <a:rPr lang="en-US" sz="2499" dirty="0">
+                <a:solidFill>
+                  <a:srgbClr val="000000"/>
+                </a:solidFill>
+                <a:latin typeface="Calibri (MS)"/>
+                <a:ea typeface="Calibri (MS)"/>
+                <a:cs typeface="Calibri (MS)"/>
+                <a:sym typeface="Calibri (MS)"/>
+              </a:rPr>
+              <a:t>;</a:t>
             </a:r>
           </a:p>
           <a:p>
             <a:pPr algn="just">
               <a:lnSpc>
-                <a:spcPts val="3749"/>
+                <a:spcPct val="150000"/>
               </a:lnSpc>
             </a:pPr>
             <a:r>
-              <a:rPr lang="en-US" sz="2499">
-                <a:solidFill>
-                  <a:srgbClr val="000000"/>
-                </a:solidFill>
-                <a:latin typeface="Calibri (MS)"/>
-                <a:ea typeface="Calibri (MS)"/>
-                <a:cs typeface="Calibri (MS)"/>
-                <a:sym typeface="Calibri (MS)"/>
-              </a:rPr>
-              <a:t>•Presença de ideação suicida (item 9 do PHQ-9 ≥ 2);</a:t>
+              <a:rPr lang="en-US" sz="2499" dirty="0">
+                <a:solidFill>
+                  <a:srgbClr val="000000"/>
+                </a:solidFill>
+                <a:latin typeface="Calibri (MS)"/>
+                <a:ea typeface="Calibri (MS)"/>
+                <a:cs typeface="Calibri (MS)"/>
+                <a:sym typeface="Calibri (MS)"/>
+              </a:rPr>
+              <a:t>•</a:t>
+            </a:r>
+            <a:r>
+              <a:rPr lang="en-US" sz="2499" dirty="0" err="1">
+                <a:solidFill>
+                  <a:srgbClr val="000000"/>
+                </a:solidFill>
+                <a:latin typeface="Calibri (MS)"/>
+                <a:ea typeface="Calibri (MS)"/>
+                <a:cs typeface="Calibri (MS)"/>
+                <a:sym typeface="Calibri (MS)"/>
+              </a:rPr>
+              <a:t>Presença</a:t>
+            </a:r>
+            <a:r>
+              <a:rPr lang="en-US" sz="2499" dirty="0">
+                <a:solidFill>
+                  <a:srgbClr val="000000"/>
+                </a:solidFill>
+                <a:latin typeface="Calibri (MS)"/>
+                <a:ea typeface="Calibri (MS)"/>
+                <a:cs typeface="Calibri (MS)"/>
+                <a:sym typeface="Calibri (MS)"/>
+              </a:rPr>
+              <a:t> de </a:t>
+            </a:r>
+            <a:r>
+              <a:rPr lang="en-US" sz="2499" dirty="0" err="1">
+                <a:solidFill>
+                  <a:srgbClr val="000000"/>
+                </a:solidFill>
+                <a:latin typeface="Calibri (MS)"/>
+                <a:ea typeface="Calibri (MS)"/>
+                <a:cs typeface="Calibri (MS)"/>
+                <a:sym typeface="Calibri (MS)"/>
+              </a:rPr>
+              <a:t>ideação</a:t>
+            </a:r>
+            <a:r>
+              <a:rPr lang="en-US" sz="2499" dirty="0">
+                <a:solidFill>
+                  <a:srgbClr val="000000"/>
+                </a:solidFill>
+                <a:latin typeface="Calibri (MS)"/>
+                <a:ea typeface="Calibri (MS)"/>
+                <a:cs typeface="Calibri (MS)"/>
+                <a:sym typeface="Calibri (MS)"/>
+              </a:rPr>
+              <a:t> </a:t>
+            </a:r>
+            <a:r>
+              <a:rPr lang="en-US" sz="2499" dirty="0" err="1">
+                <a:solidFill>
+                  <a:srgbClr val="000000"/>
+                </a:solidFill>
+                <a:latin typeface="Calibri (MS)"/>
+                <a:ea typeface="Calibri (MS)"/>
+                <a:cs typeface="Calibri (MS)"/>
+                <a:sym typeface="Calibri (MS)"/>
+              </a:rPr>
+              <a:t>suicida</a:t>
+            </a:r>
+            <a:r>
+              <a:rPr lang="en-US" sz="2499" dirty="0">
+                <a:solidFill>
+                  <a:srgbClr val="000000"/>
+                </a:solidFill>
+                <a:latin typeface="Calibri (MS)"/>
+                <a:ea typeface="Calibri (MS)"/>
+                <a:cs typeface="Calibri (MS)"/>
+                <a:sym typeface="Calibri (MS)"/>
+              </a:rPr>
+              <a:t> (item 9 do PHQ-9 ≥ 2);</a:t>
             </a:r>
           </a:p>
           <a:p>
             <a:pPr algn="just">
               <a:lnSpc>
-                <a:spcPts val="3749"/>
+                <a:spcPct val="150000"/>
               </a:lnSpc>
             </a:pPr>
             <a:r>
-              <a:rPr lang="en-US" sz="2499">
-                <a:solidFill>
-                  <a:srgbClr val="000000"/>
-                </a:solidFill>
-                <a:latin typeface="Calibri (MS)"/>
-                <a:ea typeface="Calibri (MS)"/>
-                <a:cs typeface="Calibri (MS)"/>
-                <a:sym typeface="Calibri (MS)"/>
-              </a:rPr>
-              <a:t>•Diagnóstico de perturbação psicótica ou bipolar;</a:t>
+              <a:rPr lang="en-US" sz="2499" dirty="0">
+                <a:solidFill>
+                  <a:srgbClr val="000000"/>
+                </a:solidFill>
+                <a:latin typeface="Calibri (MS)"/>
+                <a:ea typeface="Calibri (MS)"/>
+                <a:cs typeface="Calibri (MS)"/>
+                <a:sym typeface="Calibri (MS)"/>
+              </a:rPr>
+              <a:t>•</a:t>
+            </a:r>
+            <a:r>
+              <a:rPr lang="en-US" sz="2499" dirty="0" err="1">
+                <a:solidFill>
+                  <a:srgbClr val="000000"/>
+                </a:solidFill>
+                <a:latin typeface="Calibri (MS)"/>
+                <a:ea typeface="Calibri (MS)"/>
+                <a:cs typeface="Calibri (MS)"/>
+                <a:sym typeface="Calibri (MS)"/>
+              </a:rPr>
+              <a:t>Diagnóstico</a:t>
+            </a:r>
+            <a:r>
+              <a:rPr lang="en-US" sz="2499" dirty="0">
+                <a:solidFill>
+                  <a:srgbClr val="000000"/>
+                </a:solidFill>
+                <a:latin typeface="Calibri (MS)"/>
+                <a:ea typeface="Calibri (MS)"/>
+                <a:cs typeface="Calibri (MS)"/>
+                <a:sym typeface="Calibri (MS)"/>
+              </a:rPr>
+              <a:t> de </a:t>
+            </a:r>
+            <a:r>
+              <a:rPr lang="en-US" sz="2499" dirty="0" err="1">
+                <a:solidFill>
+                  <a:srgbClr val="000000"/>
+                </a:solidFill>
+                <a:latin typeface="Calibri (MS)"/>
+                <a:ea typeface="Calibri (MS)"/>
+                <a:cs typeface="Calibri (MS)"/>
+                <a:sym typeface="Calibri (MS)"/>
+              </a:rPr>
+              <a:t>perturbação</a:t>
+            </a:r>
+            <a:r>
+              <a:rPr lang="en-US" sz="2499" dirty="0">
+                <a:solidFill>
+                  <a:srgbClr val="000000"/>
+                </a:solidFill>
+                <a:latin typeface="Calibri (MS)"/>
+                <a:ea typeface="Calibri (MS)"/>
+                <a:cs typeface="Calibri (MS)"/>
+                <a:sym typeface="Calibri (MS)"/>
+              </a:rPr>
+              <a:t> </a:t>
+            </a:r>
+            <a:r>
+              <a:rPr lang="en-US" sz="2499" dirty="0" err="1">
+                <a:solidFill>
+                  <a:srgbClr val="000000"/>
+                </a:solidFill>
+                <a:latin typeface="Calibri (MS)"/>
+                <a:ea typeface="Calibri (MS)"/>
+                <a:cs typeface="Calibri (MS)"/>
+                <a:sym typeface="Calibri (MS)"/>
+              </a:rPr>
+              <a:t>psicótica</a:t>
+            </a:r>
+            <a:r>
+              <a:rPr lang="en-US" sz="2499" dirty="0">
+                <a:solidFill>
+                  <a:srgbClr val="000000"/>
+                </a:solidFill>
+                <a:latin typeface="Calibri (MS)"/>
+                <a:ea typeface="Calibri (MS)"/>
+                <a:cs typeface="Calibri (MS)"/>
+                <a:sym typeface="Calibri (MS)"/>
+              </a:rPr>
+              <a:t> </a:t>
+            </a:r>
+            <a:r>
+              <a:rPr lang="en-US" sz="2499" dirty="0" err="1">
+                <a:solidFill>
+                  <a:srgbClr val="000000"/>
+                </a:solidFill>
+                <a:latin typeface="Calibri (MS)"/>
+                <a:ea typeface="Calibri (MS)"/>
+                <a:cs typeface="Calibri (MS)"/>
+                <a:sym typeface="Calibri (MS)"/>
+              </a:rPr>
+              <a:t>ou</a:t>
+            </a:r>
+            <a:r>
+              <a:rPr lang="en-US" sz="2499" dirty="0">
+                <a:solidFill>
+                  <a:srgbClr val="000000"/>
+                </a:solidFill>
+                <a:latin typeface="Calibri (MS)"/>
+                <a:ea typeface="Calibri (MS)"/>
+                <a:cs typeface="Calibri (MS)"/>
+                <a:sym typeface="Calibri (MS)"/>
+              </a:rPr>
+              <a:t> bipolar;</a:t>
             </a:r>
           </a:p>
           <a:p>
             <a:pPr algn="just">
               <a:lnSpc>
-                <a:spcPts val="3749"/>
+                <a:spcPct val="150000"/>
               </a:lnSpc>
             </a:pPr>
             <a:r>
-              <a:rPr lang="en-US" sz="2499">
-                <a:solidFill>
-                  <a:srgbClr val="000000"/>
-                </a:solidFill>
-                <a:latin typeface="Calibri (MS)"/>
-                <a:ea typeface="Calibri (MS)"/>
-                <a:cs typeface="Calibri (MS)"/>
-                <a:sym typeface="Calibri (MS)"/>
-              </a:rPr>
-              <a:t>•Participação noutro ensaio clínico de saúde mental;</a:t>
+              <a:rPr lang="en-US" sz="2499" dirty="0">
+                <a:solidFill>
+                  <a:srgbClr val="000000"/>
+                </a:solidFill>
+                <a:latin typeface="Calibri (MS)"/>
+                <a:ea typeface="Calibri (MS)"/>
+                <a:cs typeface="Calibri (MS)"/>
+                <a:sym typeface="Calibri (MS)"/>
+              </a:rPr>
+              <a:t>•</a:t>
+            </a:r>
+            <a:r>
+              <a:rPr lang="en-US" sz="2499" dirty="0" err="1">
+                <a:solidFill>
+                  <a:srgbClr val="000000"/>
+                </a:solidFill>
+                <a:latin typeface="Calibri (MS)"/>
+                <a:ea typeface="Calibri (MS)"/>
+                <a:cs typeface="Calibri (MS)"/>
+                <a:sym typeface="Calibri (MS)"/>
+              </a:rPr>
+              <a:t>Participação</a:t>
+            </a:r>
+            <a:r>
+              <a:rPr lang="en-US" sz="2499" dirty="0">
+                <a:solidFill>
+                  <a:srgbClr val="000000"/>
+                </a:solidFill>
+                <a:latin typeface="Calibri (MS)"/>
+                <a:ea typeface="Calibri (MS)"/>
+                <a:cs typeface="Calibri (MS)"/>
+                <a:sym typeface="Calibri (MS)"/>
+              </a:rPr>
+              <a:t> </a:t>
+            </a:r>
+            <a:r>
+              <a:rPr lang="en-US" sz="2499" dirty="0" err="1">
+                <a:solidFill>
+                  <a:srgbClr val="000000"/>
+                </a:solidFill>
+                <a:latin typeface="Calibri (MS)"/>
+                <a:ea typeface="Calibri (MS)"/>
+                <a:cs typeface="Calibri (MS)"/>
+                <a:sym typeface="Calibri (MS)"/>
+              </a:rPr>
+              <a:t>noutro</a:t>
+            </a:r>
+            <a:r>
+              <a:rPr lang="en-US" sz="2499" dirty="0">
+                <a:solidFill>
+                  <a:srgbClr val="000000"/>
+                </a:solidFill>
+                <a:latin typeface="Calibri (MS)"/>
+                <a:ea typeface="Calibri (MS)"/>
+                <a:cs typeface="Calibri (MS)"/>
+                <a:sym typeface="Calibri (MS)"/>
+              </a:rPr>
+              <a:t> </a:t>
+            </a:r>
+            <a:r>
+              <a:rPr lang="en-US" sz="2499" dirty="0" err="1">
+                <a:solidFill>
+                  <a:srgbClr val="000000"/>
+                </a:solidFill>
+                <a:latin typeface="Calibri (MS)"/>
+                <a:ea typeface="Calibri (MS)"/>
+                <a:cs typeface="Calibri (MS)"/>
+                <a:sym typeface="Calibri (MS)"/>
+              </a:rPr>
+              <a:t>ensaio</a:t>
+            </a:r>
+            <a:r>
+              <a:rPr lang="en-US" sz="2499" dirty="0">
+                <a:solidFill>
+                  <a:srgbClr val="000000"/>
+                </a:solidFill>
+                <a:latin typeface="Calibri (MS)"/>
+                <a:ea typeface="Calibri (MS)"/>
+                <a:cs typeface="Calibri (MS)"/>
+                <a:sym typeface="Calibri (MS)"/>
+              </a:rPr>
+              <a:t> </a:t>
+            </a:r>
+            <a:r>
+              <a:rPr lang="en-US" sz="2499" dirty="0" err="1">
+                <a:solidFill>
+                  <a:srgbClr val="000000"/>
+                </a:solidFill>
+                <a:latin typeface="Calibri (MS)"/>
+                <a:ea typeface="Calibri (MS)"/>
+                <a:cs typeface="Calibri (MS)"/>
+                <a:sym typeface="Calibri (MS)"/>
+              </a:rPr>
+              <a:t>clínico</a:t>
+            </a:r>
+            <a:r>
+              <a:rPr lang="en-US" sz="2499" dirty="0">
+                <a:solidFill>
+                  <a:srgbClr val="000000"/>
+                </a:solidFill>
+                <a:latin typeface="Calibri (MS)"/>
+                <a:ea typeface="Calibri (MS)"/>
+                <a:cs typeface="Calibri (MS)"/>
+                <a:sym typeface="Calibri (MS)"/>
+              </a:rPr>
+              <a:t> de </a:t>
+            </a:r>
+            <a:r>
+              <a:rPr lang="en-US" sz="2499" dirty="0" err="1">
+                <a:solidFill>
+                  <a:srgbClr val="000000"/>
+                </a:solidFill>
+                <a:latin typeface="Calibri (MS)"/>
+                <a:ea typeface="Calibri (MS)"/>
+                <a:cs typeface="Calibri (MS)"/>
+                <a:sym typeface="Calibri (MS)"/>
+              </a:rPr>
+              <a:t>saúde</a:t>
+            </a:r>
+            <a:r>
+              <a:rPr lang="en-US" sz="2499" dirty="0">
+                <a:solidFill>
+                  <a:srgbClr val="000000"/>
+                </a:solidFill>
+                <a:latin typeface="Calibri (MS)"/>
+                <a:ea typeface="Calibri (MS)"/>
+                <a:cs typeface="Calibri (MS)"/>
+                <a:sym typeface="Calibri (MS)"/>
+              </a:rPr>
+              <a:t> mental;</a:t>
             </a:r>
           </a:p>
           <a:p>
             <a:pPr algn="just">
               <a:lnSpc>
-                <a:spcPts val="3749"/>
+                <a:spcPct val="150000"/>
               </a:lnSpc>
             </a:pPr>
             <a:r>
-              <a:rPr lang="en-US" sz="2499">
-                <a:solidFill>
-                  <a:srgbClr val="000000"/>
-                </a:solidFill>
-                <a:latin typeface="Calibri (MS)"/>
-                <a:ea typeface="Calibri (MS)"/>
-                <a:cs typeface="Calibri (MS)"/>
-                <a:sym typeface="Calibri (MS)"/>
-              </a:rPr>
-              <a:t>•Incapacidade de compreender português escrito.</a:t>
+              <a:rPr lang="en-US" sz="2499" dirty="0">
+                <a:solidFill>
+                  <a:srgbClr val="000000"/>
+                </a:solidFill>
+                <a:latin typeface="Calibri (MS)"/>
+                <a:ea typeface="Calibri (MS)"/>
+                <a:cs typeface="Calibri (MS)"/>
+                <a:sym typeface="Calibri (MS)"/>
+              </a:rPr>
+              <a:t>•</a:t>
+            </a:r>
+            <a:r>
+              <a:rPr lang="en-US" sz="2499" dirty="0" err="1">
+                <a:solidFill>
+                  <a:srgbClr val="000000"/>
+                </a:solidFill>
+                <a:latin typeface="Calibri (MS)"/>
+                <a:ea typeface="Calibri (MS)"/>
+                <a:cs typeface="Calibri (MS)"/>
+                <a:sym typeface="Calibri (MS)"/>
+              </a:rPr>
+              <a:t>Incapacidade</a:t>
+            </a:r>
+            <a:r>
+              <a:rPr lang="en-US" sz="2499" dirty="0">
+                <a:solidFill>
+                  <a:srgbClr val="000000"/>
+                </a:solidFill>
+                <a:latin typeface="Calibri (MS)"/>
+                <a:ea typeface="Calibri (MS)"/>
+                <a:cs typeface="Calibri (MS)"/>
+                <a:sym typeface="Calibri (MS)"/>
+              </a:rPr>
+              <a:t> de </a:t>
+            </a:r>
+            <a:r>
+              <a:rPr lang="en-US" sz="2499" dirty="0" err="1">
+                <a:solidFill>
+                  <a:srgbClr val="000000"/>
+                </a:solidFill>
+                <a:latin typeface="Calibri (MS)"/>
+                <a:ea typeface="Calibri (MS)"/>
+                <a:cs typeface="Calibri (MS)"/>
+                <a:sym typeface="Calibri (MS)"/>
+              </a:rPr>
+              <a:t>compreender</a:t>
+            </a:r>
+            <a:r>
+              <a:rPr lang="en-US" sz="2499" dirty="0">
+                <a:solidFill>
+                  <a:srgbClr val="000000"/>
+                </a:solidFill>
+                <a:latin typeface="Calibri (MS)"/>
+                <a:ea typeface="Calibri (MS)"/>
+                <a:cs typeface="Calibri (MS)"/>
+                <a:sym typeface="Calibri (MS)"/>
+              </a:rPr>
+              <a:t> </a:t>
+            </a:r>
+            <a:r>
+              <a:rPr lang="en-US" sz="2499" dirty="0" err="1">
+                <a:solidFill>
+                  <a:srgbClr val="000000"/>
+                </a:solidFill>
+                <a:latin typeface="Calibri (MS)"/>
+                <a:ea typeface="Calibri (MS)"/>
+                <a:cs typeface="Calibri (MS)"/>
+                <a:sym typeface="Calibri (MS)"/>
+              </a:rPr>
+              <a:t>português</a:t>
+            </a:r>
+            <a:r>
+              <a:rPr lang="en-US" sz="2499" dirty="0">
+                <a:solidFill>
+                  <a:srgbClr val="000000"/>
+                </a:solidFill>
+                <a:latin typeface="Calibri (MS)"/>
+                <a:ea typeface="Calibri (MS)"/>
+                <a:cs typeface="Calibri (MS)"/>
+                <a:sym typeface="Calibri (MS)"/>
+              </a:rPr>
+              <a:t> </a:t>
+            </a:r>
+            <a:r>
+              <a:rPr lang="en-US" sz="2499" dirty="0" err="1">
+                <a:solidFill>
+                  <a:srgbClr val="000000"/>
+                </a:solidFill>
+                <a:latin typeface="Calibri (MS)"/>
+                <a:ea typeface="Calibri (MS)"/>
+                <a:cs typeface="Calibri (MS)"/>
+                <a:sym typeface="Calibri (MS)"/>
+              </a:rPr>
+              <a:t>escrito</a:t>
+            </a:r>
+            <a:r>
+              <a:rPr lang="en-US" sz="2499" dirty="0">
+                <a:solidFill>
+                  <a:srgbClr val="000000"/>
+                </a:solidFill>
+                <a:latin typeface="Calibri (MS)"/>
+                <a:ea typeface="Calibri (MS)"/>
+                <a:cs typeface="Calibri (MS)"/>
+                <a:sym typeface="Calibri (MS)"/>
+              </a:rPr>
+              <a:t>.</a:t>
             </a:r>
           </a:p>
           <a:p>
@@ -10431,7 +14126,7 @@
                 <a:spcPts val="3749"/>
               </a:lnSpc>
             </a:pPr>
-            <a:endParaRPr lang="en-US" sz="2499">
+            <a:endParaRPr lang="en-US" sz="2499" dirty="0">
               <a:solidFill>
                 <a:srgbClr val="000000"/>
               </a:solidFill>
@@ -11063,7 +14758,7 @@
         <p:spPr>
           <a:xfrm>
             <a:off x="2257221" y="3702838"/>
-            <a:ext cx="13773557" cy="3724275"/>
+            <a:ext cx="13773557" cy="4312399"/>
           </a:xfrm>
           <a:prstGeom prst="rect">
             <a:avLst/>
@@ -11081,7 +14776,7 @@
               </a:lnSpc>
             </a:pPr>
             <a:r>
-              <a:rPr lang="en-US" sz="3500" b="1">
+              <a:rPr lang="en-US" sz="3500" b="1" dirty="0">
                 <a:solidFill>
                   <a:srgbClr val="000000"/>
                 </a:solidFill>
@@ -11096,29 +14791,413 @@
           <a:p>
             <a:pPr algn="just">
               <a:lnSpc>
-                <a:spcPts val="3749"/>
+                <a:spcPct val="150000"/>
               </a:lnSpc>
             </a:pPr>
             <a:r>
-              <a:rPr lang="en-US" sz="2499">
-                <a:solidFill>
-                  <a:srgbClr val="000000"/>
-                </a:solidFill>
-                <a:latin typeface="Calibri (MS)"/>
-                <a:ea typeface="Calibri (MS)"/>
-                <a:cs typeface="Calibri (MS)"/>
-                <a:sym typeface="Calibri (MS)"/>
-              </a:rPr>
-              <a:t>App MindMove com funcionalidades integradas: monitorização contínua de sintomas, alertas personalizados baseados em dados, conteúdo educativo sobre saúde mental e exercícios de bem-estar.</a:t>
+              <a:rPr lang="en-US" sz="2499" dirty="0">
+                <a:solidFill>
+                  <a:srgbClr val="000000"/>
+                </a:solidFill>
+                <a:latin typeface="Calibri (MS)"/>
+                <a:ea typeface="Calibri (MS)"/>
+                <a:cs typeface="Calibri (MS)"/>
+                <a:sym typeface="Calibri (MS)"/>
+              </a:rPr>
+              <a:t>App </a:t>
+            </a:r>
+            <a:r>
+              <a:rPr lang="en-US" sz="2499" dirty="0" err="1">
+                <a:solidFill>
+                  <a:srgbClr val="000000"/>
+                </a:solidFill>
+                <a:latin typeface="Calibri (MS)"/>
+                <a:ea typeface="Calibri (MS)"/>
+                <a:cs typeface="Calibri (MS)"/>
+                <a:sym typeface="Calibri (MS)"/>
+              </a:rPr>
+              <a:t>MindMove</a:t>
+            </a:r>
+            <a:r>
+              <a:rPr lang="en-US" sz="2499" dirty="0">
+                <a:solidFill>
+                  <a:srgbClr val="000000"/>
+                </a:solidFill>
+                <a:latin typeface="Calibri (MS)"/>
+                <a:ea typeface="Calibri (MS)"/>
+                <a:cs typeface="Calibri (MS)"/>
+                <a:sym typeface="Calibri (MS)"/>
+              </a:rPr>
+              <a:t> com </a:t>
+            </a:r>
+            <a:r>
+              <a:rPr lang="en-US" sz="2499" dirty="0" err="1">
+                <a:solidFill>
+                  <a:srgbClr val="000000"/>
+                </a:solidFill>
+                <a:latin typeface="Calibri (MS)"/>
+                <a:ea typeface="Calibri (MS)"/>
+                <a:cs typeface="Calibri (MS)"/>
+                <a:sym typeface="Calibri (MS)"/>
+              </a:rPr>
+              <a:t>funcionalidades</a:t>
+            </a:r>
+            <a:r>
+              <a:rPr lang="en-US" sz="2499" dirty="0">
+                <a:solidFill>
+                  <a:srgbClr val="000000"/>
+                </a:solidFill>
+                <a:latin typeface="Calibri (MS)"/>
+                <a:ea typeface="Calibri (MS)"/>
+                <a:cs typeface="Calibri (MS)"/>
+                <a:sym typeface="Calibri (MS)"/>
+              </a:rPr>
+              <a:t> </a:t>
+            </a:r>
+            <a:r>
+              <a:rPr lang="en-US" sz="2499" dirty="0" err="1">
+                <a:solidFill>
+                  <a:srgbClr val="000000"/>
+                </a:solidFill>
+                <a:latin typeface="Calibri (MS)"/>
+                <a:ea typeface="Calibri (MS)"/>
+                <a:cs typeface="Calibri (MS)"/>
+                <a:sym typeface="Calibri (MS)"/>
+              </a:rPr>
+              <a:t>integradas</a:t>
+            </a:r>
+            <a:r>
+              <a:rPr lang="en-US" sz="2499" dirty="0">
+                <a:solidFill>
+                  <a:srgbClr val="000000"/>
+                </a:solidFill>
+                <a:latin typeface="Calibri (MS)"/>
+                <a:ea typeface="Calibri (MS)"/>
+                <a:cs typeface="Calibri (MS)"/>
+                <a:sym typeface="Calibri (MS)"/>
+              </a:rPr>
+              <a:t>: </a:t>
+            </a:r>
+            <a:r>
+              <a:rPr lang="en-US" sz="2499" dirty="0" err="1">
+                <a:solidFill>
+                  <a:srgbClr val="000000"/>
+                </a:solidFill>
+                <a:latin typeface="Calibri (MS)"/>
+                <a:ea typeface="Calibri (MS)"/>
+                <a:cs typeface="Calibri (MS)"/>
+                <a:sym typeface="Calibri (MS)"/>
+              </a:rPr>
+              <a:t>monitorização</a:t>
+            </a:r>
+            <a:r>
+              <a:rPr lang="en-US" sz="2499" dirty="0">
+                <a:solidFill>
+                  <a:srgbClr val="000000"/>
+                </a:solidFill>
+                <a:latin typeface="Calibri (MS)"/>
+                <a:ea typeface="Calibri (MS)"/>
+                <a:cs typeface="Calibri (MS)"/>
+                <a:sym typeface="Calibri (MS)"/>
+              </a:rPr>
+              <a:t> </a:t>
+            </a:r>
+            <a:r>
+              <a:rPr lang="en-US" sz="2499" dirty="0" err="1">
+                <a:solidFill>
+                  <a:srgbClr val="000000"/>
+                </a:solidFill>
+                <a:latin typeface="Calibri (MS)"/>
+                <a:ea typeface="Calibri (MS)"/>
+                <a:cs typeface="Calibri (MS)"/>
+                <a:sym typeface="Calibri (MS)"/>
+              </a:rPr>
+              <a:t>contínua</a:t>
+            </a:r>
+            <a:r>
+              <a:rPr lang="en-US" sz="2499" dirty="0">
+                <a:solidFill>
+                  <a:srgbClr val="000000"/>
+                </a:solidFill>
+                <a:latin typeface="Calibri (MS)"/>
+                <a:ea typeface="Calibri (MS)"/>
+                <a:cs typeface="Calibri (MS)"/>
+                <a:sym typeface="Calibri (MS)"/>
+              </a:rPr>
+              <a:t> de </a:t>
+            </a:r>
+            <a:r>
+              <a:rPr lang="en-US" sz="2499" dirty="0" err="1">
+                <a:solidFill>
+                  <a:srgbClr val="000000"/>
+                </a:solidFill>
+                <a:latin typeface="Calibri (MS)"/>
+                <a:ea typeface="Calibri (MS)"/>
+                <a:cs typeface="Calibri (MS)"/>
+                <a:sym typeface="Calibri (MS)"/>
+              </a:rPr>
+              <a:t>sintomas</a:t>
+            </a:r>
+            <a:r>
+              <a:rPr lang="en-US" sz="2499" dirty="0">
+                <a:solidFill>
+                  <a:srgbClr val="000000"/>
+                </a:solidFill>
+                <a:latin typeface="Calibri (MS)"/>
+                <a:ea typeface="Calibri (MS)"/>
+                <a:cs typeface="Calibri (MS)"/>
+                <a:sym typeface="Calibri (MS)"/>
+              </a:rPr>
+              <a:t>, </a:t>
+            </a:r>
+            <a:r>
+              <a:rPr lang="en-US" sz="2499" dirty="0" err="1">
+                <a:solidFill>
+                  <a:srgbClr val="000000"/>
+                </a:solidFill>
+                <a:latin typeface="Calibri (MS)"/>
+                <a:ea typeface="Calibri (MS)"/>
+                <a:cs typeface="Calibri (MS)"/>
+                <a:sym typeface="Calibri (MS)"/>
+              </a:rPr>
+              <a:t>alertas</a:t>
+            </a:r>
+            <a:r>
+              <a:rPr lang="en-US" sz="2499" dirty="0">
+                <a:solidFill>
+                  <a:srgbClr val="000000"/>
+                </a:solidFill>
+                <a:latin typeface="Calibri (MS)"/>
+                <a:ea typeface="Calibri (MS)"/>
+                <a:cs typeface="Calibri (MS)"/>
+                <a:sym typeface="Calibri (MS)"/>
+              </a:rPr>
+              <a:t> </a:t>
+            </a:r>
+            <a:r>
+              <a:rPr lang="en-US" sz="2499" dirty="0" err="1">
+                <a:solidFill>
+                  <a:srgbClr val="000000"/>
+                </a:solidFill>
+                <a:latin typeface="Calibri (MS)"/>
+                <a:ea typeface="Calibri (MS)"/>
+                <a:cs typeface="Calibri (MS)"/>
+                <a:sym typeface="Calibri (MS)"/>
+              </a:rPr>
+              <a:t>personalizados</a:t>
+            </a:r>
+            <a:r>
+              <a:rPr lang="en-US" sz="2499" dirty="0">
+                <a:solidFill>
+                  <a:srgbClr val="000000"/>
+                </a:solidFill>
+                <a:latin typeface="Calibri (MS)"/>
+                <a:ea typeface="Calibri (MS)"/>
+                <a:cs typeface="Calibri (MS)"/>
+                <a:sym typeface="Calibri (MS)"/>
+              </a:rPr>
+              <a:t> </a:t>
+            </a:r>
+            <a:r>
+              <a:rPr lang="en-US" sz="2499" dirty="0" err="1">
+                <a:solidFill>
+                  <a:srgbClr val="000000"/>
+                </a:solidFill>
+                <a:latin typeface="Calibri (MS)"/>
+                <a:ea typeface="Calibri (MS)"/>
+                <a:cs typeface="Calibri (MS)"/>
+                <a:sym typeface="Calibri (MS)"/>
+              </a:rPr>
+              <a:t>baseados</a:t>
+            </a:r>
+            <a:r>
+              <a:rPr lang="en-US" sz="2499" dirty="0">
+                <a:solidFill>
+                  <a:srgbClr val="000000"/>
+                </a:solidFill>
+                <a:latin typeface="Calibri (MS)"/>
+                <a:ea typeface="Calibri (MS)"/>
+                <a:cs typeface="Calibri (MS)"/>
+                <a:sym typeface="Calibri (MS)"/>
+              </a:rPr>
+              <a:t> </a:t>
+            </a:r>
+            <a:r>
+              <a:rPr lang="en-US" sz="2499" dirty="0" err="1">
+                <a:solidFill>
+                  <a:srgbClr val="000000"/>
+                </a:solidFill>
+                <a:latin typeface="Calibri (MS)"/>
+                <a:ea typeface="Calibri (MS)"/>
+                <a:cs typeface="Calibri (MS)"/>
+                <a:sym typeface="Calibri (MS)"/>
+              </a:rPr>
+              <a:t>em</a:t>
+            </a:r>
+            <a:r>
+              <a:rPr lang="en-US" sz="2499" dirty="0">
+                <a:solidFill>
+                  <a:srgbClr val="000000"/>
+                </a:solidFill>
+                <a:latin typeface="Calibri (MS)"/>
+                <a:ea typeface="Calibri (MS)"/>
+                <a:cs typeface="Calibri (MS)"/>
+                <a:sym typeface="Calibri (MS)"/>
+              </a:rPr>
+              <a:t> dados, </a:t>
+            </a:r>
+            <a:r>
+              <a:rPr lang="en-US" sz="2499" dirty="0" err="1">
+                <a:solidFill>
+                  <a:srgbClr val="000000"/>
+                </a:solidFill>
+                <a:latin typeface="Calibri (MS)"/>
+                <a:ea typeface="Calibri (MS)"/>
+                <a:cs typeface="Calibri (MS)"/>
+                <a:sym typeface="Calibri (MS)"/>
+              </a:rPr>
+              <a:t>conteúdo</a:t>
+            </a:r>
+            <a:r>
+              <a:rPr lang="en-US" sz="2499" dirty="0">
+                <a:solidFill>
+                  <a:srgbClr val="000000"/>
+                </a:solidFill>
+                <a:latin typeface="Calibri (MS)"/>
+                <a:ea typeface="Calibri (MS)"/>
+                <a:cs typeface="Calibri (MS)"/>
+                <a:sym typeface="Calibri (MS)"/>
+              </a:rPr>
+              <a:t> </a:t>
+            </a:r>
+            <a:r>
+              <a:rPr lang="en-US" sz="2499" dirty="0" err="1">
+                <a:solidFill>
+                  <a:srgbClr val="000000"/>
+                </a:solidFill>
+                <a:latin typeface="Calibri (MS)"/>
+                <a:ea typeface="Calibri (MS)"/>
+                <a:cs typeface="Calibri (MS)"/>
+                <a:sym typeface="Calibri (MS)"/>
+              </a:rPr>
+              <a:t>educativo</a:t>
+            </a:r>
+            <a:r>
+              <a:rPr lang="en-US" sz="2499" dirty="0">
+                <a:solidFill>
+                  <a:srgbClr val="000000"/>
+                </a:solidFill>
+                <a:latin typeface="Calibri (MS)"/>
+                <a:ea typeface="Calibri (MS)"/>
+                <a:cs typeface="Calibri (MS)"/>
+                <a:sym typeface="Calibri (MS)"/>
+              </a:rPr>
+              <a:t> </a:t>
+            </a:r>
+            <a:r>
+              <a:rPr lang="en-US" sz="2499" dirty="0" err="1">
+                <a:solidFill>
+                  <a:srgbClr val="000000"/>
+                </a:solidFill>
+                <a:latin typeface="Calibri (MS)"/>
+                <a:ea typeface="Calibri (MS)"/>
+                <a:cs typeface="Calibri (MS)"/>
+                <a:sym typeface="Calibri (MS)"/>
+              </a:rPr>
+              <a:t>sobre</a:t>
+            </a:r>
+            <a:r>
+              <a:rPr lang="en-US" sz="2499" dirty="0">
+                <a:solidFill>
+                  <a:srgbClr val="000000"/>
+                </a:solidFill>
+                <a:latin typeface="Calibri (MS)"/>
+                <a:ea typeface="Calibri (MS)"/>
+                <a:cs typeface="Calibri (MS)"/>
+                <a:sym typeface="Calibri (MS)"/>
+              </a:rPr>
+              <a:t> </a:t>
+            </a:r>
+            <a:r>
+              <a:rPr lang="en-US" sz="2499" dirty="0" err="1">
+                <a:solidFill>
+                  <a:srgbClr val="000000"/>
+                </a:solidFill>
+                <a:latin typeface="Calibri (MS)"/>
+                <a:ea typeface="Calibri (MS)"/>
+                <a:cs typeface="Calibri (MS)"/>
+                <a:sym typeface="Calibri (MS)"/>
+              </a:rPr>
+              <a:t>saúde</a:t>
+            </a:r>
+            <a:r>
+              <a:rPr lang="en-US" sz="2499" dirty="0">
+                <a:solidFill>
+                  <a:srgbClr val="000000"/>
+                </a:solidFill>
+                <a:latin typeface="Calibri (MS)"/>
+                <a:ea typeface="Calibri (MS)"/>
+                <a:cs typeface="Calibri (MS)"/>
+                <a:sym typeface="Calibri (MS)"/>
+              </a:rPr>
+              <a:t> mental e </a:t>
+            </a:r>
+            <a:r>
+              <a:rPr lang="en-US" sz="2499" dirty="0" err="1">
+                <a:solidFill>
+                  <a:srgbClr val="000000"/>
+                </a:solidFill>
+                <a:latin typeface="Calibri (MS)"/>
+                <a:ea typeface="Calibri (MS)"/>
+                <a:cs typeface="Calibri (MS)"/>
+                <a:sym typeface="Calibri (MS)"/>
+              </a:rPr>
+              <a:t>exercícios</a:t>
+            </a:r>
+            <a:r>
+              <a:rPr lang="en-US" sz="2499" dirty="0">
+                <a:solidFill>
+                  <a:srgbClr val="000000"/>
+                </a:solidFill>
+                <a:latin typeface="Calibri (MS)"/>
+                <a:ea typeface="Calibri (MS)"/>
+                <a:cs typeface="Calibri (MS)"/>
+                <a:sym typeface="Calibri (MS)"/>
+              </a:rPr>
+              <a:t> de </a:t>
+            </a:r>
+            <a:r>
+              <a:rPr lang="en-US" sz="2499" dirty="0" err="1">
+                <a:solidFill>
+                  <a:srgbClr val="000000"/>
+                </a:solidFill>
+                <a:latin typeface="Calibri (MS)"/>
+                <a:ea typeface="Calibri (MS)"/>
+                <a:cs typeface="Calibri (MS)"/>
+                <a:sym typeface="Calibri (MS)"/>
+              </a:rPr>
+              <a:t>bem-estar</a:t>
+            </a:r>
+            <a:r>
+              <a:rPr lang="en-US" sz="2499" dirty="0">
+                <a:solidFill>
+                  <a:srgbClr val="000000"/>
+                </a:solidFill>
+                <a:latin typeface="Calibri (MS)"/>
+                <a:ea typeface="Calibri (MS)"/>
+                <a:cs typeface="Calibri (MS)"/>
+                <a:sym typeface="Calibri (MS)"/>
+              </a:rPr>
+              <a:t>.</a:t>
             </a:r>
           </a:p>
           <a:p>
             <a:pPr algn="just">
               <a:lnSpc>
-                <a:spcPts val="3749"/>
+                <a:spcPct val="150000"/>
               </a:lnSpc>
             </a:pPr>
-            <a:endParaRPr lang="en-US" sz="2499">
+            <a:endParaRPr lang="en-US" sz="2499" dirty="0">
               <a:solidFill>
                 <a:srgbClr val="000000"/>
               </a:solidFill>
@@ -11131,11 +15210,11 @@
           <a:p>
             <a:pPr algn="just">
               <a:lnSpc>
-                <a:spcPts val="5250"/>
+                <a:spcPct val="150000"/>
               </a:lnSpc>
             </a:pPr>
             <a:r>
-              <a:rPr lang="en-US" sz="3500" b="1">
+              <a:rPr lang="en-US" sz="3500" b="1" dirty="0">
                 <a:solidFill>
                   <a:srgbClr val="000000"/>
                 </a:solidFill>
@@ -11144,26 +15223,386 @@
                 <a:cs typeface="Calibri (MS) Bold"/>
                 <a:sym typeface="Calibri (MS) Bold"/>
               </a:rPr>
-              <a:t>Grupo Controlo:</a:t>
+              <a:t>Grupo </a:t>
+            </a:r>
+            <a:r>
+              <a:rPr lang="en-US" sz="3500" b="1" dirty="0" err="1">
+                <a:solidFill>
+                  <a:srgbClr val="000000"/>
+                </a:solidFill>
+                <a:latin typeface="Calibri (MS) Bold"/>
+                <a:ea typeface="Calibri (MS) Bold"/>
+                <a:cs typeface="Calibri (MS) Bold"/>
+                <a:sym typeface="Calibri (MS) Bold"/>
+              </a:rPr>
+              <a:t>Controlo</a:t>
+            </a:r>
+            <a:r>
+              <a:rPr lang="en-US" sz="3500" b="1" dirty="0">
+                <a:solidFill>
+                  <a:srgbClr val="000000"/>
+                </a:solidFill>
+                <a:latin typeface="Calibri (MS) Bold"/>
+                <a:ea typeface="Calibri (MS) Bold"/>
+                <a:cs typeface="Calibri (MS) Bold"/>
+                <a:sym typeface="Calibri (MS) Bold"/>
+              </a:rPr>
+              <a:t>:</a:t>
             </a:r>
           </a:p>
           <a:p>
             <a:pPr algn="just">
               <a:lnSpc>
-                <a:spcPts val="3749"/>
+                <a:spcPct val="150000"/>
               </a:lnSpc>
             </a:pPr>
             <a:r>
-              <a:rPr lang="en-US" sz="2499">
-                <a:solidFill>
-                  <a:srgbClr val="000000"/>
-                </a:solidFill>
-                <a:latin typeface="Calibri (MS)"/>
-                <a:ea typeface="Calibri (MS)"/>
-                <a:cs typeface="Calibri (MS)"/>
-                <a:sym typeface="Calibri (MS)"/>
-              </a:rPr>
-              <a:t>Brochuras informativas sobre saúde mental (standard ofcare): material educativo convencional sem componente digital ou interativo, servindo como comparador ativo.</a:t>
+              <a:rPr lang="en-US" sz="2499" dirty="0">
+                <a:solidFill>
+                  <a:srgbClr val="000000"/>
+                </a:solidFill>
+                <a:latin typeface="Calibri (MS)"/>
+                <a:ea typeface="Calibri (MS)"/>
+                <a:cs typeface="Calibri (MS)"/>
+                <a:sym typeface="Calibri (MS)"/>
+              </a:rPr>
+              <a:t>Brochuras </a:t>
+            </a:r>
+            <a:r>
+              <a:rPr lang="en-US" sz="2499" dirty="0" err="1">
+                <a:solidFill>
+                  <a:srgbClr val="000000"/>
+                </a:solidFill>
+                <a:latin typeface="Calibri (MS)"/>
+                <a:ea typeface="Calibri (MS)"/>
+                <a:cs typeface="Calibri (MS)"/>
+                <a:sym typeface="Calibri (MS)"/>
+              </a:rPr>
+              <a:t>informativas</a:t>
+            </a:r>
+            <a:r>
+              <a:rPr lang="en-US" sz="2499" dirty="0">
+                <a:solidFill>
+                  <a:srgbClr val="000000"/>
+                </a:solidFill>
+                <a:latin typeface="Calibri (MS)"/>
+                <a:ea typeface="Calibri (MS)"/>
+                <a:cs typeface="Calibri (MS)"/>
+                <a:sym typeface="Calibri (MS)"/>
+              </a:rPr>
+              <a:t> </a:t>
+            </a:r>
+            <a:r>
+              <a:rPr lang="en-US" sz="2499" dirty="0" err="1">
+                <a:solidFill>
+                  <a:srgbClr val="000000"/>
+                </a:solidFill>
+                <a:latin typeface="Calibri (MS)"/>
+                <a:ea typeface="Calibri (MS)"/>
+                <a:cs typeface="Calibri (MS)"/>
+                <a:sym typeface="Calibri (MS)"/>
+              </a:rPr>
+              <a:t>sobre</a:t>
+            </a:r>
+            <a:r>
+              <a:rPr lang="en-US" sz="2499" dirty="0">
+                <a:solidFill>
+                  <a:srgbClr val="000000"/>
+                </a:solidFill>
+                <a:latin typeface="Calibri (MS)"/>
+                <a:ea typeface="Calibri (MS)"/>
+                <a:cs typeface="Calibri (MS)"/>
+                <a:sym typeface="Calibri (MS)"/>
+              </a:rPr>
+              <a:t> </a:t>
+            </a:r>
+            <a:r>
+              <a:rPr lang="en-US" sz="2499" dirty="0" err="1">
+                <a:solidFill>
+                  <a:srgbClr val="000000"/>
+                </a:solidFill>
+                <a:latin typeface="Calibri (MS)"/>
+                <a:ea typeface="Calibri (MS)"/>
+                <a:cs typeface="Calibri (MS)"/>
+                <a:sym typeface="Calibri (MS)"/>
+              </a:rPr>
+              <a:t>saúde</a:t>
+            </a:r>
+            <a:r>
+              <a:rPr lang="en-US" sz="2499" dirty="0">
+                <a:solidFill>
+                  <a:srgbClr val="000000"/>
+                </a:solidFill>
+                <a:latin typeface="Calibri (MS)"/>
+                <a:ea typeface="Calibri (MS)"/>
+                <a:cs typeface="Calibri (MS)"/>
+                <a:sym typeface="Calibri (MS)"/>
+              </a:rPr>
+              <a:t> mental (standard </a:t>
+            </a:r>
+            <a:r>
+              <a:rPr lang="en-US" sz="2499" dirty="0" err="1">
+                <a:solidFill>
+                  <a:srgbClr val="000000"/>
+                </a:solidFill>
+                <a:latin typeface="Calibri (MS)"/>
+                <a:ea typeface="Calibri (MS)"/>
+                <a:cs typeface="Calibri (MS)"/>
+                <a:sym typeface="Calibri (MS)"/>
+              </a:rPr>
+              <a:t>ofcare</a:t>
+            </a:r>
+            <a:r>
+              <a:rPr lang="en-US" sz="2499" dirty="0">
+                <a:solidFill>
+                  <a:srgbClr val="000000"/>
+                </a:solidFill>
+                <a:latin typeface="Calibri (MS)"/>
+                <a:ea typeface="Calibri (MS)"/>
+                <a:cs typeface="Calibri (MS)"/>
+                <a:sym typeface="Calibri (MS)"/>
+              </a:rPr>
+              <a:t>): material </a:t>
+            </a:r>
+            <a:r>
+              <a:rPr lang="en-US" sz="2499" dirty="0" err="1">
+                <a:solidFill>
+                  <a:srgbClr val="000000"/>
+                </a:solidFill>
+                <a:latin typeface="Calibri (MS)"/>
+                <a:ea typeface="Calibri (MS)"/>
+                <a:cs typeface="Calibri (MS)"/>
+                <a:sym typeface="Calibri (MS)"/>
+              </a:rPr>
+              <a:t>educativo</a:t>
+            </a:r>
+            <a:r>
+              <a:rPr lang="en-US" sz="2499" dirty="0">
+                <a:solidFill>
+                  <a:srgbClr val="000000"/>
+                </a:solidFill>
+                <a:latin typeface="Calibri (MS)"/>
+                <a:ea typeface="Calibri (MS)"/>
+                <a:cs typeface="Calibri (MS)"/>
+                <a:sym typeface="Calibri (MS)"/>
+              </a:rPr>
+              <a:t> </a:t>
+            </a:r>
+            <a:r>
+              <a:rPr lang="en-US" sz="2499" dirty="0" err="1">
+                <a:solidFill>
+                  <a:srgbClr val="000000"/>
+                </a:solidFill>
+                <a:latin typeface="Calibri (MS)"/>
+                <a:ea typeface="Calibri (MS)"/>
+                <a:cs typeface="Calibri (MS)"/>
+                <a:sym typeface="Calibri (MS)"/>
+              </a:rPr>
+              <a:t>convencional</a:t>
+            </a:r>
+            <a:r>
+              <a:rPr lang="en-US" sz="2499" dirty="0">
+                <a:solidFill>
+                  <a:srgbClr val="000000"/>
+                </a:solidFill>
+                <a:latin typeface="Calibri (MS)"/>
+                <a:ea typeface="Calibri (MS)"/>
+                <a:cs typeface="Calibri (MS)"/>
+                <a:sym typeface="Calibri (MS)"/>
+              </a:rPr>
+              <a:t> </a:t>
+            </a:r>
+            <a:r>
+              <a:rPr lang="en-US" sz="2499" dirty="0" err="1">
+                <a:solidFill>
+                  <a:srgbClr val="000000"/>
+                </a:solidFill>
+                <a:latin typeface="Calibri (MS)"/>
+                <a:ea typeface="Calibri (MS)"/>
+                <a:cs typeface="Calibri (MS)"/>
+                <a:sym typeface="Calibri (MS)"/>
+              </a:rPr>
+              <a:t>sem</a:t>
+            </a:r>
+            <a:r>
+              <a:rPr lang="en-US" sz="2499" dirty="0">
+                <a:solidFill>
+                  <a:srgbClr val="000000"/>
+                </a:solidFill>
+                <a:latin typeface="Calibri (MS)"/>
+                <a:ea typeface="Calibri (MS)"/>
+                <a:cs typeface="Calibri (MS)"/>
+                <a:sym typeface="Calibri (MS)"/>
+              </a:rPr>
+              <a:t> </a:t>
+            </a:r>
+            <a:r>
+              <a:rPr lang="en-US" sz="2499" dirty="0" err="1">
+                <a:solidFill>
+                  <a:srgbClr val="000000"/>
+                </a:solidFill>
+                <a:latin typeface="Calibri (MS)"/>
+                <a:ea typeface="Calibri (MS)"/>
+                <a:cs typeface="Calibri (MS)"/>
+                <a:sym typeface="Calibri (MS)"/>
+              </a:rPr>
+              <a:t>componente</a:t>
+            </a:r>
+            <a:r>
+              <a:rPr lang="en-US" sz="2499" dirty="0">
+                <a:solidFill>
+                  <a:srgbClr val="000000"/>
+                </a:solidFill>
+                <a:latin typeface="Calibri (MS)"/>
+                <a:ea typeface="Calibri (MS)"/>
+                <a:cs typeface="Calibri (MS)"/>
+                <a:sym typeface="Calibri (MS)"/>
+              </a:rPr>
+              <a:t> digital </a:t>
+            </a:r>
+            <a:r>
+              <a:rPr lang="en-US" sz="2499" dirty="0" err="1">
+                <a:solidFill>
+                  <a:srgbClr val="000000"/>
+                </a:solidFill>
+                <a:latin typeface="Calibri (MS)"/>
+                <a:ea typeface="Calibri (MS)"/>
+                <a:cs typeface="Calibri (MS)"/>
+                <a:sym typeface="Calibri (MS)"/>
+              </a:rPr>
+              <a:t>ou</a:t>
+            </a:r>
+            <a:r>
+              <a:rPr lang="en-US" sz="2499" dirty="0">
+                <a:solidFill>
+                  <a:srgbClr val="000000"/>
+                </a:solidFill>
+                <a:latin typeface="Calibri (MS)"/>
+                <a:ea typeface="Calibri (MS)"/>
+                <a:cs typeface="Calibri (MS)"/>
+                <a:sym typeface="Calibri (MS)"/>
+              </a:rPr>
+              <a:t> </a:t>
+            </a:r>
+            <a:r>
+              <a:rPr lang="en-US" sz="2499" dirty="0" err="1">
+                <a:solidFill>
+                  <a:srgbClr val="000000"/>
+                </a:solidFill>
+                <a:latin typeface="Calibri (MS)"/>
+                <a:ea typeface="Calibri (MS)"/>
+                <a:cs typeface="Calibri (MS)"/>
+                <a:sym typeface="Calibri (MS)"/>
+              </a:rPr>
+              <a:t>interativo</a:t>
+            </a:r>
+            <a:r>
+              <a:rPr lang="en-US" sz="2499" dirty="0">
+                <a:solidFill>
+                  <a:srgbClr val="000000"/>
+                </a:solidFill>
+                <a:latin typeface="Calibri (MS)"/>
+                <a:ea typeface="Calibri (MS)"/>
+                <a:cs typeface="Calibri (MS)"/>
+                <a:sym typeface="Calibri (MS)"/>
+              </a:rPr>
+              <a:t>, </a:t>
+            </a:r>
+            <a:r>
+              <a:rPr lang="en-US" sz="2499" dirty="0" err="1">
+                <a:solidFill>
+                  <a:srgbClr val="000000"/>
+                </a:solidFill>
+                <a:latin typeface="Calibri (MS)"/>
+                <a:ea typeface="Calibri (MS)"/>
+                <a:cs typeface="Calibri (MS)"/>
+                <a:sym typeface="Calibri (MS)"/>
+              </a:rPr>
+              <a:t>servindo</a:t>
+            </a:r>
+            <a:r>
+              <a:rPr lang="en-US" sz="2499" dirty="0">
+                <a:solidFill>
+                  <a:srgbClr val="000000"/>
+                </a:solidFill>
+                <a:latin typeface="Calibri (MS)"/>
+                <a:ea typeface="Calibri (MS)"/>
+                <a:cs typeface="Calibri (MS)"/>
+                <a:sym typeface="Calibri (MS)"/>
+              </a:rPr>
+              <a:t> </a:t>
+            </a:r>
+            <a:r>
+              <a:rPr lang="en-US" sz="2499" dirty="0" err="1">
+                <a:solidFill>
+                  <a:srgbClr val="000000"/>
+                </a:solidFill>
+                <a:latin typeface="Calibri (MS)"/>
+                <a:ea typeface="Calibri (MS)"/>
+                <a:cs typeface="Calibri (MS)"/>
+                <a:sym typeface="Calibri (MS)"/>
+              </a:rPr>
+              <a:t>como</a:t>
+            </a:r>
+            <a:r>
+              <a:rPr lang="en-US" sz="2499" dirty="0">
+                <a:solidFill>
+                  <a:srgbClr val="000000"/>
+                </a:solidFill>
+                <a:latin typeface="Calibri (MS)"/>
+                <a:ea typeface="Calibri (MS)"/>
+                <a:cs typeface="Calibri (MS)"/>
+                <a:sym typeface="Calibri (MS)"/>
+              </a:rPr>
+              <a:t> </a:t>
+            </a:r>
+            <a:r>
+              <a:rPr lang="en-US" sz="2499" dirty="0" err="1">
+                <a:solidFill>
+                  <a:srgbClr val="000000"/>
+                </a:solidFill>
+                <a:latin typeface="Calibri (MS)"/>
+                <a:ea typeface="Calibri (MS)"/>
+                <a:cs typeface="Calibri (MS)"/>
+                <a:sym typeface="Calibri (MS)"/>
+              </a:rPr>
+              <a:t>comparador</a:t>
+            </a:r>
+            <a:r>
+              <a:rPr lang="en-US" sz="2499" dirty="0">
+                <a:solidFill>
+                  <a:srgbClr val="000000"/>
+                </a:solidFill>
+                <a:latin typeface="Calibri (MS)"/>
+                <a:ea typeface="Calibri (MS)"/>
+                <a:cs typeface="Calibri (MS)"/>
+                <a:sym typeface="Calibri (MS)"/>
+              </a:rPr>
+              <a:t> </a:t>
+            </a:r>
+            <a:r>
+              <a:rPr lang="en-US" sz="2499" dirty="0" err="1">
+                <a:solidFill>
+                  <a:srgbClr val="000000"/>
+                </a:solidFill>
+                <a:latin typeface="Calibri (MS)"/>
+                <a:ea typeface="Calibri (MS)"/>
+                <a:cs typeface="Calibri (MS)"/>
+                <a:sym typeface="Calibri (MS)"/>
+              </a:rPr>
+              <a:t>ativo</a:t>
+            </a:r>
+            <a:r>
+              <a:rPr lang="en-US" sz="2499" dirty="0">
+                <a:solidFill>
+                  <a:srgbClr val="000000"/>
+                </a:solidFill>
+                <a:latin typeface="Calibri (MS)"/>
+                <a:ea typeface="Calibri (MS)"/>
+                <a:cs typeface="Calibri (MS)"/>
+                <a:sym typeface="Calibri (MS)"/>
+              </a:rPr>
+              <a:t>.</a:t>
             </a:r>
           </a:p>
         </p:txBody>
@@ -11878,7 +16317,7 @@
         <p:spPr>
           <a:xfrm>
             <a:off x="2242425" y="3198422"/>
-            <a:ext cx="13773557" cy="6334235"/>
+            <a:ext cx="13773557" cy="5780237"/>
           </a:xfrm>
           <a:prstGeom prst="rect">
             <a:avLst/>
@@ -11896,31 +16335,52 @@
               </a:lnSpc>
             </a:pPr>
             <a:r>
-              <a:rPr lang="pt-PT" sz="2800" b="1" dirty="0" err="1"/>
+              <a:rPr lang="pt-PT" sz="2500" b="1" dirty="0" err="1">
+                <a:latin typeface="Calibri (MS)" panose="020B0604020202020204" charset="0"/>
+                <a:cs typeface="Calibri (MS)" panose="020B0604020202020204" charset="0"/>
+              </a:rPr>
               <a:t>Outcome</a:t>
             </a:r>
             <a:r>
-              <a:rPr lang="pt-PT" sz="2800" b="1" dirty="0"/>
+              <a:rPr lang="pt-PT" sz="2500" b="1" dirty="0">
+                <a:latin typeface="Calibri (MS)" panose="020B0604020202020204" charset="0"/>
+                <a:cs typeface="Calibri (MS)" panose="020B0604020202020204" charset="0"/>
+              </a:rPr>
               <a:t> Primário: </a:t>
             </a:r>
             <a:r>
-              <a:rPr lang="pt-PT" sz="2800" dirty="0"/>
+              <a:rPr lang="pt-PT" sz="2500" dirty="0">
+                <a:latin typeface="Calibri (MS)" panose="020B0604020202020204" charset="0"/>
+                <a:cs typeface="Calibri (MS)" panose="020B0604020202020204" charset="0"/>
+              </a:rPr>
               <a:t>Variação no score PHQ-9 (</a:t>
             </a:r>
             <a:r>
-              <a:rPr lang="pt-PT" sz="2800" dirty="0" err="1"/>
+              <a:rPr lang="pt-PT" sz="2500" dirty="0" err="1">
+                <a:latin typeface="Calibri (MS)" panose="020B0604020202020204" charset="0"/>
+                <a:cs typeface="Calibri (MS)" panose="020B0604020202020204" charset="0"/>
+              </a:rPr>
               <a:t>Patient</a:t>
             </a:r>
             <a:r>
-              <a:rPr lang="pt-PT" sz="2800" dirty="0"/>
+              <a:rPr lang="pt-PT" sz="2500" dirty="0">
+                <a:latin typeface="Calibri (MS)" panose="020B0604020202020204" charset="0"/>
+                <a:cs typeface="Calibri (MS)" panose="020B0604020202020204" charset="0"/>
+              </a:rPr>
               <a:t> </a:t>
             </a:r>
             <a:r>
-              <a:rPr lang="pt-PT" sz="2800" dirty="0" err="1"/>
+              <a:rPr lang="pt-PT" sz="2500" dirty="0" err="1">
+                <a:latin typeface="Calibri (MS)" panose="020B0604020202020204" charset="0"/>
+                <a:cs typeface="Calibri (MS)" panose="020B0604020202020204" charset="0"/>
+              </a:rPr>
               <a:t>Health</a:t>
             </a:r>
             <a:r>
-              <a:rPr lang="pt-PT" sz="2800" dirty="0"/>
+              <a:rPr lang="pt-PT" sz="2500" dirty="0">
+                <a:latin typeface="Calibri (MS)" panose="020B0604020202020204" charset="0"/>
+                <a:cs typeface="Calibri (MS)" panose="020B0604020202020204" charset="0"/>
+              </a:rPr>
               <a:t> Questionnaire-9) para avaliação da redução de sintomas depressivos.</a:t>
             </a:r>
           </a:p>
@@ -11930,7 +16390,10 @@
                 <a:spcPct val="150000"/>
               </a:lnSpc>
             </a:pPr>
-            <a:endParaRPr lang="pt-PT" sz="2800" dirty="0"/>
+            <a:endParaRPr lang="pt-PT" sz="2500" dirty="0">
+              <a:latin typeface="Calibri (MS)" panose="020B0604020202020204" charset="0"/>
+              <a:cs typeface="Calibri (MS)" panose="020B0604020202020204" charset="0"/>
+            </a:endParaRPr>
           </a:p>
           <a:p>
             <a:pPr>
@@ -11939,47 +16402,80 @@
               </a:lnSpc>
             </a:pPr>
             <a:r>
-              <a:rPr lang="pt-PT" sz="2800" b="1" dirty="0" err="1"/>
+              <a:rPr lang="pt-PT" sz="2500" b="1" dirty="0" err="1">
+                <a:latin typeface="Calibri (MS)" panose="020B0604020202020204" charset="0"/>
+                <a:cs typeface="Calibri (MS)" panose="020B0604020202020204" charset="0"/>
+              </a:rPr>
               <a:t>Outcomes</a:t>
             </a:r>
             <a:r>
-              <a:rPr lang="pt-PT" sz="2800" b="1" dirty="0"/>
+              <a:rPr lang="pt-PT" sz="2500" b="1" dirty="0">
+                <a:latin typeface="Calibri (MS)" panose="020B0604020202020204" charset="0"/>
+                <a:cs typeface="Calibri (MS)" panose="020B0604020202020204" charset="0"/>
+              </a:rPr>
               <a:t> Secundários: </a:t>
             </a:r>
             <a:r>
-              <a:rPr lang="pt-PT" sz="2800" dirty="0"/>
+              <a:rPr lang="pt-PT" sz="2500" dirty="0">
+                <a:latin typeface="Calibri (MS)" panose="020B0604020202020204" charset="0"/>
+                <a:cs typeface="Calibri (MS)" panose="020B0604020202020204" charset="0"/>
+              </a:rPr>
               <a:t>Adesão à intervenção digital e bem-estar geral medido pelo WHO-5 (</a:t>
             </a:r>
             <a:r>
-              <a:rPr lang="pt-PT" sz="2800" dirty="0" err="1"/>
+              <a:rPr lang="pt-PT" sz="2500" dirty="0" err="1">
+                <a:latin typeface="Calibri (MS)" panose="020B0604020202020204" charset="0"/>
+                <a:cs typeface="Calibri (MS)" panose="020B0604020202020204" charset="0"/>
+              </a:rPr>
               <a:t>World</a:t>
             </a:r>
             <a:r>
-              <a:rPr lang="pt-PT" sz="2800" dirty="0"/>
+              <a:rPr lang="pt-PT" sz="2500" dirty="0">
+                <a:latin typeface="Calibri (MS)" panose="020B0604020202020204" charset="0"/>
+                <a:cs typeface="Calibri (MS)" panose="020B0604020202020204" charset="0"/>
+              </a:rPr>
               <a:t> </a:t>
             </a:r>
             <a:r>
-              <a:rPr lang="pt-PT" sz="2800" dirty="0" err="1"/>
+              <a:rPr lang="pt-PT" sz="2500" dirty="0" err="1">
+                <a:latin typeface="Calibri (MS)" panose="020B0604020202020204" charset="0"/>
+                <a:cs typeface="Calibri (MS)" panose="020B0604020202020204" charset="0"/>
+              </a:rPr>
               <a:t>Health</a:t>
             </a:r>
             <a:r>
-              <a:rPr lang="pt-PT" sz="2800" dirty="0"/>
+              <a:rPr lang="pt-PT" sz="2500" dirty="0">
+                <a:latin typeface="Calibri (MS)" panose="020B0604020202020204" charset="0"/>
+                <a:cs typeface="Calibri (MS)" panose="020B0604020202020204" charset="0"/>
+              </a:rPr>
               <a:t> </a:t>
             </a:r>
             <a:r>
-              <a:rPr lang="pt-PT" sz="2800" dirty="0" err="1"/>
+              <a:rPr lang="pt-PT" sz="2500" dirty="0" err="1">
+                <a:latin typeface="Calibri (MS)" panose="020B0604020202020204" charset="0"/>
+                <a:cs typeface="Calibri (MS)" panose="020B0604020202020204" charset="0"/>
+              </a:rPr>
               <a:t>Organization</a:t>
             </a:r>
             <a:r>
-              <a:rPr lang="pt-PT" sz="2800" dirty="0"/>
+              <a:rPr lang="pt-PT" sz="2500" dirty="0">
+                <a:latin typeface="Calibri (MS)" panose="020B0604020202020204" charset="0"/>
+                <a:cs typeface="Calibri (MS)" panose="020B0604020202020204" charset="0"/>
+              </a:rPr>
               <a:t> </a:t>
             </a:r>
             <a:r>
-              <a:rPr lang="pt-PT" sz="2800" dirty="0" err="1"/>
+              <a:rPr lang="pt-PT" sz="2500" dirty="0" err="1">
+                <a:latin typeface="Calibri (MS)" panose="020B0604020202020204" charset="0"/>
+                <a:cs typeface="Calibri (MS)" panose="020B0604020202020204" charset="0"/>
+              </a:rPr>
               <a:t>Well-Being</a:t>
             </a:r>
             <a:r>
-              <a:rPr lang="pt-PT" sz="2800" dirty="0"/>
+              <a:rPr lang="pt-PT" sz="2500" dirty="0">
+                <a:latin typeface="Calibri (MS)" panose="020B0604020202020204" charset="0"/>
+                <a:cs typeface="Calibri (MS)" panose="020B0604020202020204" charset="0"/>
+              </a:rPr>
               <a:t> Index).</a:t>
             </a:r>
           </a:p>
@@ -11990,46 +16486,79 @@
               </a:lnSpc>
             </a:pPr>
             <a:br>
-              <a:rPr lang="pt-PT" sz="2800" dirty="0"/>
+              <a:rPr lang="pt-PT" sz="2500" dirty="0">
+                <a:latin typeface="Calibri (MS)" panose="020B0604020202020204" charset="0"/>
+                <a:cs typeface="Calibri (MS)" panose="020B0604020202020204" charset="0"/>
+              </a:rPr>
             </a:br>
             <a:r>
-              <a:rPr lang="pt-PT" sz="2800" b="1" dirty="0"/>
+              <a:rPr lang="pt-PT" sz="2500" b="1" dirty="0">
+                <a:latin typeface="Calibri (MS)" panose="020B0604020202020204" charset="0"/>
+                <a:cs typeface="Calibri (MS)" panose="020B0604020202020204" charset="0"/>
+              </a:rPr>
               <a:t>Usabilidade: </a:t>
             </a:r>
             <a:r>
-              <a:rPr lang="pt-PT" sz="2800" dirty="0"/>
+              <a:rPr lang="pt-PT" sz="2500" dirty="0">
+                <a:latin typeface="Calibri (MS)" panose="020B0604020202020204" charset="0"/>
+                <a:cs typeface="Calibri (MS)" panose="020B0604020202020204" charset="0"/>
+              </a:rPr>
               <a:t>Avaliação através do </a:t>
             </a:r>
             <a:r>
-              <a:rPr lang="pt-PT" sz="2800" dirty="0" err="1"/>
+              <a:rPr lang="pt-PT" sz="2500" dirty="0" err="1">
+                <a:latin typeface="Calibri (MS)" panose="020B0604020202020204" charset="0"/>
+                <a:cs typeface="Calibri (MS)" panose="020B0604020202020204" charset="0"/>
+              </a:rPr>
               <a:t>System</a:t>
             </a:r>
             <a:r>
-              <a:rPr lang="pt-PT" sz="2800" dirty="0"/>
+              <a:rPr lang="pt-PT" sz="2500" dirty="0">
+                <a:latin typeface="Calibri (MS)" panose="020B0604020202020204" charset="0"/>
+                <a:cs typeface="Calibri (MS)" panose="020B0604020202020204" charset="0"/>
+              </a:rPr>
               <a:t> </a:t>
             </a:r>
             <a:r>
-              <a:rPr lang="pt-PT" sz="2800" dirty="0" err="1"/>
+              <a:rPr lang="pt-PT" sz="2500" dirty="0" err="1">
+                <a:latin typeface="Calibri (MS)" panose="020B0604020202020204" charset="0"/>
+                <a:cs typeface="Calibri (MS)" panose="020B0604020202020204" charset="0"/>
+              </a:rPr>
               <a:t>Usability</a:t>
             </a:r>
             <a:r>
-              <a:rPr lang="pt-PT" sz="2800" dirty="0"/>
+              <a:rPr lang="pt-PT" sz="2500" dirty="0">
+                <a:latin typeface="Calibri (MS)" panose="020B0604020202020204" charset="0"/>
+                <a:cs typeface="Calibri (MS)" panose="020B0604020202020204" charset="0"/>
+              </a:rPr>
               <a:t> </a:t>
             </a:r>
             <a:r>
-              <a:rPr lang="pt-PT" sz="2800" dirty="0" err="1"/>
+              <a:rPr lang="pt-PT" sz="2500" dirty="0" err="1">
+                <a:latin typeface="Calibri (MS)" panose="020B0604020202020204" charset="0"/>
+                <a:cs typeface="Calibri (MS)" panose="020B0604020202020204" charset="0"/>
+              </a:rPr>
               <a:t>Scale</a:t>
             </a:r>
             <a:r>
-              <a:rPr lang="pt-PT" sz="2800" dirty="0"/>
+              <a:rPr lang="pt-PT" sz="2500" dirty="0">
+                <a:latin typeface="Calibri (MS)" panose="020B0604020202020204" charset="0"/>
+                <a:cs typeface="Calibri (MS)" panose="020B0604020202020204" charset="0"/>
+              </a:rPr>
               <a:t> (SUS) para medir a experiência do utilizador com a aplicação </a:t>
             </a:r>
             <a:r>
-              <a:rPr lang="pt-PT" sz="2800" dirty="0" err="1"/>
+              <a:rPr lang="pt-PT" sz="2500" dirty="0" err="1">
+                <a:latin typeface="Calibri (MS)" panose="020B0604020202020204" charset="0"/>
+                <a:cs typeface="Calibri (MS)" panose="020B0604020202020204" charset="0"/>
+              </a:rPr>
               <a:t>MindMove</a:t>
             </a:r>
             <a:r>
-              <a:rPr lang="pt-PT" sz="2800" dirty="0"/>
+              <a:rPr lang="pt-PT" sz="2500" dirty="0">
+                <a:latin typeface="Calibri (MS)" panose="020B0604020202020204" charset="0"/>
+                <a:cs typeface="Calibri (MS)" panose="020B0604020202020204" charset="0"/>
+              </a:rPr>
               <a:t>.</a:t>
             </a:r>
             <a:br>
@@ -12798,7 +17327,7 @@
         <p:spPr>
           <a:xfrm>
             <a:off x="2242425" y="3198422"/>
-            <a:ext cx="13773557" cy="6334235"/>
+            <a:ext cx="13773557" cy="5503238"/>
           </a:xfrm>
           <a:prstGeom prst="rect">
             <a:avLst/>
@@ -12816,32 +17345,119 @@
               </a:lnSpc>
             </a:pPr>
             <a:r>
-              <a:rPr lang="pt-PT" sz="2800" b="1" dirty="0" err="1"/>
-              <a:t>Outcome</a:t>
-            </a:r>
-            <a:r>
-              <a:rPr lang="pt-PT" sz="2800" b="1" dirty="0"/>
-              <a:t> Primário: </a:t>
-            </a:r>
-            <a:r>
-              <a:rPr lang="pt-PT" sz="2800" dirty="0"/>
-              <a:t>Variação no score PHQ-9 (</a:t>
-            </a:r>
-            <a:r>
-              <a:rPr lang="pt-PT" sz="2800" dirty="0" err="1"/>
-              <a:t>Patient</a:t>
-            </a:r>
-            <a:r>
-              <a:rPr lang="pt-PT" sz="2800" dirty="0"/>
-              <a:t> </a:t>
-            </a:r>
-            <a:r>
-              <a:rPr lang="pt-PT" sz="2800" dirty="0" err="1"/>
-              <a:t>Health</a:t>
-            </a:r>
-            <a:r>
-              <a:rPr lang="pt-PT" sz="2800" dirty="0"/>
-              <a:t> Questionnaire-9) para avaliação da redução de sintomas depressivos.</a:t>
+              <a:rPr lang="pt-PT" sz="3500" b="1" dirty="0">
+                <a:latin typeface="Calibri (MS)" panose="020B0604020202020204" charset="0"/>
+                <a:cs typeface="Calibri (MS)" panose="020B0604020202020204" charset="0"/>
+              </a:rPr>
+              <a:t>Métodos e Métricas:</a:t>
+            </a:r>
+          </a:p>
+          <a:p>
+            <a:pPr marL="457200" indent="-457200">
+              <a:lnSpc>
+                <a:spcPct val="150000"/>
+              </a:lnSpc>
+              <a:buFont typeface="Arial" panose="020B0604020202020204" pitchFamily="34" charset="0"/>
+              <a:buChar char="•"/>
+            </a:pPr>
+            <a:r>
+              <a:rPr lang="pt-PT" sz="2500" dirty="0">
+                <a:latin typeface="Calibri (MS)" panose="020B0604020202020204" charset="0"/>
+                <a:cs typeface="Calibri (MS)" panose="020B0604020202020204" charset="0"/>
+              </a:rPr>
+              <a:t>Amostra piloto: n=30 participantes;</a:t>
+            </a:r>
+          </a:p>
+          <a:p>
+            <a:pPr marL="457200" indent="-457200">
+              <a:lnSpc>
+                <a:spcPct val="150000"/>
+              </a:lnSpc>
+              <a:buFont typeface="Arial" panose="020B0604020202020204" pitchFamily="34" charset="0"/>
+              <a:buChar char="•"/>
+            </a:pPr>
+            <a:r>
+              <a:rPr lang="pt-PT" sz="2500" dirty="0">
+                <a:latin typeface="Calibri (MS)" panose="020B0604020202020204" charset="0"/>
+                <a:cs typeface="Calibri (MS)" panose="020B0604020202020204" charset="0"/>
+              </a:rPr>
+              <a:t>Modelos Lineares Mistos (LMM) para análise longitudinal;</a:t>
+            </a:r>
+          </a:p>
+          <a:p>
+            <a:pPr marL="457200" indent="-457200">
+              <a:lnSpc>
+                <a:spcPct val="150000"/>
+              </a:lnSpc>
+              <a:buFont typeface="Arial" panose="020B0604020202020204" pitchFamily="34" charset="0"/>
+              <a:buChar char="•"/>
+            </a:pPr>
+            <a:r>
+              <a:rPr lang="pt-PT" sz="2500" dirty="0">
+                <a:latin typeface="Calibri (MS)" panose="020B0604020202020204" charset="0"/>
+                <a:cs typeface="Calibri (MS)" panose="020B0604020202020204" charset="0"/>
+              </a:rPr>
+              <a:t>Análise ITT (intenção de tratar) e per-</a:t>
+            </a:r>
+            <a:r>
+              <a:rPr lang="pt-PT" sz="2500" dirty="0" err="1">
+                <a:latin typeface="Calibri (MS)" panose="020B0604020202020204" charset="0"/>
+                <a:cs typeface="Calibri (MS)" panose="020B0604020202020204" charset="0"/>
+              </a:rPr>
+              <a:t>protocol</a:t>
+            </a:r>
+            <a:r>
+              <a:rPr lang="pt-PT" sz="2500" dirty="0">
+                <a:latin typeface="Calibri (MS)" panose="020B0604020202020204" charset="0"/>
+                <a:cs typeface="Calibri (MS)" panose="020B0604020202020204" charset="0"/>
+              </a:rPr>
+              <a:t>;</a:t>
+            </a:r>
+          </a:p>
+          <a:p>
+            <a:pPr marL="457200" indent="-457200">
+              <a:lnSpc>
+                <a:spcPct val="150000"/>
+              </a:lnSpc>
+              <a:buFont typeface="Arial" panose="020B0604020202020204" pitchFamily="34" charset="0"/>
+              <a:buChar char="•"/>
+            </a:pPr>
+            <a:r>
+              <a:rPr lang="pt-PT" sz="2500" dirty="0">
+                <a:latin typeface="Calibri (MS)" panose="020B0604020202020204" charset="0"/>
+                <a:cs typeface="Calibri (MS)" panose="020B0604020202020204" charset="0"/>
+              </a:rPr>
+              <a:t>Cálculo do tamanho de efeito: </a:t>
+            </a:r>
+            <a:r>
+              <a:rPr lang="pt-PT" sz="2500" dirty="0" err="1">
+                <a:latin typeface="Calibri (MS)" panose="020B0604020202020204" charset="0"/>
+                <a:cs typeface="Calibri (MS)" panose="020B0604020202020204" charset="0"/>
+              </a:rPr>
+              <a:t>Cohen’s</a:t>
+            </a:r>
+            <a:r>
+              <a:rPr lang="pt-PT" sz="2500" dirty="0">
+                <a:latin typeface="Calibri (MS)" panose="020B0604020202020204" charset="0"/>
+                <a:cs typeface="Calibri (MS)" panose="020B0604020202020204" charset="0"/>
+              </a:rPr>
+              <a:t> d;</a:t>
+            </a:r>
+          </a:p>
+          <a:p>
+            <a:pPr marL="457200" indent="-457200">
+              <a:lnSpc>
+                <a:spcPct val="150000"/>
+              </a:lnSpc>
+              <a:buFont typeface="Arial" panose="020B0604020202020204" pitchFamily="34" charset="0"/>
+              <a:buChar char="•"/>
+            </a:pPr>
+            <a:r>
+              <a:rPr lang="pt-PT" sz="2500" dirty="0">
+                <a:latin typeface="Calibri (MS)" panose="020B0604020202020204" charset="0"/>
+                <a:cs typeface="Calibri (MS)" panose="020B0604020202020204" charset="0"/>
+              </a:rPr>
+              <a:t>Comparação entre grupos ao longo do tempo.</a:t>
             </a:r>
           </a:p>
           <a:p>
@@ -12850,108 +17466,6 @@
                 <a:spcPct val="150000"/>
               </a:lnSpc>
             </a:pPr>
-            <a:endParaRPr lang="pt-PT" sz="2800" dirty="0"/>
-          </a:p>
-          <a:p>
-            <a:pPr>
-              <a:lnSpc>
-                <a:spcPct val="150000"/>
-              </a:lnSpc>
-            </a:pPr>
-            <a:r>
-              <a:rPr lang="pt-PT" sz="2800" b="1" dirty="0" err="1"/>
-              <a:t>Outcomes</a:t>
-            </a:r>
-            <a:r>
-              <a:rPr lang="pt-PT" sz="2800" b="1" dirty="0"/>
-              <a:t> Secundários: </a:t>
-            </a:r>
-            <a:r>
-              <a:rPr lang="pt-PT" sz="2800" dirty="0"/>
-              <a:t>Adesão à intervenção digital e bem-estar geral medido pelo WHO-5 (</a:t>
-            </a:r>
-            <a:r>
-              <a:rPr lang="pt-PT" sz="2800" dirty="0" err="1"/>
-              <a:t>World</a:t>
-            </a:r>
-            <a:r>
-              <a:rPr lang="pt-PT" sz="2800" dirty="0"/>
-              <a:t> </a:t>
-            </a:r>
-            <a:r>
-              <a:rPr lang="pt-PT" sz="2800" dirty="0" err="1"/>
-              <a:t>Health</a:t>
-            </a:r>
-            <a:r>
-              <a:rPr lang="pt-PT" sz="2800" dirty="0"/>
-              <a:t> </a:t>
-            </a:r>
-            <a:r>
-              <a:rPr lang="pt-PT" sz="2800" dirty="0" err="1"/>
-              <a:t>Organization</a:t>
-            </a:r>
-            <a:r>
-              <a:rPr lang="pt-PT" sz="2800" dirty="0"/>
-              <a:t> </a:t>
-            </a:r>
-            <a:r>
-              <a:rPr lang="pt-PT" sz="2800" dirty="0" err="1"/>
-              <a:t>Well-Being</a:t>
-            </a:r>
-            <a:r>
-              <a:rPr lang="pt-PT" sz="2800" dirty="0"/>
-              <a:t> Index).</a:t>
-            </a:r>
-          </a:p>
-          <a:p>
-            <a:pPr>
-              <a:lnSpc>
-                <a:spcPct val="150000"/>
-              </a:lnSpc>
-            </a:pPr>
-            <a:br>
-              <a:rPr lang="pt-PT" sz="2800" dirty="0"/>
-            </a:br>
-            <a:r>
-              <a:rPr lang="pt-PT" sz="2800" b="1" dirty="0"/>
-              <a:t>Usabilidade: </a:t>
-            </a:r>
-            <a:r>
-              <a:rPr lang="pt-PT" sz="2800" dirty="0"/>
-              <a:t>Avaliação através do </a:t>
-            </a:r>
-            <a:r>
-              <a:rPr lang="pt-PT" sz="2800" dirty="0" err="1"/>
-              <a:t>System</a:t>
-            </a:r>
-            <a:r>
-              <a:rPr lang="pt-PT" sz="2800" dirty="0"/>
-              <a:t> </a:t>
-            </a:r>
-            <a:r>
-              <a:rPr lang="pt-PT" sz="2800" dirty="0" err="1"/>
-              <a:t>Usability</a:t>
-            </a:r>
-            <a:r>
-              <a:rPr lang="pt-PT" sz="2800" dirty="0"/>
-              <a:t> </a:t>
-            </a:r>
-            <a:r>
-              <a:rPr lang="pt-PT" sz="2800" dirty="0" err="1"/>
-              <a:t>Scale</a:t>
-            </a:r>
-            <a:r>
-              <a:rPr lang="pt-PT" sz="2800" dirty="0"/>
-              <a:t> (SUS) para medir a experiência do utilizador com a aplicação </a:t>
-            </a:r>
-            <a:r>
-              <a:rPr lang="pt-PT" sz="2800" dirty="0" err="1"/>
-              <a:t>MindMove</a:t>
-            </a:r>
-            <a:r>
-              <a:rPr lang="pt-PT" sz="2800" dirty="0"/>
-              <a:t>.</a:t>
-            </a:r>
             <a:br>
               <a:rPr lang="pt-PT" sz="2800" dirty="0"/>
             </a:br>

--- a/MindMove.pptx
+++ b/MindMove.pptx
@@ -148,7 +148,7 @@
 <file path=ppt/revisionInfo.xml><?xml version="1.0" encoding="utf-8"?>
 <p1510:revInfo xmlns:a="http://schemas.openxmlformats.org/drawingml/2006/main" xmlns:r="http://schemas.openxmlformats.org/officeDocument/2006/relationships" xmlns:p1510="http://schemas.microsoft.com/office/powerpoint/2015/10/main">
   <p1510:revLst>
-    <p1510:client id="{0098CBE5-14F3-4F79-B2D5-566AE0C8256B}" v="8" dt="2026-05-14T07:52:27.162"/>
+    <p1510:client id="{0098CBE5-14F3-4F79-B2D5-566AE0C8256B}" v="12" dt="2026-05-14T08:15:32.139"/>
   </p1510:revLst>
 </p1510:revInfo>
 </file>
@@ -508,8 +508,8 @@
   </pc:docChgLst>
   <pc:docChgLst>
     <pc:chgData name="Gabriela Gonçalves Carneiro" userId="d552a4f0-38ab-4544-a7a4-6025654d07bb" providerId="ADAL" clId="{D03F746D-BE5D-4789-93E6-42C6E52F57A2}"/>
-    <pc:docChg chg="addSld delSld modSld">
-      <pc:chgData name="Gabriela Gonçalves Carneiro" userId="d552a4f0-38ab-4544-a7a4-6025654d07bb" providerId="ADAL" clId="{D03F746D-BE5D-4789-93E6-42C6E52F57A2}" dt="2026-05-14T07:52:27.162" v="228"/>
+    <pc:docChg chg="undo custSel addSld delSld modSld">
+      <pc:chgData name="Gabriela Gonçalves Carneiro" userId="d552a4f0-38ab-4544-a7a4-6025654d07bb" providerId="ADAL" clId="{D03F746D-BE5D-4789-93E6-42C6E52F57A2}" dt="2026-05-14T08:17:00.147" v="283" actId="20577"/>
       <pc:docMkLst>
         <pc:docMk/>
       </pc:docMkLst>
@@ -550,14 +550,14 @@
           <pc:sldMk cId="472268791" sldId="269"/>
         </pc:sldMkLst>
       </pc:sldChg>
-      <pc:sldChg chg="modSp add mod">
-        <pc:chgData name="Gabriela Gonçalves Carneiro" userId="d552a4f0-38ab-4544-a7a4-6025654d07bb" providerId="ADAL" clId="{D03F746D-BE5D-4789-93E6-42C6E52F57A2}" dt="2026-05-14T07:51:20.224" v="225"/>
+      <pc:sldChg chg="addSp delSp modSp add mod">
+        <pc:chgData name="Gabriela Gonçalves Carneiro" userId="d552a4f0-38ab-4544-a7a4-6025654d07bb" providerId="ADAL" clId="{D03F746D-BE5D-4789-93E6-42C6E52F57A2}" dt="2026-05-14T08:17:00.147" v="283" actId="20577"/>
         <pc:sldMkLst>
           <pc:docMk/>
           <pc:sldMk cId="573965222" sldId="269"/>
         </pc:sldMkLst>
         <pc:spChg chg="mod">
-          <ac:chgData name="Gabriela Gonçalves Carneiro" userId="d552a4f0-38ab-4544-a7a4-6025654d07bb" providerId="ADAL" clId="{D03F746D-BE5D-4789-93E6-42C6E52F57A2}" dt="2026-05-14T07:49:31.633" v="108" actId="20577"/>
+          <ac:chgData name="Gabriela Gonçalves Carneiro" userId="d552a4f0-38ab-4544-a7a4-6025654d07bb" providerId="ADAL" clId="{D03F746D-BE5D-4789-93E6-42C6E52F57A2}" dt="2026-05-14T08:17:00.147" v="283" actId="20577"/>
           <ac:spMkLst>
             <pc:docMk/>
             <pc:sldMk cId="573965222" sldId="269"/>
@@ -565,13 +565,45 @@
           </ac:spMkLst>
         </pc:spChg>
         <pc:spChg chg="mod">
-          <ac:chgData name="Gabriela Gonçalves Carneiro" userId="d552a4f0-38ab-4544-a7a4-6025654d07bb" providerId="ADAL" clId="{D03F746D-BE5D-4789-93E6-42C6E52F57A2}" dt="2026-05-14T07:51:20.224" v="225"/>
+          <ac:chgData name="Gabriela Gonçalves Carneiro" userId="d552a4f0-38ab-4544-a7a4-6025654d07bb" providerId="ADAL" clId="{D03F746D-BE5D-4789-93E6-42C6E52F57A2}" dt="2026-05-14T08:14:19.990" v="273" actId="1076"/>
           <ac:spMkLst>
             <pc:docMk/>
             <pc:sldMk cId="573965222" sldId="269"/>
             <ac:spMk id="15" creationId="{A0308FB3-1071-6A7F-9B36-628632EFD52E}"/>
           </ac:spMkLst>
         </pc:spChg>
+        <pc:spChg chg="add del">
+          <ac:chgData name="Gabriela Gonçalves Carneiro" userId="d552a4f0-38ab-4544-a7a4-6025654d07bb" providerId="ADAL" clId="{D03F746D-BE5D-4789-93E6-42C6E52F57A2}" dt="2026-05-14T08:13:08.620" v="232" actId="22"/>
+          <ac:spMkLst>
+            <pc:docMk/>
+            <pc:sldMk cId="573965222" sldId="269"/>
+            <ac:spMk id="17" creationId="{1B06E7F4-4E57-67FC-24EC-5B431D18BC6B}"/>
+          </ac:spMkLst>
+        </pc:spChg>
+        <pc:spChg chg="add mod">
+          <ac:chgData name="Gabriela Gonçalves Carneiro" userId="d552a4f0-38ab-4544-a7a4-6025654d07bb" providerId="ADAL" clId="{D03F746D-BE5D-4789-93E6-42C6E52F57A2}" dt="2026-05-14T08:14:13.954" v="272" actId="1076"/>
+          <ac:spMkLst>
+            <pc:docMk/>
+            <pc:sldMk cId="573965222" sldId="269"/>
+            <ac:spMk id="18" creationId="{DC3D3241-746D-30FC-DCE5-9C5F521652F0}"/>
+          </ac:spMkLst>
+        </pc:spChg>
+        <pc:spChg chg="add mod">
+          <ac:chgData name="Gabriela Gonçalves Carneiro" userId="d552a4f0-38ab-4544-a7a4-6025654d07bb" providerId="ADAL" clId="{D03F746D-BE5D-4789-93E6-42C6E52F57A2}" dt="2026-05-14T08:15:03.552" v="281"/>
+          <ac:spMkLst>
+            <pc:docMk/>
+            <pc:sldMk cId="573965222" sldId="269"/>
+            <ac:spMk id="19" creationId="{77FC34A0-2CF6-32F8-B21B-DEFF1C72DD61}"/>
+          </ac:spMkLst>
+        </pc:spChg>
+        <pc:grpChg chg="mod">
+          <ac:chgData name="Gabriela Gonçalves Carneiro" userId="d552a4f0-38ab-4544-a7a4-6025654d07bb" providerId="ADAL" clId="{D03F746D-BE5D-4789-93E6-42C6E52F57A2}" dt="2026-05-14T08:13:48.451" v="271" actId="1076"/>
+          <ac:grpSpMkLst>
+            <pc:docMk/>
+            <pc:sldMk cId="573965222" sldId="269"/>
+            <ac:grpSpMk id="11" creationId="{1A36D9CF-907C-AF5F-9901-36BC33CBC0FB}"/>
+          </ac:grpSpMkLst>
+        </pc:grpChg>
       </pc:sldChg>
       <pc:sldChg chg="del">
         <pc:chgData name="Gabriela Gonçalves Carneiro" userId="d552a4f0-38ab-4544-a7a4-6025654d07bb" providerId="ADAL" clId="{D03F746D-BE5D-4789-93E6-42C6E52F57A2}" dt="2026-05-14T07:46:56.050" v="2" actId="47"/>
@@ -6630,8 +6662,8 @@
         </p:nvSpPr>
         <p:spPr>
           <a:xfrm>
-            <a:off x="2281335" y="2789450"/>
-            <a:ext cx="13773557" cy="2194190"/>
+            <a:off x="2460753" y="4996249"/>
+            <a:ext cx="13773557" cy="2071336"/>
           </a:xfrm>
           <a:prstGeom prst="rect">
             <a:avLst/>
@@ -6649,7 +6681,7 @@
               </a:lnSpc>
             </a:pPr>
             <a:r>
-              <a:rPr lang="en-US" sz="9129" dirty="0">
+              <a:rPr lang="en-US" sz="5500" dirty="0">
                 <a:solidFill>
                   <a:srgbClr val="000000"/>
                 </a:solidFill>
@@ -6661,7 +6693,55 @@
               <a:t>Link do </a:t>
             </a:r>
             <a:r>
-              <a:rPr lang="en-US" sz="9129" dirty="0" err="1">
+              <a:rPr lang="en-US" sz="5500">
+                <a:solidFill>
+                  <a:srgbClr val="000000"/>
+                </a:solidFill>
+                <a:latin typeface="Calibri (MS)"/>
+                <a:ea typeface="Calibri (MS)"/>
+                <a:cs typeface="Calibri (MS)"/>
+                <a:sym typeface="Calibri (MS)"/>
+              </a:rPr>
+              <a:t>vídeo</a:t>
+            </a:r>
+            <a:r>
+              <a:rPr lang="en-US" sz="5500" dirty="0">
+                <a:solidFill>
+                  <a:srgbClr val="000000"/>
+                </a:solidFill>
+                <a:latin typeface="Calibri (MS)"/>
+                <a:ea typeface="Calibri (MS)"/>
+                <a:cs typeface="Calibri (MS)"/>
+                <a:sym typeface="Calibri (MS)"/>
+              </a:rPr>
+              <a:t> </a:t>
+            </a:r>
+            <a:r>
+              <a:rPr lang="en-US" sz="5500" dirty="0" err="1">
+                <a:solidFill>
+                  <a:srgbClr val="000000"/>
+                </a:solidFill>
+                <a:latin typeface="Calibri (MS)"/>
+                <a:ea typeface="Calibri (MS)"/>
+                <a:cs typeface="Calibri (MS)"/>
+                <a:sym typeface="Calibri (MS)"/>
+              </a:rPr>
+              <a:t>demonstrativo</a:t>
+            </a:r>
+            <a:r>
+              <a:rPr lang="en-US" sz="5500" dirty="0">
+                <a:solidFill>
+                  <a:srgbClr val="000000"/>
+                </a:solidFill>
+                <a:latin typeface="Calibri (MS)"/>
+                <a:ea typeface="Calibri (MS)"/>
+                <a:cs typeface="Calibri (MS)"/>
+                <a:sym typeface="Calibri (MS)"/>
+              </a:rPr>
+              <a:t> do </a:t>
+            </a:r>
+            <a:r>
+              <a:rPr lang="en-US" sz="5500" dirty="0" err="1">
                 <a:solidFill>
                   <a:srgbClr val="000000"/>
                 </a:solidFill>
@@ -6673,7 +6753,7 @@
               <a:t>protótipo</a:t>
             </a:r>
             <a:r>
-              <a:rPr lang="en-US" sz="9129" dirty="0">
+              <a:rPr lang="en-US" sz="5500" dirty="0">
                 <a:solidFill>
                   <a:srgbClr val="000000"/>
                 </a:solidFill>
@@ -6685,7 +6765,7 @@
               <a:t> da App </a:t>
             </a:r>
             <a:r>
-              <a:rPr lang="en-US" sz="9129" dirty="0" err="1">
+              <a:rPr lang="en-US" sz="5500" dirty="0" err="1">
                 <a:solidFill>
                   <a:srgbClr val="000000"/>
                 </a:solidFill>
@@ -6696,7 +6776,7 @@
               </a:rPr>
               <a:t>MindMove</a:t>
             </a:r>
-            <a:endParaRPr lang="en-US" sz="9129" dirty="0">
+            <a:endParaRPr lang="en-US" sz="5500" dirty="0">
               <a:solidFill>
                 <a:srgbClr val="000000"/>
               </a:solidFill>
@@ -6722,7 +6802,7 @@
         </p:nvSpPr>
         <p:spPr>
           <a:xfrm>
-            <a:off x="2219052" y="5143500"/>
+            <a:off x="2133600" y="3322468"/>
             <a:ext cx="13773557" cy="1225848"/>
           </a:xfrm>
           <a:prstGeom prst="rect">
@@ -6745,6 +6825,140 @@
                 <a:hlinkClick r:id="rId4"/>
               </a:rPr>
               <a:t>https://www.figma.com/make/jqpvN3R267yLQH77eYXytl/Criar-tela-inicial-MindMove?code-node-id=0-9&amp;fullscreen=1</a:t>
+            </a:r>
+            <a:endParaRPr lang="pt-PT" sz="2800" dirty="0"/>
+          </a:p>
+        </p:txBody>
+      </p:sp>
+      <p:sp>
+        <p:nvSpPr>
+          <p:cNvPr id="18" name="TextBox 14">
+            <a:extLst>
+              <a:ext uri="{FF2B5EF4-FFF2-40B4-BE49-F238E27FC236}">
+                <a16:creationId xmlns:a16="http://schemas.microsoft.com/office/drawing/2014/main" id="{DC3D3241-746D-30FC-DCE5-9C5F521652F0}"/>
+              </a:ext>
+            </a:extLst>
+          </p:cNvPr>
+          <p:cNvSpPr txBox="1"/>
+          <p:nvPr/>
+        </p:nvSpPr>
+        <p:spPr>
+          <a:xfrm>
+            <a:off x="2433734" y="2136571"/>
+            <a:ext cx="13773557" cy="994118"/>
+          </a:xfrm>
+          <a:prstGeom prst="rect">
+            <a:avLst/>
+          </a:prstGeom>
+        </p:spPr>
+        <p:txBody>
+          <a:bodyPr lIns="0" tIns="0" rIns="0" bIns="0" rtlCol="0" anchor="t">
+            <a:spAutoFit/>
+          </a:bodyPr>
+          <a:lstStyle/>
+          <a:p>
+            <a:pPr lvl="0" algn="ctr">
+              <a:lnSpc>
+                <a:spcPts val="8398"/>
+              </a:lnSpc>
+            </a:pPr>
+            <a:r>
+              <a:rPr lang="en-US" sz="5500" dirty="0">
+                <a:solidFill>
+                  <a:srgbClr val="000000"/>
+                </a:solidFill>
+                <a:latin typeface="Calibri (MS)"/>
+                <a:ea typeface="Calibri (MS)"/>
+                <a:cs typeface="Calibri (MS)"/>
+                <a:sym typeface="Calibri (MS)"/>
+              </a:rPr>
+              <a:t>Link do </a:t>
+            </a:r>
+            <a:r>
+              <a:rPr lang="en-US" sz="5500" dirty="0" err="1">
+                <a:solidFill>
+                  <a:srgbClr val="000000"/>
+                </a:solidFill>
+                <a:latin typeface="Calibri (MS)"/>
+                <a:ea typeface="Calibri (MS)"/>
+                <a:cs typeface="Calibri (MS)"/>
+                <a:sym typeface="Calibri (MS)"/>
+              </a:rPr>
+              <a:t>protótipo</a:t>
+            </a:r>
+            <a:r>
+              <a:rPr lang="en-US" sz="5500" dirty="0">
+                <a:solidFill>
+                  <a:srgbClr val="000000"/>
+                </a:solidFill>
+                <a:latin typeface="Calibri (MS)"/>
+                <a:ea typeface="Calibri (MS)"/>
+                <a:cs typeface="Calibri (MS)"/>
+                <a:sym typeface="Calibri (MS)"/>
+              </a:rPr>
+              <a:t> da App </a:t>
+            </a:r>
+            <a:r>
+              <a:rPr lang="en-US" sz="5500" dirty="0" err="1">
+                <a:solidFill>
+                  <a:srgbClr val="000000"/>
+                </a:solidFill>
+                <a:latin typeface="Calibri (MS)"/>
+                <a:ea typeface="Calibri (MS)"/>
+                <a:cs typeface="Calibri (MS)"/>
+                <a:sym typeface="Calibri (MS)"/>
+              </a:rPr>
+              <a:t>MindMove</a:t>
+            </a:r>
+            <a:endParaRPr lang="en-US" sz="5500" dirty="0">
+              <a:solidFill>
+                <a:srgbClr val="000000"/>
+              </a:solidFill>
+              <a:latin typeface="Calibri (MS)"/>
+              <a:ea typeface="Calibri (MS)"/>
+              <a:cs typeface="Calibri (MS)"/>
+              <a:sym typeface="Calibri (MS)"/>
+            </a:endParaRPr>
+          </a:p>
+        </p:txBody>
+      </p:sp>
+      <p:sp>
+        <p:nvSpPr>
+          <p:cNvPr id="19" name="TextBox 15">
+            <a:extLst>
+              <a:ext uri="{FF2B5EF4-FFF2-40B4-BE49-F238E27FC236}">
+                <a16:creationId xmlns:a16="http://schemas.microsoft.com/office/drawing/2014/main" id="{77FC34A0-2CF6-32F8-B21B-DEFF1C72DD61}"/>
+              </a:ext>
+            </a:extLst>
+          </p:cNvPr>
+          <p:cNvSpPr txBox="1"/>
+          <p:nvPr/>
+        </p:nvSpPr>
+        <p:spPr>
+          <a:xfrm>
+            <a:off x="2036717" y="7223119"/>
+            <a:ext cx="13773557" cy="579518"/>
+          </a:xfrm>
+          <a:prstGeom prst="rect">
+            <a:avLst/>
+          </a:prstGeom>
+        </p:spPr>
+        <p:txBody>
+          <a:bodyPr lIns="0" tIns="0" rIns="0" bIns="0" rtlCol="0" anchor="t">
+            <a:spAutoFit/>
+          </a:bodyPr>
+          <a:lstStyle/>
+          <a:p>
+            <a:pPr>
+              <a:lnSpc>
+                <a:spcPct val="150000"/>
+              </a:lnSpc>
+            </a:pPr>
+            <a:r>
+              <a:rPr lang="pt-PT" sz="2800" dirty="0">
+                <a:hlinkClick r:id="rId5"/>
+              </a:rPr>
+              <a:t>https://www.youtube.com/watch?v=cAeMl6o3SJE</a:t>
             </a:r>
             <a:endParaRPr lang="pt-PT" sz="2800" dirty="0"/>
           </a:p>

--- a/MindMove.pptx
+++ b/MindMove.pptx
@@ -509,10 +509,25 @@
   <pc:docChgLst>
     <pc:chgData name="Gabriela Gonçalves Carneiro" userId="d552a4f0-38ab-4544-a7a4-6025654d07bb" providerId="ADAL" clId="{D03F746D-BE5D-4789-93E6-42C6E52F57A2}"/>
     <pc:docChg chg="undo custSel addSld delSld modSld">
-      <pc:chgData name="Gabriela Gonçalves Carneiro" userId="d552a4f0-38ab-4544-a7a4-6025654d07bb" providerId="ADAL" clId="{D03F746D-BE5D-4789-93E6-42C6E52F57A2}" dt="2026-05-14T08:17:00.147" v="283" actId="20577"/>
+      <pc:chgData name="Gabriela Gonçalves Carneiro" userId="d552a4f0-38ab-4544-a7a4-6025654d07bb" providerId="ADAL" clId="{D03F746D-BE5D-4789-93E6-42C6E52F57A2}" dt="2026-05-14T12:38:31.755" v="284" actId="20577"/>
       <pc:docMkLst>
         <pc:docMk/>
       </pc:docMkLst>
+      <pc:sldChg chg="modSp mod">
+        <pc:chgData name="Gabriela Gonçalves Carneiro" userId="d552a4f0-38ab-4544-a7a4-6025654d07bb" providerId="ADAL" clId="{D03F746D-BE5D-4789-93E6-42C6E52F57A2}" dt="2026-05-14T12:38:31.755" v="284" actId="20577"/>
+        <pc:sldMkLst>
+          <pc:docMk/>
+          <pc:sldMk cId="0" sldId="259"/>
+        </pc:sldMkLst>
+        <pc:spChg chg="mod">
+          <ac:chgData name="Gabriela Gonçalves Carneiro" userId="d552a4f0-38ab-4544-a7a4-6025654d07bb" providerId="ADAL" clId="{D03F746D-BE5D-4789-93E6-42C6E52F57A2}" dt="2026-05-14T12:38:31.755" v="284" actId="20577"/>
+          <ac:spMkLst>
+            <pc:docMk/>
+            <pc:sldMk cId="0" sldId="259"/>
+            <ac:spMk id="14" creationId="{00000000-0000-0000-0000-000000000000}"/>
+          </ac:spMkLst>
+        </pc:spChg>
+      </pc:sldChg>
       <pc:sldChg chg="del">
         <pc:chgData name="Gabriela Gonçalves Carneiro" userId="d552a4f0-38ab-4544-a7a4-6025654d07bb" providerId="ADAL" clId="{D03F746D-BE5D-4789-93E6-42C6E52F57A2}" dt="2026-05-14T07:46:54.137" v="0" actId="47"/>
         <pc:sldMkLst>
@@ -6693,7 +6708,7 @@
               <a:t>Link do </a:t>
             </a:r>
             <a:r>
-              <a:rPr lang="en-US" sz="5500">
+              <a:rPr lang="en-US" sz="5500" dirty="0" err="1">
                 <a:solidFill>
                   <a:srgbClr val="000000"/>
                 </a:solidFill>
@@ -11166,7 +11181,7 @@
         <p:spPr>
           <a:xfrm>
             <a:off x="2163650" y="4401136"/>
-            <a:ext cx="13960701" cy="3744871"/>
+            <a:ext cx="13960701" cy="3167983"/>
           </a:xfrm>
           <a:prstGeom prst="rect">
             <a:avLst/>
@@ -11783,7 +11798,7 @@
               <a:t>ofcare</a:t>
             </a:r>
             <a:r>
-              <a:rPr lang="en-US" sz="2499" dirty="0">
+              <a:rPr lang="en-US" sz="2499">
                 <a:solidFill>
                   <a:srgbClr val="000000"/>
                 </a:solidFill>
@@ -11794,126 +11809,15 @@
               </a:rPr>
               <a:t>). </a:t>
             </a:r>
-            <a:r>
-              <a:rPr lang="en-US" sz="2499" dirty="0" err="1">
-                <a:solidFill>
-                  <a:srgbClr val="000000"/>
-                </a:solidFill>
-                <a:latin typeface="Calibri (MS)"/>
-                <a:ea typeface="Calibri (MS)"/>
-                <a:cs typeface="Calibri (MS)"/>
-                <a:sym typeface="Calibri (MS)"/>
-              </a:rPr>
-              <a:t>Período</a:t>
-            </a:r>
-            <a:r>
-              <a:rPr lang="en-US" sz="2499" dirty="0">
-                <a:solidFill>
-                  <a:srgbClr val="000000"/>
-                </a:solidFill>
-                <a:latin typeface="Calibri (MS)"/>
-                <a:ea typeface="Calibri (MS)"/>
-                <a:cs typeface="Calibri (MS)"/>
-                <a:sym typeface="Calibri (MS)"/>
-              </a:rPr>
-              <a:t> do </a:t>
-            </a:r>
-            <a:r>
-              <a:rPr lang="en-US" sz="2499" dirty="0" err="1">
-                <a:solidFill>
-                  <a:srgbClr val="000000"/>
-                </a:solidFill>
-                <a:latin typeface="Calibri (MS)"/>
-                <a:ea typeface="Calibri (MS)"/>
-                <a:cs typeface="Calibri (MS)"/>
-                <a:sym typeface="Calibri (MS)"/>
-              </a:rPr>
-              <a:t>estudo</a:t>
-            </a:r>
-            <a:r>
-              <a:rPr lang="en-US" sz="2499" dirty="0">
-                <a:solidFill>
-                  <a:srgbClr val="000000"/>
-                </a:solidFill>
-                <a:latin typeface="Calibri (MS)"/>
-                <a:ea typeface="Calibri (MS)"/>
-                <a:cs typeface="Calibri (MS)"/>
-                <a:sym typeface="Calibri (MS)"/>
-              </a:rPr>
-              <a:t>: 21 a 27 de </a:t>
-            </a:r>
-            <a:r>
-              <a:rPr lang="en-US" sz="2499" dirty="0" err="1">
-                <a:solidFill>
-                  <a:srgbClr val="000000"/>
-                </a:solidFill>
-                <a:latin typeface="Calibri (MS)"/>
-                <a:ea typeface="Calibri (MS)"/>
-                <a:cs typeface="Calibri (MS)"/>
-                <a:sym typeface="Calibri (MS)"/>
-              </a:rPr>
-              <a:t>março</a:t>
-            </a:r>
-            <a:r>
-              <a:rPr lang="en-US" sz="2499" dirty="0">
-                <a:solidFill>
-                  <a:srgbClr val="000000"/>
-                </a:solidFill>
-                <a:latin typeface="Calibri (MS)"/>
-                <a:ea typeface="Calibri (MS)"/>
-                <a:cs typeface="Calibri (MS)"/>
-                <a:sym typeface="Calibri (MS)"/>
-              </a:rPr>
-              <a:t> de 2026 (</a:t>
-            </a:r>
-            <a:r>
-              <a:rPr lang="en-US" sz="2499" dirty="0" err="1">
-                <a:solidFill>
-                  <a:srgbClr val="000000"/>
-                </a:solidFill>
-                <a:latin typeface="Calibri (MS)"/>
-                <a:ea typeface="Calibri (MS)"/>
-                <a:cs typeface="Calibri (MS)"/>
-                <a:sym typeface="Calibri (MS)"/>
-              </a:rPr>
-              <a:t>fase</a:t>
-            </a:r>
-            <a:r>
-              <a:rPr lang="en-US" sz="2499" dirty="0">
-                <a:solidFill>
-                  <a:srgbClr val="000000"/>
-                </a:solidFill>
-                <a:latin typeface="Calibri (MS)"/>
-                <a:ea typeface="Calibri (MS)"/>
-                <a:cs typeface="Calibri (MS)"/>
-                <a:sym typeface="Calibri (MS)"/>
-              </a:rPr>
-              <a:t> </a:t>
-            </a:r>
-            <a:r>
-              <a:rPr lang="en-US" sz="2499" dirty="0" err="1">
-                <a:solidFill>
-                  <a:srgbClr val="000000"/>
-                </a:solidFill>
-                <a:latin typeface="Calibri (MS)"/>
-                <a:ea typeface="Calibri (MS)"/>
-                <a:cs typeface="Calibri (MS)"/>
-                <a:sym typeface="Calibri (MS)"/>
-              </a:rPr>
-              <a:t>piloto</a:t>
-            </a:r>
-            <a:r>
-              <a:rPr lang="en-US" sz="2499" dirty="0">
-                <a:solidFill>
-                  <a:srgbClr val="000000"/>
-                </a:solidFill>
-                <a:latin typeface="Calibri (MS)"/>
-                <a:ea typeface="Calibri (MS)"/>
-                <a:cs typeface="Calibri (MS)"/>
-                <a:sym typeface="Calibri (MS)"/>
-              </a:rPr>
-              <a:t>).</a:t>
-            </a:r>
+            <a:endParaRPr lang="en-US" sz="2499" dirty="0">
+              <a:solidFill>
+                <a:srgbClr val="000000"/>
+              </a:solidFill>
+              <a:latin typeface="Calibri (MS)"/>
+              <a:ea typeface="Calibri (MS)"/>
+              <a:cs typeface="Calibri (MS)"/>
+              <a:sym typeface="Calibri (MS)"/>
+            </a:endParaRPr>
           </a:p>
           <a:p>
             <a:pPr marL="0" lvl="0" indent="0" algn="just">

--- a/MindMove.pptx
+++ b/MindMove.pptx
@@ -509,18 +509,18 @@
   <pc:docChgLst>
     <pc:chgData name="Gabriela Gonçalves Carneiro" userId="d552a4f0-38ab-4544-a7a4-6025654d07bb" providerId="ADAL" clId="{D03F746D-BE5D-4789-93E6-42C6E52F57A2}"/>
     <pc:docChg chg="undo custSel addSld delSld modSld">
-      <pc:chgData name="Gabriela Gonçalves Carneiro" userId="d552a4f0-38ab-4544-a7a4-6025654d07bb" providerId="ADAL" clId="{D03F746D-BE5D-4789-93E6-42C6E52F57A2}" dt="2026-05-14T12:38:31.755" v="284" actId="20577"/>
+      <pc:chgData name="Gabriela Gonçalves Carneiro" userId="d552a4f0-38ab-4544-a7a4-6025654d07bb" providerId="ADAL" clId="{D03F746D-BE5D-4789-93E6-42C6E52F57A2}" dt="2026-05-14T12:39:32.351" v="286" actId="20577"/>
       <pc:docMkLst>
         <pc:docMk/>
       </pc:docMkLst>
       <pc:sldChg chg="modSp mod">
-        <pc:chgData name="Gabriela Gonçalves Carneiro" userId="d552a4f0-38ab-4544-a7a4-6025654d07bb" providerId="ADAL" clId="{D03F746D-BE5D-4789-93E6-42C6E52F57A2}" dt="2026-05-14T12:38:31.755" v="284" actId="20577"/>
+        <pc:chgData name="Gabriela Gonçalves Carneiro" userId="d552a4f0-38ab-4544-a7a4-6025654d07bb" providerId="ADAL" clId="{D03F746D-BE5D-4789-93E6-42C6E52F57A2}" dt="2026-05-14T12:39:32.351" v="286" actId="20577"/>
         <pc:sldMkLst>
           <pc:docMk/>
           <pc:sldMk cId="0" sldId="259"/>
         </pc:sldMkLst>
         <pc:spChg chg="mod">
-          <ac:chgData name="Gabriela Gonçalves Carneiro" userId="d552a4f0-38ab-4544-a7a4-6025654d07bb" providerId="ADAL" clId="{D03F746D-BE5D-4789-93E6-42C6E52F57A2}" dt="2026-05-14T12:38:31.755" v="284" actId="20577"/>
+          <ac:chgData name="Gabriela Gonçalves Carneiro" userId="d552a4f0-38ab-4544-a7a4-6025654d07bb" providerId="ADAL" clId="{D03F746D-BE5D-4789-93E6-42C6E52F57A2}" dt="2026-05-14T12:39:32.351" v="286" actId="20577"/>
           <ac:spMkLst>
             <pc:docMk/>
             <pc:sldMk cId="0" sldId="259"/>
@@ -11181,7 +11181,7 @@
         <p:spPr>
           <a:xfrm>
             <a:off x="2163650" y="4401136"/>
-            <a:ext cx="13960701" cy="3167983"/>
+            <a:ext cx="13960701" cy="3744871"/>
           </a:xfrm>
           <a:prstGeom prst="rect">
             <a:avLst/>
@@ -11340,223 +11340,7 @@
                 <a:cs typeface="Calibri (MS)"/>
                 <a:sym typeface="Calibri (MS)"/>
               </a:rPr>
-              <a:t> 1:1. O </a:t>
-            </a:r>
-            <a:r>
-              <a:rPr lang="en-US" sz="2499" dirty="0" err="1">
-                <a:solidFill>
-                  <a:srgbClr val="000000"/>
-                </a:solidFill>
-                <a:latin typeface="Calibri (MS)"/>
-                <a:ea typeface="Calibri (MS)"/>
-                <a:cs typeface="Calibri (MS)"/>
-                <a:sym typeface="Calibri (MS)"/>
-              </a:rPr>
-              <a:t>grupo</a:t>
-            </a:r>
-            <a:r>
-              <a:rPr lang="en-US" sz="2499" dirty="0">
-                <a:solidFill>
-                  <a:srgbClr val="000000"/>
-                </a:solidFill>
-                <a:latin typeface="Calibri (MS)"/>
-                <a:ea typeface="Calibri (MS)"/>
-                <a:cs typeface="Calibri (MS)"/>
-                <a:sym typeface="Calibri (MS)"/>
-              </a:rPr>
-              <a:t> </a:t>
-            </a:r>
-            <a:r>
-              <a:rPr lang="en-US" sz="2499" dirty="0" err="1">
-                <a:solidFill>
-                  <a:srgbClr val="000000"/>
-                </a:solidFill>
-                <a:latin typeface="Calibri (MS)"/>
-                <a:ea typeface="Calibri (MS)"/>
-                <a:cs typeface="Calibri (MS)"/>
-                <a:sym typeface="Calibri (MS)"/>
-              </a:rPr>
-              <a:t>intervenção</a:t>
-            </a:r>
-            <a:r>
-              <a:rPr lang="en-US" sz="2499" dirty="0">
-                <a:solidFill>
-                  <a:srgbClr val="000000"/>
-                </a:solidFill>
-                <a:latin typeface="Calibri (MS)"/>
-                <a:ea typeface="Calibri (MS)"/>
-                <a:cs typeface="Calibri (MS)"/>
-                <a:sym typeface="Calibri (MS)"/>
-              </a:rPr>
-              <a:t> </a:t>
-            </a:r>
-            <a:r>
-              <a:rPr lang="en-US" sz="2499" dirty="0" err="1">
-                <a:solidFill>
-                  <a:srgbClr val="000000"/>
-                </a:solidFill>
-                <a:latin typeface="Calibri (MS)"/>
-                <a:ea typeface="Calibri (MS)"/>
-                <a:cs typeface="Calibri (MS)"/>
-                <a:sym typeface="Calibri (MS)"/>
-              </a:rPr>
-              <a:t>utiliza</a:t>
-            </a:r>
-            <a:r>
-              <a:rPr lang="en-US" sz="2499" dirty="0">
-                <a:solidFill>
-                  <a:srgbClr val="000000"/>
-                </a:solidFill>
-                <a:latin typeface="Calibri (MS)"/>
-                <a:ea typeface="Calibri (MS)"/>
-                <a:cs typeface="Calibri (MS)"/>
-                <a:sym typeface="Calibri (MS)"/>
-              </a:rPr>
-              <a:t> a </a:t>
-            </a:r>
-            <a:r>
-              <a:rPr lang="en-US" sz="2499" dirty="0" err="1">
-                <a:solidFill>
-                  <a:srgbClr val="000000"/>
-                </a:solidFill>
-                <a:latin typeface="Calibri (MS)"/>
-                <a:ea typeface="Calibri (MS)"/>
-                <a:cs typeface="Calibri (MS)"/>
-                <a:sym typeface="Calibri (MS)"/>
-              </a:rPr>
-              <a:t>aplicação</a:t>
-            </a:r>
-            <a:r>
-              <a:rPr lang="en-US" sz="2499" dirty="0">
-                <a:solidFill>
-                  <a:srgbClr val="000000"/>
-                </a:solidFill>
-                <a:latin typeface="Calibri (MS)"/>
-                <a:ea typeface="Calibri (MS)"/>
-                <a:cs typeface="Calibri (MS)"/>
-                <a:sym typeface="Calibri (MS)"/>
-              </a:rPr>
-              <a:t> </a:t>
-            </a:r>
-            <a:r>
-              <a:rPr lang="en-US" sz="2499" dirty="0" err="1">
-                <a:solidFill>
-                  <a:srgbClr val="000000"/>
-                </a:solidFill>
-                <a:latin typeface="Calibri (MS)"/>
-                <a:ea typeface="Calibri (MS)"/>
-                <a:cs typeface="Calibri (MS)"/>
-                <a:sym typeface="Calibri (MS)"/>
-              </a:rPr>
-              <a:t>MindMove</a:t>
-            </a:r>
-            <a:r>
-              <a:rPr lang="en-US" sz="2499" dirty="0">
-                <a:solidFill>
-                  <a:srgbClr val="000000"/>
-                </a:solidFill>
-                <a:latin typeface="Calibri (MS)"/>
-                <a:ea typeface="Calibri (MS)"/>
-                <a:cs typeface="Calibri (MS)"/>
-                <a:sym typeface="Calibri (MS)"/>
-              </a:rPr>
-              <a:t> com </a:t>
-            </a:r>
-            <a:r>
-              <a:rPr lang="en-US" sz="2499" dirty="0" err="1">
-                <a:solidFill>
-                  <a:srgbClr val="000000"/>
-                </a:solidFill>
-                <a:latin typeface="Calibri (MS)"/>
-                <a:ea typeface="Calibri (MS)"/>
-                <a:cs typeface="Calibri (MS)"/>
-                <a:sym typeface="Calibri (MS)"/>
-              </a:rPr>
-              <a:t>monitorização</a:t>
-            </a:r>
-            <a:r>
-              <a:rPr lang="en-US" sz="2499" dirty="0">
-                <a:solidFill>
-                  <a:srgbClr val="000000"/>
-                </a:solidFill>
-                <a:latin typeface="Calibri (MS)"/>
-                <a:ea typeface="Calibri (MS)"/>
-                <a:cs typeface="Calibri (MS)"/>
-                <a:sym typeface="Calibri (MS)"/>
-              </a:rPr>
-              <a:t>, </a:t>
-            </a:r>
-            <a:r>
-              <a:rPr lang="en-US" sz="2499" dirty="0" err="1">
-                <a:solidFill>
-                  <a:srgbClr val="000000"/>
-                </a:solidFill>
-                <a:latin typeface="Calibri (MS)"/>
-                <a:ea typeface="Calibri (MS)"/>
-                <a:cs typeface="Calibri (MS)"/>
-                <a:sym typeface="Calibri (MS)"/>
-              </a:rPr>
-              <a:t>alertas</a:t>
-            </a:r>
-            <a:r>
-              <a:rPr lang="en-US" sz="2499" dirty="0">
-                <a:solidFill>
-                  <a:srgbClr val="000000"/>
-                </a:solidFill>
-                <a:latin typeface="Calibri (MS)"/>
-                <a:ea typeface="Calibri (MS)"/>
-                <a:cs typeface="Calibri (MS)"/>
-                <a:sym typeface="Calibri (MS)"/>
-              </a:rPr>
-              <a:t> e </a:t>
-            </a:r>
-            <a:r>
-              <a:rPr lang="en-US" sz="2499" dirty="0" err="1">
-                <a:solidFill>
-                  <a:srgbClr val="000000"/>
-                </a:solidFill>
-                <a:latin typeface="Calibri (MS)"/>
-                <a:ea typeface="Calibri (MS)"/>
-                <a:cs typeface="Calibri (MS)"/>
-                <a:sym typeface="Calibri (MS)"/>
-              </a:rPr>
-              <a:t>conteúdo</a:t>
-            </a:r>
-            <a:r>
-              <a:rPr lang="en-US" sz="2499" dirty="0">
-                <a:solidFill>
-                  <a:srgbClr val="000000"/>
-                </a:solidFill>
-                <a:latin typeface="Calibri (MS)"/>
-                <a:ea typeface="Calibri (MS)"/>
-                <a:cs typeface="Calibri (MS)"/>
-                <a:sym typeface="Calibri (MS)"/>
-              </a:rPr>
-              <a:t> </a:t>
-            </a:r>
-            <a:r>
-              <a:rPr lang="en-US" sz="2499" dirty="0" err="1">
-                <a:solidFill>
-                  <a:srgbClr val="000000"/>
-                </a:solidFill>
-                <a:latin typeface="Calibri (MS)"/>
-                <a:ea typeface="Calibri (MS)"/>
-                <a:cs typeface="Calibri (MS)"/>
-                <a:sym typeface="Calibri (MS)"/>
-              </a:rPr>
-              <a:t>educativo</a:t>
-            </a:r>
-            <a:r>
-              <a:rPr lang="en-US" sz="2499" dirty="0">
-                <a:solidFill>
-                  <a:srgbClr val="000000"/>
-                </a:solidFill>
-                <a:latin typeface="Calibri (MS)"/>
-                <a:ea typeface="Calibri (MS)"/>
-                <a:cs typeface="Calibri (MS)"/>
-                <a:sym typeface="Calibri (MS)"/>
-              </a:rPr>
-              <a:t>.</a:t>
+              <a:t> 1:1. </a:t>
             </a:r>
           </a:p>
           <a:p>
@@ -11627,7 +11411,7 @@
                 <a:cs typeface="Calibri (MS)"/>
                 <a:sym typeface="Calibri (MS)"/>
               </a:rPr>
-              <a:t>controlo</a:t>
+              <a:t>intervenção</a:t>
             </a:r>
             <a:r>
               <a:rPr lang="en-US" sz="2499" dirty="0">
@@ -11651,7 +11435,7 @@
                 <a:cs typeface="Calibri (MS)"/>
                 <a:sym typeface="Calibri (MS)"/>
               </a:rPr>
-              <a:t>em</a:t>
+              <a:t>utiliza</a:t>
             </a:r>
             <a:r>
               <a:rPr lang="en-US" sz="2499" dirty="0">
@@ -11663,6 +11447,30 @@
                 <a:cs typeface="Calibri (MS)"/>
                 <a:sym typeface="Calibri (MS)"/>
               </a:rPr>
+              <a:t> a </a:t>
+            </a:r>
+            <a:r>
+              <a:rPr lang="en-US" sz="2499" dirty="0" err="1">
+                <a:solidFill>
+                  <a:srgbClr val="000000"/>
+                </a:solidFill>
+                <a:latin typeface="Calibri (MS)"/>
+                <a:ea typeface="Calibri (MS)"/>
+                <a:cs typeface="Calibri (MS)"/>
+                <a:sym typeface="Calibri (MS)"/>
+              </a:rPr>
+              <a:t>aplicação</a:t>
+            </a:r>
+            <a:r>
+              <a:rPr lang="en-US" sz="2499" dirty="0">
+                <a:solidFill>
+                  <a:srgbClr val="000000"/>
+                </a:solidFill>
+                <a:latin typeface="Calibri (MS)"/>
+                <a:ea typeface="Calibri (MS)"/>
+                <a:cs typeface="Calibri (MS)"/>
+                <a:sym typeface="Calibri (MS)"/>
+              </a:rPr>
               <a:t> </a:t>
             </a:r>
             <a:r>
@@ -11675,7 +11483,7 @@
                 <a:cs typeface="Calibri (MS)"/>
                 <a:sym typeface="Calibri (MS)"/>
               </a:rPr>
-              <a:t>lista</a:t>
+              <a:t>MindMove</a:t>
             </a:r>
             <a:r>
               <a:rPr lang="en-US" sz="2499" dirty="0">
@@ -11687,7 +11495,7 @@
                 <a:cs typeface="Calibri (MS)"/>
                 <a:sym typeface="Calibri (MS)"/>
               </a:rPr>
-              <a:t> de </a:t>
+              <a:t> com </a:t>
             </a:r>
             <a:r>
               <a:rPr lang="en-US" sz="2499" dirty="0" err="1">
@@ -11699,7 +11507,7 @@
                 <a:cs typeface="Calibri (MS)"/>
                 <a:sym typeface="Calibri (MS)"/>
               </a:rPr>
-              <a:t>espera</a:t>
+              <a:t>monitorização</a:t>
             </a:r>
             <a:r>
               <a:rPr lang="en-US" sz="2499" dirty="0">
@@ -11711,6 +11519,54 @@
                 <a:cs typeface="Calibri (MS)"/>
                 <a:sym typeface="Calibri (MS)"/>
               </a:rPr>
+              <a:t>, </a:t>
+            </a:r>
+            <a:r>
+              <a:rPr lang="en-US" sz="2499" dirty="0" err="1">
+                <a:solidFill>
+                  <a:srgbClr val="000000"/>
+                </a:solidFill>
+                <a:latin typeface="Calibri (MS)"/>
+                <a:ea typeface="Calibri (MS)"/>
+                <a:cs typeface="Calibri (MS)"/>
+                <a:sym typeface="Calibri (MS)"/>
+              </a:rPr>
+              <a:t>alertas</a:t>
+            </a:r>
+            <a:r>
+              <a:rPr lang="en-US" sz="2499" dirty="0">
+                <a:solidFill>
+                  <a:srgbClr val="000000"/>
+                </a:solidFill>
+                <a:latin typeface="Calibri (MS)"/>
+                <a:ea typeface="Calibri (MS)"/>
+                <a:cs typeface="Calibri (MS)"/>
+                <a:sym typeface="Calibri (MS)"/>
+              </a:rPr>
+              <a:t> e </a:t>
+            </a:r>
+            <a:r>
+              <a:rPr lang="en-US" sz="2499" dirty="0" err="1">
+                <a:solidFill>
+                  <a:srgbClr val="000000"/>
+                </a:solidFill>
+                <a:latin typeface="Calibri (MS)"/>
+                <a:ea typeface="Calibri (MS)"/>
+                <a:cs typeface="Calibri (MS)"/>
+                <a:sym typeface="Calibri (MS)"/>
+              </a:rPr>
+              <a:t>conteúdo</a:t>
+            </a:r>
+            <a:r>
+              <a:rPr lang="en-US" sz="2499" dirty="0">
+                <a:solidFill>
+                  <a:srgbClr val="000000"/>
+                </a:solidFill>
+                <a:latin typeface="Calibri (MS)"/>
+                <a:ea typeface="Calibri (MS)"/>
+                <a:cs typeface="Calibri (MS)"/>
+                <a:sym typeface="Calibri (MS)"/>
+              </a:rPr>
               <a:t> </a:t>
             </a:r>
             <a:r>
@@ -11723,7 +11579,7 @@
                 <a:cs typeface="Calibri (MS)"/>
                 <a:sym typeface="Calibri (MS)"/>
               </a:rPr>
-              <a:t>recebe</a:t>
+              <a:t>educativo</a:t>
             </a:r>
             <a:r>
               <a:rPr lang="en-US" sz="2499" dirty="0">
@@ -11735,80 +11591,15 @@
                 <a:cs typeface="Calibri (MS)"/>
                 <a:sym typeface="Calibri (MS)"/>
               </a:rPr>
-              <a:t> </a:t>
-            </a:r>
-            <a:r>
-              <a:rPr lang="en-US" sz="2499" dirty="0" err="1">
-                <a:solidFill>
-                  <a:srgbClr val="000000"/>
-                </a:solidFill>
-                <a:latin typeface="Calibri (MS)"/>
-                <a:ea typeface="Calibri (MS)"/>
-                <a:cs typeface="Calibri (MS)"/>
-                <a:sym typeface="Calibri (MS)"/>
-              </a:rPr>
-              <a:t>brochuras</a:t>
-            </a:r>
-            <a:r>
-              <a:rPr lang="en-US" sz="2499" dirty="0">
-                <a:solidFill>
-                  <a:srgbClr val="000000"/>
-                </a:solidFill>
-                <a:latin typeface="Calibri (MS)"/>
-                <a:ea typeface="Calibri (MS)"/>
-                <a:cs typeface="Calibri (MS)"/>
-                <a:sym typeface="Calibri (MS)"/>
-              </a:rPr>
-              <a:t> </a:t>
-            </a:r>
-            <a:r>
-              <a:rPr lang="en-US" sz="2499" dirty="0" err="1">
-                <a:solidFill>
-                  <a:srgbClr val="000000"/>
-                </a:solidFill>
-                <a:latin typeface="Calibri (MS)"/>
-                <a:ea typeface="Calibri (MS)"/>
-                <a:cs typeface="Calibri (MS)"/>
-                <a:sym typeface="Calibri (MS)"/>
-              </a:rPr>
-              <a:t>informativas</a:t>
-            </a:r>
-            <a:r>
-              <a:rPr lang="en-US" sz="2499" dirty="0">
-                <a:solidFill>
-                  <a:srgbClr val="000000"/>
-                </a:solidFill>
-                <a:latin typeface="Calibri (MS)"/>
-                <a:ea typeface="Calibri (MS)"/>
-                <a:cs typeface="Calibri (MS)"/>
-                <a:sym typeface="Calibri (MS)"/>
-              </a:rPr>
-              <a:t> (standard </a:t>
-            </a:r>
-            <a:r>
-              <a:rPr lang="en-US" sz="2499" dirty="0" err="1">
-                <a:solidFill>
-                  <a:srgbClr val="000000"/>
-                </a:solidFill>
-                <a:latin typeface="Calibri (MS)"/>
-                <a:ea typeface="Calibri (MS)"/>
-                <a:cs typeface="Calibri (MS)"/>
-                <a:sym typeface="Calibri (MS)"/>
-              </a:rPr>
-              <a:t>ofcare</a:t>
-            </a:r>
-            <a:r>
-              <a:rPr lang="en-US" sz="2499">
-                <a:solidFill>
-                  <a:srgbClr val="000000"/>
-                </a:solidFill>
-                <a:latin typeface="Calibri (MS)"/>
-                <a:ea typeface="Calibri (MS)"/>
-                <a:cs typeface="Calibri (MS)"/>
-                <a:sym typeface="Calibri (MS)"/>
-              </a:rPr>
-              <a:t>). </a:t>
-            </a:r>
+              <a:t>.</a:t>
+            </a:r>
+          </a:p>
+          <a:p>
+            <a:pPr algn="just">
+              <a:lnSpc>
+                <a:spcPct val="150000"/>
+              </a:lnSpc>
+            </a:pPr>
             <a:endParaRPr lang="en-US" sz="2499" dirty="0">
               <a:solidFill>
                 <a:srgbClr val="000000"/>
@@ -11818,6 +11609,241 @@
               <a:cs typeface="Calibri (MS)"/>
               <a:sym typeface="Calibri (MS)"/>
             </a:endParaRPr>
+          </a:p>
+          <a:p>
+            <a:pPr algn="just">
+              <a:lnSpc>
+                <a:spcPct val="150000"/>
+              </a:lnSpc>
+            </a:pPr>
+            <a:r>
+              <a:rPr lang="en-US" sz="2499" dirty="0">
+                <a:solidFill>
+                  <a:srgbClr val="000000"/>
+                </a:solidFill>
+                <a:latin typeface="Calibri (MS)"/>
+                <a:ea typeface="Calibri (MS)"/>
+                <a:cs typeface="Calibri (MS)"/>
+                <a:sym typeface="Calibri (MS)"/>
+              </a:rPr>
+              <a:t>O </a:t>
+            </a:r>
+            <a:r>
+              <a:rPr lang="en-US" sz="2499" dirty="0" err="1">
+                <a:solidFill>
+                  <a:srgbClr val="000000"/>
+                </a:solidFill>
+                <a:latin typeface="Calibri (MS)"/>
+                <a:ea typeface="Calibri (MS)"/>
+                <a:cs typeface="Calibri (MS)"/>
+                <a:sym typeface="Calibri (MS)"/>
+              </a:rPr>
+              <a:t>grupo</a:t>
+            </a:r>
+            <a:r>
+              <a:rPr lang="en-US" sz="2499" dirty="0">
+                <a:solidFill>
+                  <a:srgbClr val="000000"/>
+                </a:solidFill>
+                <a:latin typeface="Calibri (MS)"/>
+                <a:ea typeface="Calibri (MS)"/>
+                <a:cs typeface="Calibri (MS)"/>
+                <a:sym typeface="Calibri (MS)"/>
+              </a:rPr>
+              <a:t> </a:t>
+            </a:r>
+            <a:r>
+              <a:rPr lang="en-US" sz="2499" dirty="0" err="1">
+                <a:solidFill>
+                  <a:srgbClr val="000000"/>
+                </a:solidFill>
+                <a:latin typeface="Calibri (MS)"/>
+                <a:ea typeface="Calibri (MS)"/>
+                <a:cs typeface="Calibri (MS)"/>
+                <a:sym typeface="Calibri (MS)"/>
+              </a:rPr>
+              <a:t>controlo</a:t>
+            </a:r>
+            <a:r>
+              <a:rPr lang="en-US" sz="2499" dirty="0">
+                <a:solidFill>
+                  <a:srgbClr val="000000"/>
+                </a:solidFill>
+                <a:latin typeface="Calibri (MS)"/>
+                <a:ea typeface="Calibri (MS)"/>
+                <a:cs typeface="Calibri (MS)"/>
+                <a:sym typeface="Calibri (MS)"/>
+              </a:rPr>
+              <a:t> </a:t>
+            </a:r>
+            <a:r>
+              <a:rPr lang="en-US" sz="2499" dirty="0" err="1">
+                <a:solidFill>
+                  <a:srgbClr val="000000"/>
+                </a:solidFill>
+                <a:latin typeface="Calibri (MS)"/>
+                <a:ea typeface="Calibri (MS)"/>
+                <a:cs typeface="Calibri (MS)"/>
+                <a:sym typeface="Calibri (MS)"/>
+              </a:rPr>
+              <a:t>em</a:t>
+            </a:r>
+            <a:r>
+              <a:rPr lang="en-US" sz="2499" dirty="0">
+                <a:solidFill>
+                  <a:srgbClr val="000000"/>
+                </a:solidFill>
+                <a:latin typeface="Calibri (MS)"/>
+                <a:ea typeface="Calibri (MS)"/>
+                <a:cs typeface="Calibri (MS)"/>
+                <a:sym typeface="Calibri (MS)"/>
+              </a:rPr>
+              <a:t> </a:t>
+            </a:r>
+            <a:r>
+              <a:rPr lang="en-US" sz="2499" dirty="0" err="1">
+                <a:solidFill>
+                  <a:srgbClr val="000000"/>
+                </a:solidFill>
+                <a:latin typeface="Calibri (MS)"/>
+                <a:ea typeface="Calibri (MS)"/>
+                <a:cs typeface="Calibri (MS)"/>
+                <a:sym typeface="Calibri (MS)"/>
+              </a:rPr>
+              <a:t>lista</a:t>
+            </a:r>
+            <a:r>
+              <a:rPr lang="en-US" sz="2499" dirty="0">
+                <a:solidFill>
+                  <a:srgbClr val="000000"/>
+                </a:solidFill>
+                <a:latin typeface="Calibri (MS)"/>
+                <a:ea typeface="Calibri (MS)"/>
+                <a:cs typeface="Calibri (MS)"/>
+                <a:sym typeface="Calibri (MS)"/>
+              </a:rPr>
+              <a:t> de </a:t>
+            </a:r>
+            <a:r>
+              <a:rPr lang="en-US" sz="2499" dirty="0" err="1">
+                <a:solidFill>
+                  <a:srgbClr val="000000"/>
+                </a:solidFill>
+                <a:latin typeface="Calibri (MS)"/>
+                <a:ea typeface="Calibri (MS)"/>
+                <a:cs typeface="Calibri (MS)"/>
+                <a:sym typeface="Calibri (MS)"/>
+              </a:rPr>
+              <a:t>espera</a:t>
+            </a:r>
+            <a:r>
+              <a:rPr lang="en-US" sz="2499" dirty="0">
+                <a:solidFill>
+                  <a:srgbClr val="000000"/>
+                </a:solidFill>
+                <a:latin typeface="Calibri (MS)"/>
+                <a:ea typeface="Calibri (MS)"/>
+                <a:cs typeface="Calibri (MS)"/>
+                <a:sym typeface="Calibri (MS)"/>
+              </a:rPr>
+              <a:t> </a:t>
+            </a:r>
+            <a:r>
+              <a:rPr lang="en-US" sz="2499" dirty="0" err="1">
+                <a:solidFill>
+                  <a:srgbClr val="000000"/>
+                </a:solidFill>
+                <a:latin typeface="Calibri (MS)"/>
+                <a:ea typeface="Calibri (MS)"/>
+                <a:cs typeface="Calibri (MS)"/>
+                <a:sym typeface="Calibri (MS)"/>
+              </a:rPr>
+              <a:t>recebe</a:t>
+            </a:r>
+            <a:r>
+              <a:rPr lang="en-US" sz="2499" dirty="0">
+                <a:solidFill>
+                  <a:srgbClr val="000000"/>
+                </a:solidFill>
+                <a:latin typeface="Calibri (MS)"/>
+                <a:ea typeface="Calibri (MS)"/>
+                <a:cs typeface="Calibri (MS)"/>
+                <a:sym typeface="Calibri (MS)"/>
+              </a:rPr>
+              <a:t> </a:t>
+            </a:r>
+            <a:r>
+              <a:rPr lang="en-US" sz="2499" dirty="0" err="1">
+                <a:solidFill>
+                  <a:srgbClr val="000000"/>
+                </a:solidFill>
+                <a:latin typeface="Calibri (MS)"/>
+                <a:ea typeface="Calibri (MS)"/>
+                <a:cs typeface="Calibri (MS)"/>
+                <a:sym typeface="Calibri (MS)"/>
+              </a:rPr>
+              <a:t>brochuras</a:t>
+            </a:r>
+            <a:r>
+              <a:rPr lang="en-US" sz="2499" dirty="0">
+                <a:solidFill>
+                  <a:srgbClr val="000000"/>
+                </a:solidFill>
+                <a:latin typeface="Calibri (MS)"/>
+                <a:ea typeface="Calibri (MS)"/>
+                <a:cs typeface="Calibri (MS)"/>
+                <a:sym typeface="Calibri (MS)"/>
+              </a:rPr>
+              <a:t> </a:t>
+            </a:r>
+            <a:r>
+              <a:rPr lang="en-US" sz="2499" dirty="0" err="1">
+                <a:solidFill>
+                  <a:srgbClr val="000000"/>
+                </a:solidFill>
+                <a:latin typeface="Calibri (MS)"/>
+                <a:ea typeface="Calibri (MS)"/>
+                <a:cs typeface="Calibri (MS)"/>
+                <a:sym typeface="Calibri (MS)"/>
+              </a:rPr>
+              <a:t>informativas</a:t>
+            </a:r>
+            <a:r>
+              <a:rPr lang="en-US" sz="2499" dirty="0">
+                <a:solidFill>
+                  <a:srgbClr val="000000"/>
+                </a:solidFill>
+                <a:latin typeface="Calibri (MS)"/>
+                <a:ea typeface="Calibri (MS)"/>
+                <a:cs typeface="Calibri (MS)"/>
+                <a:sym typeface="Calibri (MS)"/>
+              </a:rPr>
+              <a:t> (standard </a:t>
+            </a:r>
+            <a:r>
+              <a:rPr lang="en-US" sz="2499" dirty="0" err="1">
+                <a:solidFill>
+                  <a:srgbClr val="000000"/>
+                </a:solidFill>
+                <a:latin typeface="Calibri (MS)"/>
+                <a:ea typeface="Calibri (MS)"/>
+                <a:cs typeface="Calibri (MS)"/>
+                <a:sym typeface="Calibri (MS)"/>
+              </a:rPr>
+              <a:t>ofcare</a:t>
+            </a:r>
+            <a:r>
+              <a:rPr lang="en-US" sz="2499" dirty="0">
+                <a:solidFill>
+                  <a:srgbClr val="000000"/>
+                </a:solidFill>
+                <a:latin typeface="Calibri (MS)"/>
+                <a:ea typeface="Calibri (MS)"/>
+                <a:cs typeface="Calibri (MS)"/>
+                <a:sym typeface="Calibri (MS)"/>
+              </a:rPr>
+              <a:t>). </a:t>
+            </a:r>
           </a:p>
           <a:p>
             <a:pPr marL="0" lvl="0" indent="0" algn="just">

--- a/MindMove.pptx
+++ b/MindMove.pptx
@@ -148,7 +148,7 @@
 <file path=ppt/revisionInfo.xml><?xml version="1.0" encoding="utf-8"?>
 <p1510:revInfo xmlns:a="http://schemas.openxmlformats.org/drawingml/2006/main" xmlns:r="http://schemas.openxmlformats.org/officeDocument/2006/relationships" xmlns:p1510="http://schemas.microsoft.com/office/powerpoint/2015/10/main">
   <p1510:revLst>
-    <p1510:client id="{0098CBE5-14F3-4F79-B2D5-566AE0C8256B}" v="12" dt="2026-05-14T08:15:32.139"/>
+    <p1510:client id="{0098CBE5-14F3-4F79-B2D5-566AE0C8256B}" v="15" dt="2026-05-14T12:42:55.187"/>
   </p1510:revLst>
 </p1510:revInfo>
 </file>

--- a/MindMove.pptx
+++ b/MindMove.pptx
@@ -148,7 +148,7 @@
 <file path=ppt/revisionInfo.xml><?xml version="1.0" encoding="utf-8"?>
 <p1510:revInfo xmlns:a="http://schemas.openxmlformats.org/drawingml/2006/main" xmlns:r="http://schemas.openxmlformats.org/officeDocument/2006/relationships" xmlns:p1510="http://schemas.microsoft.com/office/powerpoint/2015/10/main">
   <p1510:revLst>
-    <p1510:client id="{0098CBE5-14F3-4F79-B2D5-566AE0C8256B}" v="15" dt="2026-05-14T12:42:55.187"/>
+    <p1510:client id="{0098CBE5-14F3-4F79-B2D5-566AE0C8256B}" v="17" dt="2026-05-14T13:49:12.289"/>
   </p1510:revLst>
 </p1510:revInfo>
 </file>
@@ -509,7 +509,7 @@
   <pc:docChgLst>
     <pc:chgData name="Gabriela Gonçalves Carneiro" userId="d552a4f0-38ab-4544-a7a4-6025654d07bb" providerId="ADAL" clId="{D03F746D-BE5D-4789-93E6-42C6E52F57A2}"/>
     <pc:docChg chg="undo custSel addSld delSld modSld">
-      <pc:chgData name="Gabriela Gonçalves Carneiro" userId="d552a4f0-38ab-4544-a7a4-6025654d07bb" providerId="ADAL" clId="{D03F746D-BE5D-4789-93E6-42C6E52F57A2}" dt="2026-05-14T12:39:32.351" v="286" actId="20577"/>
+      <pc:chgData name="Gabriela Gonçalves Carneiro" userId="d552a4f0-38ab-4544-a7a4-6025654d07bb" providerId="ADAL" clId="{D03F746D-BE5D-4789-93E6-42C6E52F57A2}" dt="2026-05-14T13:50:12.554" v="296" actId="14100"/>
       <pc:docMkLst>
         <pc:docMk/>
       </pc:docMkLst>
@@ -535,8 +535,8 @@
           <pc:sldMk cId="64004893" sldId="268"/>
         </pc:sldMkLst>
       </pc:sldChg>
-      <pc:sldChg chg="modSp add mod">
-        <pc:chgData name="Gabriela Gonçalves Carneiro" userId="d552a4f0-38ab-4544-a7a4-6025654d07bb" providerId="ADAL" clId="{D03F746D-BE5D-4789-93E6-42C6E52F57A2}" dt="2026-05-14T07:52:27.162" v="228"/>
+      <pc:sldChg chg="addSp delSp modSp add mod">
+        <pc:chgData name="Gabriela Gonçalves Carneiro" userId="d552a4f0-38ab-4544-a7a4-6025654d07bb" providerId="ADAL" clId="{D03F746D-BE5D-4789-93E6-42C6E52F57A2}" dt="2026-05-14T13:50:12.554" v="296" actId="14100"/>
         <pc:sldMkLst>
           <pc:docMk/>
           <pc:sldMk cId="101234818" sldId="268"/>
@@ -549,12 +549,20 @@
             <ac:spMk id="14" creationId="{D5D60796-965F-9B45-39B1-26357F2A7862}"/>
           </ac:spMkLst>
         </pc:spChg>
-        <pc:spChg chg="mod">
-          <ac:chgData name="Gabriela Gonçalves Carneiro" userId="d552a4f0-38ab-4544-a7a4-6025654d07bb" providerId="ADAL" clId="{D03F746D-BE5D-4789-93E6-42C6E52F57A2}" dt="2026-05-14T07:52:27.162" v="228"/>
+        <pc:spChg chg="del mod">
+          <ac:chgData name="Gabriela Gonçalves Carneiro" userId="d552a4f0-38ab-4544-a7a4-6025654d07bb" providerId="ADAL" clId="{D03F746D-BE5D-4789-93E6-42C6E52F57A2}" dt="2026-05-14T13:48:38.667" v="289"/>
           <ac:spMkLst>
             <pc:docMk/>
             <pc:sldMk cId="101234818" sldId="268"/>
             <ac:spMk id="15" creationId="{39BC4B94-5B56-F7F8-FFE1-9FB46D355F94}"/>
+          </ac:spMkLst>
+        </pc:spChg>
+        <pc:spChg chg="add mod">
+          <ac:chgData name="Gabriela Gonçalves Carneiro" userId="d552a4f0-38ab-4544-a7a4-6025654d07bb" providerId="ADAL" clId="{D03F746D-BE5D-4789-93E6-42C6E52F57A2}" dt="2026-05-14T13:50:12.554" v="296" actId="14100"/>
+          <ac:spMkLst>
+            <pc:docMk/>
+            <pc:sldMk cId="101234818" sldId="268"/>
+            <ac:spMk id="17" creationId="{338EB19D-0124-C00A-D7B9-9E49DD98C20B}"/>
           </ac:spMkLst>
         </pc:spChg>
       </pc:sldChg>
@@ -5967,10 +5975,10 @@
       </p:sp>
       <p:sp>
         <p:nvSpPr>
-          <p:cNvPr id="15" name="TextBox 15">
+          <p:cNvPr id="17" name="CaixaDeTexto 16">
             <a:extLst>
               <a:ext uri="{FF2B5EF4-FFF2-40B4-BE49-F238E27FC236}">
-                <a16:creationId xmlns:a16="http://schemas.microsoft.com/office/drawing/2014/main" id="{39BC4B94-5B56-F7F8-FFE1-9FB46D355F94}"/>
+                <a16:creationId xmlns:a16="http://schemas.microsoft.com/office/drawing/2014/main" id="{338EB19D-0124-C00A-D7B9-9E49DD98C20B}"/>
               </a:ext>
             </a:extLst>
           </p:cNvPr>
@@ -5979,15 +5987,16 @@
         </p:nvSpPr>
         <p:spPr>
           <a:xfrm>
-            <a:off x="2255741" y="4479114"/>
-            <a:ext cx="13773557" cy="579518"/>
+            <a:off x="3429000" y="5095043"/>
+            <a:ext cx="11582400" cy="671851"/>
           </a:xfrm>
           <a:prstGeom prst="rect">
             <a:avLst/>
           </a:prstGeom>
+          <a:noFill/>
         </p:spPr>
         <p:txBody>
-          <a:bodyPr lIns="0" tIns="0" rIns="0" bIns="0" rtlCol="0" anchor="t">
+          <a:bodyPr wrap="square">
             <a:spAutoFit/>
           </a:bodyPr>
           <a:lstStyle/>
@@ -5998,15 +6007,12 @@
               </a:lnSpc>
             </a:pPr>
             <a:r>
-              <a:rPr lang="pt-PT" sz="2800">
+              <a:rPr lang="pt-PT" sz="2800" dirty="0">
                 <a:hlinkClick r:id="rId4"/>
               </a:rPr>
-              <a:t>https://github.com/sofiawxys/Projeto_FerramentasProdutividade_G_2/tree/main/diagramas</a:t>
-            </a:r>
-            <a:endParaRPr lang="pt-PT" sz="2500" dirty="0">
-              <a:latin typeface="Calibri (MS)" panose="020B0604020202020204" charset="0"/>
-              <a:cs typeface="Calibri (MS)" panose="020B0604020202020204" charset="0"/>
-            </a:endParaRPr>
+              <a:t>https://sofiawxys.github.io/Projeto_FerramentasProdutividade_G_2_E3/</a:t>
+            </a:r>
+            <a:endParaRPr lang="pt-PT" sz="2800" dirty="0"/>
           </a:p>
         </p:txBody>
       </p:sp>
